--- a/tmp-tj/261028_proline-logistics_audit-reseaux-sociaux_v1.pptx
+++ b/tmp-tj/261028_proline-logistics_audit-reseaux-sociaux_v1.pptx
@@ -174,7 +174,7 @@
             <c:idx val="0"/>
             <c:spPr>
               <a:solidFill>
-                <a:srgbClr val="EE5B22"/>
+                <a:srgbClr val="B9B9B9"/>
               </a:solidFill>
             </c:spPr>
           </c:dPt>
@@ -198,7 +198,7 @@
             <c:idx val="3"/>
             <c:spPr>
               <a:solidFill>
-                <a:srgbClr val="B9B9B9"/>
+                <a:srgbClr val="EE5B22"/>
               </a:solidFill>
             </c:spPr>
           </c:dPt>
@@ -208,16 +208,16 @@
               <c:strCache>
                 <c:ptCount val="4"/>
                 <c:pt idx="0">
-                  <c:v>Proline</c:v>
+                  <c:v>OTL (LinkedIn)</c:v>
                 </c:pt>
                 <c:pt idx="1">
+                  <c:v>LTA (LinkedIn)</c:v>
+                </c:pt>
+                <c:pt idx="2">
                   <c:v>AGL (Facebook)</c:v>
                 </c:pt>
-                <c:pt idx="2">
-                  <c:v>LTA (LinkedIn)</c:v>
-                </c:pt>
                 <c:pt idx="3">
-                  <c:v>OTL (LinkedIn)</c:v>
+                  <c:v>Proline</c:v>
                 </c:pt>
               </c:strCache>
             </c:strRef>
@@ -229,16 +229,16 @@
                 <c:formatCode>General</c:formatCode>
                 <c:ptCount val="4"/>
                 <c:pt idx="0">
-                  <c:v>0</c:v>
+                  <c:v>0.2</c:v>
                 </c:pt>
                 <c:pt idx="1">
+                  <c:v>0.3</c:v>
+                </c:pt>
+                <c:pt idx="2">
                   <c:v>6.0</c:v>
                 </c:pt>
-                <c:pt idx="2">
-                  <c:v>0.3</c:v>
-                </c:pt>
                 <c:pt idx="3">
-                  <c:v>0.2</c:v>
+                  <c:v>0</c:v>
                 </c:pt>
               </c:numCache>
             </c:numRef>
@@ -271,7 +271,7 @@
       <c:catAx>
         <c:axId val="-2068027336"/>
         <c:scaling>
-          <c:orientation val="maxMin"/>
+          <c:orientation val="minMax"/>
         </c:scaling>
         <c:delete val="0"/>
         <c:axPos val="l"/>
@@ -376,7 +376,7 @@
             <c:idx val="0"/>
             <c:spPr>
               <a:solidFill>
-                <a:srgbClr val="EE5B22"/>
+                <a:srgbClr val="B9B9B9"/>
               </a:solidFill>
             </c:spPr>
           </c:dPt>
@@ -400,7 +400,7 @@
             <c:idx val="3"/>
             <c:spPr>
               <a:solidFill>
-                <a:srgbClr val="B9B9B9"/>
+                <a:srgbClr val="EE5B22"/>
               </a:solidFill>
             </c:spPr>
           </c:dPt>
@@ -410,16 +410,16 @@
               <c:strCache>
                 <c:ptCount val="4"/>
                 <c:pt idx="0">
-                  <c:v>Offres d’emploi (4)</c:v>
+                  <c:v>Agenda et événements (4)</c:v>
                 </c:pt>
                 <c:pt idx="1">
+                  <c:v>Toute la page (25)</c:v>
+                </c:pt>
+                <c:pt idx="2">
                   <c:v>Équipes et engins (13)</c:v>
                 </c:pt>
-                <c:pt idx="2">
-                  <c:v>Toute la page (25)</c:v>
-                </c:pt>
                 <c:pt idx="3">
-                  <c:v>Agenda et événements (4)</c:v>
+                  <c:v>Offres d’emploi (4)</c:v>
                 </c:pt>
               </c:strCache>
             </c:strRef>
@@ -431,16 +431,16 @@
                 <c:formatCode>General</c:formatCode>
                 <c:ptCount val="4"/>
                 <c:pt idx="0">
-                  <c:v>270</c:v>
+                  <c:v>32</c:v>
                 </c:pt>
                 <c:pt idx="1">
+                  <c:v>96</c:v>
+                </c:pt>
+                <c:pt idx="2">
                   <c:v>95</c:v>
                 </c:pt>
-                <c:pt idx="2">
-                  <c:v>96</c:v>
-                </c:pt>
                 <c:pt idx="3">
-                  <c:v>32</c:v>
+                  <c:v>270</c:v>
                 </c:pt>
               </c:numCache>
             </c:numRef>
@@ -472,7 +472,7 @@
       <c:catAx>
         <c:axId val="-2068027336"/>
         <c:scaling>
-          <c:orientation val="maxMin"/>
+          <c:orientation val="minMax"/>
         </c:scaling>
         <c:delete val="0"/>
         <c:axPos val="l"/>
@@ -4396,7 +4396,7 @@
               </a:lnSpc>
             </a:pPr>
             <a:r>
-              <a:rPr sz="2500" b="1">
+              <a:rPr sz="2100" b="1">
                 <a:solidFill>
                   <a:srgbClr val="111111"/>
                 </a:solidFill>
@@ -10756,8 +10756,8 @@
         </p:nvSpPr>
         <p:spPr>
           <a:xfrm>
-            <a:off x="1836000" y="1943999"/>
-            <a:ext cx="3888000" cy="503999"/>
+            <a:off x="1836000" y="1907998"/>
+            <a:ext cx="3924000" cy="720000"/>
           </a:xfrm>
           <a:prstGeom prst="rect">
             <a:avLst/>
@@ -10776,7 +10776,7 @@
               </a:lnSpc>
             </a:pPr>
             <a:r>
-              <a:rPr sz="1900" b="1">
+              <a:rPr sz="1700" b="1">
                 <a:solidFill>
                   <a:srgbClr val="111111"/>
                 </a:solidFill>
@@ -10795,8 +10795,8 @@
         </p:nvSpPr>
         <p:spPr>
           <a:xfrm>
-            <a:off x="1836000" y="2519999"/>
-            <a:ext cx="3888000" cy="1007999"/>
+            <a:off x="1836000" y="2645999"/>
+            <a:ext cx="3924000" cy="972000"/>
           </a:xfrm>
           <a:prstGeom prst="rect">
             <a:avLst/>
@@ -10815,7 +10815,7 @@
               </a:lnSpc>
             </a:pPr>
             <a:r>
-              <a:rPr sz="1300" b="0">
+              <a:rPr sz="1250" b="0">
                 <a:solidFill>
                   <a:srgbClr val="5A5A5A"/>
                 </a:solidFill>
@@ -10948,8 +10948,8 @@
         </p:nvSpPr>
         <p:spPr>
           <a:xfrm>
-            <a:off x="7452000" y="1943999"/>
-            <a:ext cx="3888000" cy="503999"/>
+            <a:off x="7452000" y="1907998"/>
+            <a:ext cx="3924000" cy="720000"/>
           </a:xfrm>
           <a:prstGeom prst="rect">
             <a:avLst/>
@@ -10968,7 +10968,7 @@
               </a:lnSpc>
             </a:pPr>
             <a:r>
-              <a:rPr sz="1900" b="1">
+              <a:rPr sz="1700" b="1">
                 <a:solidFill>
                   <a:srgbClr val="111111"/>
                 </a:solidFill>
@@ -10987,8 +10987,8 @@
         </p:nvSpPr>
         <p:spPr>
           <a:xfrm>
-            <a:off x="7452000" y="2519999"/>
-            <a:ext cx="3888000" cy="1007999"/>
+            <a:off x="7452000" y="2645999"/>
+            <a:ext cx="3924000" cy="972000"/>
           </a:xfrm>
           <a:prstGeom prst="rect">
             <a:avLst/>
@@ -11007,7 +11007,7 @@
               </a:lnSpc>
             </a:pPr>
             <a:r>
-              <a:rPr sz="1300" b="0">
+              <a:rPr sz="1250" b="0">
                 <a:solidFill>
                   <a:srgbClr val="5A5A5A"/>
                 </a:solidFill>
@@ -11140,8 +11140,8 @@
         </p:nvSpPr>
         <p:spPr>
           <a:xfrm>
-            <a:off x="1836000" y="4211999"/>
-            <a:ext cx="3888000" cy="503999"/>
+            <a:off x="1836000" y="4175998"/>
+            <a:ext cx="3924000" cy="720000"/>
           </a:xfrm>
           <a:prstGeom prst="rect">
             <a:avLst/>
@@ -11160,7 +11160,7 @@
               </a:lnSpc>
             </a:pPr>
             <a:r>
-              <a:rPr sz="1900" b="1">
+              <a:rPr sz="1700" b="1">
                 <a:solidFill>
                   <a:srgbClr val="111111"/>
                 </a:solidFill>
@@ -11179,8 +11179,8 @@
         </p:nvSpPr>
         <p:spPr>
           <a:xfrm>
-            <a:off x="1836000" y="4787999"/>
-            <a:ext cx="3888000" cy="1007999"/>
+            <a:off x="1836000" y="4913999"/>
+            <a:ext cx="3924000" cy="972000"/>
           </a:xfrm>
           <a:prstGeom prst="rect">
             <a:avLst/>
@@ -11199,7 +11199,7 @@
               </a:lnSpc>
             </a:pPr>
             <a:r>
-              <a:rPr sz="1300" b="0">
+              <a:rPr sz="1250" b="0">
                 <a:solidFill>
                   <a:srgbClr val="5A5A5A"/>
                 </a:solidFill>
@@ -11332,8 +11332,8 @@
         </p:nvSpPr>
         <p:spPr>
           <a:xfrm>
-            <a:off x="7452000" y="4211999"/>
-            <a:ext cx="3888000" cy="503999"/>
+            <a:off x="7452000" y="4175998"/>
+            <a:ext cx="3924000" cy="720000"/>
           </a:xfrm>
           <a:prstGeom prst="rect">
             <a:avLst/>
@@ -11352,7 +11352,7 @@
               </a:lnSpc>
             </a:pPr>
             <a:r>
-              <a:rPr sz="1900" b="1">
+              <a:rPr sz="1700" b="1">
                 <a:solidFill>
                   <a:srgbClr val="111111"/>
                 </a:solidFill>
@@ -11371,8 +11371,8 @@
         </p:nvSpPr>
         <p:spPr>
           <a:xfrm>
-            <a:off x="7452000" y="4787999"/>
-            <a:ext cx="3888000" cy="1007999"/>
+            <a:off x="7452000" y="4913999"/>
+            <a:ext cx="3924000" cy="972000"/>
           </a:xfrm>
           <a:prstGeom prst="rect">
             <a:avLst/>
@@ -11391,7 +11391,7 @@
               </a:lnSpc>
             </a:pPr>
             <a:r>
-              <a:rPr sz="1300" b="0">
+              <a:rPr sz="1250" b="0">
                 <a:solidFill>
                   <a:srgbClr val="5A5A5A"/>
                 </a:solidFill>
@@ -17581,7 +17581,7 @@
               </a:lnSpc>
             </a:pPr>
             <a:r>
-              <a:rPr sz="2500" b="1">
+              <a:rPr sz="2100" b="1">
                 <a:solidFill>
                   <a:srgbClr val="111111"/>
                 </a:solidFill>
@@ -20882,7 +20882,7 @@
               </a:lnSpc>
             </a:pPr>
             <a:r>
-              <a:rPr sz="2500" b="1">
+              <a:rPr sz="2100" b="1">
                 <a:solidFill>
                   <a:srgbClr val="111111"/>
                 </a:solidFill>
@@ -24810,7 +24810,7 @@
               </a:lnSpc>
             </a:pPr>
             <a:r>
-              <a:rPr sz="2500" b="1">
+              <a:rPr sz="2100" b="1">
                 <a:solidFill>
                   <a:srgbClr val="111111"/>
                 </a:solidFill>

--- a/tmp-tj/261028_proline-logistics_audit-reseaux-sociaux_v1.pptx
+++ b/tmp-tj/261028_proline-logistics_audit-reseaux-sociaux_v1.pptx
@@ -133,25 +133,7 @@
 <c:chartSpace xmlns:c="http://schemas.openxmlformats.org/drawingml/2006/chart" xmlns:a="http://schemas.openxmlformats.org/drawingml/2006/main" xmlns:r="http://schemas.openxmlformats.org/officeDocument/2006/relationships">
   <c:date1904 val="0"/>
   <c:chart>
-    <c:title>
-      <c:tx>
-        <c:rich>
-          <a:bodyPr/>
-          <a:lstStyle/>
-          <a:p>
-            <a:r>
-              <a:rPr sz="1250" b="1">
-                <a:latin typeface="Poppins"/>
-              </a:rPr>
-              <a:t>Publications par semaine (période relevée)</a:t>
-            </a:r>
-          </a:p>
-        </c:rich>
-      </c:tx>
-      <c:layout/>
-      <c:overlay val="0"/>
-    </c:title>
-    <c:autoTitleDeleted val="0"/>
+    <c:autoTitleDeleted val="1"/>
     <c:plotArea>
       <c:barChart>
         <c:barDir val="bar"/>
@@ -303,12 +285,19 @@
       </c:catAx>
       <c:valAx>
         <c:axId val="-2113994440"/>
-        <c:scaling/>
+        <c:scaling>
+          <c:min val="0.0"/>
+        </c:scaling>
         <c:delete/>
         <c:axPos val="b"/>
-        <c:majorTickMark val="out"/>
+        <c:majorTickMark val="none"/>
         <c:minorTickMark val="none"/>
-        <c:tickLblPos val="nextTo"/>
+        <c:tickLblPos val="none"/>
+        <c:spPr>
+          <a:ln>
+            <a:noFill/>
+          </a:ln>
+        </c:spPr>
         <c:crossAx val="-2068027336"/>
         <c:crosses val="autoZero"/>
       </c:valAx>
@@ -335,25 +324,7 @@
 <c:chartSpace xmlns:c="http://schemas.openxmlformats.org/drawingml/2006/chart" xmlns:a="http://schemas.openxmlformats.org/drawingml/2006/main" xmlns:r="http://schemas.openxmlformats.org/officeDocument/2006/relationships">
   <c:date1904 val="0"/>
   <c:chart>
-    <c:title>
-      <c:tx>
-        <c:rich>
-          <a:bodyPr/>
-          <a:lstStyle/>
-          <a:p>
-            <a:r>
-              <a:rPr sz="1250" b="1">
-                <a:latin typeface="Poppins"/>
-              </a:rPr>
-              <a:t>Réactions médianes par type (nombre de publications)</a:t>
-            </a:r>
-          </a:p>
-        </c:rich>
-      </c:tx>
-      <c:layout/>
-      <c:overlay val="0"/>
-    </c:title>
-    <c:autoTitleDeleted val="0"/>
+    <c:autoTitleDeleted val="1"/>
     <c:plotArea>
       <c:barChart>
         <c:barDir val="bar"/>
@@ -504,12 +475,19 @@
       </c:catAx>
       <c:valAx>
         <c:axId val="-2113994440"/>
-        <c:scaling/>
+        <c:scaling>
+          <c:min val="0.0"/>
+        </c:scaling>
         <c:delete/>
         <c:axPos val="b"/>
-        <c:majorTickMark val="out"/>
+        <c:majorTickMark val="none"/>
         <c:minorTickMark val="none"/>
-        <c:tickLblPos val="nextTo"/>
+        <c:tickLblPos val="none"/>
+        <c:spPr>
+          <a:ln>
+            <a:noFill/>
+          </a:ln>
+        </c:spPr>
         <c:crossAx val="-2068027336"/>
         <c:crosses val="autoZero"/>
       </c:valAx>
@@ -3603,7 +3581,7 @@
       </p:sp>
       <p:pic>
         <p:nvPicPr>
-          <p:cNvPr id="4" name="Picture 3" descr="v_p_cariste.jpg"/>
+          <p:cNvPr id="4" name="Picture 3" descr="w_p_cariste.jpg"/>
           <p:cNvPicPr>
             <a:picLocks noChangeAspect="1"/>
           </p:cNvPicPr>
@@ -6469,8 +6447,8 @@
           <p:nvPr/>
         </p:nvGraphicFramePr>
         <p:xfrm>
-          <a:off x="576000" y="1584000"/>
-          <a:ext cx="5760000" cy="4464000"/>
+          <a:off x="576000" y="1944000"/>
+          <a:ext cx="5760000" cy="4104000"/>
         </p:xfrm>
         <a:graphic>
           <a:graphicData uri="http://schemas.openxmlformats.org/drawingml/2006/chart">
@@ -6481,6 +6459,45 @@
       <p:sp>
         <p:nvSpPr>
           <p:cNvPr id="10" name="TextBox 9"/>
+          <p:cNvSpPr txBox="1"/>
+          <p:nvPr/>
+        </p:nvSpPr>
+        <p:spPr>
+          <a:xfrm>
+            <a:off x="576000" y="1548000"/>
+            <a:ext cx="5760000" cy="360000"/>
+          </a:xfrm>
+          <a:prstGeom prst="rect">
+            <a:avLst/>
+          </a:prstGeom>
+          <a:noFill/>
+        </p:spPr>
+        <p:txBody>
+          <a:bodyPr wrap="square" lIns="36000" rIns="36000" tIns="18000" bIns="18000" anchor="t">
+            <a:spAutoFit/>
+          </a:bodyPr>
+          <a:lstStyle/>
+          <a:p>
+            <a:pPr algn="l">
+              <a:lnSpc>
+                <a:spcPct val="110000"/>
+              </a:lnSpc>
+            </a:pPr>
+            <a:r>
+              <a:rPr sz="1250" b="1">
+                <a:solidFill>
+                  <a:srgbClr val="111111"/>
+                </a:solidFill>
+                <a:latin typeface="Poppins"/>
+              </a:rPr>
+              <a:t>Réactions médianes par type (nombre de publications)</a:t>
+            </a:r>
+          </a:p>
+        </p:txBody>
+      </p:sp>
+      <p:sp>
+        <p:nvSpPr>
+          <p:cNvPr id="11" name="TextBox 10"/>
           <p:cNvSpPr txBox="1"/>
           <p:nvPr/>
         </p:nvSpPr>
@@ -6933,7 +6950,7 @@
         </p:nvSpPr>
         <p:spPr>
           <a:xfrm>
-            <a:off x="1260000" y="1872000"/>
+            <a:off x="1260000" y="1835999"/>
             <a:ext cx="720000" cy="720000"/>
           </a:xfrm>
           <a:prstGeom prst="ellipse">
@@ -6985,7 +7002,7 @@
         </p:blipFill>
         <p:spPr>
           <a:xfrm>
-            <a:off x="1418400" y="2030400"/>
+            <a:off x="1418400" y="1994399"/>
             <a:ext cx="403200" cy="403200"/>
           </a:xfrm>
           <a:prstGeom prst="rect">
@@ -7001,8 +7018,47 @@
         </p:nvSpPr>
         <p:spPr>
           <a:xfrm>
-            <a:off x="684000" y="2772000"/>
-            <a:ext cx="1872000" cy="360000"/>
+            <a:off x="684000" y="2664000"/>
+            <a:ext cx="1872000" cy="576000"/>
+          </a:xfrm>
+          <a:prstGeom prst="rect">
+            <a:avLst/>
+          </a:prstGeom>
+          <a:noFill/>
+        </p:spPr>
+        <p:txBody>
+          <a:bodyPr wrap="square" lIns="36000" rIns="36000" tIns="18000" bIns="18000" anchor="ctr">
+            <a:spAutoFit/>
+          </a:bodyPr>
+          <a:lstStyle/>
+          <a:p>
+            <a:pPr algn="ctr">
+              <a:lnSpc>
+                <a:spcPct val="110000"/>
+              </a:lnSpc>
+            </a:pPr>
+            <a:r>
+              <a:rPr sz="1400" b="1">
+                <a:solidFill>
+                  <a:srgbClr val="111111"/>
+                </a:solidFill>
+                <a:latin typeface="Poppins"/>
+              </a:rPr>
+              <a:t>Un chiffre</a:t>
+            </a:r>
+          </a:p>
+        </p:txBody>
+      </p:sp>
+      <p:sp>
+        <p:nvSpPr>
+          <p:cNvPr id="13" name="TextBox 12"/>
+          <p:cNvSpPr txBox="1"/>
+          <p:nvPr/>
+        </p:nvSpPr>
+        <p:spPr>
+          <a:xfrm>
+            <a:off x="684000" y="3311999"/>
+            <a:ext cx="1872000" cy="1188000"/>
           </a:xfrm>
           <a:prstGeom prst="rect">
             <a:avLst/>
@@ -7021,46 +7077,7 @@
               </a:lnSpc>
             </a:pPr>
             <a:r>
-              <a:rPr sz="1500" b="1">
-                <a:solidFill>
-                  <a:srgbClr val="111111"/>
-                </a:solidFill>
-                <a:latin typeface="Poppins"/>
-              </a:rPr>
-              <a:t>Un chiffre</a:t>
-            </a:r>
-          </a:p>
-        </p:txBody>
-      </p:sp>
-      <p:sp>
-        <p:nvSpPr>
-          <p:cNvPr id="13" name="TextBox 12"/>
-          <p:cNvSpPr txBox="1"/>
-          <p:nvPr/>
-        </p:nvSpPr>
-        <p:spPr>
-          <a:xfrm>
-            <a:off x="684000" y="3168000"/>
-            <a:ext cx="1872000" cy="1296000"/>
-          </a:xfrm>
-          <a:prstGeom prst="rect">
-            <a:avLst/>
-          </a:prstGeom>
-          <a:noFill/>
-        </p:spPr>
-        <p:txBody>
-          <a:bodyPr wrap="square" lIns="36000" rIns="36000" tIns="18000" bIns="18000" anchor="t">
-            <a:spAutoFit/>
-          </a:bodyPr>
-          <a:lstStyle/>
-          <a:p>
-            <a:pPr algn="ctr">
-              <a:lnSpc>
-                <a:spcPct val="110000"/>
-              </a:lnSpc>
-            </a:pPr>
-            <a:r>
-              <a:rPr sz="1150" b="0">
+              <a:rPr sz="1100" b="0">
                 <a:solidFill>
                   <a:srgbClr val="5A5A5A"/>
                 </a:solidFill>
@@ -7125,7 +7142,7 @@
         </p:nvSpPr>
         <p:spPr>
           <a:xfrm>
-            <a:off x="3492000" y="1872000"/>
+            <a:off x="3492000" y="1835999"/>
             <a:ext cx="720000" cy="720000"/>
           </a:xfrm>
           <a:prstGeom prst="ellipse">
@@ -7177,7 +7194,7 @@
         </p:blipFill>
         <p:spPr>
           <a:xfrm>
-            <a:off x="3650400" y="2030400"/>
+            <a:off x="3650400" y="1994399"/>
             <a:ext cx="403200" cy="403200"/>
           </a:xfrm>
           <a:prstGeom prst="rect">
@@ -7193,8 +7210,47 @@
         </p:nvSpPr>
         <p:spPr>
           <a:xfrm>
-            <a:off x="2916000" y="2772000"/>
-            <a:ext cx="1872000" cy="360000"/>
+            <a:off x="2916000" y="2664000"/>
+            <a:ext cx="1872000" cy="576000"/>
+          </a:xfrm>
+          <a:prstGeom prst="rect">
+            <a:avLst/>
+          </a:prstGeom>
+          <a:noFill/>
+        </p:spPr>
+        <p:txBody>
+          <a:bodyPr wrap="square" lIns="36000" rIns="36000" tIns="18000" bIns="18000" anchor="ctr">
+            <a:spAutoFit/>
+          </a:bodyPr>
+          <a:lstStyle/>
+          <a:p>
+            <a:pPr algn="ctr">
+              <a:lnSpc>
+                <a:spcPct val="110000"/>
+              </a:lnSpc>
+            </a:pPr>
+            <a:r>
+              <a:rPr sz="1400" b="1">
+                <a:solidFill>
+                  <a:srgbClr val="111111"/>
+                </a:solidFill>
+                <a:latin typeface="Poppins"/>
+              </a:rPr>
+              <a:t>Vos lieux</a:t>
+            </a:r>
+          </a:p>
+        </p:txBody>
+      </p:sp>
+      <p:sp>
+        <p:nvSpPr>
+          <p:cNvPr id="18" name="TextBox 17"/>
+          <p:cNvSpPr txBox="1"/>
+          <p:nvPr/>
+        </p:nvSpPr>
+        <p:spPr>
+          <a:xfrm>
+            <a:off x="2916000" y="3311999"/>
+            <a:ext cx="1872000" cy="1188000"/>
           </a:xfrm>
           <a:prstGeom prst="rect">
             <a:avLst/>
@@ -7213,46 +7269,7 @@
               </a:lnSpc>
             </a:pPr>
             <a:r>
-              <a:rPr sz="1500" b="1">
-                <a:solidFill>
-                  <a:srgbClr val="111111"/>
-                </a:solidFill>
-                <a:latin typeface="Poppins"/>
-              </a:rPr>
-              <a:t>Vos lieux</a:t>
-            </a:r>
-          </a:p>
-        </p:txBody>
-      </p:sp>
-      <p:sp>
-        <p:nvSpPr>
-          <p:cNvPr id="18" name="TextBox 17"/>
-          <p:cNvSpPr txBox="1"/>
-          <p:nvPr/>
-        </p:nvSpPr>
-        <p:spPr>
-          <a:xfrm>
-            <a:off x="2916000" y="3168000"/>
-            <a:ext cx="1872000" cy="1296000"/>
-          </a:xfrm>
-          <a:prstGeom prst="rect">
-            <a:avLst/>
-          </a:prstGeom>
-          <a:noFill/>
-        </p:spPr>
-        <p:txBody>
-          <a:bodyPr wrap="square" lIns="36000" rIns="36000" tIns="18000" bIns="18000" anchor="t">
-            <a:spAutoFit/>
-          </a:bodyPr>
-          <a:lstStyle/>
-          <a:p>
-            <a:pPr algn="ctr">
-              <a:lnSpc>
-                <a:spcPct val="110000"/>
-              </a:lnSpc>
-            </a:pPr>
-            <a:r>
-              <a:rPr sz="1150" b="0">
+              <a:rPr sz="1100" b="0">
                 <a:solidFill>
                   <a:srgbClr val="5A5A5A"/>
                 </a:solidFill>
@@ -7317,7 +7334,7 @@
         </p:nvSpPr>
         <p:spPr>
           <a:xfrm>
-            <a:off x="5724000" y="1872000"/>
+            <a:off x="5724000" y="1835999"/>
             <a:ext cx="720000" cy="720000"/>
           </a:xfrm>
           <a:prstGeom prst="ellipse">
@@ -7369,7 +7386,7 @@
         </p:blipFill>
         <p:spPr>
           <a:xfrm>
-            <a:off x="5882400" y="2030400"/>
+            <a:off x="5882400" y="1994399"/>
             <a:ext cx="403200" cy="403200"/>
           </a:xfrm>
           <a:prstGeom prst="rect">
@@ -7385,8 +7402,47 @@
         </p:nvSpPr>
         <p:spPr>
           <a:xfrm>
-            <a:off x="5148000" y="2772000"/>
-            <a:ext cx="1872000" cy="360000"/>
+            <a:off x="5148000" y="2664000"/>
+            <a:ext cx="1872000" cy="576000"/>
+          </a:xfrm>
+          <a:prstGeom prst="rect">
+            <a:avLst/>
+          </a:prstGeom>
+          <a:noFill/>
+        </p:spPr>
+        <p:txBody>
+          <a:bodyPr wrap="square" lIns="36000" rIns="36000" tIns="18000" bIns="18000" anchor="ctr">
+            <a:spAutoFit/>
+          </a:bodyPr>
+          <a:lstStyle/>
+          <a:p>
+            <a:pPr algn="ctr">
+              <a:lnSpc>
+                <a:spcPct val="110000"/>
+              </a:lnSpc>
+            </a:pPr>
+            <a:r>
+              <a:rPr sz="1400" b="1">
+                <a:solidFill>
+                  <a:srgbClr val="111111"/>
+                </a:solidFill>
+                <a:latin typeface="Poppins"/>
+              </a:rPr>
+              <a:t>Une personne</a:t>
+            </a:r>
+          </a:p>
+        </p:txBody>
+      </p:sp>
+      <p:sp>
+        <p:nvSpPr>
+          <p:cNvPr id="23" name="TextBox 22"/>
+          <p:cNvSpPr txBox="1"/>
+          <p:nvPr/>
+        </p:nvSpPr>
+        <p:spPr>
+          <a:xfrm>
+            <a:off x="5148000" y="3311999"/>
+            <a:ext cx="1872000" cy="1188000"/>
           </a:xfrm>
           <a:prstGeom prst="rect">
             <a:avLst/>
@@ -7405,46 +7461,7 @@
               </a:lnSpc>
             </a:pPr>
             <a:r>
-              <a:rPr sz="1500" b="1">
-                <a:solidFill>
-                  <a:srgbClr val="111111"/>
-                </a:solidFill>
-                <a:latin typeface="Poppins"/>
-              </a:rPr>
-              <a:t>Une personne</a:t>
-            </a:r>
-          </a:p>
-        </p:txBody>
-      </p:sp>
-      <p:sp>
-        <p:nvSpPr>
-          <p:cNvPr id="23" name="TextBox 22"/>
-          <p:cNvSpPr txBox="1"/>
-          <p:nvPr/>
-        </p:nvSpPr>
-        <p:spPr>
-          <a:xfrm>
-            <a:off x="5148000" y="3168000"/>
-            <a:ext cx="1872000" cy="1296000"/>
-          </a:xfrm>
-          <a:prstGeom prst="rect">
-            <a:avLst/>
-          </a:prstGeom>
-          <a:noFill/>
-        </p:spPr>
-        <p:txBody>
-          <a:bodyPr wrap="square" lIns="36000" rIns="36000" tIns="18000" bIns="18000" anchor="t">
-            <a:spAutoFit/>
-          </a:bodyPr>
-          <a:lstStyle/>
-          <a:p>
-            <a:pPr algn="ctr">
-              <a:lnSpc>
-                <a:spcPct val="110000"/>
-              </a:lnSpc>
-            </a:pPr>
-            <a:r>
-              <a:rPr sz="1150" b="0">
+              <a:rPr sz="1100" b="0">
                 <a:solidFill>
                   <a:srgbClr val="5A5A5A"/>
                 </a:solidFill>
@@ -7509,7 +7526,7 @@
         </p:nvSpPr>
         <p:spPr>
           <a:xfrm>
-            <a:off x="7956000" y="1872000"/>
+            <a:off x="7956000" y="1835999"/>
             <a:ext cx="720000" cy="720000"/>
           </a:xfrm>
           <a:prstGeom prst="ellipse">
@@ -7561,7 +7578,7 @@
         </p:blipFill>
         <p:spPr>
           <a:xfrm>
-            <a:off x="8114400" y="2030400"/>
+            <a:off x="8114400" y="1994399"/>
             <a:ext cx="403200" cy="403200"/>
           </a:xfrm>
           <a:prstGeom prst="rect">
@@ -7577,8 +7594,47 @@
         </p:nvSpPr>
         <p:spPr>
           <a:xfrm>
-            <a:off x="7380000" y="2772000"/>
-            <a:ext cx="1872000" cy="360000"/>
+            <a:off x="7380000" y="2664000"/>
+            <a:ext cx="1872000" cy="576000"/>
+          </a:xfrm>
+          <a:prstGeom prst="rect">
+            <a:avLst/>
+          </a:prstGeom>
+          <a:noFill/>
+        </p:spPr>
+        <p:txBody>
+          <a:bodyPr wrap="square" lIns="36000" rIns="36000" tIns="18000" bIns="18000" anchor="ctr">
+            <a:spAutoFit/>
+          </a:bodyPr>
+          <a:lstStyle/>
+          <a:p>
+            <a:pPr algn="ctr">
+              <a:lnSpc>
+                <a:spcPct val="110000"/>
+              </a:lnSpc>
+            </a:pPr>
+            <a:r>
+              <a:rPr sz="1400" b="1">
+                <a:solidFill>
+                  <a:srgbClr val="111111"/>
+                </a:solidFill>
+                <a:latin typeface="Poppins"/>
+              </a:rPr>
+              <a:t>Une question d’acheteur</a:t>
+            </a:r>
+          </a:p>
+        </p:txBody>
+      </p:sp>
+      <p:sp>
+        <p:nvSpPr>
+          <p:cNvPr id="28" name="TextBox 27"/>
+          <p:cNvSpPr txBox="1"/>
+          <p:nvPr/>
+        </p:nvSpPr>
+        <p:spPr>
+          <a:xfrm>
+            <a:off x="7380000" y="3311999"/>
+            <a:ext cx="1872000" cy="1188000"/>
           </a:xfrm>
           <a:prstGeom prst="rect">
             <a:avLst/>
@@ -7597,46 +7653,7 @@
               </a:lnSpc>
             </a:pPr>
             <a:r>
-              <a:rPr sz="1500" b="1">
-                <a:solidFill>
-                  <a:srgbClr val="111111"/>
-                </a:solidFill>
-                <a:latin typeface="Poppins"/>
-              </a:rPr>
-              <a:t>Une question d’acheteur</a:t>
-            </a:r>
-          </a:p>
-        </p:txBody>
-      </p:sp>
-      <p:sp>
-        <p:nvSpPr>
-          <p:cNvPr id="28" name="TextBox 27"/>
-          <p:cNvSpPr txBox="1"/>
-          <p:nvPr/>
-        </p:nvSpPr>
-        <p:spPr>
-          <a:xfrm>
-            <a:off x="7380000" y="3168000"/>
-            <a:ext cx="1872000" cy="1296000"/>
-          </a:xfrm>
-          <a:prstGeom prst="rect">
-            <a:avLst/>
-          </a:prstGeom>
-          <a:noFill/>
-        </p:spPr>
-        <p:txBody>
-          <a:bodyPr wrap="square" lIns="36000" rIns="36000" tIns="18000" bIns="18000" anchor="t">
-            <a:spAutoFit/>
-          </a:bodyPr>
-          <a:lstStyle/>
-          <a:p>
-            <a:pPr algn="ctr">
-              <a:lnSpc>
-                <a:spcPct val="110000"/>
-              </a:lnSpc>
-            </a:pPr>
-            <a:r>
-              <a:rPr sz="1150" b="0">
+              <a:rPr sz="1100" b="0">
                 <a:solidFill>
                   <a:srgbClr val="5A5A5A"/>
                 </a:solidFill>
@@ -7701,7 +7718,7 @@
         </p:nvSpPr>
         <p:spPr>
           <a:xfrm>
-            <a:off x="10188000" y="1872000"/>
+            <a:off x="10188000" y="1835999"/>
             <a:ext cx="720000" cy="720000"/>
           </a:xfrm>
           <a:prstGeom prst="ellipse">
@@ -7753,7 +7770,7 @@
         </p:blipFill>
         <p:spPr>
           <a:xfrm>
-            <a:off x="10346400" y="2030400"/>
+            <a:off x="10346400" y="1994399"/>
             <a:ext cx="403200" cy="403200"/>
           </a:xfrm>
           <a:prstGeom prst="rect">
@@ -7769,8 +7786,47 @@
         </p:nvSpPr>
         <p:spPr>
           <a:xfrm>
-            <a:off x="9612000" y="2772000"/>
-            <a:ext cx="1872000" cy="360000"/>
+            <a:off x="9612000" y="2664000"/>
+            <a:ext cx="1872000" cy="576000"/>
+          </a:xfrm>
+          <a:prstGeom prst="rect">
+            <a:avLst/>
+          </a:prstGeom>
+          <a:noFill/>
+        </p:spPr>
+        <p:txBody>
+          <a:bodyPr wrap="square" lIns="36000" rIns="36000" tIns="18000" bIns="18000" anchor="ctr">
+            <a:spAutoFit/>
+          </a:bodyPr>
+          <a:lstStyle/>
+          <a:p>
+            <a:pPr algn="ctr">
+              <a:lnSpc>
+                <a:spcPct val="110000"/>
+              </a:lnSpc>
+            </a:pPr>
+            <a:r>
+              <a:rPr sz="1400" b="1">
+                <a:solidFill>
+                  <a:srgbClr val="111111"/>
+                </a:solidFill>
+                <a:latin typeface="Poppins"/>
+              </a:rPr>
+              <a:t>Un contact</a:t>
+            </a:r>
+          </a:p>
+        </p:txBody>
+      </p:sp>
+      <p:sp>
+        <p:nvSpPr>
+          <p:cNvPr id="33" name="TextBox 32"/>
+          <p:cNvSpPr txBox="1"/>
+          <p:nvPr/>
+        </p:nvSpPr>
+        <p:spPr>
+          <a:xfrm>
+            <a:off x="9612000" y="3311999"/>
+            <a:ext cx="1872000" cy="1188000"/>
           </a:xfrm>
           <a:prstGeom prst="rect">
             <a:avLst/>
@@ -7789,46 +7845,7 @@
               </a:lnSpc>
             </a:pPr>
             <a:r>
-              <a:rPr sz="1500" b="1">
-                <a:solidFill>
-                  <a:srgbClr val="111111"/>
-                </a:solidFill>
-                <a:latin typeface="Poppins"/>
-              </a:rPr>
-              <a:t>Un contact</a:t>
-            </a:r>
-          </a:p>
-        </p:txBody>
-      </p:sp>
-      <p:sp>
-        <p:nvSpPr>
-          <p:cNvPr id="33" name="TextBox 32"/>
-          <p:cNvSpPr txBox="1"/>
-          <p:nvPr/>
-        </p:nvSpPr>
-        <p:spPr>
-          <a:xfrm>
-            <a:off x="9612000" y="3168000"/>
-            <a:ext cx="1872000" cy="1296000"/>
-          </a:xfrm>
-          <a:prstGeom prst="rect">
-            <a:avLst/>
-          </a:prstGeom>
-          <a:noFill/>
-        </p:spPr>
-        <p:txBody>
-          <a:bodyPr wrap="square" lIns="36000" rIns="36000" tIns="18000" bIns="18000" anchor="t">
-            <a:spAutoFit/>
-          </a:bodyPr>
-          <a:lstStyle/>
-          <a:p>
-            <a:pPr algn="ctr">
-              <a:lnSpc>
-                <a:spcPct val="110000"/>
-              </a:lnSpc>
-            </a:pPr>
-            <a:r>
-              <a:rPr sz="1150" b="0">
+              <a:rPr sz="1100" b="0">
                 <a:solidFill>
                   <a:srgbClr val="5A5A5A"/>
                 </a:solidFill>
@@ -8231,7 +8248,7 @@
       </p:sp>
       <p:pic>
         <p:nvPicPr>
-          <p:cNvPr id="9" name="Picture 8" descr="v_p_rack.jpg"/>
+          <p:cNvPr id="9" name="Picture 8" descr="w_p_rack.jpg"/>
           <p:cNvPicPr>
             <a:picLocks noChangeAspect="1"/>
           </p:cNvPicPr>
@@ -8245,8 +8262,8 @@
         </p:blipFill>
         <p:spPr>
           <a:xfrm>
-            <a:off x="799200" y="1440000"/>
-            <a:ext cx="1929600" cy="2412000"/>
+            <a:off x="792000" y="1475999"/>
+            <a:ext cx="1944000" cy="2430000"/>
           </a:xfrm>
           <a:prstGeom prst="rect">
             <a:avLst/>
@@ -8255,7 +8272,7 @@
       </p:pic>
       <p:pic>
         <p:nvPicPr>
-          <p:cNvPr id="10" name="Picture 9" descr="v_p_cariste.jpg"/>
+          <p:cNvPr id="10" name="Picture 9" descr="w_p_cariste.jpg"/>
           <p:cNvPicPr>
             <a:picLocks noChangeAspect="1"/>
           </p:cNvPicPr>
@@ -8269,8 +8286,8 @@
         </p:blipFill>
         <p:spPr>
           <a:xfrm>
-            <a:off x="3319200" y="1440000"/>
-            <a:ext cx="1929600" cy="2412000"/>
+            <a:off x="3276000" y="1475999"/>
+            <a:ext cx="1944000" cy="2430000"/>
           </a:xfrm>
           <a:prstGeom prst="rect">
             <a:avLst/>
@@ -8279,7 +8296,7 @@
       </p:pic>
       <p:pic>
         <p:nvPicPr>
-          <p:cNvPr id="11" name="Picture 10" descr="v_p_citerne.jpg"/>
+          <p:cNvPr id="11" name="Picture 10" descr="w_p_citerne.jpg"/>
           <p:cNvPicPr>
             <a:picLocks noChangeAspect="1"/>
           </p:cNvPicPr>
@@ -8293,8 +8310,8 @@
         </p:blipFill>
         <p:spPr>
           <a:xfrm>
-            <a:off x="5839200" y="1440000"/>
-            <a:ext cx="1929600" cy="2412000"/>
+            <a:off x="5760000" y="1475999"/>
+            <a:ext cx="1944000" cy="2430000"/>
           </a:xfrm>
           <a:prstGeom prst="rect">
             <a:avLst/>
@@ -8303,7 +8320,7 @@
       </p:pic>
       <p:pic>
         <p:nvPicPr>
-          <p:cNvPr id="12" name="Picture 11" descr="v_p_fifo.jpg"/>
+          <p:cNvPr id="12" name="Picture 11" descr="w_p_fifo.jpg"/>
           <p:cNvPicPr>
             <a:picLocks noChangeAspect="1"/>
           </p:cNvPicPr>
@@ -8317,8 +8334,8 @@
         </p:blipFill>
         <p:spPr>
           <a:xfrm>
-            <a:off x="799200" y="3924000"/>
-            <a:ext cx="1929600" cy="2412000"/>
+            <a:off x="792000" y="3977999"/>
+            <a:ext cx="1944000" cy="2430000"/>
           </a:xfrm>
           <a:prstGeom prst="rect">
             <a:avLst/>
@@ -8327,7 +8344,7 @@
       </p:pic>
       <p:pic>
         <p:nvPicPr>
-          <p:cNvPr id="13" name="Picture 12" descr="v_p_stock.jpg"/>
+          <p:cNvPr id="13" name="Picture 12" descr="w_p_stock.jpg"/>
           <p:cNvPicPr>
             <a:picLocks noChangeAspect="1"/>
           </p:cNvPicPr>
@@ -8341,8 +8358,8 @@
         </p:blipFill>
         <p:spPr>
           <a:xfrm>
-            <a:off x="3319200" y="3924000"/>
-            <a:ext cx="1929600" cy="2412000"/>
+            <a:off x="3276000" y="3977999"/>
+            <a:ext cx="1944000" cy="2430000"/>
           </a:xfrm>
           <a:prstGeom prst="rect">
             <a:avLst/>
@@ -8351,7 +8368,7 @@
       </p:pic>
       <p:pic>
         <p:nvPicPr>
-          <p:cNvPr id="14" name="Picture 13" descr="v_p_port.jpg"/>
+          <p:cNvPr id="14" name="Picture 13" descr="w_p_port.jpg"/>
           <p:cNvPicPr>
             <a:picLocks noChangeAspect="1"/>
           </p:cNvPicPr>
@@ -8365,8 +8382,8 @@
         </p:blipFill>
         <p:spPr>
           <a:xfrm>
-            <a:off x="5839200" y="3924000"/>
-            <a:ext cx="1929600" cy="2412000"/>
+            <a:off x="5760000" y="3977999"/>
+            <a:ext cx="1944000" cy="2430000"/>
           </a:xfrm>
           <a:prstGeom prst="rect">
             <a:avLst/>
@@ -8774,9 +8791,92 @@
           </a:p>
         </p:txBody>
       </p:sp>
+      <p:sp>
+        <p:nvSpPr>
+          <p:cNvPr id="9" name="Rounded Rectangle 8"/>
+          <p:cNvSpPr/>
+          <p:nvPr/>
+        </p:nvSpPr>
+        <p:spPr>
+          <a:xfrm>
+            <a:off x="576000" y="1512000"/>
+            <a:ext cx="3456000" cy="270000"/>
+          </a:xfrm>
+          <a:prstGeom prst="roundRect">
+            <a:avLst/>
+          </a:prstGeom>
+          <a:solidFill>
+            <a:srgbClr val="E2E2E2"/>
+          </a:solidFill>
+          <a:ln>
+            <a:noFill/>
+          </a:ln>
+          <a:effectLst/>
+        </p:spPr>
+        <p:style>
+          <a:lnRef idx="1">
+            <a:schemeClr val="accent1"/>
+          </a:lnRef>
+          <a:fillRef idx="3">
+            <a:schemeClr val="accent1"/>
+          </a:fillRef>
+          <a:effectRef idx="2">
+            <a:schemeClr val="accent1"/>
+          </a:effectRef>
+          <a:fontRef idx="minor">
+            <a:schemeClr val="lt1"/>
+          </a:fontRef>
+        </p:style>
+        <p:txBody>
+          <a:bodyPr rtlCol="0" anchor="ctr"/>
+          <a:lstStyle/>
+          <a:p>
+            <a:pPr algn="ctr"/>
+          </a:p>
+        </p:txBody>
+      </p:sp>
+      <p:sp>
+        <p:nvSpPr>
+          <p:cNvPr id="10" name="TextBox 9"/>
+          <p:cNvSpPr txBox="1"/>
+          <p:nvPr/>
+        </p:nvSpPr>
+        <p:spPr>
+          <a:xfrm>
+            <a:off x="576000" y="1512000"/>
+            <a:ext cx="3456000" cy="270000"/>
+          </a:xfrm>
+          <a:prstGeom prst="rect">
+            <a:avLst/>
+          </a:prstGeom>
+          <a:noFill/>
+        </p:spPr>
+        <p:txBody>
+          <a:bodyPr wrap="square" lIns="36000" rIns="36000" tIns="18000" bIns="18000" anchor="ctr">
+            <a:spAutoFit/>
+          </a:bodyPr>
+          <a:lstStyle/>
+          <a:p>
+            <a:pPr algn="ctr">
+              <a:lnSpc>
+                <a:spcPct val="110000"/>
+              </a:lnSpc>
+            </a:pPr>
+            <a:r>
+              <a:rPr sz="1000" b="1">
+                <a:solidFill>
+                  <a:srgbClr val="5A5A5A"/>
+                </a:solidFill>
+                <a:latin typeface="Poppins"/>
+              </a:rPr>
+              <a:t>AVANT · AUJOURD’HUI</a:t>
+            </a:r>
+          </a:p>
+        </p:txBody>
+      </p:sp>
       <p:pic>
         <p:nvPicPr>
-          <p:cNvPr id="9" name="Picture 8" descr="cmp_p_rack.jpg"/>
+          <p:cNvPr id="11" name="Picture 10" descr="b_p_rack.jpg"/>
           <p:cNvPicPr>
             <a:picLocks noChangeAspect="1"/>
           </p:cNvPicPr>
@@ -8790,14 +8890,719 @@
         </p:blipFill>
         <p:spPr>
           <a:xfrm>
-            <a:off x="1306044" y="1422000"/>
-            <a:ext cx="9555912" cy="4896000"/>
+            <a:off x="627380" y="1872000"/>
+            <a:ext cx="3353239" cy="4464000"/>
           </a:xfrm>
           <a:prstGeom prst="rect">
             <a:avLst/>
           </a:prstGeom>
         </p:spPr>
       </p:pic>
+      <p:sp>
+        <p:nvSpPr>
+          <p:cNvPr id="12" name="Oval 11"/>
+          <p:cNvSpPr/>
+          <p:nvPr/>
+        </p:nvSpPr>
+        <p:spPr>
+          <a:xfrm>
+            <a:off x="4158000" y="3744000"/>
+            <a:ext cx="540000" cy="540000"/>
+          </a:xfrm>
+          <a:prstGeom prst="ellipse">
+            <a:avLst/>
+          </a:prstGeom>
+          <a:solidFill>
+            <a:srgbClr val="EE5B22"/>
+          </a:solidFill>
+          <a:ln>
+            <a:noFill/>
+          </a:ln>
+          <a:effectLst/>
+        </p:spPr>
+        <p:style>
+          <a:lnRef idx="1">
+            <a:schemeClr val="accent1"/>
+          </a:lnRef>
+          <a:fillRef idx="3">
+            <a:schemeClr val="accent1"/>
+          </a:fillRef>
+          <a:effectRef idx="2">
+            <a:schemeClr val="accent1"/>
+          </a:effectRef>
+          <a:fontRef idx="minor">
+            <a:schemeClr val="lt1"/>
+          </a:fontRef>
+        </p:style>
+        <p:txBody>
+          <a:bodyPr rtlCol="0" anchor="ctr"/>
+          <a:lstStyle/>
+          <a:p>
+            <a:pPr algn="ctr"/>
+          </a:p>
+        </p:txBody>
+      </p:sp>
+      <p:pic>
+        <p:nvPicPr>
+          <p:cNvPr id="13" name="Picture 12" descr="arrow-right_bl.png"/>
+          <p:cNvPicPr>
+            <a:picLocks noChangeAspect="1"/>
+          </p:cNvPicPr>
+          <p:nvPr/>
+        </p:nvPicPr>
+        <p:blipFill>
+          <a:blip r:embed="rId4"/>
+          <a:stretch>
+            <a:fillRect/>
+          </a:stretch>
+        </p:blipFill>
+        <p:spPr>
+          <a:xfrm>
+            <a:off x="4266000" y="3851999"/>
+            <a:ext cx="324000" cy="324000"/>
+          </a:xfrm>
+          <a:prstGeom prst="rect">
+            <a:avLst/>
+          </a:prstGeom>
+        </p:spPr>
+      </p:pic>
+      <p:sp>
+        <p:nvSpPr>
+          <p:cNvPr id="14" name="Rounded Rectangle 13"/>
+          <p:cNvSpPr/>
+          <p:nvPr/>
+        </p:nvSpPr>
+        <p:spPr>
+          <a:xfrm>
+            <a:off x="4824000" y="1512000"/>
+            <a:ext cx="3816000" cy="270000"/>
+          </a:xfrm>
+          <a:prstGeom prst="roundRect">
+            <a:avLst/>
+          </a:prstGeom>
+          <a:solidFill>
+            <a:srgbClr val="EE5B22"/>
+          </a:solidFill>
+          <a:ln>
+            <a:noFill/>
+          </a:ln>
+          <a:effectLst/>
+        </p:spPr>
+        <p:style>
+          <a:lnRef idx="1">
+            <a:schemeClr val="accent1"/>
+          </a:lnRef>
+          <a:fillRef idx="3">
+            <a:schemeClr val="accent1"/>
+          </a:fillRef>
+          <a:effectRef idx="2">
+            <a:schemeClr val="accent1"/>
+          </a:effectRef>
+          <a:fontRef idx="minor">
+            <a:schemeClr val="lt1"/>
+          </a:fontRef>
+        </p:style>
+        <p:txBody>
+          <a:bodyPr rtlCol="0" anchor="ctr"/>
+          <a:lstStyle/>
+          <a:p>
+            <a:pPr algn="ctr"/>
+          </a:p>
+        </p:txBody>
+      </p:sp>
+      <p:sp>
+        <p:nvSpPr>
+          <p:cNvPr id="15" name="TextBox 14"/>
+          <p:cNvSpPr txBox="1"/>
+          <p:nvPr/>
+        </p:nvSpPr>
+        <p:spPr>
+          <a:xfrm>
+            <a:off x="4824000" y="1512000"/>
+            <a:ext cx="3816000" cy="270000"/>
+          </a:xfrm>
+          <a:prstGeom prst="rect">
+            <a:avLst/>
+          </a:prstGeom>
+          <a:noFill/>
+        </p:spPr>
+        <p:txBody>
+          <a:bodyPr wrap="square" lIns="36000" rIns="36000" tIns="18000" bIns="18000" anchor="ctr">
+            <a:spAutoFit/>
+          </a:bodyPr>
+          <a:lstStyle/>
+          <a:p>
+            <a:pPr algn="ctr">
+              <a:lnSpc>
+                <a:spcPct val="110000"/>
+              </a:lnSpc>
+            </a:pPr>
+            <a:r>
+              <a:rPr sz="1000" b="1">
+                <a:solidFill>
+                  <a:srgbClr val="FFFFFF"/>
+                </a:solidFill>
+                <a:latin typeface="Poppins"/>
+              </a:rPr>
+              <a:t>APRÈS · PROPOSÉ</a:t>
+            </a:r>
+          </a:p>
+        </p:txBody>
+      </p:sp>
+      <p:pic>
+        <p:nvPicPr>
+          <p:cNvPr id="16" name="Picture 15" descr="w_p_rack.jpg"/>
+          <p:cNvPicPr>
+            <a:picLocks noChangeAspect="1"/>
+          </p:cNvPicPr>
+          <p:nvPr/>
+        </p:nvPicPr>
+        <p:blipFill>
+          <a:blip r:embed="rId5"/>
+          <a:stretch>
+            <a:fillRect/>
+          </a:stretch>
+        </p:blipFill>
+        <p:spPr>
+          <a:xfrm>
+            <a:off x="4946400" y="1872000"/>
+            <a:ext cx="3571200" cy="4464000"/>
+          </a:xfrm>
+          <a:prstGeom prst="rect">
+            <a:avLst/>
+          </a:prstGeom>
+        </p:spPr>
+      </p:pic>
+      <p:sp>
+        <p:nvSpPr>
+          <p:cNvPr id="17" name="Rounded Rectangle 16"/>
+          <p:cNvSpPr/>
+          <p:nvPr/>
+        </p:nvSpPr>
+        <p:spPr>
+          <a:xfrm>
+            <a:off x="8820000" y="1512000"/>
+            <a:ext cx="2808000" cy="4824000"/>
+          </a:xfrm>
+          <a:prstGeom prst="roundRect">
+            <a:avLst>
+              <a:gd name="adj" fmla="val 6000"/>
+            </a:avLst>
+          </a:prstGeom>
+          <a:solidFill>
+            <a:srgbClr val="E3E7EC"/>
+          </a:solidFill>
+          <a:ln>
+            <a:noFill/>
+          </a:ln>
+          <a:effectLst/>
+        </p:spPr>
+        <p:style>
+          <a:lnRef idx="1">
+            <a:schemeClr val="accent1"/>
+          </a:lnRef>
+          <a:fillRef idx="3">
+            <a:schemeClr val="accent1"/>
+          </a:fillRef>
+          <a:effectRef idx="2">
+            <a:schemeClr val="accent1"/>
+          </a:effectRef>
+          <a:fontRef idx="minor">
+            <a:schemeClr val="lt1"/>
+          </a:fontRef>
+        </p:style>
+        <p:txBody>
+          <a:bodyPr rtlCol="0" anchor="ctr"/>
+          <a:lstStyle/>
+          <a:p>
+            <a:pPr algn="ctr"/>
+          </a:p>
+        </p:txBody>
+      </p:sp>
+      <p:sp>
+        <p:nvSpPr>
+          <p:cNvPr id="18" name="TextBox 17"/>
+          <p:cNvSpPr txBox="1"/>
+          <p:nvPr/>
+        </p:nvSpPr>
+        <p:spPr>
+          <a:xfrm>
+            <a:off x="9036000" y="1655999"/>
+            <a:ext cx="2448000" cy="324000"/>
+          </a:xfrm>
+          <a:prstGeom prst="rect">
+            <a:avLst/>
+          </a:prstGeom>
+          <a:noFill/>
+        </p:spPr>
+        <p:txBody>
+          <a:bodyPr wrap="square" lIns="36000" rIns="36000" tIns="18000" bIns="18000" anchor="t">
+            <a:spAutoFit/>
+          </a:bodyPr>
+          <a:lstStyle/>
+          <a:p>
+            <a:pPr algn="l">
+              <a:lnSpc>
+                <a:spcPct val="110000"/>
+              </a:lnSpc>
+            </a:pPr>
+            <a:r>
+              <a:rPr sz="1500" b="1">
+                <a:solidFill>
+                  <a:srgbClr val="EE5B22"/>
+                </a:solidFill>
+                <a:latin typeface="Poppins"/>
+              </a:rPr>
+              <a:t>Ce qui change</a:t>
+            </a:r>
+          </a:p>
+        </p:txBody>
+      </p:sp>
+      <p:sp>
+        <p:nvSpPr>
+          <p:cNvPr id="19" name="Oval 18"/>
+          <p:cNvSpPr/>
+          <p:nvPr/>
+        </p:nvSpPr>
+        <p:spPr>
+          <a:xfrm>
+            <a:off x="9036000" y="2088000"/>
+            <a:ext cx="342000" cy="342000"/>
+          </a:xfrm>
+          <a:prstGeom prst="ellipse">
+            <a:avLst/>
+          </a:prstGeom>
+          <a:solidFill>
+            <a:srgbClr val="EE5B22"/>
+          </a:solidFill>
+          <a:ln>
+            <a:noFill/>
+          </a:ln>
+          <a:effectLst/>
+        </p:spPr>
+        <p:style>
+          <a:lnRef idx="1">
+            <a:schemeClr val="accent1"/>
+          </a:lnRef>
+          <a:fillRef idx="3">
+            <a:schemeClr val="accent1"/>
+          </a:fillRef>
+          <a:effectRef idx="2">
+            <a:schemeClr val="accent1"/>
+          </a:effectRef>
+          <a:fontRef idx="minor">
+            <a:schemeClr val="lt1"/>
+          </a:fontRef>
+        </p:style>
+        <p:txBody>
+          <a:bodyPr rtlCol="0" anchor="ctr"/>
+          <a:lstStyle/>
+          <a:p>
+            <a:pPr algn="ctr"/>
+          </a:p>
+        </p:txBody>
+      </p:sp>
+      <p:pic>
+        <p:nvPicPr>
+          <p:cNvPr id="20" name="Picture 19" descr="check_bl.png"/>
+          <p:cNvPicPr>
+            <a:picLocks noChangeAspect="1"/>
+          </p:cNvPicPr>
+          <p:nvPr/>
+        </p:nvPicPr>
+        <p:blipFill>
+          <a:blip r:embed="rId6"/>
+          <a:stretch>
+            <a:fillRect/>
+          </a:stretch>
+        </p:blipFill>
+        <p:spPr>
+          <a:xfrm>
+            <a:off x="9097200" y="2149200"/>
+            <a:ext cx="216000" cy="216000"/>
+          </a:xfrm>
+          <a:prstGeom prst="rect">
+            <a:avLst/>
+          </a:prstGeom>
+        </p:spPr>
+      </p:pic>
+      <p:sp>
+        <p:nvSpPr>
+          <p:cNvPr id="21" name="TextBox 20"/>
+          <p:cNvSpPr txBox="1"/>
+          <p:nvPr/>
+        </p:nvSpPr>
+        <p:spPr>
+          <a:xfrm>
+            <a:off x="9468000" y="2052000"/>
+            <a:ext cx="2052000" cy="648000"/>
+          </a:xfrm>
+          <a:prstGeom prst="rect">
+            <a:avLst/>
+          </a:prstGeom>
+          <a:noFill/>
+        </p:spPr>
+        <p:txBody>
+          <a:bodyPr wrap="square" lIns="36000" rIns="36000" tIns="18000" bIns="18000" anchor="t">
+            <a:spAutoFit/>
+          </a:bodyPr>
+          <a:lstStyle/>
+          <a:p>
+            <a:pPr algn="l">
+              <a:lnSpc>
+                <a:spcPct val="110000"/>
+              </a:lnSpc>
+            </a:pPr>
+            <a:r>
+              <a:rPr sz="1100" b="1">
+                <a:solidFill>
+                  <a:srgbClr val="111111"/>
+                </a:solidFill>
+                <a:latin typeface="Poppins"/>
+              </a:rPr>
+              <a:t>Le chiffre qui vous distingue, en titre</a:t>
+            </a:r>
+          </a:p>
+        </p:txBody>
+      </p:sp>
+      <p:sp>
+        <p:nvSpPr>
+          <p:cNvPr id="22" name="Oval 21"/>
+          <p:cNvSpPr/>
+          <p:nvPr/>
+        </p:nvSpPr>
+        <p:spPr>
+          <a:xfrm>
+            <a:off x="9036000" y="2790000"/>
+            <a:ext cx="342000" cy="342000"/>
+          </a:xfrm>
+          <a:prstGeom prst="ellipse">
+            <a:avLst/>
+          </a:prstGeom>
+          <a:solidFill>
+            <a:srgbClr val="EE5B22"/>
+          </a:solidFill>
+          <a:ln>
+            <a:noFill/>
+          </a:ln>
+          <a:effectLst/>
+        </p:spPr>
+        <p:style>
+          <a:lnRef idx="1">
+            <a:schemeClr val="accent1"/>
+          </a:lnRef>
+          <a:fillRef idx="3">
+            <a:schemeClr val="accent1"/>
+          </a:fillRef>
+          <a:effectRef idx="2">
+            <a:schemeClr val="accent1"/>
+          </a:effectRef>
+          <a:fontRef idx="minor">
+            <a:schemeClr val="lt1"/>
+          </a:fontRef>
+        </p:style>
+        <p:txBody>
+          <a:bodyPr rtlCol="0" anchor="ctr"/>
+          <a:lstStyle/>
+          <a:p>
+            <a:pPr algn="ctr"/>
+          </a:p>
+        </p:txBody>
+      </p:sp>
+      <p:pic>
+        <p:nvPicPr>
+          <p:cNvPr id="23" name="Picture 22" descr="check_bl.png"/>
+          <p:cNvPicPr>
+            <a:picLocks noChangeAspect="1"/>
+          </p:cNvPicPr>
+          <p:nvPr/>
+        </p:nvPicPr>
+        <p:blipFill>
+          <a:blip r:embed="rId6"/>
+          <a:stretch>
+            <a:fillRect/>
+          </a:stretch>
+        </p:blipFill>
+        <p:spPr>
+          <a:xfrm>
+            <a:off x="9097200" y="2851200"/>
+            <a:ext cx="216000" cy="216000"/>
+          </a:xfrm>
+          <a:prstGeom prst="rect">
+            <a:avLst/>
+          </a:prstGeom>
+        </p:spPr>
+      </p:pic>
+      <p:sp>
+        <p:nvSpPr>
+          <p:cNvPr id="24" name="TextBox 23"/>
+          <p:cNvSpPr txBox="1"/>
+          <p:nvPr/>
+        </p:nvSpPr>
+        <p:spPr>
+          <a:xfrm>
+            <a:off x="9468000" y="2754000"/>
+            <a:ext cx="2052000" cy="648000"/>
+          </a:xfrm>
+          <a:prstGeom prst="rect">
+            <a:avLst/>
+          </a:prstGeom>
+          <a:noFill/>
+        </p:spPr>
+        <p:txBody>
+          <a:bodyPr wrap="square" lIns="36000" rIns="36000" tIns="18000" bIns="18000" anchor="t">
+            <a:spAutoFit/>
+          </a:bodyPr>
+          <a:lstStyle/>
+          <a:p>
+            <a:pPr algn="l">
+              <a:lnSpc>
+                <a:spcPct val="110000"/>
+              </a:lnSpc>
+            </a:pPr>
+            <a:r>
+              <a:rPr sz="1100" b="1">
+                <a:solidFill>
+                  <a:srgbClr val="111111"/>
+                </a:solidFill>
+                <a:latin typeface="Poppins"/>
+              </a:rPr>
+              <a:t>Votre vrai entrepôt en photo</a:t>
+            </a:r>
+          </a:p>
+        </p:txBody>
+      </p:sp>
+      <p:sp>
+        <p:nvSpPr>
+          <p:cNvPr id="25" name="Oval 24"/>
+          <p:cNvSpPr/>
+          <p:nvPr/>
+        </p:nvSpPr>
+        <p:spPr>
+          <a:xfrm>
+            <a:off x="9036000" y="3492000"/>
+            <a:ext cx="342000" cy="342000"/>
+          </a:xfrm>
+          <a:prstGeom prst="ellipse">
+            <a:avLst/>
+          </a:prstGeom>
+          <a:solidFill>
+            <a:srgbClr val="EE5B22"/>
+          </a:solidFill>
+          <a:ln>
+            <a:noFill/>
+          </a:ln>
+          <a:effectLst/>
+        </p:spPr>
+        <p:style>
+          <a:lnRef idx="1">
+            <a:schemeClr val="accent1"/>
+          </a:lnRef>
+          <a:fillRef idx="3">
+            <a:schemeClr val="accent1"/>
+          </a:fillRef>
+          <a:effectRef idx="2">
+            <a:schemeClr val="accent1"/>
+          </a:effectRef>
+          <a:fontRef idx="minor">
+            <a:schemeClr val="lt1"/>
+          </a:fontRef>
+        </p:style>
+        <p:txBody>
+          <a:bodyPr rtlCol="0" anchor="ctr"/>
+          <a:lstStyle/>
+          <a:p>
+            <a:pPr algn="ctr"/>
+          </a:p>
+        </p:txBody>
+      </p:sp>
+      <p:pic>
+        <p:nvPicPr>
+          <p:cNvPr id="26" name="Picture 25" descr="check_bl.png"/>
+          <p:cNvPicPr>
+            <a:picLocks noChangeAspect="1"/>
+          </p:cNvPicPr>
+          <p:nvPr/>
+        </p:nvPicPr>
+        <p:blipFill>
+          <a:blip r:embed="rId6"/>
+          <a:stretch>
+            <a:fillRect/>
+          </a:stretch>
+        </p:blipFill>
+        <p:spPr>
+          <a:xfrm>
+            <a:off x="9097200" y="3553200"/>
+            <a:ext cx="216000" cy="216000"/>
+          </a:xfrm>
+          <a:prstGeom prst="rect">
+            <a:avLst/>
+          </a:prstGeom>
+        </p:spPr>
+      </p:pic>
+      <p:sp>
+        <p:nvSpPr>
+          <p:cNvPr id="27" name="TextBox 26"/>
+          <p:cNvSpPr txBox="1"/>
+          <p:nvPr/>
+        </p:nvSpPr>
+        <p:spPr>
+          <a:xfrm>
+            <a:off x="9468000" y="3456000"/>
+            <a:ext cx="2052000" cy="648000"/>
+          </a:xfrm>
+          <a:prstGeom prst="rect">
+            <a:avLst/>
+          </a:prstGeom>
+          <a:noFill/>
+        </p:spPr>
+        <p:txBody>
+          <a:bodyPr wrap="square" lIns="36000" rIns="36000" tIns="18000" bIns="18000" anchor="t">
+            <a:spAutoFit/>
+          </a:bodyPr>
+          <a:lstStyle/>
+          <a:p>
+            <a:pPr algn="l">
+              <a:lnSpc>
+                <a:spcPct val="110000"/>
+              </a:lnSpc>
+            </a:pPr>
+            <a:r>
+              <a:rPr sz="1100" b="1">
+                <a:solidFill>
+                  <a:srgbClr val="111111"/>
+                </a:solidFill>
+                <a:latin typeface="Poppins"/>
+              </a:rPr>
+              <a:t>Une question qui qualifie le prospect</a:t>
+            </a:r>
+          </a:p>
+        </p:txBody>
+      </p:sp>
+      <p:sp>
+        <p:nvSpPr>
+          <p:cNvPr id="28" name="Rectangle 27"/>
+          <p:cNvSpPr/>
+          <p:nvPr/>
+        </p:nvSpPr>
+        <p:spPr>
+          <a:xfrm>
+            <a:off x="9036000" y="4248000"/>
+            <a:ext cx="2376000" cy="21600"/>
+          </a:xfrm>
+          <a:prstGeom prst="rect">
+            <a:avLst/>
+          </a:prstGeom>
+          <a:solidFill>
+            <a:srgbClr val="E2E2E2"/>
+          </a:solidFill>
+          <a:ln>
+            <a:noFill/>
+          </a:ln>
+          <a:effectLst/>
+        </p:spPr>
+        <p:style>
+          <a:lnRef idx="1">
+            <a:schemeClr val="accent1"/>
+          </a:lnRef>
+          <a:fillRef idx="3">
+            <a:schemeClr val="accent1"/>
+          </a:fillRef>
+          <a:effectRef idx="2">
+            <a:schemeClr val="accent1"/>
+          </a:effectRef>
+          <a:fontRef idx="minor">
+            <a:schemeClr val="lt1"/>
+          </a:fontRef>
+        </p:style>
+        <p:txBody>
+          <a:bodyPr rtlCol="0" anchor="ctr"/>
+          <a:lstStyle/>
+          <a:p>
+            <a:pPr algn="ctr"/>
+          </a:p>
+        </p:txBody>
+      </p:sp>
+      <p:sp>
+        <p:nvSpPr>
+          <p:cNvPr id="29" name="TextBox 28"/>
+          <p:cNvSpPr txBox="1"/>
+          <p:nvPr/>
+        </p:nvSpPr>
+        <p:spPr>
+          <a:xfrm>
+            <a:off x="9036000" y="4320000"/>
+            <a:ext cx="2376000" cy="251999"/>
+          </a:xfrm>
+          <a:prstGeom prst="rect">
+            <a:avLst/>
+          </a:prstGeom>
+          <a:noFill/>
+        </p:spPr>
+        <p:txBody>
+          <a:bodyPr wrap="square" lIns="36000" rIns="36000" tIns="18000" bIns="18000" anchor="t">
+            <a:spAutoFit/>
+          </a:bodyPr>
+          <a:lstStyle/>
+          <a:p>
+            <a:pPr algn="l">
+              <a:lnSpc>
+                <a:spcPct val="110000"/>
+              </a:lnSpc>
+            </a:pPr>
+            <a:r>
+              <a:rPr sz="900" b="1">
+                <a:solidFill>
+                  <a:srgbClr val="5A5A5A"/>
+                </a:solidFill>
+                <a:latin typeface="Poppins"/>
+              </a:rPr>
+              <a:t>LE TEXTE PROPOSÉ</a:t>
+            </a:r>
+          </a:p>
+        </p:txBody>
+      </p:sp>
+      <p:sp>
+        <p:nvSpPr>
+          <p:cNvPr id="30" name="TextBox 29"/>
+          <p:cNvSpPr txBox="1"/>
+          <p:nvPr/>
+        </p:nvSpPr>
+        <p:spPr>
+          <a:xfrm>
+            <a:off x="9036000" y="4536000"/>
+            <a:ext cx="2376000" cy="1764000"/>
+          </a:xfrm>
+          <a:prstGeom prst="rect">
+            <a:avLst/>
+          </a:prstGeom>
+          <a:noFill/>
+        </p:spPr>
+        <p:txBody>
+          <a:bodyPr wrap="square" lIns="36000" rIns="36000" tIns="18000" bIns="18000" anchor="t">
+            <a:spAutoFit/>
+          </a:bodyPr>
+          <a:lstStyle/>
+          <a:p>
+            <a:pPr algn="l">
+              <a:lnSpc>
+                <a:spcPct val="110000"/>
+              </a:lnSpc>
+            </a:pPr>
+            <a:r>
+              <a:rPr sz="950" b="0">
+                <a:solidFill>
+                  <a:srgbClr val="111111"/>
+                </a:solidFill>
+                <a:latin typeface="Poppins"/>
+              </a:rPr>
+              <a:t>43 000 m² d’entrepôts rackés et 70 000 m² de terre-plein à Abidjan. 📦
+Stockage palettisé, parc à conteneurs, suivi par logiciel.
+ Combien de palettes stockez-vous par mois ?</a:t>
+            </a:r>
+          </a:p>
+        </p:txBody>
+      </p:sp>
     </p:spTree>
   </p:cSld>
   <p:clrMapOvr>
@@ -9084,9 +9889,92 @@
           </a:p>
         </p:txBody>
       </p:sp>
+      <p:sp>
+        <p:nvSpPr>
+          <p:cNvPr id="9" name="Rounded Rectangle 8"/>
+          <p:cNvSpPr/>
+          <p:nvPr/>
+        </p:nvSpPr>
+        <p:spPr>
+          <a:xfrm>
+            <a:off x="576000" y="1512000"/>
+            <a:ext cx="3456000" cy="270000"/>
+          </a:xfrm>
+          <a:prstGeom prst="roundRect">
+            <a:avLst/>
+          </a:prstGeom>
+          <a:solidFill>
+            <a:srgbClr val="E2E2E2"/>
+          </a:solidFill>
+          <a:ln>
+            <a:noFill/>
+          </a:ln>
+          <a:effectLst/>
+        </p:spPr>
+        <p:style>
+          <a:lnRef idx="1">
+            <a:schemeClr val="accent1"/>
+          </a:lnRef>
+          <a:fillRef idx="3">
+            <a:schemeClr val="accent1"/>
+          </a:fillRef>
+          <a:effectRef idx="2">
+            <a:schemeClr val="accent1"/>
+          </a:effectRef>
+          <a:fontRef idx="minor">
+            <a:schemeClr val="lt1"/>
+          </a:fontRef>
+        </p:style>
+        <p:txBody>
+          <a:bodyPr rtlCol="0" anchor="ctr"/>
+          <a:lstStyle/>
+          <a:p>
+            <a:pPr algn="ctr"/>
+          </a:p>
+        </p:txBody>
+      </p:sp>
+      <p:sp>
+        <p:nvSpPr>
+          <p:cNvPr id="10" name="TextBox 9"/>
+          <p:cNvSpPr txBox="1"/>
+          <p:nvPr/>
+        </p:nvSpPr>
+        <p:spPr>
+          <a:xfrm>
+            <a:off x="576000" y="1512000"/>
+            <a:ext cx="3456000" cy="270000"/>
+          </a:xfrm>
+          <a:prstGeom prst="rect">
+            <a:avLst/>
+          </a:prstGeom>
+          <a:noFill/>
+        </p:spPr>
+        <p:txBody>
+          <a:bodyPr wrap="square" lIns="36000" rIns="36000" tIns="18000" bIns="18000" anchor="ctr">
+            <a:spAutoFit/>
+          </a:bodyPr>
+          <a:lstStyle/>
+          <a:p>
+            <a:pPr algn="ctr">
+              <a:lnSpc>
+                <a:spcPct val="110000"/>
+              </a:lnSpc>
+            </a:pPr>
+            <a:r>
+              <a:rPr sz="1000" b="1">
+                <a:solidFill>
+                  <a:srgbClr val="5A5A5A"/>
+                </a:solidFill>
+                <a:latin typeface="Poppins"/>
+              </a:rPr>
+              <a:t>AVANT · AUJOURD’HUI</a:t>
+            </a:r>
+          </a:p>
+        </p:txBody>
+      </p:sp>
       <p:pic>
         <p:nvPicPr>
-          <p:cNvPr id="9" name="Picture 8" descr="cmp_p_cariste.jpg"/>
+          <p:cNvPr id="11" name="Picture 10" descr="b_p_rack.jpg"/>
           <p:cNvPicPr>
             <a:picLocks noChangeAspect="1"/>
           </p:cNvPicPr>
@@ -9100,14 +9988,719 @@
         </p:blipFill>
         <p:spPr>
           <a:xfrm>
-            <a:off x="1408045" y="1422000"/>
-            <a:ext cx="9351910" cy="4896000"/>
+            <a:off x="627380" y="1872000"/>
+            <a:ext cx="3353239" cy="4464000"/>
           </a:xfrm>
           <a:prstGeom prst="rect">
             <a:avLst/>
           </a:prstGeom>
         </p:spPr>
       </p:pic>
+      <p:sp>
+        <p:nvSpPr>
+          <p:cNvPr id="12" name="Oval 11"/>
+          <p:cNvSpPr/>
+          <p:nvPr/>
+        </p:nvSpPr>
+        <p:spPr>
+          <a:xfrm>
+            <a:off x="4158000" y="3744000"/>
+            <a:ext cx="540000" cy="540000"/>
+          </a:xfrm>
+          <a:prstGeom prst="ellipse">
+            <a:avLst/>
+          </a:prstGeom>
+          <a:solidFill>
+            <a:srgbClr val="EE5B22"/>
+          </a:solidFill>
+          <a:ln>
+            <a:noFill/>
+          </a:ln>
+          <a:effectLst/>
+        </p:spPr>
+        <p:style>
+          <a:lnRef idx="1">
+            <a:schemeClr val="accent1"/>
+          </a:lnRef>
+          <a:fillRef idx="3">
+            <a:schemeClr val="accent1"/>
+          </a:fillRef>
+          <a:effectRef idx="2">
+            <a:schemeClr val="accent1"/>
+          </a:effectRef>
+          <a:fontRef idx="minor">
+            <a:schemeClr val="lt1"/>
+          </a:fontRef>
+        </p:style>
+        <p:txBody>
+          <a:bodyPr rtlCol="0" anchor="ctr"/>
+          <a:lstStyle/>
+          <a:p>
+            <a:pPr algn="ctr"/>
+          </a:p>
+        </p:txBody>
+      </p:sp>
+      <p:pic>
+        <p:nvPicPr>
+          <p:cNvPr id="13" name="Picture 12" descr="arrow-right_bl.png"/>
+          <p:cNvPicPr>
+            <a:picLocks noChangeAspect="1"/>
+          </p:cNvPicPr>
+          <p:nvPr/>
+        </p:nvPicPr>
+        <p:blipFill>
+          <a:blip r:embed="rId4"/>
+          <a:stretch>
+            <a:fillRect/>
+          </a:stretch>
+        </p:blipFill>
+        <p:spPr>
+          <a:xfrm>
+            <a:off x="4266000" y="3851999"/>
+            <a:ext cx="324000" cy="324000"/>
+          </a:xfrm>
+          <a:prstGeom prst="rect">
+            <a:avLst/>
+          </a:prstGeom>
+        </p:spPr>
+      </p:pic>
+      <p:sp>
+        <p:nvSpPr>
+          <p:cNvPr id="14" name="Rounded Rectangle 13"/>
+          <p:cNvSpPr/>
+          <p:nvPr/>
+        </p:nvSpPr>
+        <p:spPr>
+          <a:xfrm>
+            <a:off x="4824000" y="1512000"/>
+            <a:ext cx="3816000" cy="270000"/>
+          </a:xfrm>
+          <a:prstGeom prst="roundRect">
+            <a:avLst/>
+          </a:prstGeom>
+          <a:solidFill>
+            <a:srgbClr val="EE5B22"/>
+          </a:solidFill>
+          <a:ln>
+            <a:noFill/>
+          </a:ln>
+          <a:effectLst/>
+        </p:spPr>
+        <p:style>
+          <a:lnRef idx="1">
+            <a:schemeClr val="accent1"/>
+          </a:lnRef>
+          <a:fillRef idx="3">
+            <a:schemeClr val="accent1"/>
+          </a:fillRef>
+          <a:effectRef idx="2">
+            <a:schemeClr val="accent1"/>
+          </a:effectRef>
+          <a:fontRef idx="minor">
+            <a:schemeClr val="lt1"/>
+          </a:fontRef>
+        </p:style>
+        <p:txBody>
+          <a:bodyPr rtlCol="0" anchor="ctr"/>
+          <a:lstStyle/>
+          <a:p>
+            <a:pPr algn="ctr"/>
+          </a:p>
+        </p:txBody>
+      </p:sp>
+      <p:sp>
+        <p:nvSpPr>
+          <p:cNvPr id="15" name="TextBox 14"/>
+          <p:cNvSpPr txBox="1"/>
+          <p:nvPr/>
+        </p:nvSpPr>
+        <p:spPr>
+          <a:xfrm>
+            <a:off x="4824000" y="1512000"/>
+            <a:ext cx="3816000" cy="270000"/>
+          </a:xfrm>
+          <a:prstGeom prst="rect">
+            <a:avLst/>
+          </a:prstGeom>
+          <a:noFill/>
+        </p:spPr>
+        <p:txBody>
+          <a:bodyPr wrap="square" lIns="36000" rIns="36000" tIns="18000" bIns="18000" anchor="ctr">
+            <a:spAutoFit/>
+          </a:bodyPr>
+          <a:lstStyle/>
+          <a:p>
+            <a:pPr algn="ctr">
+              <a:lnSpc>
+                <a:spcPct val="110000"/>
+              </a:lnSpc>
+            </a:pPr>
+            <a:r>
+              <a:rPr sz="1000" b="1">
+                <a:solidFill>
+                  <a:srgbClr val="FFFFFF"/>
+                </a:solidFill>
+                <a:latin typeface="Poppins"/>
+              </a:rPr>
+              <a:t>APRÈS · PROPOSÉ</a:t>
+            </a:r>
+          </a:p>
+        </p:txBody>
+      </p:sp>
+      <p:pic>
+        <p:nvPicPr>
+          <p:cNvPr id="16" name="Picture 15" descr="w_p_cariste.jpg"/>
+          <p:cNvPicPr>
+            <a:picLocks noChangeAspect="1"/>
+          </p:cNvPicPr>
+          <p:nvPr/>
+        </p:nvPicPr>
+        <p:blipFill>
+          <a:blip r:embed="rId5"/>
+          <a:stretch>
+            <a:fillRect/>
+          </a:stretch>
+        </p:blipFill>
+        <p:spPr>
+          <a:xfrm>
+            <a:off x="4946400" y="1872000"/>
+            <a:ext cx="3571200" cy="4464000"/>
+          </a:xfrm>
+          <a:prstGeom prst="rect">
+            <a:avLst/>
+          </a:prstGeom>
+        </p:spPr>
+      </p:pic>
+      <p:sp>
+        <p:nvSpPr>
+          <p:cNvPr id="17" name="Rounded Rectangle 16"/>
+          <p:cNvSpPr/>
+          <p:nvPr/>
+        </p:nvSpPr>
+        <p:spPr>
+          <a:xfrm>
+            <a:off x="8820000" y="1512000"/>
+            <a:ext cx="2808000" cy="4824000"/>
+          </a:xfrm>
+          <a:prstGeom prst="roundRect">
+            <a:avLst>
+              <a:gd name="adj" fmla="val 6000"/>
+            </a:avLst>
+          </a:prstGeom>
+          <a:solidFill>
+            <a:srgbClr val="E3E7EC"/>
+          </a:solidFill>
+          <a:ln>
+            <a:noFill/>
+          </a:ln>
+          <a:effectLst/>
+        </p:spPr>
+        <p:style>
+          <a:lnRef idx="1">
+            <a:schemeClr val="accent1"/>
+          </a:lnRef>
+          <a:fillRef idx="3">
+            <a:schemeClr val="accent1"/>
+          </a:fillRef>
+          <a:effectRef idx="2">
+            <a:schemeClr val="accent1"/>
+          </a:effectRef>
+          <a:fontRef idx="minor">
+            <a:schemeClr val="lt1"/>
+          </a:fontRef>
+        </p:style>
+        <p:txBody>
+          <a:bodyPr rtlCol="0" anchor="ctr"/>
+          <a:lstStyle/>
+          <a:p>
+            <a:pPr algn="ctr"/>
+          </a:p>
+        </p:txBody>
+      </p:sp>
+      <p:sp>
+        <p:nvSpPr>
+          <p:cNvPr id="18" name="TextBox 17"/>
+          <p:cNvSpPr txBox="1"/>
+          <p:nvPr/>
+        </p:nvSpPr>
+        <p:spPr>
+          <a:xfrm>
+            <a:off x="9036000" y="1655999"/>
+            <a:ext cx="2448000" cy="324000"/>
+          </a:xfrm>
+          <a:prstGeom prst="rect">
+            <a:avLst/>
+          </a:prstGeom>
+          <a:noFill/>
+        </p:spPr>
+        <p:txBody>
+          <a:bodyPr wrap="square" lIns="36000" rIns="36000" tIns="18000" bIns="18000" anchor="t">
+            <a:spAutoFit/>
+          </a:bodyPr>
+          <a:lstStyle/>
+          <a:p>
+            <a:pPr algn="l">
+              <a:lnSpc>
+                <a:spcPct val="110000"/>
+              </a:lnSpc>
+            </a:pPr>
+            <a:r>
+              <a:rPr sz="1500" b="1">
+                <a:solidFill>
+                  <a:srgbClr val="EE5B22"/>
+                </a:solidFill>
+                <a:latin typeface="Poppins"/>
+              </a:rPr>
+              <a:t>Ce qui change</a:t>
+            </a:r>
+          </a:p>
+        </p:txBody>
+      </p:sp>
+      <p:sp>
+        <p:nvSpPr>
+          <p:cNvPr id="19" name="Oval 18"/>
+          <p:cNvSpPr/>
+          <p:nvPr/>
+        </p:nvSpPr>
+        <p:spPr>
+          <a:xfrm>
+            <a:off x="9036000" y="2088000"/>
+            <a:ext cx="342000" cy="342000"/>
+          </a:xfrm>
+          <a:prstGeom prst="ellipse">
+            <a:avLst/>
+          </a:prstGeom>
+          <a:solidFill>
+            <a:srgbClr val="EE5B22"/>
+          </a:solidFill>
+          <a:ln>
+            <a:noFill/>
+          </a:ln>
+          <a:effectLst/>
+        </p:spPr>
+        <p:style>
+          <a:lnRef idx="1">
+            <a:schemeClr val="accent1"/>
+          </a:lnRef>
+          <a:fillRef idx="3">
+            <a:schemeClr val="accent1"/>
+          </a:fillRef>
+          <a:effectRef idx="2">
+            <a:schemeClr val="accent1"/>
+          </a:effectRef>
+          <a:fontRef idx="minor">
+            <a:schemeClr val="lt1"/>
+          </a:fontRef>
+        </p:style>
+        <p:txBody>
+          <a:bodyPr rtlCol="0" anchor="ctr"/>
+          <a:lstStyle/>
+          <a:p>
+            <a:pPr algn="ctr"/>
+          </a:p>
+        </p:txBody>
+      </p:sp>
+      <p:pic>
+        <p:nvPicPr>
+          <p:cNvPr id="20" name="Picture 19" descr="check_bl.png"/>
+          <p:cNvPicPr>
+            <a:picLocks noChangeAspect="1"/>
+          </p:cNvPicPr>
+          <p:nvPr/>
+        </p:nvPicPr>
+        <p:blipFill>
+          <a:blip r:embed="rId6"/>
+          <a:stretch>
+            <a:fillRect/>
+          </a:stretch>
+        </p:blipFill>
+        <p:spPr>
+          <a:xfrm>
+            <a:off x="9097200" y="2149200"/>
+            <a:ext cx="216000" cy="216000"/>
+          </a:xfrm>
+          <a:prstGeom prst="rect">
+            <a:avLst/>
+          </a:prstGeom>
+        </p:spPr>
+      </p:pic>
+      <p:sp>
+        <p:nvSpPr>
+          <p:cNvPr id="21" name="TextBox 20"/>
+          <p:cNvSpPr txBox="1"/>
+          <p:nvPr/>
+        </p:nvSpPr>
+        <p:spPr>
+          <a:xfrm>
+            <a:off x="9468000" y="2052000"/>
+            <a:ext cx="2052000" cy="648000"/>
+          </a:xfrm>
+          <a:prstGeom prst="rect">
+            <a:avLst/>
+          </a:prstGeom>
+          <a:noFill/>
+        </p:spPr>
+        <p:txBody>
+          <a:bodyPr wrap="square" lIns="36000" rIns="36000" tIns="18000" bIns="18000" anchor="t">
+            <a:spAutoFit/>
+          </a:bodyPr>
+          <a:lstStyle/>
+          <a:p>
+            <a:pPr algn="l">
+              <a:lnSpc>
+                <a:spcPct val="110000"/>
+              </a:lnSpc>
+            </a:pPr>
+            <a:r>
+              <a:rPr sz="1100" b="1">
+                <a:solidFill>
+                  <a:srgbClr val="111111"/>
+                </a:solidFill>
+                <a:latin typeface="Poppins"/>
+              </a:rPr>
+              <a:t>Les gens d’abord : ce qui marche chez AGL</a:t>
+            </a:r>
+          </a:p>
+        </p:txBody>
+      </p:sp>
+      <p:sp>
+        <p:nvSpPr>
+          <p:cNvPr id="22" name="Oval 21"/>
+          <p:cNvSpPr/>
+          <p:nvPr/>
+        </p:nvSpPr>
+        <p:spPr>
+          <a:xfrm>
+            <a:off x="9036000" y="2790000"/>
+            <a:ext cx="342000" cy="342000"/>
+          </a:xfrm>
+          <a:prstGeom prst="ellipse">
+            <a:avLst/>
+          </a:prstGeom>
+          <a:solidFill>
+            <a:srgbClr val="EE5B22"/>
+          </a:solidFill>
+          <a:ln>
+            <a:noFill/>
+          </a:ln>
+          <a:effectLst/>
+        </p:spPr>
+        <p:style>
+          <a:lnRef idx="1">
+            <a:schemeClr val="accent1"/>
+          </a:lnRef>
+          <a:fillRef idx="3">
+            <a:schemeClr val="accent1"/>
+          </a:fillRef>
+          <a:effectRef idx="2">
+            <a:schemeClr val="accent1"/>
+          </a:effectRef>
+          <a:fontRef idx="minor">
+            <a:schemeClr val="lt1"/>
+          </a:fontRef>
+        </p:style>
+        <p:txBody>
+          <a:bodyPr rtlCol="0" anchor="ctr"/>
+          <a:lstStyle/>
+          <a:p>
+            <a:pPr algn="ctr"/>
+          </a:p>
+        </p:txBody>
+      </p:sp>
+      <p:pic>
+        <p:nvPicPr>
+          <p:cNvPr id="23" name="Picture 22" descr="check_bl.png"/>
+          <p:cNvPicPr>
+            <a:picLocks noChangeAspect="1"/>
+          </p:cNvPicPr>
+          <p:nvPr/>
+        </p:nvPicPr>
+        <p:blipFill>
+          <a:blip r:embed="rId6"/>
+          <a:stretch>
+            <a:fillRect/>
+          </a:stretch>
+        </p:blipFill>
+        <p:spPr>
+          <a:xfrm>
+            <a:off x="9097200" y="2851200"/>
+            <a:ext cx="216000" cy="216000"/>
+          </a:xfrm>
+          <a:prstGeom prst="rect">
+            <a:avLst/>
+          </a:prstGeom>
+        </p:spPr>
+      </p:pic>
+      <p:sp>
+        <p:nvSpPr>
+          <p:cNvPr id="24" name="TextBox 23"/>
+          <p:cNvSpPr txBox="1"/>
+          <p:nvPr/>
+        </p:nvSpPr>
+        <p:spPr>
+          <a:xfrm>
+            <a:off x="9468000" y="2754000"/>
+            <a:ext cx="2052000" cy="648000"/>
+          </a:xfrm>
+          <a:prstGeom prst="rect">
+            <a:avLst/>
+          </a:prstGeom>
+          <a:noFill/>
+        </p:spPr>
+        <p:txBody>
+          <a:bodyPr wrap="square" lIns="36000" rIns="36000" tIns="18000" bIns="18000" anchor="t">
+            <a:spAutoFit/>
+          </a:bodyPr>
+          <a:lstStyle/>
+          <a:p>
+            <a:pPr algn="l">
+              <a:lnSpc>
+                <a:spcPct val="110000"/>
+              </a:lnSpc>
+            </a:pPr>
+            <a:r>
+              <a:rPr sz="1100" b="1">
+                <a:solidFill>
+                  <a:srgbClr val="111111"/>
+                </a:solidFill>
+                <a:latin typeface="Poppins"/>
+              </a:rPr>
+              <a:t>Une preuve de sérieux, sans jargon</a:t>
+            </a:r>
+          </a:p>
+        </p:txBody>
+      </p:sp>
+      <p:sp>
+        <p:nvSpPr>
+          <p:cNvPr id="25" name="Oval 24"/>
+          <p:cNvSpPr/>
+          <p:nvPr/>
+        </p:nvSpPr>
+        <p:spPr>
+          <a:xfrm>
+            <a:off x="9036000" y="3492000"/>
+            <a:ext cx="342000" cy="342000"/>
+          </a:xfrm>
+          <a:prstGeom prst="ellipse">
+            <a:avLst/>
+          </a:prstGeom>
+          <a:solidFill>
+            <a:srgbClr val="EE5B22"/>
+          </a:solidFill>
+          <a:ln>
+            <a:noFill/>
+          </a:ln>
+          <a:effectLst/>
+        </p:spPr>
+        <p:style>
+          <a:lnRef idx="1">
+            <a:schemeClr val="accent1"/>
+          </a:lnRef>
+          <a:fillRef idx="3">
+            <a:schemeClr val="accent1"/>
+          </a:fillRef>
+          <a:effectRef idx="2">
+            <a:schemeClr val="accent1"/>
+          </a:effectRef>
+          <a:fontRef idx="minor">
+            <a:schemeClr val="lt1"/>
+          </a:fontRef>
+        </p:style>
+        <p:txBody>
+          <a:bodyPr rtlCol="0" anchor="ctr"/>
+          <a:lstStyle/>
+          <a:p>
+            <a:pPr algn="ctr"/>
+          </a:p>
+        </p:txBody>
+      </p:sp>
+      <p:pic>
+        <p:nvPicPr>
+          <p:cNvPr id="26" name="Picture 25" descr="check_bl.png"/>
+          <p:cNvPicPr>
+            <a:picLocks noChangeAspect="1"/>
+          </p:cNvPicPr>
+          <p:nvPr/>
+        </p:nvPicPr>
+        <p:blipFill>
+          <a:blip r:embed="rId6"/>
+          <a:stretch>
+            <a:fillRect/>
+          </a:stretch>
+        </p:blipFill>
+        <p:spPr>
+          <a:xfrm>
+            <a:off x="9097200" y="3553200"/>
+            <a:ext cx="216000" cy="216000"/>
+          </a:xfrm>
+          <a:prstGeom prst="rect">
+            <a:avLst/>
+          </a:prstGeom>
+        </p:spPr>
+      </p:pic>
+      <p:sp>
+        <p:nvSpPr>
+          <p:cNvPr id="27" name="TextBox 26"/>
+          <p:cNvSpPr txBox="1"/>
+          <p:nvPr/>
+        </p:nvSpPr>
+        <p:spPr>
+          <a:xfrm>
+            <a:off x="9468000" y="3456000"/>
+            <a:ext cx="2052000" cy="648000"/>
+          </a:xfrm>
+          <a:prstGeom prst="rect">
+            <a:avLst/>
+          </a:prstGeom>
+          <a:noFill/>
+        </p:spPr>
+        <p:txBody>
+          <a:bodyPr wrap="square" lIns="36000" rIns="36000" tIns="18000" bIns="18000" anchor="t">
+            <a:spAutoFit/>
+          </a:bodyPr>
+          <a:lstStyle/>
+          <a:p>
+            <a:pPr algn="l">
+              <a:lnSpc>
+                <a:spcPct val="110000"/>
+              </a:lnSpc>
+            </a:pPr>
+            <a:r>
+              <a:rPr sz="1100" b="1">
+                <a:solidFill>
+                  <a:srgbClr val="111111"/>
+                </a:solidFill>
+                <a:latin typeface="Poppins"/>
+              </a:rPr>
+              <a:t>Une question qui fait réfléchir l’acheteur</a:t>
+            </a:r>
+          </a:p>
+        </p:txBody>
+      </p:sp>
+      <p:sp>
+        <p:nvSpPr>
+          <p:cNvPr id="28" name="Rectangle 27"/>
+          <p:cNvSpPr/>
+          <p:nvPr/>
+        </p:nvSpPr>
+        <p:spPr>
+          <a:xfrm>
+            <a:off x="9036000" y="4248000"/>
+            <a:ext cx="2376000" cy="21600"/>
+          </a:xfrm>
+          <a:prstGeom prst="rect">
+            <a:avLst/>
+          </a:prstGeom>
+          <a:solidFill>
+            <a:srgbClr val="E2E2E2"/>
+          </a:solidFill>
+          <a:ln>
+            <a:noFill/>
+          </a:ln>
+          <a:effectLst/>
+        </p:spPr>
+        <p:style>
+          <a:lnRef idx="1">
+            <a:schemeClr val="accent1"/>
+          </a:lnRef>
+          <a:fillRef idx="3">
+            <a:schemeClr val="accent1"/>
+          </a:fillRef>
+          <a:effectRef idx="2">
+            <a:schemeClr val="accent1"/>
+          </a:effectRef>
+          <a:fontRef idx="minor">
+            <a:schemeClr val="lt1"/>
+          </a:fontRef>
+        </p:style>
+        <p:txBody>
+          <a:bodyPr rtlCol="0" anchor="ctr"/>
+          <a:lstStyle/>
+          <a:p>
+            <a:pPr algn="ctr"/>
+          </a:p>
+        </p:txBody>
+      </p:sp>
+      <p:sp>
+        <p:nvSpPr>
+          <p:cNvPr id="29" name="TextBox 28"/>
+          <p:cNvSpPr txBox="1"/>
+          <p:nvPr/>
+        </p:nvSpPr>
+        <p:spPr>
+          <a:xfrm>
+            <a:off x="9036000" y="4320000"/>
+            <a:ext cx="2376000" cy="251999"/>
+          </a:xfrm>
+          <a:prstGeom prst="rect">
+            <a:avLst/>
+          </a:prstGeom>
+          <a:noFill/>
+        </p:spPr>
+        <p:txBody>
+          <a:bodyPr wrap="square" lIns="36000" rIns="36000" tIns="18000" bIns="18000" anchor="t">
+            <a:spAutoFit/>
+          </a:bodyPr>
+          <a:lstStyle/>
+          <a:p>
+            <a:pPr algn="l">
+              <a:lnSpc>
+                <a:spcPct val="110000"/>
+              </a:lnSpc>
+            </a:pPr>
+            <a:r>
+              <a:rPr sz="900" b="1">
+                <a:solidFill>
+                  <a:srgbClr val="5A5A5A"/>
+                </a:solidFill>
+                <a:latin typeface="Poppins"/>
+              </a:rPr>
+              <a:t>LE TEXTE PROPOSÉ</a:t>
+            </a:r>
+          </a:p>
+        </p:txBody>
+      </p:sp>
+      <p:sp>
+        <p:nvSpPr>
+          <p:cNvPr id="30" name="TextBox 29"/>
+          <p:cNvSpPr txBox="1"/>
+          <p:nvPr/>
+        </p:nvSpPr>
+        <p:spPr>
+          <a:xfrm>
+            <a:off x="9036000" y="4536000"/>
+            <a:ext cx="2376000" cy="1764000"/>
+          </a:xfrm>
+          <a:prstGeom prst="rect">
+            <a:avLst/>
+          </a:prstGeom>
+          <a:noFill/>
+        </p:spPr>
+        <p:txBody>
+          <a:bodyPr wrap="square" lIns="36000" rIns="36000" tIns="18000" bIns="18000" anchor="t">
+            <a:spAutoFit/>
+          </a:bodyPr>
+          <a:lstStyle/>
+          <a:p>
+            <a:pPr algn="l">
+              <a:lnSpc>
+                <a:spcPct val="110000"/>
+              </a:lnSpc>
+            </a:pPr>
+            <a:r>
+              <a:rPr sz="950" b="0">
+                <a:solidFill>
+                  <a:srgbClr val="111111"/>
+                </a:solidFill>
+                <a:latin typeface="Poppins"/>
+              </a:rPr>
+              <a:t>Un cariste formé, c’est moins de casse et plus de palettes à l’heure. 🦺
+Nos équipes sont formées : CACES, sécurité, procédures de chaque client.
+ Vos prestataires forment-ils leurs caristes ?</a:t>
+            </a:r>
+          </a:p>
+        </p:txBody>
+      </p:sp>
     </p:spTree>
   </p:cSld>
   <p:clrMapOvr>
@@ -9394,9 +10987,92 @@
           </a:p>
         </p:txBody>
       </p:sp>
+      <p:sp>
+        <p:nvSpPr>
+          <p:cNvPr id="9" name="Rounded Rectangle 8"/>
+          <p:cNvSpPr/>
+          <p:nvPr/>
+        </p:nvSpPr>
+        <p:spPr>
+          <a:xfrm>
+            <a:off x="576000" y="1512000"/>
+            <a:ext cx="3456000" cy="270000"/>
+          </a:xfrm>
+          <a:prstGeom prst="roundRect">
+            <a:avLst/>
+          </a:prstGeom>
+          <a:solidFill>
+            <a:srgbClr val="E2E2E2"/>
+          </a:solidFill>
+          <a:ln>
+            <a:noFill/>
+          </a:ln>
+          <a:effectLst/>
+        </p:spPr>
+        <p:style>
+          <a:lnRef idx="1">
+            <a:schemeClr val="accent1"/>
+          </a:lnRef>
+          <a:fillRef idx="3">
+            <a:schemeClr val="accent1"/>
+          </a:fillRef>
+          <a:effectRef idx="2">
+            <a:schemeClr val="accent1"/>
+          </a:effectRef>
+          <a:fontRef idx="minor">
+            <a:schemeClr val="lt1"/>
+          </a:fontRef>
+        </p:style>
+        <p:txBody>
+          <a:bodyPr rtlCol="0" anchor="ctr"/>
+          <a:lstStyle/>
+          <a:p>
+            <a:pPr algn="ctr"/>
+          </a:p>
+        </p:txBody>
+      </p:sp>
+      <p:sp>
+        <p:nvSpPr>
+          <p:cNvPr id="10" name="TextBox 9"/>
+          <p:cNvSpPr txBox="1"/>
+          <p:nvPr/>
+        </p:nvSpPr>
+        <p:spPr>
+          <a:xfrm>
+            <a:off x="576000" y="1512000"/>
+            <a:ext cx="3456000" cy="270000"/>
+          </a:xfrm>
+          <a:prstGeom prst="rect">
+            <a:avLst/>
+          </a:prstGeom>
+          <a:noFill/>
+        </p:spPr>
+        <p:txBody>
+          <a:bodyPr wrap="square" lIns="36000" rIns="36000" tIns="18000" bIns="18000" anchor="ctr">
+            <a:spAutoFit/>
+          </a:bodyPr>
+          <a:lstStyle/>
+          <a:p>
+            <a:pPr algn="ctr">
+              <a:lnSpc>
+                <a:spcPct val="110000"/>
+              </a:lnSpc>
+            </a:pPr>
+            <a:r>
+              <a:rPr sz="1000" b="1">
+                <a:solidFill>
+                  <a:srgbClr val="5A5A5A"/>
+                </a:solidFill>
+                <a:latin typeface="Poppins"/>
+              </a:rPr>
+              <a:t>AVANT · AUJOURD’HUI</a:t>
+            </a:r>
+          </a:p>
+        </p:txBody>
+      </p:sp>
       <p:pic>
         <p:nvPicPr>
-          <p:cNvPr id="9" name="Picture 8" descr="cmp_p_citerne.jpg"/>
+          <p:cNvPr id="11" name="Picture 10" descr="b_p_rack.jpg"/>
           <p:cNvPicPr>
             <a:picLocks noChangeAspect="1"/>
           </p:cNvPicPr>
@@ -9410,14 +11086,718 @@
         </p:blipFill>
         <p:spPr>
           <a:xfrm>
-            <a:off x="1199493" y="1422000"/>
-            <a:ext cx="9769014" cy="4896000"/>
+            <a:off x="627380" y="1872000"/>
+            <a:ext cx="3353239" cy="4464000"/>
           </a:xfrm>
           <a:prstGeom prst="rect">
             <a:avLst/>
           </a:prstGeom>
         </p:spPr>
       </p:pic>
+      <p:sp>
+        <p:nvSpPr>
+          <p:cNvPr id="12" name="Oval 11"/>
+          <p:cNvSpPr/>
+          <p:nvPr/>
+        </p:nvSpPr>
+        <p:spPr>
+          <a:xfrm>
+            <a:off x="4158000" y="3744000"/>
+            <a:ext cx="540000" cy="540000"/>
+          </a:xfrm>
+          <a:prstGeom prst="ellipse">
+            <a:avLst/>
+          </a:prstGeom>
+          <a:solidFill>
+            <a:srgbClr val="EE5B22"/>
+          </a:solidFill>
+          <a:ln>
+            <a:noFill/>
+          </a:ln>
+          <a:effectLst/>
+        </p:spPr>
+        <p:style>
+          <a:lnRef idx="1">
+            <a:schemeClr val="accent1"/>
+          </a:lnRef>
+          <a:fillRef idx="3">
+            <a:schemeClr val="accent1"/>
+          </a:fillRef>
+          <a:effectRef idx="2">
+            <a:schemeClr val="accent1"/>
+          </a:effectRef>
+          <a:fontRef idx="minor">
+            <a:schemeClr val="lt1"/>
+          </a:fontRef>
+        </p:style>
+        <p:txBody>
+          <a:bodyPr rtlCol="0" anchor="ctr"/>
+          <a:lstStyle/>
+          <a:p>
+            <a:pPr algn="ctr"/>
+          </a:p>
+        </p:txBody>
+      </p:sp>
+      <p:pic>
+        <p:nvPicPr>
+          <p:cNvPr id="13" name="Picture 12" descr="arrow-right_bl.png"/>
+          <p:cNvPicPr>
+            <a:picLocks noChangeAspect="1"/>
+          </p:cNvPicPr>
+          <p:nvPr/>
+        </p:nvPicPr>
+        <p:blipFill>
+          <a:blip r:embed="rId4"/>
+          <a:stretch>
+            <a:fillRect/>
+          </a:stretch>
+        </p:blipFill>
+        <p:spPr>
+          <a:xfrm>
+            <a:off x="4266000" y="3851999"/>
+            <a:ext cx="324000" cy="324000"/>
+          </a:xfrm>
+          <a:prstGeom prst="rect">
+            <a:avLst/>
+          </a:prstGeom>
+        </p:spPr>
+      </p:pic>
+      <p:sp>
+        <p:nvSpPr>
+          <p:cNvPr id="14" name="Rounded Rectangle 13"/>
+          <p:cNvSpPr/>
+          <p:nvPr/>
+        </p:nvSpPr>
+        <p:spPr>
+          <a:xfrm>
+            <a:off x="4824000" y="1512000"/>
+            <a:ext cx="3816000" cy="270000"/>
+          </a:xfrm>
+          <a:prstGeom prst="roundRect">
+            <a:avLst/>
+          </a:prstGeom>
+          <a:solidFill>
+            <a:srgbClr val="EE5B22"/>
+          </a:solidFill>
+          <a:ln>
+            <a:noFill/>
+          </a:ln>
+          <a:effectLst/>
+        </p:spPr>
+        <p:style>
+          <a:lnRef idx="1">
+            <a:schemeClr val="accent1"/>
+          </a:lnRef>
+          <a:fillRef idx="3">
+            <a:schemeClr val="accent1"/>
+          </a:fillRef>
+          <a:effectRef idx="2">
+            <a:schemeClr val="accent1"/>
+          </a:effectRef>
+          <a:fontRef idx="minor">
+            <a:schemeClr val="lt1"/>
+          </a:fontRef>
+        </p:style>
+        <p:txBody>
+          <a:bodyPr rtlCol="0" anchor="ctr"/>
+          <a:lstStyle/>
+          <a:p>
+            <a:pPr algn="ctr"/>
+          </a:p>
+        </p:txBody>
+      </p:sp>
+      <p:sp>
+        <p:nvSpPr>
+          <p:cNvPr id="15" name="TextBox 14"/>
+          <p:cNvSpPr txBox="1"/>
+          <p:nvPr/>
+        </p:nvSpPr>
+        <p:spPr>
+          <a:xfrm>
+            <a:off x="4824000" y="1512000"/>
+            <a:ext cx="3816000" cy="270000"/>
+          </a:xfrm>
+          <a:prstGeom prst="rect">
+            <a:avLst/>
+          </a:prstGeom>
+          <a:noFill/>
+        </p:spPr>
+        <p:txBody>
+          <a:bodyPr wrap="square" lIns="36000" rIns="36000" tIns="18000" bIns="18000" anchor="ctr">
+            <a:spAutoFit/>
+          </a:bodyPr>
+          <a:lstStyle/>
+          <a:p>
+            <a:pPr algn="ctr">
+              <a:lnSpc>
+                <a:spcPct val="110000"/>
+              </a:lnSpc>
+            </a:pPr>
+            <a:r>
+              <a:rPr sz="1000" b="1">
+                <a:solidFill>
+                  <a:srgbClr val="FFFFFF"/>
+                </a:solidFill>
+                <a:latin typeface="Poppins"/>
+              </a:rPr>
+              <a:t>APRÈS · PROPOSÉ</a:t>
+            </a:r>
+          </a:p>
+        </p:txBody>
+      </p:sp>
+      <p:pic>
+        <p:nvPicPr>
+          <p:cNvPr id="16" name="Picture 15" descr="w_p_citerne.jpg"/>
+          <p:cNvPicPr>
+            <a:picLocks noChangeAspect="1"/>
+          </p:cNvPicPr>
+          <p:nvPr/>
+        </p:nvPicPr>
+        <p:blipFill>
+          <a:blip r:embed="rId5"/>
+          <a:stretch>
+            <a:fillRect/>
+          </a:stretch>
+        </p:blipFill>
+        <p:spPr>
+          <a:xfrm>
+            <a:off x="4946400" y="1872000"/>
+            <a:ext cx="3571200" cy="4464000"/>
+          </a:xfrm>
+          <a:prstGeom prst="rect">
+            <a:avLst/>
+          </a:prstGeom>
+        </p:spPr>
+      </p:pic>
+      <p:sp>
+        <p:nvSpPr>
+          <p:cNvPr id="17" name="Rounded Rectangle 16"/>
+          <p:cNvSpPr/>
+          <p:nvPr/>
+        </p:nvSpPr>
+        <p:spPr>
+          <a:xfrm>
+            <a:off x="8820000" y="1512000"/>
+            <a:ext cx="2808000" cy="4824000"/>
+          </a:xfrm>
+          <a:prstGeom prst="roundRect">
+            <a:avLst>
+              <a:gd name="adj" fmla="val 6000"/>
+            </a:avLst>
+          </a:prstGeom>
+          <a:solidFill>
+            <a:srgbClr val="E3E7EC"/>
+          </a:solidFill>
+          <a:ln>
+            <a:noFill/>
+          </a:ln>
+          <a:effectLst/>
+        </p:spPr>
+        <p:style>
+          <a:lnRef idx="1">
+            <a:schemeClr val="accent1"/>
+          </a:lnRef>
+          <a:fillRef idx="3">
+            <a:schemeClr val="accent1"/>
+          </a:fillRef>
+          <a:effectRef idx="2">
+            <a:schemeClr val="accent1"/>
+          </a:effectRef>
+          <a:fontRef idx="minor">
+            <a:schemeClr val="lt1"/>
+          </a:fontRef>
+        </p:style>
+        <p:txBody>
+          <a:bodyPr rtlCol="0" anchor="ctr"/>
+          <a:lstStyle/>
+          <a:p>
+            <a:pPr algn="ctr"/>
+          </a:p>
+        </p:txBody>
+      </p:sp>
+      <p:sp>
+        <p:nvSpPr>
+          <p:cNvPr id="18" name="TextBox 17"/>
+          <p:cNvSpPr txBox="1"/>
+          <p:nvPr/>
+        </p:nvSpPr>
+        <p:spPr>
+          <a:xfrm>
+            <a:off x="9036000" y="1655999"/>
+            <a:ext cx="2448000" cy="324000"/>
+          </a:xfrm>
+          <a:prstGeom prst="rect">
+            <a:avLst/>
+          </a:prstGeom>
+          <a:noFill/>
+        </p:spPr>
+        <p:txBody>
+          <a:bodyPr wrap="square" lIns="36000" rIns="36000" tIns="18000" bIns="18000" anchor="t">
+            <a:spAutoFit/>
+          </a:bodyPr>
+          <a:lstStyle/>
+          <a:p>
+            <a:pPr algn="l">
+              <a:lnSpc>
+                <a:spcPct val="110000"/>
+              </a:lnSpc>
+            </a:pPr>
+            <a:r>
+              <a:rPr sz="1500" b="1">
+                <a:solidFill>
+                  <a:srgbClr val="EE5B22"/>
+                </a:solidFill>
+                <a:latin typeface="Poppins"/>
+              </a:rPr>
+              <a:t>Ce qui change</a:t>
+            </a:r>
+          </a:p>
+        </p:txBody>
+      </p:sp>
+      <p:sp>
+        <p:nvSpPr>
+          <p:cNvPr id="19" name="Oval 18"/>
+          <p:cNvSpPr/>
+          <p:nvPr/>
+        </p:nvSpPr>
+        <p:spPr>
+          <a:xfrm>
+            <a:off x="9036000" y="2088000"/>
+            <a:ext cx="342000" cy="342000"/>
+          </a:xfrm>
+          <a:prstGeom prst="ellipse">
+            <a:avLst/>
+          </a:prstGeom>
+          <a:solidFill>
+            <a:srgbClr val="EE5B22"/>
+          </a:solidFill>
+          <a:ln>
+            <a:noFill/>
+          </a:ln>
+          <a:effectLst/>
+        </p:spPr>
+        <p:style>
+          <a:lnRef idx="1">
+            <a:schemeClr val="accent1"/>
+          </a:lnRef>
+          <a:fillRef idx="3">
+            <a:schemeClr val="accent1"/>
+          </a:fillRef>
+          <a:effectRef idx="2">
+            <a:schemeClr val="accent1"/>
+          </a:effectRef>
+          <a:fontRef idx="minor">
+            <a:schemeClr val="lt1"/>
+          </a:fontRef>
+        </p:style>
+        <p:txBody>
+          <a:bodyPr rtlCol="0" anchor="ctr"/>
+          <a:lstStyle/>
+          <a:p>
+            <a:pPr algn="ctr"/>
+          </a:p>
+        </p:txBody>
+      </p:sp>
+      <p:pic>
+        <p:nvPicPr>
+          <p:cNvPr id="20" name="Picture 19" descr="check_bl.png"/>
+          <p:cNvPicPr>
+            <a:picLocks noChangeAspect="1"/>
+          </p:cNvPicPr>
+          <p:nvPr/>
+        </p:nvPicPr>
+        <p:blipFill>
+          <a:blip r:embed="rId6"/>
+          <a:stretch>
+            <a:fillRect/>
+          </a:stretch>
+        </p:blipFill>
+        <p:spPr>
+          <a:xfrm>
+            <a:off x="9097200" y="2149200"/>
+            <a:ext cx="216000" cy="216000"/>
+          </a:xfrm>
+          <a:prstGeom prst="rect">
+            <a:avLst/>
+          </a:prstGeom>
+        </p:spPr>
+      </p:pic>
+      <p:sp>
+        <p:nvSpPr>
+          <p:cNvPr id="21" name="TextBox 20"/>
+          <p:cNvSpPr txBox="1"/>
+          <p:nvPr/>
+        </p:nvSpPr>
+        <p:spPr>
+          <a:xfrm>
+            <a:off x="9468000" y="2052000"/>
+            <a:ext cx="2052000" cy="648000"/>
+          </a:xfrm>
+          <a:prstGeom prst="rect">
+            <a:avLst/>
+          </a:prstGeom>
+          <a:noFill/>
+        </p:spPr>
+        <p:txBody>
+          <a:bodyPr wrap="square" lIns="36000" rIns="36000" tIns="18000" bIns="18000" anchor="t">
+            <a:spAutoFit/>
+          </a:bodyPr>
+          <a:lstStyle/>
+          <a:p>
+            <a:pPr algn="l">
+              <a:lnSpc>
+                <a:spcPct val="110000"/>
+              </a:lnSpc>
+            </a:pPr>
+            <a:r>
+              <a:rPr sz="1100" b="1">
+                <a:solidFill>
+                  <a:srgbClr val="111111"/>
+                </a:solidFill>
+                <a:latin typeface="Poppins"/>
+              </a:rPr>
+              <a:t>Un métier rare, mis en avant</a:t>
+            </a:r>
+          </a:p>
+        </p:txBody>
+      </p:sp>
+      <p:sp>
+        <p:nvSpPr>
+          <p:cNvPr id="22" name="Oval 21"/>
+          <p:cNvSpPr/>
+          <p:nvPr/>
+        </p:nvSpPr>
+        <p:spPr>
+          <a:xfrm>
+            <a:off x="9036000" y="2790000"/>
+            <a:ext cx="342000" cy="342000"/>
+          </a:xfrm>
+          <a:prstGeom prst="ellipse">
+            <a:avLst/>
+          </a:prstGeom>
+          <a:solidFill>
+            <a:srgbClr val="EE5B22"/>
+          </a:solidFill>
+          <a:ln>
+            <a:noFill/>
+          </a:ln>
+          <a:effectLst/>
+        </p:spPr>
+        <p:style>
+          <a:lnRef idx="1">
+            <a:schemeClr val="accent1"/>
+          </a:lnRef>
+          <a:fillRef idx="3">
+            <a:schemeClr val="accent1"/>
+          </a:fillRef>
+          <a:effectRef idx="2">
+            <a:schemeClr val="accent1"/>
+          </a:effectRef>
+          <a:fontRef idx="minor">
+            <a:schemeClr val="lt1"/>
+          </a:fontRef>
+        </p:style>
+        <p:txBody>
+          <a:bodyPr rtlCol="0" anchor="ctr"/>
+          <a:lstStyle/>
+          <a:p>
+            <a:pPr algn="ctr"/>
+          </a:p>
+        </p:txBody>
+      </p:sp>
+      <p:pic>
+        <p:nvPicPr>
+          <p:cNvPr id="23" name="Picture 22" descr="check_bl.png"/>
+          <p:cNvPicPr>
+            <a:picLocks noChangeAspect="1"/>
+          </p:cNvPicPr>
+          <p:nvPr/>
+        </p:nvPicPr>
+        <p:blipFill>
+          <a:blip r:embed="rId6"/>
+          <a:stretch>
+            <a:fillRect/>
+          </a:stretch>
+        </p:blipFill>
+        <p:spPr>
+          <a:xfrm>
+            <a:off x="9097200" y="2851200"/>
+            <a:ext cx="216000" cy="216000"/>
+          </a:xfrm>
+          <a:prstGeom prst="rect">
+            <a:avLst/>
+          </a:prstGeom>
+        </p:spPr>
+      </p:pic>
+      <p:sp>
+        <p:nvSpPr>
+          <p:cNvPr id="24" name="TextBox 23"/>
+          <p:cNvSpPr txBox="1"/>
+          <p:nvPr/>
+        </p:nvSpPr>
+        <p:spPr>
+          <a:xfrm>
+            <a:off x="9468000" y="2754000"/>
+            <a:ext cx="2052000" cy="648000"/>
+          </a:xfrm>
+          <a:prstGeom prst="rect">
+            <a:avLst/>
+          </a:prstGeom>
+          <a:noFill/>
+        </p:spPr>
+        <p:txBody>
+          <a:bodyPr wrap="square" lIns="36000" rIns="36000" tIns="18000" bIns="18000" anchor="t">
+            <a:spAutoFit/>
+          </a:bodyPr>
+          <a:lstStyle/>
+          <a:p>
+            <a:pPr algn="l">
+              <a:lnSpc>
+                <a:spcPct val="110000"/>
+              </a:lnSpc>
+            </a:pPr>
+            <a:r>
+              <a:rPr sz="1100" b="1">
+                <a:solidFill>
+                  <a:srgbClr val="111111"/>
+                </a:solidFill>
+                <a:latin typeface="Poppins"/>
+              </a:rPr>
+              <a:t>Une vraie citerne, pas une image de banque</a:t>
+            </a:r>
+          </a:p>
+        </p:txBody>
+      </p:sp>
+      <p:sp>
+        <p:nvSpPr>
+          <p:cNvPr id="25" name="Oval 24"/>
+          <p:cNvSpPr/>
+          <p:nvPr/>
+        </p:nvSpPr>
+        <p:spPr>
+          <a:xfrm>
+            <a:off x="9036000" y="3492000"/>
+            <a:ext cx="342000" cy="342000"/>
+          </a:xfrm>
+          <a:prstGeom prst="ellipse">
+            <a:avLst/>
+          </a:prstGeom>
+          <a:solidFill>
+            <a:srgbClr val="EE5B22"/>
+          </a:solidFill>
+          <a:ln>
+            <a:noFill/>
+          </a:ln>
+          <a:effectLst/>
+        </p:spPr>
+        <p:style>
+          <a:lnRef idx="1">
+            <a:schemeClr val="accent1"/>
+          </a:lnRef>
+          <a:fillRef idx="3">
+            <a:schemeClr val="accent1"/>
+          </a:fillRef>
+          <a:effectRef idx="2">
+            <a:schemeClr val="accent1"/>
+          </a:effectRef>
+          <a:fontRef idx="minor">
+            <a:schemeClr val="lt1"/>
+          </a:fontRef>
+        </p:style>
+        <p:txBody>
+          <a:bodyPr rtlCol="0" anchor="ctr"/>
+          <a:lstStyle/>
+          <a:p>
+            <a:pPr algn="ctr"/>
+          </a:p>
+        </p:txBody>
+      </p:sp>
+      <p:pic>
+        <p:nvPicPr>
+          <p:cNvPr id="26" name="Picture 25" descr="check_bl.png"/>
+          <p:cNvPicPr>
+            <a:picLocks noChangeAspect="1"/>
+          </p:cNvPicPr>
+          <p:nvPr/>
+        </p:nvPicPr>
+        <p:blipFill>
+          <a:blip r:embed="rId6"/>
+          <a:stretch>
+            <a:fillRect/>
+          </a:stretch>
+        </p:blipFill>
+        <p:spPr>
+          <a:xfrm>
+            <a:off x="9097200" y="3553200"/>
+            <a:ext cx="216000" cy="216000"/>
+          </a:xfrm>
+          <a:prstGeom prst="rect">
+            <a:avLst/>
+          </a:prstGeom>
+        </p:spPr>
+      </p:pic>
+      <p:sp>
+        <p:nvSpPr>
+          <p:cNvPr id="27" name="TextBox 26"/>
+          <p:cNvSpPr txBox="1"/>
+          <p:nvPr/>
+        </p:nvSpPr>
+        <p:spPr>
+          <a:xfrm>
+            <a:off x="9468000" y="3456000"/>
+            <a:ext cx="2052000" cy="648000"/>
+          </a:xfrm>
+          <a:prstGeom prst="rect">
+            <a:avLst/>
+          </a:prstGeom>
+          <a:noFill/>
+        </p:spPr>
+        <p:txBody>
+          <a:bodyPr wrap="square" lIns="36000" rIns="36000" tIns="18000" bIns="18000" anchor="t">
+            <a:spAutoFit/>
+          </a:bodyPr>
+          <a:lstStyle/>
+          <a:p>
+            <a:pPr algn="l">
+              <a:lnSpc>
+                <a:spcPct val="110000"/>
+              </a:lnSpc>
+            </a:pPr>
+            <a:r>
+              <a:rPr sz="1100" b="1">
+                <a:solidFill>
+                  <a:srgbClr val="111111"/>
+                </a:solidFill>
+                <a:latin typeface="Poppins"/>
+              </a:rPr>
+              <a:t>La question qui touche le client</a:t>
+            </a:r>
+          </a:p>
+        </p:txBody>
+      </p:sp>
+      <p:sp>
+        <p:nvSpPr>
+          <p:cNvPr id="28" name="Rectangle 27"/>
+          <p:cNvSpPr/>
+          <p:nvPr/>
+        </p:nvSpPr>
+        <p:spPr>
+          <a:xfrm>
+            <a:off x="9036000" y="4248000"/>
+            <a:ext cx="2376000" cy="21600"/>
+          </a:xfrm>
+          <a:prstGeom prst="rect">
+            <a:avLst/>
+          </a:prstGeom>
+          <a:solidFill>
+            <a:srgbClr val="E2E2E2"/>
+          </a:solidFill>
+          <a:ln>
+            <a:noFill/>
+          </a:ln>
+          <a:effectLst/>
+        </p:spPr>
+        <p:style>
+          <a:lnRef idx="1">
+            <a:schemeClr val="accent1"/>
+          </a:lnRef>
+          <a:fillRef idx="3">
+            <a:schemeClr val="accent1"/>
+          </a:fillRef>
+          <a:effectRef idx="2">
+            <a:schemeClr val="accent1"/>
+          </a:effectRef>
+          <a:fontRef idx="minor">
+            <a:schemeClr val="lt1"/>
+          </a:fontRef>
+        </p:style>
+        <p:txBody>
+          <a:bodyPr rtlCol="0" anchor="ctr"/>
+          <a:lstStyle/>
+          <a:p>
+            <a:pPr algn="ctr"/>
+          </a:p>
+        </p:txBody>
+      </p:sp>
+      <p:sp>
+        <p:nvSpPr>
+          <p:cNvPr id="29" name="TextBox 28"/>
+          <p:cNvSpPr txBox="1"/>
+          <p:nvPr/>
+        </p:nvSpPr>
+        <p:spPr>
+          <a:xfrm>
+            <a:off x="9036000" y="4320000"/>
+            <a:ext cx="2376000" cy="251999"/>
+          </a:xfrm>
+          <a:prstGeom prst="rect">
+            <a:avLst/>
+          </a:prstGeom>
+          <a:noFill/>
+        </p:spPr>
+        <p:txBody>
+          <a:bodyPr wrap="square" lIns="36000" rIns="36000" tIns="18000" bIns="18000" anchor="t">
+            <a:spAutoFit/>
+          </a:bodyPr>
+          <a:lstStyle/>
+          <a:p>
+            <a:pPr algn="l">
+              <a:lnSpc>
+                <a:spcPct val="110000"/>
+              </a:lnSpc>
+            </a:pPr>
+            <a:r>
+              <a:rPr sz="900" b="1">
+                <a:solidFill>
+                  <a:srgbClr val="5A5A5A"/>
+                </a:solidFill>
+                <a:latin typeface="Poppins"/>
+              </a:rPr>
+              <a:t>LE TEXTE PROPOSÉ</a:t>
+            </a:r>
+          </a:p>
+        </p:txBody>
+      </p:sp>
+      <p:sp>
+        <p:nvSpPr>
+          <p:cNvPr id="30" name="TextBox 29"/>
+          <p:cNvSpPr txBox="1"/>
+          <p:nvPr/>
+        </p:nvSpPr>
+        <p:spPr>
+          <a:xfrm>
+            <a:off x="9036000" y="4536000"/>
+            <a:ext cx="2376000" cy="1764000"/>
+          </a:xfrm>
+          <a:prstGeom prst="rect">
+            <a:avLst/>
+          </a:prstGeom>
+          <a:noFill/>
+        </p:spPr>
+        <p:txBody>
+          <a:bodyPr wrap="square" lIns="36000" rIns="36000" tIns="18000" bIns="18000" anchor="t">
+            <a:spAutoFit/>
+          </a:bodyPr>
+          <a:lstStyle/>
+          <a:p>
+            <a:pPr algn="l">
+              <a:lnSpc>
+                <a:spcPct val="110000"/>
+              </a:lnSpc>
+            </a:pPr>
+            <a:r>
+              <a:rPr sz="950" b="0">
+                <a:solidFill>
+                  <a:srgbClr val="111111"/>
+                </a:solidFill>
+                <a:latin typeface="Poppins"/>
+              </a:rPr>
+              <a:t>Transport d’hydrocarbures : chaque citerne Proline est suivie au GPS, du départ à la livraison. ⛽
+ Savez-vous où est votre camion, là, maintenant ?</a:t>
+            </a:r>
+          </a:p>
+        </p:txBody>
+      </p:sp>
     </p:spTree>
   </p:cSld>
   <p:clrMapOvr>
@@ -9704,9 +12084,92 @@
           </a:p>
         </p:txBody>
       </p:sp>
+      <p:sp>
+        <p:nvSpPr>
+          <p:cNvPr id="9" name="Rounded Rectangle 8"/>
+          <p:cNvSpPr/>
+          <p:nvPr/>
+        </p:nvSpPr>
+        <p:spPr>
+          <a:xfrm>
+            <a:off x="576000" y="1512000"/>
+            <a:ext cx="3456000" cy="270000"/>
+          </a:xfrm>
+          <a:prstGeom prst="roundRect">
+            <a:avLst/>
+          </a:prstGeom>
+          <a:solidFill>
+            <a:srgbClr val="E2E2E2"/>
+          </a:solidFill>
+          <a:ln>
+            <a:noFill/>
+          </a:ln>
+          <a:effectLst/>
+        </p:spPr>
+        <p:style>
+          <a:lnRef idx="1">
+            <a:schemeClr val="accent1"/>
+          </a:lnRef>
+          <a:fillRef idx="3">
+            <a:schemeClr val="accent1"/>
+          </a:fillRef>
+          <a:effectRef idx="2">
+            <a:schemeClr val="accent1"/>
+          </a:effectRef>
+          <a:fontRef idx="minor">
+            <a:schemeClr val="lt1"/>
+          </a:fontRef>
+        </p:style>
+        <p:txBody>
+          <a:bodyPr rtlCol="0" anchor="ctr"/>
+          <a:lstStyle/>
+          <a:p>
+            <a:pPr algn="ctr"/>
+          </a:p>
+        </p:txBody>
+      </p:sp>
+      <p:sp>
+        <p:nvSpPr>
+          <p:cNvPr id="10" name="TextBox 9"/>
+          <p:cNvSpPr txBox="1"/>
+          <p:nvPr/>
+        </p:nvSpPr>
+        <p:spPr>
+          <a:xfrm>
+            <a:off x="576000" y="1512000"/>
+            <a:ext cx="3456000" cy="270000"/>
+          </a:xfrm>
+          <a:prstGeom prst="rect">
+            <a:avLst/>
+          </a:prstGeom>
+          <a:noFill/>
+        </p:spPr>
+        <p:txBody>
+          <a:bodyPr wrap="square" lIns="36000" rIns="36000" tIns="18000" bIns="18000" anchor="ctr">
+            <a:spAutoFit/>
+          </a:bodyPr>
+          <a:lstStyle/>
+          <a:p>
+            <a:pPr algn="ctr">
+              <a:lnSpc>
+                <a:spcPct val="110000"/>
+              </a:lnSpc>
+            </a:pPr>
+            <a:r>
+              <a:rPr sz="1000" b="1">
+                <a:solidFill>
+                  <a:srgbClr val="5A5A5A"/>
+                </a:solidFill>
+                <a:latin typeface="Poppins"/>
+              </a:rPr>
+              <a:t>AVANT · AUJOURD’HUI</a:t>
+            </a:r>
+          </a:p>
+        </p:txBody>
+      </p:sp>
       <p:pic>
         <p:nvPicPr>
-          <p:cNvPr id="9" name="Picture 8" descr="cmp_p_fifo.jpg"/>
+          <p:cNvPr id="11" name="Picture 10" descr="b_p_rack.jpg"/>
           <p:cNvPicPr>
             <a:picLocks noChangeAspect="1"/>
           </p:cNvPicPr>
@@ -9720,14 +12183,719 @@
         </p:blipFill>
         <p:spPr>
           <a:xfrm>
-            <a:off x="1306044" y="1422000"/>
-            <a:ext cx="9555912" cy="4896000"/>
+            <a:off x="627380" y="1872000"/>
+            <a:ext cx="3353239" cy="4464000"/>
           </a:xfrm>
           <a:prstGeom prst="rect">
             <a:avLst/>
           </a:prstGeom>
         </p:spPr>
       </p:pic>
+      <p:sp>
+        <p:nvSpPr>
+          <p:cNvPr id="12" name="Oval 11"/>
+          <p:cNvSpPr/>
+          <p:nvPr/>
+        </p:nvSpPr>
+        <p:spPr>
+          <a:xfrm>
+            <a:off x="4158000" y="3744000"/>
+            <a:ext cx="540000" cy="540000"/>
+          </a:xfrm>
+          <a:prstGeom prst="ellipse">
+            <a:avLst/>
+          </a:prstGeom>
+          <a:solidFill>
+            <a:srgbClr val="EE5B22"/>
+          </a:solidFill>
+          <a:ln>
+            <a:noFill/>
+          </a:ln>
+          <a:effectLst/>
+        </p:spPr>
+        <p:style>
+          <a:lnRef idx="1">
+            <a:schemeClr val="accent1"/>
+          </a:lnRef>
+          <a:fillRef idx="3">
+            <a:schemeClr val="accent1"/>
+          </a:fillRef>
+          <a:effectRef idx="2">
+            <a:schemeClr val="accent1"/>
+          </a:effectRef>
+          <a:fontRef idx="minor">
+            <a:schemeClr val="lt1"/>
+          </a:fontRef>
+        </p:style>
+        <p:txBody>
+          <a:bodyPr rtlCol="0" anchor="ctr"/>
+          <a:lstStyle/>
+          <a:p>
+            <a:pPr algn="ctr"/>
+          </a:p>
+        </p:txBody>
+      </p:sp>
+      <p:pic>
+        <p:nvPicPr>
+          <p:cNvPr id="13" name="Picture 12" descr="arrow-right_bl.png"/>
+          <p:cNvPicPr>
+            <a:picLocks noChangeAspect="1"/>
+          </p:cNvPicPr>
+          <p:nvPr/>
+        </p:nvPicPr>
+        <p:blipFill>
+          <a:blip r:embed="rId4"/>
+          <a:stretch>
+            <a:fillRect/>
+          </a:stretch>
+        </p:blipFill>
+        <p:spPr>
+          <a:xfrm>
+            <a:off x="4266000" y="3851999"/>
+            <a:ext cx="324000" cy="324000"/>
+          </a:xfrm>
+          <a:prstGeom prst="rect">
+            <a:avLst/>
+          </a:prstGeom>
+        </p:spPr>
+      </p:pic>
+      <p:sp>
+        <p:nvSpPr>
+          <p:cNvPr id="14" name="Rounded Rectangle 13"/>
+          <p:cNvSpPr/>
+          <p:nvPr/>
+        </p:nvSpPr>
+        <p:spPr>
+          <a:xfrm>
+            <a:off x="4824000" y="1512000"/>
+            <a:ext cx="3816000" cy="270000"/>
+          </a:xfrm>
+          <a:prstGeom prst="roundRect">
+            <a:avLst/>
+          </a:prstGeom>
+          <a:solidFill>
+            <a:srgbClr val="EE5B22"/>
+          </a:solidFill>
+          <a:ln>
+            <a:noFill/>
+          </a:ln>
+          <a:effectLst/>
+        </p:spPr>
+        <p:style>
+          <a:lnRef idx="1">
+            <a:schemeClr val="accent1"/>
+          </a:lnRef>
+          <a:fillRef idx="3">
+            <a:schemeClr val="accent1"/>
+          </a:fillRef>
+          <a:effectRef idx="2">
+            <a:schemeClr val="accent1"/>
+          </a:effectRef>
+          <a:fontRef idx="minor">
+            <a:schemeClr val="lt1"/>
+          </a:fontRef>
+        </p:style>
+        <p:txBody>
+          <a:bodyPr rtlCol="0" anchor="ctr"/>
+          <a:lstStyle/>
+          <a:p>
+            <a:pPr algn="ctr"/>
+          </a:p>
+        </p:txBody>
+      </p:sp>
+      <p:sp>
+        <p:nvSpPr>
+          <p:cNvPr id="15" name="TextBox 14"/>
+          <p:cNvSpPr txBox="1"/>
+          <p:nvPr/>
+        </p:nvSpPr>
+        <p:spPr>
+          <a:xfrm>
+            <a:off x="4824000" y="1512000"/>
+            <a:ext cx="3816000" cy="270000"/>
+          </a:xfrm>
+          <a:prstGeom prst="rect">
+            <a:avLst/>
+          </a:prstGeom>
+          <a:noFill/>
+        </p:spPr>
+        <p:txBody>
+          <a:bodyPr wrap="square" lIns="36000" rIns="36000" tIns="18000" bIns="18000" anchor="ctr">
+            <a:spAutoFit/>
+          </a:bodyPr>
+          <a:lstStyle/>
+          <a:p>
+            <a:pPr algn="ctr">
+              <a:lnSpc>
+                <a:spcPct val="110000"/>
+              </a:lnSpc>
+            </a:pPr>
+            <a:r>
+              <a:rPr sz="1000" b="1">
+                <a:solidFill>
+                  <a:srgbClr val="FFFFFF"/>
+                </a:solidFill>
+                <a:latin typeface="Poppins"/>
+              </a:rPr>
+              <a:t>APRÈS · PROPOSÉ</a:t>
+            </a:r>
+          </a:p>
+        </p:txBody>
+      </p:sp>
+      <p:pic>
+        <p:nvPicPr>
+          <p:cNvPr id="16" name="Picture 15" descr="w_p_fifo.jpg"/>
+          <p:cNvPicPr>
+            <a:picLocks noChangeAspect="1"/>
+          </p:cNvPicPr>
+          <p:nvPr/>
+        </p:nvPicPr>
+        <p:blipFill>
+          <a:blip r:embed="rId5"/>
+          <a:stretch>
+            <a:fillRect/>
+          </a:stretch>
+        </p:blipFill>
+        <p:spPr>
+          <a:xfrm>
+            <a:off x="4946400" y="1872000"/>
+            <a:ext cx="3571200" cy="4464000"/>
+          </a:xfrm>
+          <a:prstGeom prst="rect">
+            <a:avLst/>
+          </a:prstGeom>
+        </p:spPr>
+      </p:pic>
+      <p:sp>
+        <p:nvSpPr>
+          <p:cNvPr id="17" name="Rounded Rectangle 16"/>
+          <p:cNvSpPr/>
+          <p:nvPr/>
+        </p:nvSpPr>
+        <p:spPr>
+          <a:xfrm>
+            <a:off x="8820000" y="1512000"/>
+            <a:ext cx="2808000" cy="4824000"/>
+          </a:xfrm>
+          <a:prstGeom prst="roundRect">
+            <a:avLst>
+              <a:gd name="adj" fmla="val 6000"/>
+            </a:avLst>
+          </a:prstGeom>
+          <a:solidFill>
+            <a:srgbClr val="E3E7EC"/>
+          </a:solidFill>
+          <a:ln>
+            <a:noFill/>
+          </a:ln>
+          <a:effectLst/>
+        </p:spPr>
+        <p:style>
+          <a:lnRef idx="1">
+            <a:schemeClr val="accent1"/>
+          </a:lnRef>
+          <a:fillRef idx="3">
+            <a:schemeClr val="accent1"/>
+          </a:fillRef>
+          <a:effectRef idx="2">
+            <a:schemeClr val="accent1"/>
+          </a:effectRef>
+          <a:fontRef idx="minor">
+            <a:schemeClr val="lt1"/>
+          </a:fontRef>
+        </p:style>
+        <p:txBody>
+          <a:bodyPr rtlCol="0" anchor="ctr"/>
+          <a:lstStyle/>
+          <a:p>
+            <a:pPr algn="ctr"/>
+          </a:p>
+        </p:txBody>
+      </p:sp>
+      <p:sp>
+        <p:nvSpPr>
+          <p:cNvPr id="18" name="TextBox 17"/>
+          <p:cNvSpPr txBox="1"/>
+          <p:nvPr/>
+        </p:nvSpPr>
+        <p:spPr>
+          <a:xfrm>
+            <a:off x="9036000" y="1655999"/>
+            <a:ext cx="2448000" cy="324000"/>
+          </a:xfrm>
+          <a:prstGeom prst="rect">
+            <a:avLst/>
+          </a:prstGeom>
+          <a:noFill/>
+        </p:spPr>
+        <p:txBody>
+          <a:bodyPr wrap="square" lIns="36000" rIns="36000" tIns="18000" bIns="18000" anchor="t">
+            <a:spAutoFit/>
+          </a:bodyPr>
+          <a:lstStyle/>
+          <a:p>
+            <a:pPr algn="l">
+              <a:lnSpc>
+                <a:spcPct val="110000"/>
+              </a:lnSpc>
+            </a:pPr>
+            <a:r>
+              <a:rPr sz="1500" b="1">
+                <a:solidFill>
+                  <a:srgbClr val="EE5B22"/>
+                </a:solidFill>
+                <a:latin typeface="Poppins"/>
+              </a:rPr>
+              <a:t>Ce qui change</a:t>
+            </a:r>
+          </a:p>
+        </p:txBody>
+      </p:sp>
+      <p:sp>
+        <p:nvSpPr>
+          <p:cNvPr id="19" name="Oval 18"/>
+          <p:cNvSpPr/>
+          <p:nvPr/>
+        </p:nvSpPr>
+        <p:spPr>
+          <a:xfrm>
+            <a:off x="9036000" y="2088000"/>
+            <a:ext cx="342000" cy="342000"/>
+          </a:xfrm>
+          <a:prstGeom prst="ellipse">
+            <a:avLst/>
+          </a:prstGeom>
+          <a:solidFill>
+            <a:srgbClr val="EE5B22"/>
+          </a:solidFill>
+          <a:ln>
+            <a:noFill/>
+          </a:ln>
+          <a:effectLst/>
+        </p:spPr>
+        <p:style>
+          <a:lnRef idx="1">
+            <a:schemeClr val="accent1"/>
+          </a:lnRef>
+          <a:fillRef idx="3">
+            <a:schemeClr val="accent1"/>
+          </a:fillRef>
+          <a:effectRef idx="2">
+            <a:schemeClr val="accent1"/>
+          </a:effectRef>
+          <a:fontRef idx="minor">
+            <a:schemeClr val="lt1"/>
+          </a:fontRef>
+        </p:style>
+        <p:txBody>
+          <a:bodyPr rtlCol="0" anchor="ctr"/>
+          <a:lstStyle/>
+          <a:p>
+            <a:pPr algn="ctr"/>
+          </a:p>
+        </p:txBody>
+      </p:sp>
+      <p:pic>
+        <p:nvPicPr>
+          <p:cNvPr id="20" name="Picture 19" descr="check_bl.png"/>
+          <p:cNvPicPr>
+            <a:picLocks noChangeAspect="1"/>
+          </p:cNvPicPr>
+          <p:nvPr/>
+        </p:nvPicPr>
+        <p:blipFill>
+          <a:blip r:embed="rId6"/>
+          <a:stretch>
+            <a:fillRect/>
+          </a:stretch>
+        </p:blipFill>
+        <p:spPr>
+          <a:xfrm>
+            <a:off x="9097200" y="2149200"/>
+            <a:ext cx="216000" cy="216000"/>
+          </a:xfrm>
+          <a:prstGeom prst="rect">
+            <a:avLst/>
+          </a:prstGeom>
+        </p:spPr>
+      </p:pic>
+      <p:sp>
+        <p:nvSpPr>
+          <p:cNvPr id="21" name="TextBox 20"/>
+          <p:cNvSpPr txBox="1"/>
+          <p:nvPr/>
+        </p:nvSpPr>
+        <p:spPr>
+          <a:xfrm>
+            <a:off x="9468000" y="2052000"/>
+            <a:ext cx="2052000" cy="648000"/>
+          </a:xfrm>
+          <a:prstGeom prst="rect">
+            <a:avLst/>
+          </a:prstGeom>
+          <a:noFill/>
+        </p:spPr>
+        <p:txBody>
+          <a:bodyPr wrap="square" lIns="36000" rIns="36000" tIns="18000" bIns="18000" anchor="t">
+            <a:spAutoFit/>
+          </a:bodyPr>
+          <a:lstStyle/>
+          <a:p>
+            <a:pPr algn="l">
+              <a:lnSpc>
+                <a:spcPct val="110000"/>
+              </a:lnSpc>
+            </a:pPr>
+            <a:r>
+              <a:rPr sz="1100" b="1">
+                <a:solidFill>
+                  <a:srgbClr val="111111"/>
+                </a:solidFill>
+                <a:latin typeface="Poppins"/>
+              </a:rPr>
+              <a:t>Un mot de métier expliqué simplement</a:t>
+            </a:r>
+          </a:p>
+        </p:txBody>
+      </p:sp>
+      <p:sp>
+        <p:nvSpPr>
+          <p:cNvPr id="22" name="Oval 21"/>
+          <p:cNvSpPr/>
+          <p:nvPr/>
+        </p:nvSpPr>
+        <p:spPr>
+          <a:xfrm>
+            <a:off x="9036000" y="2790000"/>
+            <a:ext cx="342000" cy="342000"/>
+          </a:xfrm>
+          <a:prstGeom prst="ellipse">
+            <a:avLst/>
+          </a:prstGeom>
+          <a:solidFill>
+            <a:srgbClr val="EE5B22"/>
+          </a:solidFill>
+          <a:ln>
+            <a:noFill/>
+          </a:ln>
+          <a:effectLst/>
+        </p:spPr>
+        <p:style>
+          <a:lnRef idx="1">
+            <a:schemeClr val="accent1"/>
+          </a:lnRef>
+          <a:fillRef idx="3">
+            <a:schemeClr val="accent1"/>
+          </a:fillRef>
+          <a:effectRef idx="2">
+            <a:schemeClr val="accent1"/>
+          </a:effectRef>
+          <a:fontRef idx="minor">
+            <a:schemeClr val="lt1"/>
+          </a:fontRef>
+        </p:style>
+        <p:txBody>
+          <a:bodyPr rtlCol="0" anchor="ctr"/>
+          <a:lstStyle/>
+          <a:p>
+            <a:pPr algn="ctr"/>
+          </a:p>
+        </p:txBody>
+      </p:sp>
+      <p:pic>
+        <p:nvPicPr>
+          <p:cNvPr id="23" name="Picture 22" descr="check_bl.png"/>
+          <p:cNvPicPr>
+            <a:picLocks noChangeAspect="1"/>
+          </p:cNvPicPr>
+          <p:nvPr/>
+        </p:nvPicPr>
+        <p:blipFill>
+          <a:blip r:embed="rId6"/>
+          <a:stretch>
+            <a:fillRect/>
+          </a:stretch>
+        </p:blipFill>
+        <p:spPr>
+          <a:xfrm>
+            <a:off x="9097200" y="2851200"/>
+            <a:ext cx="216000" cy="216000"/>
+          </a:xfrm>
+          <a:prstGeom prst="rect">
+            <a:avLst/>
+          </a:prstGeom>
+        </p:spPr>
+      </p:pic>
+      <p:sp>
+        <p:nvSpPr>
+          <p:cNvPr id="24" name="TextBox 23"/>
+          <p:cNvSpPr txBox="1"/>
+          <p:nvPr/>
+        </p:nvSpPr>
+        <p:spPr>
+          <a:xfrm>
+            <a:off x="9468000" y="2754000"/>
+            <a:ext cx="2052000" cy="648000"/>
+          </a:xfrm>
+          <a:prstGeom prst="rect">
+            <a:avLst/>
+          </a:prstGeom>
+          <a:noFill/>
+        </p:spPr>
+        <p:txBody>
+          <a:bodyPr wrap="square" lIns="36000" rIns="36000" tIns="18000" bIns="18000" anchor="t">
+            <a:spAutoFit/>
+          </a:bodyPr>
+          <a:lstStyle/>
+          <a:p>
+            <a:pPr algn="l">
+              <a:lnSpc>
+                <a:spcPct val="110000"/>
+              </a:lnSpc>
+            </a:pPr>
+            <a:r>
+              <a:rPr sz="1100" b="1">
+                <a:solidFill>
+                  <a:srgbClr val="111111"/>
+                </a:solidFill>
+                <a:latin typeface="Poppins"/>
+              </a:rPr>
+              <a:t>L’entrepôt en vrai</a:t>
+            </a:r>
+          </a:p>
+        </p:txBody>
+      </p:sp>
+      <p:sp>
+        <p:nvSpPr>
+          <p:cNvPr id="25" name="Oval 24"/>
+          <p:cNvSpPr/>
+          <p:nvPr/>
+        </p:nvSpPr>
+        <p:spPr>
+          <a:xfrm>
+            <a:off x="9036000" y="3492000"/>
+            <a:ext cx="342000" cy="342000"/>
+          </a:xfrm>
+          <a:prstGeom prst="ellipse">
+            <a:avLst/>
+          </a:prstGeom>
+          <a:solidFill>
+            <a:srgbClr val="EE5B22"/>
+          </a:solidFill>
+          <a:ln>
+            <a:noFill/>
+          </a:ln>
+          <a:effectLst/>
+        </p:spPr>
+        <p:style>
+          <a:lnRef idx="1">
+            <a:schemeClr val="accent1"/>
+          </a:lnRef>
+          <a:fillRef idx="3">
+            <a:schemeClr val="accent1"/>
+          </a:fillRef>
+          <a:effectRef idx="2">
+            <a:schemeClr val="accent1"/>
+          </a:effectRef>
+          <a:fontRef idx="minor">
+            <a:schemeClr val="lt1"/>
+          </a:fontRef>
+        </p:style>
+        <p:txBody>
+          <a:bodyPr rtlCol="0" anchor="ctr"/>
+          <a:lstStyle/>
+          <a:p>
+            <a:pPr algn="ctr"/>
+          </a:p>
+        </p:txBody>
+      </p:sp>
+      <p:pic>
+        <p:nvPicPr>
+          <p:cNvPr id="26" name="Picture 25" descr="check_bl.png"/>
+          <p:cNvPicPr>
+            <a:picLocks noChangeAspect="1"/>
+          </p:cNvPicPr>
+          <p:nvPr/>
+        </p:nvPicPr>
+        <p:blipFill>
+          <a:blip r:embed="rId6"/>
+          <a:stretch>
+            <a:fillRect/>
+          </a:stretch>
+        </p:blipFill>
+        <p:spPr>
+          <a:xfrm>
+            <a:off x="9097200" y="3553200"/>
+            <a:ext cx="216000" cy="216000"/>
+          </a:xfrm>
+          <a:prstGeom prst="rect">
+            <a:avLst/>
+          </a:prstGeom>
+        </p:spPr>
+      </p:pic>
+      <p:sp>
+        <p:nvSpPr>
+          <p:cNvPr id="27" name="TextBox 26"/>
+          <p:cNvSpPr txBox="1"/>
+          <p:nvPr/>
+        </p:nvSpPr>
+        <p:spPr>
+          <a:xfrm>
+            <a:off x="9468000" y="3456000"/>
+            <a:ext cx="2052000" cy="648000"/>
+          </a:xfrm>
+          <a:prstGeom prst="rect">
+            <a:avLst/>
+          </a:prstGeom>
+          <a:noFill/>
+        </p:spPr>
+        <p:txBody>
+          <a:bodyPr wrap="square" lIns="36000" rIns="36000" tIns="18000" bIns="18000" anchor="t">
+            <a:spAutoFit/>
+          </a:bodyPr>
+          <a:lstStyle/>
+          <a:p>
+            <a:pPr algn="l">
+              <a:lnSpc>
+                <a:spcPct val="110000"/>
+              </a:lnSpc>
+            </a:pPr>
+            <a:r>
+              <a:rPr sz="1100" b="1">
+                <a:solidFill>
+                  <a:srgbClr val="111111"/>
+                </a:solidFill>
+                <a:latin typeface="Poppins"/>
+              </a:rPr>
+              <a:t>Une question qui ouvre la discussion</a:t>
+            </a:r>
+          </a:p>
+        </p:txBody>
+      </p:sp>
+      <p:sp>
+        <p:nvSpPr>
+          <p:cNvPr id="28" name="Rectangle 27"/>
+          <p:cNvSpPr/>
+          <p:nvPr/>
+        </p:nvSpPr>
+        <p:spPr>
+          <a:xfrm>
+            <a:off x="9036000" y="4248000"/>
+            <a:ext cx="2376000" cy="21600"/>
+          </a:xfrm>
+          <a:prstGeom prst="rect">
+            <a:avLst/>
+          </a:prstGeom>
+          <a:solidFill>
+            <a:srgbClr val="E2E2E2"/>
+          </a:solidFill>
+          <a:ln>
+            <a:noFill/>
+          </a:ln>
+          <a:effectLst/>
+        </p:spPr>
+        <p:style>
+          <a:lnRef idx="1">
+            <a:schemeClr val="accent1"/>
+          </a:lnRef>
+          <a:fillRef idx="3">
+            <a:schemeClr val="accent1"/>
+          </a:fillRef>
+          <a:effectRef idx="2">
+            <a:schemeClr val="accent1"/>
+          </a:effectRef>
+          <a:fontRef idx="minor">
+            <a:schemeClr val="lt1"/>
+          </a:fontRef>
+        </p:style>
+        <p:txBody>
+          <a:bodyPr rtlCol="0" anchor="ctr"/>
+          <a:lstStyle/>
+          <a:p>
+            <a:pPr algn="ctr"/>
+          </a:p>
+        </p:txBody>
+      </p:sp>
+      <p:sp>
+        <p:nvSpPr>
+          <p:cNvPr id="29" name="TextBox 28"/>
+          <p:cNvSpPr txBox="1"/>
+          <p:nvPr/>
+        </p:nvSpPr>
+        <p:spPr>
+          <a:xfrm>
+            <a:off x="9036000" y="4320000"/>
+            <a:ext cx="2376000" cy="251999"/>
+          </a:xfrm>
+          <a:prstGeom prst="rect">
+            <a:avLst/>
+          </a:prstGeom>
+          <a:noFill/>
+        </p:spPr>
+        <p:txBody>
+          <a:bodyPr wrap="square" lIns="36000" rIns="36000" tIns="18000" bIns="18000" anchor="t">
+            <a:spAutoFit/>
+          </a:bodyPr>
+          <a:lstStyle/>
+          <a:p>
+            <a:pPr algn="l">
+              <a:lnSpc>
+                <a:spcPct val="110000"/>
+              </a:lnSpc>
+            </a:pPr>
+            <a:r>
+              <a:rPr sz="900" b="1">
+                <a:solidFill>
+                  <a:srgbClr val="5A5A5A"/>
+                </a:solidFill>
+                <a:latin typeface="Poppins"/>
+              </a:rPr>
+              <a:t>LE TEXTE PROPOSÉ</a:t>
+            </a:r>
+          </a:p>
+        </p:txBody>
+      </p:sp>
+      <p:sp>
+        <p:nvSpPr>
+          <p:cNvPr id="30" name="TextBox 29"/>
+          <p:cNvSpPr txBox="1"/>
+          <p:nvPr/>
+        </p:nvSpPr>
+        <p:spPr>
+          <a:xfrm>
+            <a:off x="9036000" y="4536000"/>
+            <a:ext cx="2376000" cy="1764000"/>
+          </a:xfrm>
+          <a:prstGeom prst="rect">
+            <a:avLst/>
+          </a:prstGeom>
+          <a:noFill/>
+        </p:spPr>
+        <p:txBody>
+          <a:bodyPr wrap="square" lIns="36000" rIns="36000" tIns="18000" bIns="18000" anchor="t">
+            <a:spAutoFit/>
+          </a:bodyPr>
+          <a:lstStyle/>
+          <a:p>
+            <a:pPr algn="l">
+              <a:lnSpc>
+                <a:spcPct val="110000"/>
+              </a:lnSpc>
+            </a:pPr>
+            <a:r>
+              <a:rPr sz="950" b="0">
+                <a:solidFill>
+                  <a:srgbClr val="111111"/>
+                </a:solidFill>
+                <a:latin typeface="Poppins"/>
+              </a:rPr>
+              <a:t>Premier entré, premier sorti. Ou premier périmé, premier sorti. 📋
+Contrôle qualité, préparation de commandes, inventaire : le bon carton part au bon moment.
+ FIFO ou FEFO chez vous ?</a:t>
+            </a:r>
+          </a:p>
+        </p:txBody>
+      </p:sp>
     </p:spTree>
   </p:cSld>
   <p:clrMapOvr>
@@ -10014,9 +13182,92 @@
           </a:p>
         </p:txBody>
       </p:sp>
+      <p:sp>
+        <p:nvSpPr>
+          <p:cNvPr id="9" name="Rounded Rectangle 8"/>
+          <p:cNvSpPr/>
+          <p:nvPr/>
+        </p:nvSpPr>
+        <p:spPr>
+          <a:xfrm>
+            <a:off x="576000" y="1512000"/>
+            <a:ext cx="3456000" cy="270000"/>
+          </a:xfrm>
+          <a:prstGeom prst="roundRect">
+            <a:avLst/>
+          </a:prstGeom>
+          <a:solidFill>
+            <a:srgbClr val="E2E2E2"/>
+          </a:solidFill>
+          <a:ln>
+            <a:noFill/>
+          </a:ln>
+          <a:effectLst/>
+        </p:spPr>
+        <p:style>
+          <a:lnRef idx="1">
+            <a:schemeClr val="accent1"/>
+          </a:lnRef>
+          <a:fillRef idx="3">
+            <a:schemeClr val="accent1"/>
+          </a:fillRef>
+          <a:effectRef idx="2">
+            <a:schemeClr val="accent1"/>
+          </a:effectRef>
+          <a:fontRef idx="minor">
+            <a:schemeClr val="lt1"/>
+          </a:fontRef>
+        </p:style>
+        <p:txBody>
+          <a:bodyPr rtlCol="0" anchor="ctr"/>
+          <a:lstStyle/>
+          <a:p>
+            <a:pPr algn="ctr"/>
+          </a:p>
+        </p:txBody>
+      </p:sp>
+      <p:sp>
+        <p:nvSpPr>
+          <p:cNvPr id="10" name="TextBox 9"/>
+          <p:cNvSpPr txBox="1"/>
+          <p:nvPr/>
+        </p:nvSpPr>
+        <p:spPr>
+          <a:xfrm>
+            <a:off x="576000" y="1512000"/>
+            <a:ext cx="3456000" cy="270000"/>
+          </a:xfrm>
+          <a:prstGeom prst="rect">
+            <a:avLst/>
+          </a:prstGeom>
+          <a:noFill/>
+        </p:spPr>
+        <p:txBody>
+          <a:bodyPr wrap="square" lIns="36000" rIns="36000" tIns="18000" bIns="18000" anchor="ctr">
+            <a:spAutoFit/>
+          </a:bodyPr>
+          <a:lstStyle/>
+          <a:p>
+            <a:pPr algn="ctr">
+              <a:lnSpc>
+                <a:spcPct val="110000"/>
+              </a:lnSpc>
+            </a:pPr>
+            <a:r>
+              <a:rPr sz="1000" b="1">
+                <a:solidFill>
+                  <a:srgbClr val="5A5A5A"/>
+                </a:solidFill>
+                <a:latin typeface="Poppins"/>
+              </a:rPr>
+              <a:t>AVANT · AUJOURD’HUI</a:t>
+            </a:r>
+          </a:p>
+        </p:txBody>
+      </p:sp>
       <p:pic>
         <p:nvPicPr>
-          <p:cNvPr id="9" name="Picture 8" descr="cmp_p_stock.jpg"/>
+          <p:cNvPr id="11" name="Picture 10" descr="b_p_rack.jpg"/>
           <p:cNvPicPr>
             <a:picLocks noChangeAspect="1"/>
           </p:cNvPicPr>
@@ -10030,14 +13281,719 @@
         </p:blipFill>
         <p:spPr>
           <a:xfrm>
-            <a:off x="1306044" y="1422000"/>
-            <a:ext cx="9555912" cy="4896000"/>
+            <a:off x="627380" y="1872000"/>
+            <a:ext cx="3353239" cy="4464000"/>
           </a:xfrm>
           <a:prstGeom prst="rect">
             <a:avLst/>
           </a:prstGeom>
         </p:spPr>
       </p:pic>
+      <p:sp>
+        <p:nvSpPr>
+          <p:cNvPr id="12" name="Oval 11"/>
+          <p:cNvSpPr/>
+          <p:nvPr/>
+        </p:nvSpPr>
+        <p:spPr>
+          <a:xfrm>
+            <a:off x="4158000" y="3744000"/>
+            <a:ext cx="540000" cy="540000"/>
+          </a:xfrm>
+          <a:prstGeom prst="ellipse">
+            <a:avLst/>
+          </a:prstGeom>
+          <a:solidFill>
+            <a:srgbClr val="EE5B22"/>
+          </a:solidFill>
+          <a:ln>
+            <a:noFill/>
+          </a:ln>
+          <a:effectLst/>
+        </p:spPr>
+        <p:style>
+          <a:lnRef idx="1">
+            <a:schemeClr val="accent1"/>
+          </a:lnRef>
+          <a:fillRef idx="3">
+            <a:schemeClr val="accent1"/>
+          </a:fillRef>
+          <a:effectRef idx="2">
+            <a:schemeClr val="accent1"/>
+          </a:effectRef>
+          <a:fontRef idx="minor">
+            <a:schemeClr val="lt1"/>
+          </a:fontRef>
+        </p:style>
+        <p:txBody>
+          <a:bodyPr rtlCol="0" anchor="ctr"/>
+          <a:lstStyle/>
+          <a:p>
+            <a:pPr algn="ctr"/>
+          </a:p>
+        </p:txBody>
+      </p:sp>
+      <p:pic>
+        <p:nvPicPr>
+          <p:cNvPr id="13" name="Picture 12" descr="arrow-right_bl.png"/>
+          <p:cNvPicPr>
+            <a:picLocks noChangeAspect="1"/>
+          </p:cNvPicPr>
+          <p:nvPr/>
+        </p:nvPicPr>
+        <p:blipFill>
+          <a:blip r:embed="rId4"/>
+          <a:stretch>
+            <a:fillRect/>
+          </a:stretch>
+        </p:blipFill>
+        <p:spPr>
+          <a:xfrm>
+            <a:off x="4266000" y="3851999"/>
+            <a:ext cx="324000" cy="324000"/>
+          </a:xfrm>
+          <a:prstGeom prst="rect">
+            <a:avLst/>
+          </a:prstGeom>
+        </p:spPr>
+      </p:pic>
+      <p:sp>
+        <p:nvSpPr>
+          <p:cNvPr id="14" name="Rounded Rectangle 13"/>
+          <p:cNvSpPr/>
+          <p:nvPr/>
+        </p:nvSpPr>
+        <p:spPr>
+          <a:xfrm>
+            <a:off x="4824000" y="1512000"/>
+            <a:ext cx="3816000" cy="270000"/>
+          </a:xfrm>
+          <a:prstGeom prst="roundRect">
+            <a:avLst/>
+          </a:prstGeom>
+          <a:solidFill>
+            <a:srgbClr val="EE5B22"/>
+          </a:solidFill>
+          <a:ln>
+            <a:noFill/>
+          </a:ln>
+          <a:effectLst/>
+        </p:spPr>
+        <p:style>
+          <a:lnRef idx="1">
+            <a:schemeClr val="accent1"/>
+          </a:lnRef>
+          <a:fillRef idx="3">
+            <a:schemeClr val="accent1"/>
+          </a:fillRef>
+          <a:effectRef idx="2">
+            <a:schemeClr val="accent1"/>
+          </a:effectRef>
+          <a:fontRef idx="minor">
+            <a:schemeClr val="lt1"/>
+          </a:fontRef>
+        </p:style>
+        <p:txBody>
+          <a:bodyPr rtlCol="0" anchor="ctr"/>
+          <a:lstStyle/>
+          <a:p>
+            <a:pPr algn="ctr"/>
+          </a:p>
+        </p:txBody>
+      </p:sp>
+      <p:sp>
+        <p:nvSpPr>
+          <p:cNvPr id="15" name="TextBox 14"/>
+          <p:cNvSpPr txBox="1"/>
+          <p:nvPr/>
+        </p:nvSpPr>
+        <p:spPr>
+          <a:xfrm>
+            <a:off x="4824000" y="1512000"/>
+            <a:ext cx="3816000" cy="270000"/>
+          </a:xfrm>
+          <a:prstGeom prst="rect">
+            <a:avLst/>
+          </a:prstGeom>
+          <a:noFill/>
+        </p:spPr>
+        <p:txBody>
+          <a:bodyPr wrap="square" lIns="36000" rIns="36000" tIns="18000" bIns="18000" anchor="ctr">
+            <a:spAutoFit/>
+          </a:bodyPr>
+          <a:lstStyle/>
+          <a:p>
+            <a:pPr algn="ctr">
+              <a:lnSpc>
+                <a:spcPct val="110000"/>
+              </a:lnSpc>
+            </a:pPr>
+            <a:r>
+              <a:rPr sz="1000" b="1">
+                <a:solidFill>
+                  <a:srgbClr val="FFFFFF"/>
+                </a:solidFill>
+                <a:latin typeface="Poppins"/>
+              </a:rPr>
+              <a:t>APRÈS · PROPOSÉ</a:t>
+            </a:r>
+          </a:p>
+        </p:txBody>
+      </p:sp>
+      <p:pic>
+        <p:nvPicPr>
+          <p:cNvPr id="16" name="Picture 15" descr="w_p_stock.jpg"/>
+          <p:cNvPicPr>
+            <a:picLocks noChangeAspect="1"/>
+          </p:cNvPicPr>
+          <p:nvPr/>
+        </p:nvPicPr>
+        <p:blipFill>
+          <a:blip r:embed="rId5"/>
+          <a:stretch>
+            <a:fillRect/>
+          </a:stretch>
+        </p:blipFill>
+        <p:spPr>
+          <a:xfrm>
+            <a:off x="4946400" y="1872000"/>
+            <a:ext cx="3571200" cy="4464000"/>
+          </a:xfrm>
+          <a:prstGeom prst="rect">
+            <a:avLst/>
+          </a:prstGeom>
+        </p:spPr>
+      </p:pic>
+      <p:sp>
+        <p:nvSpPr>
+          <p:cNvPr id="17" name="Rounded Rectangle 16"/>
+          <p:cNvSpPr/>
+          <p:nvPr/>
+        </p:nvSpPr>
+        <p:spPr>
+          <a:xfrm>
+            <a:off x="8820000" y="1512000"/>
+            <a:ext cx="2808000" cy="4824000"/>
+          </a:xfrm>
+          <a:prstGeom prst="roundRect">
+            <a:avLst>
+              <a:gd name="adj" fmla="val 6000"/>
+            </a:avLst>
+          </a:prstGeom>
+          <a:solidFill>
+            <a:srgbClr val="E3E7EC"/>
+          </a:solidFill>
+          <a:ln>
+            <a:noFill/>
+          </a:ln>
+          <a:effectLst/>
+        </p:spPr>
+        <p:style>
+          <a:lnRef idx="1">
+            <a:schemeClr val="accent1"/>
+          </a:lnRef>
+          <a:fillRef idx="3">
+            <a:schemeClr val="accent1"/>
+          </a:fillRef>
+          <a:effectRef idx="2">
+            <a:schemeClr val="accent1"/>
+          </a:effectRef>
+          <a:fontRef idx="minor">
+            <a:schemeClr val="lt1"/>
+          </a:fontRef>
+        </p:style>
+        <p:txBody>
+          <a:bodyPr rtlCol="0" anchor="ctr"/>
+          <a:lstStyle/>
+          <a:p>
+            <a:pPr algn="ctr"/>
+          </a:p>
+        </p:txBody>
+      </p:sp>
+      <p:sp>
+        <p:nvSpPr>
+          <p:cNvPr id="18" name="TextBox 17"/>
+          <p:cNvSpPr txBox="1"/>
+          <p:nvPr/>
+        </p:nvSpPr>
+        <p:spPr>
+          <a:xfrm>
+            <a:off x="9036000" y="1655999"/>
+            <a:ext cx="2448000" cy="324000"/>
+          </a:xfrm>
+          <a:prstGeom prst="rect">
+            <a:avLst/>
+          </a:prstGeom>
+          <a:noFill/>
+        </p:spPr>
+        <p:txBody>
+          <a:bodyPr wrap="square" lIns="36000" rIns="36000" tIns="18000" bIns="18000" anchor="t">
+            <a:spAutoFit/>
+          </a:bodyPr>
+          <a:lstStyle/>
+          <a:p>
+            <a:pPr algn="l">
+              <a:lnSpc>
+                <a:spcPct val="110000"/>
+              </a:lnSpc>
+            </a:pPr>
+            <a:r>
+              <a:rPr sz="1500" b="1">
+                <a:solidFill>
+                  <a:srgbClr val="EE5B22"/>
+                </a:solidFill>
+                <a:latin typeface="Poppins"/>
+              </a:rPr>
+              <a:t>Ce qui change</a:t>
+            </a:r>
+          </a:p>
+        </p:txBody>
+      </p:sp>
+      <p:sp>
+        <p:nvSpPr>
+          <p:cNvPr id="19" name="Oval 18"/>
+          <p:cNvSpPr/>
+          <p:nvPr/>
+        </p:nvSpPr>
+        <p:spPr>
+          <a:xfrm>
+            <a:off x="9036000" y="2088000"/>
+            <a:ext cx="342000" cy="342000"/>
+          </a:xfrm>
+          <a:prstGeom prst="ellipse">
+            <a:avLst/>
+          </a:prstGeom>
+          <a:solidFill>
+            <a:srgbClr val="EE5B22"/>
+          </a:solidFill>
+          <a:ln>
+            <a:noFill/>
+          </a:ln>
+          <a:effectLst/>
+        </p:spPr>
+        <p:style>
+          <a:lnRef idx="1">
+            <a:schemeClr val="accent1"/>
+          </a:lnRef>
+          <a:fillRef idx="3">
+            <a:schemeClr val="accent1"/>
+          </a:fillRef>
+          <a:effectRef idx="2">
+            <a:schemeClr val="accent1"/>
+          </a:effectRef>
+          <a:fontRef idx="minor">
+            <a:schemeClr val="lt1"/>
+          </a:fontRef>
+        </p:style>
+        <p:txBody>
+          <a:bodyPr rtlCol="0" anchor="ctr"/>
+          <a:lstStyle/>
+          <a:p>
+            <a:pPr algn="ctr"/>
+          </a:p>
+        </p:txBody>
+      </p:sp>
+      <p:pic>
+        <p:nvPicPr>
+          <p:cNvPr id="20" name="Picture 19" descr="check_bl.png"/>
+          <p:cNvPicPr>
+            <a:picLocks noChangeAspect="1"/>
+          </p:cNvPicPr>
+          <p:nvPr/>
+        </p:nvPicPr>
+        <p:blipFill>
+          <a:blip r:embed="rId6"/>
+          <a:stretch>
+            <a:fillRect/>
+          </a:stretch>
+        </p:blipFill>
+        <p:spPr>
+          <a:xfrm>
+            <a:off x="9097200" y="2149200"/>
+            <a:ext cx="216000" cy="216000"/>
+          </a:xfrm>
+          <a:prstGeom prst="rect">
+            <a:avLst/>
+          </a:prstGeom>
+        </p:spPr>
+      </p:pic>
+      <p:sp>
+        <p:nvSpPr>
+          <p:cNvPr id="21" name="TextBox 20"/>
+          <p:cNvSpPr txBox="1"/>
+          <p:nvPr/>
+        </p:nvSpPr>
+        <p:spPr>
+          <a:xfrm>
+            <a:off x="9468000" y="2052000"/>
+            <a:ext cx="2052000" cy="648000"/>
+          </a:xfrm>
+          <a:prstGeom prst="rect">
+            <a:avLst/>
+          </a:prstGeom>
+          <a:noFill/>
+        </p:spPr>
+        <p:txBody>
+          <a:bodyPr wrap="square" lIns="36000" rIns="36000" tIns="18000" bIns="18000" anchor="t">
+            <a:spAutoFit/>
+          </a:bodyPr>
+          <a:lstStyle/>
+          <a:p>
+            <a:pPr algn="l">
+              <a:lnSpc>
+                <a:spcPct val="110000"/>
+              </a:lnSpc>
+            </a:pPr>
+            <a:r>
+              <a:rPr sz="1100" b="1">
+                <a:solidFill>
+                  <a:srgbClr val="111111"/>
+                </a:solidFill>
+                <a:latin typeface="Poppins"/>
+              </a:rPr>
+              <a:t>La promesse de transparence en une phrase</a:t>
+            </a:r>
+          </a:p>
+        </p:txBody>
+      </p:sp>
+      <p:sp>
+        <p:nvSpPr>
+          <p:cNvPr id="22" name="Oval 21"/>
+          <p:cNvSpPr/>
+          <p:nvPr/>
+        </p:nvSpPr>
+        <p:spPr>
+          <a:xfrm>
+            <a:off x="9036000" y="2790000"/>
+            <a:ext cx="342000" cy="342000"/>
+          </a:xfrm>
+          <a:prstGeom prst="ellipse">
+            <a:avLst/>
+          </a:prstGeom>
+          <a:solidFill>
+            <a:srgbClr val="EE5B22"/>
+          </a:solidFill>
+          <a:ln>
+            <a:noFill/>
+          </a:ln>
+          <a:effectLst/>
+        </p:spPr>
+        <p:style>
+          <a:lnRef idx="1">
+            <a:schemeClr val="accent1"/>
+          </a:lnRef>
+          <a:fillRef idx="3">
+            <a:schemeClr val="accent1"/>
+          </a:fillRef>
+          <a:effectRef idx="2">
+            <a:schemeClr val="accent1"/>
+          </a:effectRef>
+          <a:fontRef idx="minor">
+            <a:schemeClr val="lt1"/>
+          </a:fontRef>
+        </p:style>
+        <p:txBody>
+          <a:bodyPr rtlCol="0" anchor="ctr"/>
+          <a:lstStyle/>
+          <a:p>
+            <a:pPr algn="ctr"/>
+          </a:p>
+        </p:txBody>
+      </p:sp>
+      <p:pic>
+        <p:nvPicPr>
+          <p:cNvPr id="23" name="Picture 22" descr="check_bl.png"/>
+          <p:cNvPicPr>
+            <a:picLocks noChangeAspect="1"/>
+          </p:cNvPicPr>
+          <p:nvPr/>
+        </p:nvPicPr>
+        <p:blipFill>
+          <a:blip r:embed="rId6"/>
+          <a:stretch>
+            <a:fillRect/>
+          </a:stretch>
+        </p:blipFill>
+        <p:spPr>
+          <a:xfrm>
+            <a:off x="9097200" y="2851200"/>
+            <a:ext cx="216000" cy="216000"/>
+          </a:xfrm>
+          <a:prstGeom prst="rect">
+            <a:avLst/>
+          </a:prstGeom>
+        </p:spPr>
+      </p:pic>
+      <p:sp>
+        <p:nvSpPr>
+          <p:cNvPr id="24" name="TextBox 23"/>
+          <p:cNvSpPr txBox="1"/>
+          <p:nvPr/>
+        </p:nvSpPr>
+        <p:spPr>
+          <a:xfrm>
+            <a:off x="9468000" y="2754000"/>
+            <a:ext cx="2052000" cy="648000"/>
+          </a:xfrm>
+          <a:prstGeom prst="rect">
+            <a:avLst/>
+          </a:prstGeom>
+          <a:noFill/>
+        </p:spPr>
+        <p:txBody>
+          <a:bodyPr wrap="square" lIns="36000" rIns="36000" tIns="18000" bIns="18000" anchor="t">
+            <a:spAutoFit/>
+          </a:bodyPr>
+          <a:lstStyle/>
+          <a:p>
+            <a:pPr algn="l">
+              <a:lnSpc>
+                <a:spcPct val="110000"/>
+              </a:lnSpc>
+            </a:pPr>
+            <a:r>
+              <a:rPr sz="1100" b="1">
+                <a:solidFill>
+                  <a:srgbClr val="111111"/>
+                </a:solidFill>
+                <a:latin typeface="Poppins"/>
+              </a:rPr>
+              <a:t>Une personne au travail</a:t>
+            </a:r>
+          </a:p>
+        </p:txBody>
+      </p:sp>
+      <p:sp>
+        <p:nvSpPr>
+          <p:cNvPr id="25" name="Oval 24"/>
+          <p:cNvSpPr/>
+          <p:nvPr/>
+        </p:nvSpPr>
+        <p:spPr>
+          <a:xfrm>
+            <a:off x="9036000" y="3492000"/>
+            <a:ext cx="342000" cy="342000"/>
+          </a:xfrm>
+          <a:prstGeom prst="ellipse">
+            <a:avLst/>
+          </a:prstGeom>
+          <a:solidFill>
+            <a:srgbClr val="EE5B22"/>
+          </a:solidFill>
+          <a:ln>
+            <a:noFill/>
+          </a:ln>
+          <a:effectLst/>
+        </p:spPr>
+        <p:style>
+          <a:lnRef idx="1">
+            <a:schemeClr val="accent1"/>
+          </a:lnRef>
+          <a:fillRef idx="3">
+            <a:schemeClr val="accent1"/>
+          </a:fillRef>
+          <a:effectRef idx="2">
+            <a:schemeClr val="accent1"/>
+          </a:effectRef>
+          <a:fontRef idx="minor">
+            <a:schemeClr val="lt1"/>
+          </a:fontRef>
+        </p:style>
+        <p:txBody>
+          <a:bodyPr rtlCol="0" anchor="ctr"/>
+          <a:lstStyle/>
+          <a:p>
+            <a:pPr algn="ctr"/>
+          </a:p>
+        </p:txBody>
+      </p:sp>
+      <p:pic>
+        <p:nvPicPr>
+          <p:cNvPr id="26" name="Picture 25" descr="check_bl.png"/>
+          <p:cNvPicPr>
+            <a:picLocks noChangeAspect="1"/>
+          </p:cNvPicPr>
+          <p:nvPr/>
+        </p:nvPicPr>
+        <p:blipFill>
+          <a:blip r:embed="rId6"/>
+          <a:stretch>
+            <a:fillRect/>
+          </a:stretch>
+        </p:blipFill>
+        <p:spPr>
+          <a:xfrm>
+            <a:off x="9097200" y="3553200"/>
+            <a:ext cx="216000" cy="216000"/>
+          </a:xfrm>
+          <a:prstGeom prst="rect">
+            <a:avLst/>
+          </a:prstGeom>
+        </p:spPr>
+      </p:pic>
+      <p:sp>
+        <p:nvSpPr>
+          <p:cNvPr id="27" name="TextBox 26"/>
+          <p:cNvSpPr txBox="1"/>
+          <p:nvPr/>
+        </p:nvSpPr>
+        <p:spPr>
+          <a:xfrm>
+            <a:off x="9468000" y="3456000"/>
+            <a:ext cx="2052000" cy="648000"/>
+          </a:xfrm>
+          <a:prstGeom prst="rect">
+            <a:avLst/>
+          </a:prstGeom>
+          <a:noFill/>
+        </p:spPr>
+        <p:txBody>
+          <a:bodyPr wrap="square" lIns="36000" rIns="36000" tIns="18000" bIns="18000" anchor="t">
+            <a:spAutoFit/>
+          </a:bodyPr>
+          <a:lstStyle/>
+          <a:p>
+            <a:pPr algn="l">
+              <a:lnSpc>
+                <a:spcPct val="110000"/>
+              </a:lnSpc>
+            </a:pPr>
+            <a:r>
+              <a:rPr sz="1100" b="1">
+                <a:solidFill>
+                  <a:srgbClr val="111111"/>
+                </a:solidFill>
+                <a:latin typeface="Poppins"/>
+              </a:rPr>
+              <a:t>Une question chiffrée</a:t>
+            </a:r>
+          </a:p>
+        </p:txBody>
+      </p:sp>
+      <p:sp>
+        <p:nvSpPr>
+          <p:cNvPr id="28" name="Rectangle 27"/>
+          <p:cNvSpPr/>
+          <p:nvPr/>
+        </p:nvSpPr>
+        <p:spPr>
+          <a:xfrm>
+            <a:off x="9036000" y="4248000"/>
+            <a:ext cx="2376000" cy="21600"/>
+          </a:xfrm>
+          <a:prstGeom prst="rect">
+            <a:avLst/>
+          </a:prstGeom>
+          <a:solidFill>
+            <a:srgbClr val="E2E2E2"/>
+          </a:solidFill>
+          <a:ln>
+            <a:noFill/>
+          </a:ln>
+          <a:effectLst/>
+        </p:spPr>
+        <p:style>
+          <a:lnRef idx="1">
+            <a:schemeClr val="accent1"/>
+          </a:lnRef>
+          <a:fillRef idx="3">
+            <a:schemeClr val="accent1"/>
+          </a:fillRef>
+          <a:effectRef idx="2">
+            <a:schemeClr val="accent1"/>
+          </a:effectRef>
+          <a:fontRef idx="minor">
+            <a:schemeClr val="lt1"/>
+          </a:fontRef>
+        </p:style>
+        <p:txBody>
+          <a:bodyPr rtlCol="0" anchor="ctr"/>
+          <a:lstStyle/>
+          <a:p>
+            <a:pPr algn="ctr"/>
+          </a:p>
+        </p:txBody>
+      </p:sp>
+      <p:sp>
+        <p:nvSpPr>
+          <p:cNvPr id="29" name="TextBox 28"/>
+          <p:cNvSpPr txBox="1"/>
+          <p:nvPr/>
+        </p:nvSpPr>
+        <p:spPr>
+          <a:xfrm>
+            <a:off x="9036000" y="4320000"/>
+            <a:ext cx="2376000" cy="251999"/>
+          </a:xfrm>
+          <a:prstGeom prst="rect">
+            <a:avLst/>
+          </a:prstGeom>
+          <a:noFill/>
+        </p:spPr>
+        <p:txBody>
+          <a:bodyPr wrap="square" lIns="36000" rIns="36000" tIns="18000" bIns="18000" anchor="t">
+            <a:spAutoFit/>
+          </a:bodyPr>
+          <a:lstStyle/>
+          <a:p>
+            <a:pPr algn="l">
+              <a:lnSpc>
+                <a:spcPct val="110000"/>
+              </a:lnSpc>
+            </a:pPr>
+            <a:r>
+              <a:rPr sz="900" b="1">
+                <a:solidFill>
+                  <a:srgbClr val="5A5A5A"/>
+                </a:solidFill>
+                <a:latin typeface="Poppins"/>
+              </a:rPr>
+              <a:t>LE TEXTE PROPOSÉ</a:t>
+            </a:r>
+          </a:p>
+        </p:txBody>
+      </p:sp>
+      <p:sp>
+        <p:nvSpPr>
+          <p:cNvPr id="30" name="TextBox 29"/>
+          <p:cNvSpPr txBox="1"/>
+          <p:nvPr/>
+        </p:nvSpPr>
+        <p:spPr>
+          <a:xfrm>
+            <a:off x="9036000" y="4536000"/>
+            <a:ext cx="2376000" cy="1764000"/>
+          </a:xfrm>
+          <a:prstGeom prst="rect">
+            <a:avLst/>
+          </a:prstGeom>
+          <a:noFill/>
+        </p:spPr>
+        <p:txBody>
+          <a:bodyPr wrap="square" lIns="36000" rIns="36000" tIns="18000" bIns="18000" anchor="t">
+            <a:spAutoFit/>
+          </a:bodyPr>
+          <a:lstStyle/>
+          <a:p>
+            <a:pPr algn="l">
+              <a:lnSpc>
+                <a:spcPct val="110000"/>
+              </a:lnSpc>
+            </a:pPr>
+            <a:r>
+              <a:rPr sz="950" b="0">
+                <a:solidFill>
+                  <a:srgbClr val="111111"/>
+                </a:solidFill>
+                <a:latin typeface="Poppins"/>
+              </a:rPr>
+              <a:t>Inventaire physique et informatique : votre stock compté au carton près. 🧾
+Vous voyez ce que nous voyons.
+ Votre dernier inventaire a pris combien de jours ?</a:t>
+            </a:r>
+          </a:p>
+        </p:txBody>
+      </p:sp>
     </p:spTree>
   </p:cSld>
   <p:clrMapOvr>
@@ -10324,9 +14280,92 @@
           </a:p>
         </p:txBody>
       </p:sp>
+      <p:sp>
+        <p:nvSpPr>
+          <p:cNvPr id="9" name="Rounded Rectangle 8"/>
+          <p:cNvSpPr/>
+          <p:nvPr/>
+        </p:nvSpPr>
+        <p:spPr>
+          <a:xfrm>
+            <a:off x="576000" y="1512000"/>
+            <a:ext cx="3456000" cy="270000"/>
+          </a:xfrm>
+          <a:prstGeom prst="roundRect">
+            <a:avLst/>
+          </a:prstGeom>
+          <a:solidFill>
+            <a:srgbClr val="E2E2E2"/>
+          </a:solidFill>
+          <a:ln>
+            <a:noFill/>
+          </a:ln>
+          <a:effectLst/>
+        </p:spPr>
+        <p:style>
+          <a:lnRef idx="1">
+            <a:schemeClr val="accent1"/>
+          </a:lnRef>
+          <a:fillRef idx="3">
+            <a:schemeClr val="accent1"/>
+          </a:fillRef>
+          <a:effectRef idx="2">
+            <a:schemeClr val="accent1"/>
+          </a:effectRef>
+          <a:fontRef idx="minor">
+            <a:schemeClr val="lt1"/>
+          </a:fontRef>
+        </p:style>
+        <p:txBody>
+          <a:bodyPr rtlCol="0" anchor="ctr"/>
+          <a:lstStyle/>
+          <a:p>
+            <a:pPr algn="ctr"/>
+          </a:p>
+        </p:txBody>
+      </p:sp>
+      <p:sp>
+        <p:nvSpPr>
+          <p:cNvPr id="10" name="TextBox 9"/>
+          <p:cNvSpPr txBox="1"/>
+          <p:nvPr/>
+        </p:nvSpPr>
+        <p:spPr>
+          <a:xfrm>
+            <a:off x="576000" y="1512000"/>
+            <a:ext cx="3456000" cy="270000"/>
+          </a:xfrm>
+          <a:prstGeom prst="rect">
+            <a:avLst/>
+          </a:prstGeom>
+          <a:noFill/>
+        </p:spPr>
+        <p:txBody>
+          <a:bodyPr wrap="square" lIns="36000" rIns="36000" tIns="18000" bIns="18000" anchor="ctr">
+            <a:spAutoFit/>
+          </a:bodyPr>
+          <a:lstStyle/>
+          <a:p>
+            <a:pPr algn="ctr">
+              <a:lnSpc>
+                <a:spcPct val="110000"/>
+              </a:lnSpc>
+            </a:pPr>
+            <a:r>
+              <a:rPr sz="1000" b="1">
+                <a:solidFill>
+                  <a:srgbClr val="5A5A5A"/>
+                </a:solidFill>
+                <a:latin typeface="Poppins"/>
+              </a:rPr>
+              <a:t>AVANT · AUJOURD’HUI</a:t>
+            </a:r>
+          </a:p>
+        </p:txBody>
+      </p:sp>
       <p:pic>
         <p:nvPicPr>
-          <p:cNvPr id="9" name="Picture 8" descr="cmp_p_port.jpg"/>
+          <p:cNvPr id="11" name="Picture 10" descr="b_p_rack.jpg"/>
           <p:cNvPicPr>
             <a:picLocks noChangeAspect="1"/>
           </p:cNvPicPr>
@@ -10340,14 +14379,718 @@
         </p:blipFill>
         <p:spPr>
           <a:xfrm>
-            <a:off x="1199493" y="1422000"/>
-            <a:ext cx="9769014" cy="4896000"/>
+            <a:off x="627380" y="1872000"/>
+            <a:ext cx="3353239" cy="4464000"/>
           </a:xfrm>
           <a:prstGeom prst="rect">
             <a:avLst/>
           </a:prstGeom>
         </p:spPr>
       </p:pic>
+      <p:sp>
+        <p:nvSpPr>
+          <p:cNvPr id="12" name="Oval 11"/>
+          <p:cNvSpPr/>
+          <p:nvPr/>
+        </p:nvSpPr>
+        <p:spPr>
+          <a:xfrm>
+            <a:off x="4158000" y="3744000"/>
+            <a:ext cx="540000" cy="540000"/>
+          </a:xfrm>
+          <a:prstGeom prst="ellipse">
+            <a:avLst/>
+          </a:prstGeom>
+          <a:solidFill>
+            <a:srgbClr val="EE5B22"/>
+          </a:solidFill>
+          <a:ln>
+            <a:noFill/>
+          </a:ln>
+          <a:effectLst/>
+        </p:spPr>
+        <p:style>
+          <a:lnRef idx="1">
+            <a:schemeClr val="accent1"/>
+          </a:lnRef>
+          <a:fillRef idx="3">
+            <a:schemeClr val="accent1"/>
+          </a:fillRef>
+          <a:effectRef idx="2">
+            <a:schemeClr val="accent1"/>
+          </a:effectRef>
+          <a:fontRef idx="minor">
+            <a:schemeClr val="lt1"/>
+          </a:fontRef>
+        </p:style>
+        <p:txBody>
+          <a:bodyPr rtlCol="0" anchor="ctr"/>
+          <a:lstStyle/>
+          <a:p>
+            <a:pPr algn="ctr"/>
+          </a:p>
+        </p:txBody>
+      </p:sp>
+      <p:pic>
+        <p:nvPicPr>
+          <p:cNvPr id="13" name="Picture 12" descr="arrow-right_bl.png"/>
+          <p:cNvPicPr>
+            <a:picLocks noChangeAspect="1"/>
+          </p:cNvPicPr>
+          <p:nvPr/>
+        </p:nvPicPr>
+        <p:blipFill>
+          <a:blip r:embed="rId4"/>
+          <a:stretch>
+            <a:fillRect/>
+          </a:stretch>
+        </p:blipFill>
+        <p:spPr>
+          <a:xfrm>
+            <a:off x="4266000" y="3851999"/>
+            <a:ext cx="324000" cy="324000"/>
+          </a:xfrm>
+          <a:prstGeom prst="rect">
+            <a:avLst/>
+          </a:prstGeom>
+        </p:spPr>
+      </p:pic>
+      <p:sp>
+        <p:nvSpPr>
+          <p:cNvPr id="14" name="Rounded Rectangle 13"/>
+          <p:cNvSpPr/>
+          <p:nvPr/>
+        </p:nvSpPr>
+        <p:spPr>
+          <a:xfrm>
+            <a:off x="4824000" y="1512000"/>
+            <a:ext cx="3816000" cy="270000"/>
+          </a:xfrm>
+          <a:prstGeom prst="roundRect">
+            <a:avLst/>
+          </a:prstGeom>
+          <a:solidFill>
+            <a:srgbClr val="EE5B22"/>
+          </a:solidFill>
+          <a:ln>
+            <a:noFill/>
+          </a:ln>
+          <a:effectLst/>
+        </p:spPr>
+        <p:style>
+          <a:lnRef idx="1">
+            <a:schemeClr val="accent1"/>
+          </a:lnRef>
+          <a:fillRef idx="3">
+            <a:schemeClr val="accent1"/>
+          </a:fillRef>
+          <a:effectRef idx="2">
+            <a:schemeClr val="accent1"/>
+          </a:effectRef>
+          <a:fontRef idx="minor">
+            <a:schemeClr val="lt1"/>
+          </a:fontRef>
+        </p:style>
+        <p:txBody>
+          <a:bodyPr rtlCol="0" anchor="ctr"/>
+          <a:lstStyle/>
+          <a:p>
+            <a:pPr algn="ctr"/>
+          </a:p>
+        </p:txBody>
+      </p:sp>
+      <p:sp>
+        <p:nvSpPr>
+          <p:cNvPr id="15" name="TextBox 14"/>
+          <p:cNvSpPr txBox="1"/>
+          <p:nvPr/>
+        </p:nvSpPr>
+        <p:spPr>
+          <a:xfrm>
+            <a:off x="4824000" y="1512000"/>
+            <a:ext cx="3816000" cy="270000"/>
+          </a:xfrm>
+          <a:prstGeom prst="rect">
+            <a:avLst/>
+          </a:prstGeom>
+          <a:noFill/>
+        </p:spPr>
+        <p:txBody>
+          <a:bodyPr wrap="square" lIns="36000" rIns="36000" tIns="18000" bIns="18000" anchor="ctr">
+            <a:spAutoFit/>
+          </a:bodyPr>
+          <a:lstStyle/>
+          <a:p>
+            <a:pPr algn="ctr">
+              <a:lnSpc>
+                <a:spcPct val="110000"/>
+              </a:lnSpc>
+            </a:pPr>
+            <a:r>
+              <a:rPr sz="1000" b="1">
+                <a:solidFill>
+                  <a:srgbClr val="FFFFFF"/>
+                </a:solidFill>
+                <a:latin typeface="Poppins"/>
+              </a:rPr>
+              <a:t>APRÈS · PROPOSÉ</a:t>
+            </a:r>
+          </a:p>
+        </p:txBody>
+      </p:sp>
+      <p:pic>
+        <p:nvPicPr>
+          <p:cNvPr id="16" name="Picture 15" descr="w_p_port.jpg"/>
+          <p:cNvPicPr>
+            <a:picLocks noChangeAspect="1"/>
+          </p:cNvPicPr>
+          <p:nvPr/>
+        </p:nvPicPr>
+        <p:blipFill>
+          <a:blip r:embed="rId5"/>
+          <a:stretch>
+            <a:fillRect/>
+          </a:stretch>
+        </p:blipFill>
+        <p:spPr>
+          <a:xfrm>
+            <a:off x="4946400" y="1872000"/>
+            <a:ext cx="3571200" cy="4464000"/>
+          </a:xfrm>
+          <a:prstGeom prst="rect">
+            <a:avLst/>
+          </a:prstGeom>
+        </p:spPr>
+      </p:pic>
+      <p:sp>
+        <p:nvSpPr>
+          <p:cNvPr id="17" name="Rounded Rectangle 16"/>
+          <p:cNvSpPr/>
+          <p:nvPr/>
+        </p:nvSpPr>
+        <p:spPr>
+          <a:xfrm>
+            <a:off x="8820000" y="1512000"/>
+            <a:ext cx="2808000" cy="4824000"/>
+          </a:xfrm>
+          <a:prstGeom prst="roundRect">
+            <a:avLst>
+              <a:gd name="adj" fmla="val 6000"/>
+            </a:avLst>
+          </a:prstGeom>
+          <a:solidFill>
+            <a:srgbClr val="E3E7EC"/>
+          </a:solidFill>
+          <a:ln>
+            <a:noFill/>
+          </a:ln>
+          <a:effectLst/>
+        </p:spPr>
+        <p:style>
+          <a:lnRef idx="1">
+            <a:schemeClr val="accent1"/>
+          </a:lnRef>
+          <a:fillRef idx="3">
+            <a:schemeClr val="accent1"/>
+          </a:fillRef>
+          <a:effectRef idx="2">
+            <a:schemeClr val="accent1"/>
+          </a:effectRef>
+          <a:fontRef idx="minor">
+            <a:schemeClr val="lt1"/>
+          </a:fontRef>
+        </p:style>
+        <p:txBody>
+          <a:bodyPr rtlCol="0" anchor="ctr"/>
+          <a:lstStyle/>
+          <a:p>
+            <a:pPr algn="ctr"/>
+          </a:p>
+        </p:txBody>
+      </p:sp>
+      <p:sp>
+        <p:nvSpPr>
+          <p:cNvPr id="18" name="TextBox 17"/>
+          <p:cNvSpPr txBox="1"/>
+          <p:nvPr/>
+        </p:nvSpPr>
+        <p:spPr>
+          <a:xfrm>
+            <a:off x="9036000" y="1655999"/>
+            <a:ext cx="2448000" cy="324000"/>
+          </a:xfrm>
+          <a:prstGeom prst="rect">
+            <a:avLst/>
+          </a:prstGeom>
+          <a:noFill/>
+        </p:spPr>
+        <p:txBody>
+          <a:bodyPr wrap="square" lIns="36000" rIns="36000" tIns="18000" bIns="18000" anchor="t">
+            <a:spAutoFit/>
+          </a:bodyPr>
+          <a:lstStyle/>
+          <a:p>
+            <a:pPr algn="l">
+              <a:lnSpc>
+                <a:spcPct val="110000"/>
+              </a:lnSpc>
+            </a:pPr>
+            <a:r>
+              <a:rPr sz="1500" b="1">
+                <a:solidFill>
+                  <a:srgbClr val="EE5B22"/>
+                </a:solidFill>
+                <a:latin typeface="Poppins"/>
+              </a:rPr>
+              <a:t>Ce qui change</a:t>
+            </a:r>
+          </a:p>
+        </p:txBody>
+      </p:sp>
+      <p:sp>
+        <p:nvSpPr>
+          <p:cNvPr id="19" name="Oval 18"/>
+          <p:cNvSpPr/>
+          <p:nvPr/>
+        </p:nvSpPr>
+        <p:spPr>
+          <a:xfrm>
+            <a:off x="9036000" y="2088000"/>
+            <a:ext cx="342000" cy="342000"/>
+          </a:xfrm>
+          <a:prstGeom prst="ellipse">
+            <a:avLst/>
+          </a:prstGeom>
+          <a:solidFill>
+            <a:srgbClr val="EE5B22"/>
+          </a:solidFill>
+          <a:ln>
+            <a:noFill/>
+          </a:ln>
+          <a:effectLst/>
+        </p:spPr>
+        <p:style>
+          <a:lnRef idx="1">
+            <a:schemeClr val="accent1"/>
+          </a:lnRef>
+          <a:fillRef idx="3">
+            <a:schemeClr val="accent1"/>
+          </a:fillRef>
+          <a:effectRef idx="2">
+            <a:schemeClr val="accent1"/>
+          </a:effectRef>
+          <a:fontRef idx="minor">
+            <a:schemeClr val="lt1"/>
+          </a:fontRef>
+        </p:style>
+        <p:txBody>
+          <a:bodyPr rtlCol="0" anchor="ctr"/>
+          <a:lstStyle/>
+          <a:p>
+            <a:pPr algn="ctr"/>
+          </a:p>
+        </p:txBody>
+      </p:sp>
+      <p:pic>
+        <p:nvPicPr>
+          <p:cNvPr id="20" name="Picture 19" descr="check_bl.png"/>
+          <p:cNvPicPr>
+            <a:picLocks noChangeAspect="1"/>
+          </p:cNvPicPr>
+          <p:nvPr/>
+        </p:nvPicPr>
+        <p:blipFill>
+          <a:blip r:embed="rId6"/>
+          <a:stretch>
+            <a:fillRect/>
+          </a:stretch>
+        </p:blipFill>
+        <p:spPr>
+          <a:xfrm>
+            <a:off x="9097200" y="2149200"/>
+            <a:ext cx="216000" cy="216000"/>
+          </a:xfrm>
+          <a:prstGeom prst="rect">
+            <a:avLst/>
+          </a:prstGeom>
+        </p:spPr>
+      </p:pic>
+      <p:sp>
+        <p:nvSpPr>
+          <p:cNvPr id="21" name="TextBox 20"/>
+          <p:cNvSpPr txBox="1"/>
+          <p:nvPr/>
+        </p:nvSpPr>
+        <p:spPr>
+          <a:xfrm>
+            <a:off x="9468000" y="2052000"/>
+            <a:ext cx="2052000" cy="648000"/>
+          </a:xfrm>
+          <a:prstGeom prst="rect">
+            <a:avLst/>
+          </a:prstGeom>
+          <a:noFill/>
+        </p:spPr>
+        <p:txBody>
+          <a:bodyPr wrap="square" lIns="36000" rIns="36000" tIns="18000" bIns="18000" anchor="t">
+            <a:spAutoFit/>
+          </a:bodyPr>
+          <a:lstStyle/>
+          <a:p>
+            <a:pPr algn="l">
+              <a:lnSpc>
+                <a:spcPct val="110000"/>
+              </a:lnSpc>
+            </a:pPr>
+            <a:r>
+              <a:rPr sz="1100" b="1">
+                <a:solidFill>
+                  <a:srgbClr val="111111"/>
+                </a:solidFill>
+                <a:latin typeface="Poppins"/>
+              </a:rPr>
+              <a:t>Le parcours complet, en une image</a:t>
+            </a:r>
+          </a:p>
+        </p:txBody>
+      </p:sp>
+      <p:sp>
+        <p:nvSpPr>
+          <p:cNvPr id="22" name="Oval 21"/>
+          <p:cNvSpPr/>
+          <p:nvPr/>
+        </p:nvSpPr>
+        <p:spPr>
+          <a:xfrm>
+            <a:off x="9036000" y="2790000"/>
+            <a:ext cx="342000" cy="342000"/>
+          </a:xfrm>
+          <a:prstGeom prst="ellipse">
+            <a:avLst/>
+          </a:prstGeom>
+          <a:solidFill>
+            <a:srgbClr val="EE5B22"/>
+          </a:solidFill>
+          <a:ln>
+            <a:noFill/>
+          </a:ln>
+          <a:effectLst/>
+        </p:spPr>
+        <p:style>
+          <a:lnRef idx="1">
+            <a:schemeClr val="accent1"/>
+          </a:lnRef>
+          <a:fillRef idx="3">
+            <a:schemeClr val="accent1"/>
+          </a:fillRef>
+          <a:effectRef idx="2">
+            <a:schemeClr val="accent1"/>
+          </a:effectRef>
+          <a:fontRef idx="minor">
+            <a:schemeClr val="lt1"/>
+          </a:fontRef>
+        </p:style>
+        <p:txBody>
+          <a:bodyPr rtlCol="0" anchor="ctr"/>
+          <a:lstStyle/>
+          <a:p>
+            <a:pPr algn="ctr"/>
+          </a:p>
+        </p:txBody>
+      </p:sp>
+      <p:pic>
+        <p:nvPicPr>
+          <p:cNvPr id="23" name="Picture 22" descr="check_bl.png"/>
+          <p:cNvPicPr>
+            <a:picLocks noChangeAspect="1"/>
+          </p:cNvPicPr>
+          <p:nvPr/>
+        </p:nvPicPr>
+        <p:blipFill>
+          <a:blip r:embed="rId6"/>
+          <a:stretch>
+            <a:fillRect/>
+          </a:stretch>
+        </p:blipFill>
+        <p:spPr>
+          <a:xfrm>
+            <a:off x="9097200" y="2851200"/>
+            <a:ext cx="216000" cy="216000"/>
+          </a:xfrm>
+          <a:prstGeom prst="rect">
+            <a:avLst/>
+          </a:prstGeom>
+        </p:spPr>
+      </p:pic>
+      <p:sp>
+        <p:nvSpPr>
+          <p:cNvPr id="24" name="TextBox 23"/>
+          <p:cNvSpPr txBox="1"/>
+          <p:nvPr/>
+        </p:nvSpPr>
+        <p:spPr>
+          <a:xfrm>
+            <a:off x="9468000" y="2754000"/>
+            <a:ext cx="2052000" cy="648000"/>
+          </a:xfrm>
+          <a:prstGeom prst="rect">
+            <a:avLst/>
+          </a:prstGeom>
+          <a:noFill/>
+        </p:spPr>
+        <p:txBody>
+          <a:bodyPr wrap="square" lIns="36000" rIns="36000" tIns="18000" bIns="18000" anchor="t">
+            <a:spAutoFit/>
+          </a:bodyPr>
+          <a:lstStyle/>
+          <a:p>
+            <a:pPr algn="l">
+              <a:lnSpc>
+                <a:spcPct val="110000"/>
+              </a:lnSpc>
+            </a:pPr>
+            <a:r>
+              <a:rPr sz="1100" b="1">
+                <a:solidFill>
+                  <a:srgbClr val="111111"/>
+                </a:solidFill>
+                <a:latin typeface="Poppins"/>
+              </a:rPr>
+              <a:t>Le camion, le conteneur, la route</a:t>
+            </a:r>
+          </a:p>
+        </p:txBody>
+      </p:sp>
+      <p:sp>
+        <p:nvSpPr>
+          <p:cNvPr id="25" name="Oval 24"/>
+          <p:cNvSpPr/>
+          <p:nvPr/>
+        </p:nvSpPr>
+        <p:spPr>
+          <a:xfrm>
+            <a:off x="9036000" y="3492000"/>
+            <a:ext cx="342000" cy="342000"/>
+          </a:xfrm>
+          <a:prstGeom prst="ellipse">
+            <a:avLst/>
+          </a:prstGeom>
+          <a:solidFill>
+            <a:srgbClr val="EE5B22"/>
+          </a:solidFill>
+          <a:ln>
+            <a:noFill/>
+          </a:ln>
+          <a:effectLst/>
+        </p:spPr>
+        <p:style>
+          <a:lnRef idx="1">
+            <a:schemeClr val="accent1"/>
+          </a:lnRef>
+          <a:fillRef idx="3">
+            <a:schemeClr val="accent1"/>
+          </a:fillRef>
+          <a:effectRef idx="2">
+            <a:schemeClr val="accent1"/>
+          </a:effectRef>
+          <a:fontRef idx="minor">
+            <a:schemeClr val="lt1"/>
+          </a:fontRef>
+        </p:style>
+        <p:txBody>
+          <a:bodyPr rtlCol="0" anchor="ctr"/>
+          <a:lstStyle/>
+          <a:p>
+            <a:pPr algn="ctr"/>
+          </a:p>
+        </p:txBody>
+      </p:sp>
+      <p:pic>
+        <p:nvPicPr>
+          <p:cNvPr id="26" name="Picture 25" descr="check_bl.png"/>
+          <p:cNvPicPr>
+            <a:picLocks noChangeAspect="1"/>
+          </p:cNvPicPr>
+          <p:nvPr/>
+        </p:nvPicPr>
+        <p:blipFill>
+          <a:blip r:embed="rId6"/>
+          <a:stretch>
+            <a:fillRect/>
+          </a:stretch>
+        </p:blipFill>
+        <p:spPr>
+          <a:xfrm>
+            <a:off x="9097200" y="3553200"/>
+            <a:ext cx="216000" cy="216000"/>
+          </a:xfrm>
+          <a:prstGeom prst="rect">
+            <a:avLst/>
+          </a:prstGeom>
+        </p:spPr>
+      </p:pic>
+      <p:sp>
+        <p:nvSpPr>
+          <p:cNvPr id="27" name="TextBox 26"/>
+          <p:cNvSpPr txBox="1"/>
+          <p:nvPr/>
+        </p:nvSpPr>
+        <p:spPr>
+          <a:xfrm>
+            <a:off x="9468000" y="3456000"/>
+            <a:ext cx="2052000" cy="648000"/>
+          </a:xfrm>
+          <a:prstGeom prst="rect">
+            <a:avLst/>
+          </a:prstGeom>
+          <a:noFill/>
+        </p:spPr>
+        <p:txBody>
+          <a:bodyPr wrap="square" lIns="36000" rIns="36000" tIns="18000" bIns="18000" anchor="t">
+            <a:spAutoFit/>
+          </a:bodyPr>
+          <a:lstStyle/>
+          <a:p>
+            <a:pPr algn="l">
+              <a:lnSpc>
+                <a:spcPct val="110000"/>
+              </a:lnSpc>
+            </a:pPr>
+            <a:r>
+              <a:rPr sz="1100" b="1">
+                <a:solidFill>
+                  <a:srgbClr val="111111"/>
+                </a:solidFill>
+                <a:latin typeface="Poppins"/>
+              </a:rPr>
+              <a:t>Une question à 2 réponses</a:t>
+            </a:r>
+          </a:p>
+        </p:txBody>
+      </p:sp>
+      <p:sp>
+        <p:nvSpPr>
+          <p:cNvPr id="28" name="Rectangle 27"/>
+          <p:cNvSpPr/>
+          <p:nvPr/>
+        </p:nvSpPr>
+        <p:spPr>
+          <a:xfrm>
+            <a:off x="9036000" y="4248000"/>
+            <a:ext cx="2376000" cy="21600"/>
+          </a:xfrm>
+          <a:prstGeom prst="rect">
+            <a:avLst/>
+          </a:prstGeom>
+          <a:solidFill>
+            <a:srgbClr val="E2E2E2"/>
+          </a:solidFill>
+          <a:ln>
+            <a:noFill/>
+          </a:ln>
+          <a:effectLst/>
+        </p:spPr>
+        <p:style>
+          <a:lnRef idx="1">
+            <a:schemeClr val="accent1"/>
+          </a:lnRef>
+          <a:fillRef idx="3">
+            <a:schemeClr val="accent1"/>
+          </a:fillRef>
+          <a:effectRef idx="2">
+            <a:schemeClr val="accent1"/>
+          </a:effectRef>
+          <a:fontRef idx="minor">
+            <a:schemeClr val="lt1"/>
+          </a:fontRef>
+        </p:style>
+        <p:txBody>
+          <a:bodyPr rtlCol="0" anchor="ctr"/>
+          <a:lstStyle/>
+          <a:p>
+            <a:pPr algn="ctr"/>
+          </a:p>
+        </p:txBody>
+      </p:sp>
+      <p:sp>
+        <p:nvSpPr>
+          <p:cNvPr id="29" name="TextBox 28"/>
+          <p:cNvSpPr txBox="1"/>
+          <p:nvPr/>
+        </p:nvSpPr>
+        <p:spPr>
+          <a:xfrm>
+            <a:off x="9036000" y="4320000"/>
+            <a:ext cx="2376000" cy="251999"/>
+          </a:xfrm>
+          <a:prstGeom prst="rect">
+            <a:avLst/>
+          </a:prstGeom>
+          <a:noFill/>
+        </p:spPr>
+        <p:txBody>
+          <a:bodyPr wrap="square" lIns="36000" rIns="36000" tIns="18000" bIns="18000" anchor="t">
+            <a:spAutoFit/>
+          </a:bodyPr>
+          <a:lstStyle/>
+          <a:p>
+            <a:pPr algn="l">
+              <a:lnSpc>
+                <a:spcPct val="110000"/>
+              </a:lnSpc>
+            </a:pPr>
+            <a:r>
+              <a:rPr sz="900" b="1">
+                <a:solidFill>
+                  <a:srgbClr val="5A5A5A"/>
+                </a:solidFill>
+                <a:latin typeface="Poppins"/>
+              </a:rPr>
+              <a:t>LE TEXTE PROPOSÉ</a:t>
+            </a:r>
+          </a:p>
+        </p:txBody>
+      </p:sp>
+      <p:sp>
+        <p:nvSpPr>
+          <p:cNvPr id="30" name="TextBox 29"/>
+          <p:cNvSpPr txBox="1"/>
+          <p:nvPr/>
+        </p:nvSpPr>
+        <p:spPr>
+          <a:xfrm>
+            <a:off x="9036000" y="4536000"/>
+            <a:ext cx="2376000" cy="1764000"/>
+          </a:xfrm>
+          <a:prstGeom prst="rect">
+            <a:avLst/>
+          </a:prstGeom>
+          <a:noFill/>
+        </p:spPr>
+        <p:txBody>
+          <a:bodyPr wrap="square" lIns="36000" rIns="36000" tIns="18000" bIns="18000" anchor="t">
+            <a:spAutoFit/>
+          </a:bodyPr>
+          <a:lstStyle/>
+          <a:p>
+            <a:pPr algn="l">
+              <a:lnSpc>
+                <a:spcPct val="110000"/>
+              </a:lnSpc>
+            </a:pPr>
+            <a:r>
+              <a:rPr sz="950" b="0">
+                <a:solidFill>
+                  <a:srgbClr val="111111"/>
+                </a:solidFill>
+                <a:latin typeface="Poppins"/>
+              </a:rPr>
+              <a:t>Du port à votre entrepôt : transport de conteneurs, sites portuaire et aéroportuaire. 🚛
+ Port ou aéroport : d’où arrivent vos marchandises ?</a:t>
+            </a:r>
+          </a:p>
+        </p:txBody>
+      </p:sp>
     </p:spTree>
   </p:cSld>
   <p:clrMapOvr>
@@ -11688,16 +16431,41 @@
           </a:p>
         </p:txBody>
       </p:sp>
-      <p:sp>
-        <p:nvSpPr>
-          <p:cNvPr id="9" name="Rounded Rectangle 8"/>
+      <p:pic>
+        <p:nvPicPr>
+          <p:cNvPr id="9" name="Picture 8" descr="pl_gestion_stock_cariste_jpg.jpg"/>
+          <p:cNvPicPr>
+            <a:picLocks noChangeAspect="1"/>
+          </p:cNvPicPr>
+          <p:nvPr/>
+        </p:nvPicPr>
+        <p:blipFill>
+          <a:blip r:embed="rId3"/>
+          <a:srcRect l="37098" r="37098"/>
+          <a:stretch>
+            <a:fillRect/>
+          </a:stretch>
+        </p:blipFill>
+        <p:spPr>
+          <a:xfrm>
+            <a:off x="8928000" y="1584000"/>
+            <a:ext cx="2700000" cy="4662000"/>
+          </a:xfrm>
+          <a:prstGeom prst="rect">
+            <a:avLst/>
+          </a:prstGeom>
+        </p:spPr>
+      </p:pic>
+      <p:sp>
+        <p:nvSpPr>
+          <p:cNvPr id="10" name="Rounded Rectangle 9"/>
           <p:cNvSpPr/>
           <p:nvPr/>
         </p:nvSpPr>
         <p:spPr>
           <a:xfrm>
             <a:off x="576000" y="1584000"/>
-            <a:ext cx="11052000" cy="846000"/>
+            <a:ext cx="8136000" cy="846000"/>
           </a:xfrm>
           <a:prstGeom prst="roundRect">
             <a:avLst>
@@ -11705,7 +16473,7 @@
             </a:avLst>
           </a:prstGeom>
           <a:solidFill>
-            <a:srgbClr val="FFFFFF"/>
+            <a:srgbClr val="E3E7EC"/>
           </a:solidFill>
           <a:ln>
             <a:noFill/>
@@ -11736,7 +16504,7 @@
       </p:sp>
       <p:sp>
         <p:nvSpPr>
-          <p:cNvPr id="10" name="Rectangle 9"/>
+          <p:cNvPr id="11" name="Rectangle 10"/>
           <p:cNvSpPr/>
           <p:nvPr/>
         </p:nvSpPr>
@@ -11780,14 +16548,14 @@
       </p:sp>
       <p:sp>
         <p:nvSpPr>
-          <p:cNvPr id="11" name="TextBox 10"/>
+          <p:cNvPr id="12" name="TextBox 11"/>
           <p:cNvSpPr txBox="1"/>
           <p:nvPr/>
         </p:nvSpPr>
         <p:spPr>
           <a:xfrm>
-            <a:off x="792000" y="1584000"/>
-            <a:ext cx="503999" cy="846000"/>
+            <a:off x="756000" y="1584000"/>
+            <a:ext cx="468000" cy="846000"/>
           </a:xfrm>
           <a:prstGeom prst="rect">
             <a:avLst/>
@@ -11819,14 +16587,289 @@
       </p:sp>
       <p:sp>
         <p:nvSpPr>
-          <p:cNvPr id="12" name="Oval 11"/>
+          <p:cNvPr id="13" name="Oval 12"/>
           <p:cNvSpPr/>
           <p:nvPr/>
         </p:nvSpPr>
         <p:spPr>
           <a:xfrm>
-            <a:off x="1404000" y="1709999"/>
-            <a:ext cx="594000" cy="594000"/>
+            <a:off x="1296000" y="1728000"/>
+            <a:ext cx="558000" cy="558000"/>
+          </a:xfrm>
+          <a:prstGeom prst="ellipse">
+            <a:avLst/>
+          </a:prstGeom>
+          <a:solidFill>
+            <a:srgbClr val="EE5B22"/>
+          </a:solidFill>
+          <a:ln>
+            <a:noFill/>
+          </a:ln>
+          <a:effectLst/>
+        </p:spPr>
+        <p:style>
+          <a:lnRef idx="1">
+            <a:schemeClr val="accent1"/>
+          </a:lnRef>
+          <a:fillRef idx="3">
+            <a:schemeClr val="accent1"/>
+          </a:fillRef>
+          <a:effectRef idx="2">
+            <a:schemeClr val="accent1"/>
+          </a:effectRef>
+          <a:fontRef idx="minor">
+            <a:schemeClr val="lt1"/>
+          </a:fontRef>
+        </p:style>
+        <p:txBody>
+          <a:bodyPr rtlCol="0" anchor="ctr"/>
+          <a:lstStyle/>
+          <a:p>
+            <a:pPr algn="ctr"/>
+          </a:p>
+        </p:txBody>
+      </p:sp>
+      <p:pic>
+        <p:nvPicPr>
+          <p:cNvPr id="14" name="Picture 13" descr="calendar-event_bl.png"/>
+          <p:cNvPicPr>
+            <a:picLocks noChangeAspect="1"/>
+          </p:cNvPicPr>
+          <p:nvPr/>
+        </p:nvPicPr>
+        <p:blipFill>
+          <a:blip r:embed="rId4"/>
+          <a:stretch>
+            <a:fillRect/>
+          </a:stretch>
+        </p:blipFill>
+        <p:spPr>
+          <a:xfrm>
+            <a:off x="1418760" y="1850760"/>
+            <a:ext cx="312480" cy="312480"/>
+          </a:xfrm>
+          <a:prstGeom prst="rect">
+            <a:avLst/>
+          </a:prstGeom>
+        </p:spPr>
+      </p:pic>
+      <p:sp>
+        <p:nvSpPr>
+          <p:cNvPr id="15" name="TextBox 14"/>
+          <p:cNvSpPr txBox="1"/>
+          <p:nvPr/>
+        </p:nvSpPr>
+        <p:spPr>
+          <a:xfrm>
+            <a:off x="2015999" y="1584000"/>
+            <a:ext cx="2304000" cy="846000"/>
+          </a:xfrm>
+          <a:prstGeom prst="rect">
+            <a:avLst/>
+          </a:prstGeom>
+          <a:noFill/>
+        </p:spPr>
+        <p:txBody>
+          <a:bodyPr wrap="square" lIns="36000" rIns="36000" tIns="18000" bIns="18000" anchor="ctr">
+            <a:spAutoFit/>
+          </a:bodyPr>
+          <a:lstStyle/>
+          <a:p>
+            <a:pPr algn="l">
+              <a:lnSpc>
+                <a:spcPct val="110000"/>
+              </a:lnSpc>
+            </a:pPr>
+            <a:r>
+              <a:rPr sz="1350" b="1">
+                <a:solidFill>
+                  <a:srgbClr val="111111"/>
+                </a:solidFill>
+                <a:latin typeface="Poppins"/>
+              </a:rPr>
+              <a:t>Démarrer à 2 par semaine</a:t>
+            </a:r>
+          </a:p>
+        </p:txBody>
+      </p:sp>
+      <p:sp>
+        <p:nvSpPr>
+          <p:cNvPr id="16" name="TextBox 15"/>
+          <p:cNvSpPr txBox="1"/>
+          <p:nvPr/>
+        </p:nvSpPr>
+        <p:spPr>
+          <a:xfrm>
+            <a:off x="4356000" y="1584000"/>
+            <a:ext cx="4248000" cy="846000"/>
+          </a:xfrm>
+          <a:prstGeom prst="rect">
+            <a:avLst/>
+          </a:prstGeom>
+          <a:noFill/>
+        </p:spPr>
+        <p:txBody>
+          <a:bodyPr wrap="square" lIns="36000" rIns="36000" tIns="18000" bIns="18000" anchor="ctr">
+            <a:spAutoFit/>
+          </a:bodyPr>
+          <a:lstStyle/>
+          <a:p>
+            <a:pPr algn="l">
+              <a:lnSpc>
+                <a:spcPct val="110000"/>
+              </a:lnSpc>
+            </a:pPr>
+            <a:r>
+              <a:rPr sz="1050" b="0">
+                <a:solidFill>
+                  <a:srgbClr val="5A5A5A"/>
+                </a:solidFill>
+                <a:latin typeface="Poppins"/>
+              </a:rPr>
+              <a:t>LinkedIn d’abord, mardi et jeudi à 8 h : c’est là que sont vos 3 517 abonnés et vos acheteurs.</a:t>
+            </a:r>
+          </a:p>
+        </p:txBody>
+      </p:sp>
+      <p:sp>
+        <p:nvSpPr>
+          <p:cNvPr id="17" name="Rounded Rectangle 16"/>
+          <p:cNvSpPr/>
+          <p:nvPr/>
+        </p:nvSpPr>
+        <p:spPr>
+          <a:xfrm>
+            <a:off x="576000" y="2538000"/>
+            <a:ext cx="8136000" cy="846000"/>
+          </a:xfrm>
+          <a:prstGeom prst="roundRect">
+            <a:avLst>
+              <a:gd name="adj" fmla="val 6000"/>
+            </a:avLst>
+          </a:prstGeom>
+          <a:solidFill>
+            <a:srgbClr val="F4F4F2"/>
+          </a:solidFill>
+          <a:ln>
+            <a:noFill/>
+          </a:ln>
+          <a:effectLst/>
+        </p:spPr>
+        <p:style>
+          <a:lnRef idx="1">
+            <a:schemeClr val="accent1"/>
+          </a:lnRef>
+          <a:fillRef idx="3">
+            <a:schemeClr val="accent1"/>
+          </a:fillRef>
+          <a:effectRef idx="2">
+            <a:schemeClr val="accent1"/>
+          </a:effectRef>
+          <a:fontRef idx="minor">
+            <a:schemeClr val="lt1"/>
+          </a:fontRef>
+        </p:style>
+        <p:txBody>
+          <a:bodyPr rtlCol="0" anchor="ctr"/>
+          <a:lstStyle/>
+          <a:p>
+            <a:pPr algn="ctr"/>
+          </a:p>
+        </p:txBody>
+      </p:sp>
+      <p:sp>
+        <p:nvSpPr>
+          <p:cNvPr id="18" name="Rectangle 17"/>
+          <p:cNvSpPr/>
+          <p:nvPr/>
+        </p:nvSpPr>
+        <p:spPr>
+          <a:xfrm>
+            <a:off x="576000" y="2538000"/>
+            <a:ext cx="90000" cy="846000"/>
+          </a:xfrm>
+          <a:prstGeom prst="rect">
+            <a:avLst/>
+          </a:prstGeom>
+          <a:solidFill>
+            <a:srgbClr val="EE5B22"/>
+          </a:solidFill>
+          <a:ln>
+            <a:noFill/>
+          </a:ln>
+          <a:effectLst/>
+        </p:spPr>
+        <p:style>
+          <a:lnRef idx="1">
+            <a:schemeClr val="accent1"/>
+          </a:lnRef>
+          <a:fillRef idx="3">
+            <a:schemeClr val="accent1"/>
+          </a:fillRef>
+          <a:effectRef idx="2">
+            <a:schemeClr val="accent1"/>
+          </a:effectRef>
+          <a:fontRef idx="minor">
+            <a:schemeClr val="lt1"/>
+          </a:fontRef>
+        </p:style>
+        <p:txBody>
+          <a:bodyPr rtlCol="0" anchor="ctr"/>
+          <a:lstStyle/>
+          <a:p>
+            <a:pPr algn="ctr"/>
+          </a:p>
+        </p:txBody>
+      </p:sp>
+      <p:sp>
+        <p:nvSpPr>
+          <p:cNvPr id="19" name="TextBox 18"/>
+          <p:cNvSpPr txBox="1"/>
+          <p:nvPr/>
+        </p:nvSpPr>
+        <p:spPr>
+          <a:xfrm>
+            <a:off x="756000" y="2538000"/>
+            <a:ext cx="468000" cy="846000"/>
+          </a:xfrm>
+          <a:prstGeom prst="rect">
+            <a:avLst/>
+          </a:prstGeom>
+          <a:noFill/>
+        </p:spPr>
+        <p:txBody>
+          <a:bodyPr wrap="square" lIns="36000" rIns="36000" tIns="18000" bIns="18000" anchor="ctr">
+            <a:spAutoFit/>
+          </a:bodyPr>
+          <a:lstStyle/>
+          <a:p>
+            <a:pPr algn="ctr">
+              <a:lnSpc>
+                <a:spcPct val="110000"/>
+              </a:lnSpc>
+            </a:pPr>
+            <a:r>
+              <a:rPr sz="2400" b="1">
+                <a:solidFill>
+                  <a:srgbClr val="EE5B22"/>
+                </a:solidFill>
+                <a:latin typeface="Poppins"/>
+              </a:rPr>
+              <a:t>2</a:t>
+            </a:r>
+          </a:p>
+        </p:txBody>
+      </p:sp>
+      <p:sp>
+        <p:nvSpPr>
+          <p:cNvPr id="20" name="Oval 19"/>
+          <p:cNvSpPr/>
+          <p:nvPr/>
+        </p:nvSpPr>
+        <p:spPr>
+          <a:xfrm>
+            <a:off x="1296000" y="2682000"/>
+            <a:ext cx="558000" cy="558000"/>
           </a:xfrm>
           <a:prstGeom prst="ellipse">
             <a:avLst/>
@@ -11863,22 +16906,22 @@
       </p:sp>
       <p:pic>
         <p:nvPicPr>
-          <p:cNvPr id="13" name="Picture 12" descr="calendar-event_bl.png"/>
+          <p:cNvPr id="21" name="Picture 20" descr="briefcase_bl.png"/>
           <p:cNvPicPr>
             <a:picLocks noChangeAspect="1"/>
           </p:cNvPicPr>
           <p:nvPr/>
         </p:nvPicPr>
         <p:blipFill>
-          <a:blip r:embed="rId3"/>
+          <a:blip r:embed="rId5"/>
           <a:stretch>
             <a:fillRect/>
           </a:stretch>
         </p:blipFill>
         <p:spPr>
           <a:xfrm>
-            <a:off x="1534680" y="1840679"/>
-            <a:ext cx="332640" cy="332640"/>
+            <a:off x="1418760" y="2804760"/>
+            <a:ext cx="312480" cy="312480"/>
           </a:xfrm>
           <a:prstGeom prst="rect">
             <a:avLst/>
@@ -11887,14 +16930,14 @@
       </p:pic>
       <p:sp>
         <p:nvSpPr>
-          <p:cNvPr id="14" name="TextBox 13"/>
+          <p:cNvPr id="22" name="TextBox 21"/>
           <p:cNvSpPr txBox="1"/>
           <p:nvPr/>
         </p:nvSpPr>
         <p:spPr>
           <a:xfrm>
-            <a:off x="2196000" y="1584000"/>
-            <a:ext cx="3060000" cy="846000"/>
+            <a:off x="2015999" y="2538000"/>
+            <a:ext cx="2304000" cy="846000"/>
           </a:xfrm>
           <a:prstGeom prst="rect">
             <a:avLst/>
@@ -11913,27 +16956,27 @@
               </a:lnSpc>
             </a:pPr>
             <a:r>
-              <a:rPr sz="1450" b="1">
+              <a:rPr sz="1350" b="1">
                 <a:solidFill>
                   <a:srgbClr val="111111"/>
                 </a:solidFill>
                 <a:latin typeface="Poppins"/>
               </a:rPr>
-              <a:t>Démarrer à 2 par semaine</a:t>
-            </a:r>
-          </a:p>
-        </p:txBody>
-      </p:sp>
-      <p:sp>
-        <p:nvSpPr>
-          <p:cNvPr id="15" name="TextBox 14"/>
+              <a:t>Publier vos offres d’emploi</a:t>
+            </a:r>
+          </a:p>
+        </p:txBody>
+      </p:sp>
+      <p:sp>
+        <p:nvSpPr>
+          <p:cNvPr id="23" name="TextBox 22"/>
           <p:cNvSpPr txBox="1"/>
           <p:nvPr/>
         </p:nvSpPr>
         <p:spPr>
           <a:xfrm>
-            <a:off x="5256000" y="1584000"/>
-            <a:ext cx="6228000" cy="846000"/>
+            <a:off x="4356000" y="2538000"/>
+            <a:ext cx="4248000" cy="846000"/>
           </a:xfrm>
           <a:prstGeom prst="rect">
             <a:avLst/>
@@ -11952,27 +16995,302 @@
               </a:lnSpc>
             </a:pPr>
             <a:r>
-              <a:rPr sz="1200" b="0">
+              <a:rPr sz="1050" b="0">
                 <a:solidFill>
                   <a:srgbClr val="5A5A5A"/>
                 </a:solidFill>
                 <a:latin typeface="Poppins"/>
               </a:rPr>
-              <a:t>LinkedIn d’abord, mardi et jeudi à 8 h : c’est là que sont vos 3 517 abonnés et vos acheteurs.</a:t>
-            </a:r>
-          </a:p>
-        </p:txBody>
-      </p:sp>
-      <p:sp>
-        <p:nvSpPr>
-          <p:cNvPr id="16" name="Rounded Rectangle 15"/>
+              <a:t>La publication qui voyage le plus chez AGL : chaque recrutement devient une vitrine.</a:t>
+            </a:r>
+          </a:p>
+        </p:txBody>
+      </p:sp>
+      <p:sp>
+        <p:nvSpPr>
+          <p:cNvPr id="24" name="Rounded Rectangle 23"/>
           <p:cNvSpPr/>
           <p:nvPr/>
         </p:nvSpPr>
         <p:spPr>
           <a:xfrm>
-            <a:off x="576000" y="2538000"/>
-            <a:ext cx="11052000" cy="846000"/>
+            <a:off x="576000" y="3492000"/>
+            <a:ext cx="8136000" cy="846000"/>
+          </a:xfrm>
+          <a:prstGeom prst="roundRect">
+            <a:avLst>
+              <a:gd name="adj" fmla="val 6000"/>
+            </a:avLst>
+          </a:prstGeom>
+          <a:solidFill>
+            <a:srgbClr val="E3E7EC"/>
+          </a:solidFill>
+          <a:ln>
+            <a:noFill/>
+          </a:ln>
+          <a:effectLst/>
+        </p:spPr>
+        <p:style>
+          <a:lnRef idx="1">
+            <a:schemeClr val="accent1"/>
+          </a:lnRef>
+          <a:fillRef idx="3">
+            <a:schemeClr val="accent1"/>
+          </a:fillRef>
+          <a:effectRef idx="2">
+            <a:schemeClr val="accent1"/>
+          </a:effectRef>
+          <a:fontRef idx="minor">
+            <a:schemeClr val="lt1"/>
+          </a:fontRef>
+        </p:style>
+        <p:txBody>
+          <a:bodyPr rtlCol="0" anchor="ctr"/>
+          <a:lstStyle/>
+          <a:p>
+            <a:pPr algn="ctr"/>
+          </a:p>
+        </p:txBody>
+      </p:sp>
+      <p:sp>
+        <p:nvSpPr>
+          <p:cNvPr id="25" name="Rectangle 24"/>
+          <p:cNvSpPr/>
+          <p:nvPr/>
+        </p:nvSpPr>
+        <p:spPr>
+          <a:xfrm>
+            <a:off x="576000" y="3492000"/>
+            <a:ext cx="90000" cy="846000"/>
+          </a:xfrm>
+          <a:prstGeom prst="rect">
+            <a:avLst/>
+          </a:prstGeom>
+          <a:solidFill>
+            <a:srgbClr val="EE5B22"/>
+          </a:solidFill>
+          <a:ln>
+            <a:noFill/>
+          </a:ln>
+          <a:effectLst/>
+        </p:spPr>
+        <p:style>
+          <a:lnRef idx="1">
+            <a:schemeClr val="accent1"/>
+          </a:lnRef>
+          <a:fillRef idx="3">
+            <a:schemeClr val="accent1"/>
+          </a:fillRef>
+          <a:effectRef idx="2">
+            <a:schemeClr val="accent1"/>
+          </a:effectRef>
+          <a:fontRef idx="minor">
+            <a:schemeClr val="lt1"/>
+          </a:fontRef>
+        </p:style>
+        <p:txBody>
+          <a:bodyPr rtlCol="0" anchor="ctr"/>
+          <a:lstStyle/>
+          <a:p>
+            <a:pPr algn="ctr"/>
+          </a:p>
+        </p:txBody>
+      </p:sp>
+      <p:sp>
+        <p:nvSpPr>
+          <p:cNvPr id="26" name="TextBox 25"/>
+          <p:cNvSpPr txBox="1"/>
+          <p:nvPr/>
+        </p:nvSpPr>
+        <p:spPr>
+          <a:xfrm>
+            <a:off x="756000" y="3492000"/>
+            <a:ext cx="468000" cy="846000"/>
+          </a:xfrm>
+          <a:prstGeom prst="rect">
+            <a:avLst/>
+          </a:prstGeom>
+          <a:noFill/>
+        </p:spPr>
+        <p:txBody>
+          <a:bodyPr wrap="square" lIns="36000" rIns="36000" tIns="18000" bIns="18000" anchor="ctr">
+            <a:spAutoFit/>
+          </a:bodyPr>
+          <a:lstStyle/>
+          <a:p>
+            <a:pPr algn="ctr">
+              <a:lnSpc>
+                <a:spcPct val="110000"/>
+              </a:lnSpc>
+            </a:pPr>
+            <a:r>
+              <a:rPr sz="2400" b="1">
+                <a:solidFill>
+                  <a:srgbClr val="EE5B22"/>
+                </a:solidFill>
+                <a:latin typeface="Poppins"/>
+              </a:rPr>
+              <a:t>3</a:t>
+            </a:r>
+          </a:p>
+        </p:txBody>
+      </p:sp>
+      <p:sp>
+        <p:nvSpPr>
+          <p:cNvPr id="27" name="Oval 26"/>
+          <p:cNvSpPr/>
+          <p:nvPr/>
+        </p:nvSpPr>
+        <p:spPr>
+          <a:xfrm>
+            <a:off x="1296000" y="3636000"/>
+            <a:ext cx="558000" cy="558000"/>
+          </a:xfrm>
+          <a:prstGeom prst="ellipse">
+            <a:avLst/>
+          </a:prstGeom>
+          <a:solidFill>
+            <a:srgbClr val="EE5B22"/>
+          </a:solidFill>
+          <a:ln>
+            <a:noFill/>
+          </a:ln>
+          <a:effectLst/>
+        </p:spPr>
+        <p:style>
+          <a:lnRef idx="1">
+            <a:schemeClr val="accent1"/>
+          </a:lnRef>
+          <a:fillRef idx="3">
+            <a:schemeClr val="accent1"/>
+          </a:fillRef>
+          <a:effectRef idx="2">
+            <a:schemeClr val="accent1"/>
+          </a:effectRef>
+          <a:fontRef idx="minor">
+            <a:schemeClr val="lt1"/>
+          </a:fontRef>
+        </p:style>
+        <p:txBody>
+          <a:bodyPr rtlCol="0" anchor="ctr"/>
+          <a:lstStyle/>
+          <a:p>
+            <a:pPr algn="ctr"/>
+          </a:p>
+        </p:txBody>
+      </p:sp>
+      <p:pic>
+        <p:nvPicPr>
+          <p:cNvPr id="28" name="Picture 27" descr="forklift_bl.png"/>
+          <p:cNvPicPr>
+            <a:picLocks noChangeAspect="1"/>
+          </p:cNvPicPr>
+          <p:nvPr/>
+        </p:nvPicPr>
+        <p:blipFill>
+          <a:blip r:embed="rId6"/>
+          <a:stretch>
+            <a:fillRect/>
+          </a:stretch>
+        </p:blipFill>
+        <p:spPr>
+          <a:xfrm>
+            <a:off x="1418760" y="3758760"/>
+            <a:ext cx="312480" cy="312480"/>
+          </a:xfrm>
+          <a:prstGeom prst="rect">
+            <a:avLst/>
+          </a:prstGeom>
+        </p:spPr>
+      </p:pic>
+      <p:sp>
+        <p:nvSpPr>
+          <p:cNvPr id="29" name="TextBox 28"/>
+          <p:cNvSpPr txBox="1"/>
+          <p:nvPr/>
+        </p:nvSpPr>
+        <p:spPr>
+          <a:xfrm>
+            <a:off x="2015999" y="3492000"/>
+            <a:ext cx="2304000" cy="846000"/>
+          </a:xfrm>
+          <a:prstGeom prst="rect">
+            <a:avLst/>
+          </a:prstGeom>
+          <a:noFill/>
+        </p:spPr>
+        <p:txBody>
+          <a:bodyPr wrap="square" lIns="36000" rIns="36000" tIns="18000" bIns="18000" anchor="ctr">
+            <a:spAutoFit/>
+          </a:bodyPr>
+          <a:lstStyle/>
+          <a:p>
+            <a:pPr algn="l">
+              <a:lnSpc>
+                <a:spcPct val="110000"/>
+              </a:lnSpc>
+            </a:pPr>
+            <a:r>
+              <a:rPr sz="1350" b="1">
+                <a:solidFill>
+                  <a:srgbClr val="111111"/>
+                </a:solidFill>
+                <a:latin typeface="Poppins"/>
+              </a:rPr>
+              <a:t>Montrer vos équipes</a:t>
+            </a:r>
+          </a:p>
+        </p:txBody>
+      </p:sp>
+      <p:sp>
+        <p:nvSpPr>
+          <p:cNvPr id="30" name="TextBox 29"/>
+          <p:cNvSpPr txBox="1"/>
+          <p:nvPr/>
+        </p:nvSpPr>
+        <p:spPr>
+          <a:xfrm>
+            <a:off x="4356000" y="3492000"/>
+            <a:ext cx="4248000" cy="846000"/>
+          </a:xfrm>
+          <a:prstGeom prst="rect">
+            <a:avLst/>
+          </a:prstGeom>
+          <a:noFill/>
+        </p:spPr>
+        <p:txBody>
+          <a:bodyPr wrap="square" lIns="36000" rIns="36000" tIns="18000" bIns="18000" anchor="ctr">
+            <a:spAutoFit/>
+          </a:bodyPr>
+          <a:lstStyle/>
+          <a:p>
+            <a:pPr algn="l">
+              <a:lnSpc>
+                <a:spcPct val="110000"/>
+              </a:lnSpc>
+            </a:pPr>
+            <a:r>
+              <a:rPr sz="1050" b="0">
+                <a:solidFill>
+                  <a:srgbClr val="5A5A5A"/>
+                </a:solidFill>
+                <a:latin typeface="Poppins"/>
+              </a:rPr>
+              <a:t>Un cariste, un chauffeur, un chef de quai : une personne par mois, avec son accord.</a:t>
+            </a:r>
+          </a:p>
+        </p:txBody>
+      </p:sp>
+      <p:sp>
+        <p:nvSpPr>
+          <p:cNvPr id="31" name="Rounded Rectangle 30"/>
+          <p:cNvSpPr/>
+          <p:nvPr/>
+        </p:nvSpPr>
+        <p:spPr>
+          <a:xfrm>
+            <a:off x="576000" y="4446000"/>
+            <a:ext cx="8136000" cy="846000"/>
           </a:xfrm>
           <a:prstGeom prst="roundRect">
             <a:avLst>
@@ -12011,13 +17329,13 @@
       </p:sp>
       <p:sp>
         <p:nvSpPr>
-          <p:cNvPr id="17" name="Rectangle 16"/>
+          <p:cNvPr id="32" name="Rectangle 31"/>
           <p:cNvSpPr/>
           <p:nvPr/>
         </p:nvSpPr>
         <p:spPr>
           <a:xfrm>
-            <a:off x="576000" y="2538000"/>
+            <a:off x="576000" y="4446000"/>
             <a:ext cx="90000" cy="846000"/>
           </a:xfrm>
           <a:prstGeom prst="rect">
@@ -12055,14 +17373,14 @@
       </p:sp>
       <p:sp>
         <p:nvSpPr>
-          <p:cNvPr id="18" name="TextBox 17"/>
+          <p:cNvPr id="33" name="TextBox 32"/>
           <p:cNvSpPr txBox="1"/>
           <p:nvPr/>
         </p:nvSpPr>
         <p:spPr>
           <a:xfrm>
-            <a:off x="792000" y="2538000"/>
-            <a:ext cx="503999" cy="846000"/>
+            <a:off x="756000" y="4446000"/>
+            <a:ext cx="468000" cy="846000"/>
           </a:xfrm>
           <a:prstGeom prst="rect">
             <a:avLst/>
@@ -12087,21 +17405,21 @@
                 </a:solidFill>
                 <a:latin typeface="Poppins"/>
               </a:rPr>
-              <a:t>2</a:t>
-            </a:r>
-          </a:p>
-        </p:txBody>
-      </p:sp>
-      <p:sp>
-        <p:nvSpPr>
-          <p:cNvPr id="19" name="Oval 18"/>
+              <a:t>4</a:t>
+            </a:r>
+          </a:p>
+        </p:txBody>
+      </p:sp>
+      <p:sp>
+        <p:nvSpPr>
+          <p:cNvPr id="34" name="Oval 33"/>
           <p:cNvSpPr/>
           <p:nvPr/>
         </p:nvSpPr>
         <p:spPr>
           <a:xfrm>
-            <a:off x="1404000" y="2663999"/>
-            <a:ext cx="594000" cy="594000"/>
+            <a:off x="1296000" y="4590000"/>
+            <a:ext cx="558000" cy="558000"/>
           </a:xfrm>
           <a:prstGeom prst="ellipse">
             <a:avLst/>
@@ -12138,22 +17456,22 @@
       </p:sp>
       <p:pic>
         <p:nvPicPr>
-          <p:cNvPr id="20" name="Picture 19" descr="briefcase_bl.png"/>
+          <p:cNvPr id="35" name="Picture 34" descr="pencil_bl.png"/>
           <p:cNvPicPr>
             <a:picLocks noChangeAspect="1"/>
           </p:cNvPicPr>
           <p:nvPr/>
         </p:nvPicPr>
         <p:blipFill>
-          <a:blip r:embed="rId4"/>
+          <a:blip r:embed="rId7"/>
           <a:stretch>
             <a:fillRect/>
           </a:stretch>
         </p:blipFill>
         <p:spPr>
           <a:xfrm>
-            <a:off x="1534680" y="2794679"/>
-            <a:ext cx="332640" cy="332640"/>
+            <a:off x="1418760" y="4712760"/>
+            <a:ext cx="312480" cy="312480"/>
           </a:xfrm>
           <a:prstGeom prst="rect">
             <a:avLst/>
@@ -12162,14 +17480,14 @@
       </p:pic>
       <p:sp>
         <p:nvSpPr>
-          <p:cNvPr id="21" name="TextBox 20"/>
+          <p:cNvPr id="36" name="TextBox 35"/>
           <p:cNvSpPr txBox="1"/>
           <p:nvPr/>
         </p:nvSpPr>
         <p:spPr>
           <a:xfrm>
-            <a:off x="2196000" y="2538000"/>
-            <a:ext cx="3060000" cy="846000"/>
+            <a:off x="2015999" y="4446000"/>
+            <a:ext cx="2304000" cy="846000"/>
           </a:xfrm>
           <a:prstGeom prst="rect">
             <a:avLst/>
@@ -12188,27 +17506,27 @@
               </a:lnSpc>
             </a:pPr>
             <a:r>
-              <a:rPr sz="1450" b="1">
+              <a:rPr sz="1350" b="1">
                 <a:solidFill>
                   <a:srgbClr val="111111"/>
                 </a:solidFill>
                 <a:latin typeface="Poppins"/>
               </a:rPr>
-              <a:t>Publier vos offres d’emploi</a:t>
-            </a:r>
-          </a:p>
-        </p:txBody>
-      </p:sp>
-      <p:sp>
-        <p:nvSpPr>
-          <p:cNvPr id="22" name="TextBox 21"/>
+              <a:t>Mettre la page à jour</a:t>
+            </a:r>
+          </a:p>
+        </p:txBody>
+      </p:sp>
+      <p:sp>
+        <p:nvSpPr>
+          <p:cNvPr id="37" name="TextBox 36"/>
           <p:cNvSpPr txBox="1"/>
           <p:nvPr/>
         </p:nvSpPr>
         <p:spPr>
           <a:xfrm>
-            <a:off x="5256000" y="2538000"/>
-            <a:ext cx="6228000" cy="846000"/>
+            <a:off x="4356000" y="4446000"/>
+            <a:ext cx="4248000" cy="846000"/>
           </a:xfrm>
           <a:prstGeom prst="rect">
             <a:avLst/>
@@ -12227,27 +17545,27 @@
               </a:lnSpc>
             </a:pPr>
             <a:r>
-              <a:rPr sz="1200" b="0">
+              <a:rPr sz="1050" b="0">
                 <a:solidFill>
                   <a:srgbClr val="5A5A5A"/>
                 </a:solidFill>
                 <a:latin typeface="Poppins"/>
               </a:rPr>
-              <a:t>La publication qui voyage le plus chez AGL : chaque recrutement devient une vitrine.</a:t>
-            </a:r>
-          </a:p>
-        </p:txBody>
-      </p:sp>
-      <p:sp>
-        <p:nvSpPr>
-          <p:cNvPr id="23" name="Rounded Rectangle 22"/>
+              <a:t>Présentation, ancienneté, certifications en cours, lien vers le site, photo de couverture.</a:t>
+            </a:r>
+          </a:p>
+        </p:txBody>
+      </p:sp>
+      <p:sp>
+        <p:nvSpPr>
+          <p:cNvPr id="38" name="Rounded Rectangle 37"/>
           <p:cNvSpPr/>
           <p:nvPr/>
         </p:nvSpPr>
         <p:spPr>
           <a:xfrm>
-            <a:off x="576000" y="3492000"/>
-            <a:ext cx="11052000" cy="846000"/>
+            <a:off x="576000" y="5400000"/>
+            <a:ext cx="8136000" cy="846000"/>
           </a:xfrm>
           <a:prstGeom prst="roundRect">
             <a:avLst>
@@ -12255,7 +17573,7 @@
             </a:avLst>
           </a:prstGeom>
           <a:solidFill>
-            <a:srgbClr val="FFFFFF"/>
+            <a:srgbClr val="E3E7EC"/>
           </a:solidFill>
           <a:ln>
             <a:noFill/>
@@ -12286,13 +17604,13 @@
       </p:sp>
       <p:sp>
         <p:nvSpPr>
-          <p:cNvPr id="24" name="Rectangle 23"/>
+          <p:cNvPr id="39" name="Rectangle 38"/>
           <p:cNvSpPr/>
           <p:nvPr/>
         </p:nvSpPr>
         <p:spPr>
           <a:xfrm>
-            <a:off x="576000" y="3492000"/>
+            <a:off x="576000" y="5400000"/>
             <a:ext cx="90000" cy="846000"/>
           </a:xfrm>
           <a:prstGeom prst="rect">
@@ -12330,14 +17648,14 @@
       </p:sp>
       <p:sp>
         <p:nvSpPr>
-          <p:cNvPr id="25" name="TextBox 24"/>
+          <p:cNvPr id="40" name="TextBox 39"/>
           <p:cNvSpPr txBox="1"/>
           <p:nvPr/>
         </p:nvSpPr>
         <p:spPr>
           <a:xfrm>
-            <a:off x="792000" y="3492000"/>
-            <a:ext cx="503999" cy="846000"/>
+            <a:off x="756000" y="5400000"/>
+            <a:ext cx="468000" cy="846000"/>
           </a:xfrm>
           <a:prstGeom prst="rect">
             <a:avLst/>
@@ -12362,215 +17680,23 @@
                 </a:solidFill>
                 <a:latin typeface="Poppins"/>
               </a:rPr>
-              <a:t>3</a:t>
-            </a:r>
-          </a:p>
-        </p:txBody>
-      </p:sp>
-      <p:sp>
-        <p:nvSpPr>
-          <p:cNvPr id="26" name="Oval 25"/>
+              <a:t>5</a:t>
+            </a:r>
+          </a:p>
+        </p:txBody>
+      </p:sp>
+      <p:sp>
+        <p:nvSpPr>
+          <p:cNvPr id="41" name="Oval 40"/>
           <p:cNvSpPr/>
           <p:nvPr/>
         </p:nvSpPr>
         <p:spPr>
           <a:xfrm>
-            <a:off x="1404000" y="3617999"/>
-            <a:ext cx="594000" cy="594000"/>
+            <a:off x="1296000" y="5544000"/>
+            <a:ext cx="558000" cy="558000"/>
           </a:xfrm>
           <a:prstGeom prst="ellipse">
-            <a:avLst/>
-          </a:prstGeom>
-          <a:solidFill>
-            <a:srgbClr val="11202E"/>
-          </a:solidFill>
-          <a:ln>
-            <a:noFill/>
-          </a:ln>
-          <a:effectLst/>
-        </p:spPr>
-        <p:style>
-          <a:lnRef idx="1">
-            <a:schemeClr val="accent1"/>
-          </a:lnRef>
-          <a:fillRef idx="3">
-            <a:schemeClr val="accent1"/>
-          </a:fillRef>
-          <a:effectRef idx="2">
-            <a:schemeClr val="accent1"/>
-          </a:effectRef>
-          <a:fontRef idx="minor">
-            <a:schemeClr val="lt1"/>
-          </a:fontRef>
-        </p:style>
-        <p:txBody>
-          <a:bodyPr rtlCol="0" anchor="ctr"/>
-          <a:lstStyle/>
-          <a:p>
-            <a:pPr algn="ctr"/>
-          </a:p>
-        </p:txBody>
-      </p:sp>
-      <p:pic>
-        <p:nvPicPr>
-          <p:cNvPr id="27" name="Picture 26" descr="forklift_bl.png"/>
-          <p:cNvPicPr>
-            <a:picLocks noChangeAspect="1"/>
-          </p:cNvPicPr>
-          <p:nvPr/>
-        </p:nvPicPr>
-        <p:blipFill>
-          <a:blip r:embed="rId5"/>
-          <a:stretch>
-            <a:fillRect/>
-          </a:stretch>
-        </p:blipFill>
-        <p:spPr>
-          <a:xfrm>
-            <a:off x="1534680" y="3748679"/>
-            <a:ext cx="332640" cy="332640"/>
-          </a:xfrm>
-          <a:prstGeom prst="rect">
-            <a:avLst/>
-          </a:prstGeom>
-        </p:spPr>
-      </p:pic>
-      <p:sp>
-        <p:nvSpPr>
-          <p:cNvPr id="28" name="TextBox 27"/>
-          <p:cNvSpPr txBox="1"/>
-          <p:nvPr/>
-        </p:nvSpPr>
-        <p:spPr>
-          <a:xfrm>
-            <a:off x="2196000" y="3492000"/>
-            <a:ext cx="3060000" cy="846000"/>
-          </a:xfrm>
-          <a:prstGeom prst="rect">
-            <a:avLst/>
-          </a:prstGeom>
-          <a:noFill/>
-        </p:spPr>
-        <p:txBody>
-          <a:bodyPr wrap="square" lIns="36000" rIns="36000" tIns="18000" bIns="18000" anchor="ctr">
-            <a:spAutoFit/>
-          </a:bodyPr>
-          <a:lstStyle/>
-          <a:p>
-            <a:pPr algn="l">
-              <a:lnSpc>
-                <a:spcPct val="110000"/>
-              </a:lnSpc>
-            </a:pPr>
-            <a:r>
-              <a:rPr sz="1450" b="1">
-                <a:solidFill>
-                  <a:srgbClr val="111111"/>
-                </a:solidFill>
-                <a:latin typeface="Poppins"/>
-              </a:rPr>
-              <a:t>Montrer vos équipes</a:t>
-            </a:r>
-          </a:p>
-        </p:txBody>
-      </p:sp>
-      <p:sp>
-        <p:nvSpPr>
-          <p:cNvPr id="29" name="TextBox 28"/>
-          <p:cNvSpPr txBox="1"/>
-          <p:nvPr/>
-        </p:nvSpPr>
-        <p:spPr>
-          <a:xfrm>
-            <a:off x="5256000" y="3492000"/>
-            <a:ext cx="6228000" cy="846000"/>
-          </a:xfrm>
-          <a:prstGeom prst="rect">
-            <a:avLst/>
-          </a:prstGeom>
-          <a:noFill/>
-        </p:spPr>
-        <p:txBody>
-          <a:bodyPr wrap="square" lIns="36000" rIns="36000" tIns="18000" bIns="18000" anchor="ctr">
-            <a:spAutoFit/>
-          </a:bodyPr>
-          <a:lstStyle/>
-          <a:p>
-            <a:pPr algn="l">
-              <a:lnSpc>
-                <a:spcPct val="110000"/>
-              </a:lnSpc>
-            </a:pPr>
-            <a:r>
-              <a:rPr sz="1200" b="0">
-                <a:solidFill>
-                  <a:srgbClr val="5A5A5A"/>
-                </a:solidFill>
-                <a:latin typeface="Poppins"/>
-              </a:rPr>
-              <a:t>Un cariste, un chauffeur, un chef de quai : une personne par mois, avec son accord.</a:t>
-            </a:r>
-          </a:p>
-        </p:txBody>
-      </p:sp>
-      <p:sp>
-        <p:nvSpPr>
-          <p:cNvPr id="30" name="Rounded Rectangle 29"/>
-          <p:cNvSpPr/>
-          <p:nvPr/>
-        </p:nvSpPr>
-        <p:spPr>
-          <a:xfrm>
-            <a:off x="576000" y="4446000"/>
-            <a:ext cx="11052000" cy="846000"/>
-          </a:xfrm>
-          <a:prstGeom prst="roundRect">
-            <a:avLst>
-              <a:gd name="adj" fmla="val 6000"/>
-            </a:avLst>
-          </a:prstGeom>
-          <a:solidFill>
-            <a:srgbClr val="F4F4F2"/>
-          </a:solidFill>
-          <a:ln>
-            <a:noFill/>
-          </a:ln>
-          <a:effectLst/>
-        </p:spPr>
-        <p:style>
-          <a:lnRef idx="1">
-            <a:schemeClr val="accent1"/>
-          </a:lnRef>
-          <a:fillRef idx="3">
-            <a:schemeClr val="accent1"/>
-          </a:fillRef>
-          <a:effectRef idx="2">
-            <a:schemeClr val="accent1"/>
-          </a:effectRef>
-          <a:fontRef idx="minor">
-            <a:schemeClr val="lt1"/>
-          </a:fontRef>
-        </p:style>
-        <p:txBody>
-          <a:bodyPr rtlCol="0" anchor="ctr"/>
-          <a:lstStyle/>
-          <a:p>
-            <a:pPr algn="ctr"/>
-          </a:p>
-        </p:txBody>
-      </p:sp>
-      <p:sp>
-        <p:nvSpPr>
-          <p:cNvPr id="31" name="Rectangle 30"/>
-          <p:cNvSpPr/>
-          <p:nvPr/>
-        </p:nvSpPr>
-        <p:spPr>
-          <a:xfrm>
-            <a:off x="576000" y="4446000"/>
-            <a:ext cx="90000" cy="846000"/>
-          </a:xfrm>
-          <a:prstGeom prst="rect">
             <a:avLst/>
           </a:prstGeom>
           <a:solidFill>
@@ -12603,107 +17729,24 @@
           </a:p>
         </p:txBody>
       </p:sp>
-      <p:sp>
-        <p:nvSpPr>
-          <p:cNvPr id="32" name="TextBox 31"/>
-          <p:cNvSpPr txBox="1"/>
-          <p:nvPr/>
-        </p:nvSpPr>
-        <p:spPr>
-          <a:xfrm>
-            <a:off x="792000" y="4446000"/>
-            <a:ext cx="503999" cy="846000"/>
-          </a:xfrm>
-          <a:prstGeom prst="rect">
-            <a:avLst/>
-          </a:prstGeom>
-          <a:noFill/>
-        </p:spPr>
-        <p:txBody>
-          <a:bodyPr wrap="square" lIns="36000" rIns="36000" tIns="18000" bIns="18000" anchor="ctr">
-            <a:spAutoFit/>
-          </a:bodyPr>
-          <a:lstStyle/>
-          <a:p>
-            <a:pPr algn="ctr">
-              <a:lnSpc>
-                <a:spcPct val="110000"/>
-              </a:lnSpc>
-            </a:pPr>
-            <a:r>
-              <a:rPr sz="2400" b="1">
-                <a:solidFill>
-                  <a:srgbClr val="EE5B22"/>
-                </a:solidFill>
-                <a:latin typeface="Poppins"/>
-              </a:rPr>
-              <a:t>4</a:t>
-            </a:r>
-          </a:p>
-        </p:txBody>
-      </p:sp>
-      <p:sp>
-        <p:nvSpPr>
-          <p:cNvPr id="33" name="Oval 32"/>
-          <p:cNvSpPr/>
-          <p:nvPr/>
-        </p:nvSpPr>
-        <p:spPr>
-          <a:xfrm>
-            <a:off x="1404000" y="4571999"/>
-            <a:ext cx="594000" cy="594000"/>
-          </a:xfrm>
-          <a:prstGeom prst="ellipse">
-            <a:avLst/>
-          </a:prstGeom>
-          <a:solidFill>
-            <a:srgbClr val="11202E"/>
-          </a:solidFill>
-          <a:ln>
-            <a:noFill/>
-          </a:ln>
-          <a:effectLst/>
-        </p:spPr>
-        <p:style>
-          <a:lnRef idx="1">
-            <a:schemeClr val="accent1"/>
-          </a:lnRef>
-          <a:fillRef idx="3">
-            <a:schemeClr val="accent1"/>
-          </a:fillRef>
-          <a:effectRef idx="2">
-            <a:schemeClr val="accent1"/>
-          </a:effectRef>
-          <a:fontRef idx="minor">
-            <a:schemeClr val="lt1"/>
-          </a:fontRef>
-        </p:style>
-        <p:txBody>
-          <a:bodyPr rtlCol="0" anchor="ctr"/>
-          <a:lstStyle/>
-          <a:p>
-            <a:pPr algn="ctr"/>
-          </a:p>
-        </p:txBody>
-      </p:sp>
       <p:pic>
         <p:nvPicPr>
-          <p:cNvPr id="34" name="Picture 33" descr="pencil_bl.png"/>
+          <p:cNvPr id="42" name="Picture 41" descr="brand-instagram_bl.png"/>
           <p:cNvPicPr>
             <a:picLocks noChangeAspect="1"/>
           </p:cNvPicPr>
           <p:nvPr/>
         </p:nvPicPr>
         <p:blipFill>
-          <a:blip r:embed="rId6"/>
+          <a:blip r:embed="rId8"/>
           <a:stretch>
             <a:fillRect/>
           </a:stretch>
         </p:blipFill>
         <p:spPr>
           <a:xfrm>
-            <a:off x="1534680" y="4702679"/>
-            <a:ext cx="332640" cy="332640"/>
+            <a:off x="1418760" y="5666760"/>
+            <a:ext cx="312480" cy="312480"/>
           </a:xfrm>
           <a:prstGeom prst="rect">
             <a:avLst/>
@@ -12712,14 +17755,14 @@
       </p:pic>
       <p:sp>
         <p:nvSpPr>
-          <p:cNvPr id="35" name="TextBox 34"/>
+          <p:cNvPr id="43" name="TextBox 42"/>
           <p:cNvSpPr txBox="1"/>
           <p:nvPr/>
         </p:nvSpPr>
         <p:spPr>
           <a:xfrm>
-            <a:off x="2196000" y="4446000"/>
-            <a:ext cx="3060000" cy="846000"/>
+            <a:off x="2015999" y="5400000"/>
+            <a:ext cx="2304000" cy="846000"/>
           </a:xfrm>
           <a:prstGeom prst="rect">
             <a:avLst/>
@@ -12738,27 +17781,27 @@
               </a:lnSpc>
             </a:pPr>
             <a:r>
-              <a:rPr sz="1450" b="1">
+              <a:rPr sz="1350" b="1">
                 <a:solidFill>
                   <a:srgbClr val="111111"/>
                 </a:solidFill>
                 <a:latin typeface="Poppins"/>
               </a:rPr>
-              <a:t>Mettre la page à jour</a:t>
-            </a:r>
-          </a:p>
-        </p:txBody>
-      </p:sp>
-      <p:sp>
-        <p:nvSpPr>
-          <p:cNvPr id="36" name="TextBox 35"/>
+              <a:t>Réserver votre nom</a:t>
+            </a:r>
+          </a:p>
+        </p:txBody>
+      </p:sp>
+      <p:sp>
+        <p:nvSpPr>
+          <p:cNvPr id="44" name="TextBox 43"/>
           <p:cNvSpPr txBox="1"/>
           <p:nvPr/>
         </p:nvSpPr>
         <p:spPr>
           <a:xfrm>
-            <a:off x="5256000" y="4446000"/>
-            <a:ext cx="6228000" cy="846000"/>
+            <a:off x="4356000" y="5400000"/>
+            <a:ext cx="4248000" cy="846000"/>
           </a:xfrm>
           <a:prstGeom prst="rect">
             <a:avLst/>
@@ -12777,282 +17820,7 @@
               </a:lnSpc>
             </a:pPr>
             <a:r>
-              <a:rPr sz="1200" b="0">
-                <a:solidFill>
-                  <a:srgbClr val="5A5A5A"/>
-                </a:solidFill>
-                <a:latin typeface="Poppins"/>
-              </a:rPr>
-              <a:t>Présentation, ancienneté, certifications en cours, lien vers le site, photo de couverture.</a:t>
-            </a:r>
-          </a:p>
-        </p:txBody>
-      </p:sp>
-      <p:sp>
-        <p:nvSpPr>
-          <p:cNvPr id="37" name="Rounded Rectangle 36"/>
-          <p:cNvSpPr/>
-          <p:nvPr/>
-        </p:nvSpPr>
-        <p:spPr>
-          <a:xfrm>
-            <a:off x="576000" y="5400000"/>
-            <a:ext cx="11052000" cy="846000"/>
-          </a:xfrm>
-          <a:prstGeom prst="roundRect">
-            <a:avLst>
-              <a:gd name="adj" fmla="val 6000"/>
-            </a:avLst>
-          </a:prstGeom>
-          <a:solidFill>
-            <a:srgbClr val="FFFFFF"/>
-          </a:solidFill>
-          <a:ln>
-            <a:noFill/>
-          </a:ln>
-          <a:effectLst/>
-        </p:spPr>
-        <p:style>
-          <a:lnRef idx="1">
-            <a:schemeClr val="accent1"/>
-          </a:lnRef>
-          <a:fillRef idx="3">
-            <a:schemeClr val="accent1"/>
-          </a:fillRef>
-          <a:effectRef idx="2">
-            <a:schemeClr val="accent1"/>
-          </a:effectRef>
-          <a:fontRef idx="minor">
-            <a:schemeClr val="lt1"/>
-          </a:fontRef>
-        </p:style>
-        <p:txBody>
-          <a:bodyPr rtlCol="0" anchor="ctr"/>
-          <a:lstStyle/>
-          <a:p>
-            <a:pPr algn="ctr"/>
-          </a:p>
-        </p:txBody>
-      </p:sp>
-      <p:sp>
-        <p:nvSpPr>
-          <p:cNvPr id="38" name="Rectangle 37"/>
-          <p:cNvSpPr/>
-          <p:nvPr/>
-        </p:nvSpPr>
-        <p:spPr>
-          <a:xfrm>
-            <a:off x="576000" y="5400000"/>
-            <a:ext cx="90000" cy="846000"/>
-          </a:xfrm>
-          <a:prstGeom prst="rect">
-            <a:avLst/>
-          </a:prstGeom>
-          <a:solidFill>
-            <a:srgbClr val="EE5B22"/>
-          </a:solidFill>
-          <a:ln>
-            <a:noFill/>
-          </a:ln>
-          <a:effectLst/>
-        </p:spPr>
-        <p:style>
-          <a:lnRef idx="1">
-            <a:schemeClr val="accent1"/>
-          </a:lnRef>
-          <a:fillRef idx="3">
-            <a:schemeClr val="accent1"/>
-          </a:fillRef>
-          <a:effectRef idx="2">
-            <a:schemeClr val="accent1"/>
-          </a:effectRef>
-          <a:fontRef idx="minor">
-            <a:schemeClr val="lt1"/>
-          </a:fontRef>
-        </p:style>
-        <p:txBody>
-          <a:bodyPr rtlCol="0" anchor="ctr"/>
-          <a:lstStyle/>
-          <a:p>
-            <a:pPr algn="ctr"/>
-          </a:p>
-        </p:txBody>
-      </p:sp>
-      <p:sp>
-        <p:nvSpPr>
-          <p:cNvPr id="39" name="TextBox 38"/>
-          <p:cNvSpPr txBox="1"/>
-          <p:nvPr/>
-        </p:nvSpPr>
-        <p:spPr>
-          <a:xfrm>
-            <a:off x="792000" y="5400000"/>
-            <a:ext cx="503999" cy="846000"/>
-          </a:xfrm>
-          <a:prstGeom prst="rect">
-            <a:avLst/>
-          </a:prstGeom>
-          <a:noFill/>
-        </p:spPr>
-        <p:txBody>
-          <a:bodyPr wrap="square" lIns="36000" rIns="36000" tIns="18000" bIns="18000" anchor="ctr">
-            <a:spAutoFit/>
-          </a:bodyPr>
-          <a:lstStyle/>
-          <a:p>
-            <a:pPr algn="ctr">
-              <a:lnSpc>
-                <a:spcPct val="110000"/>
-              </a:lnSpc>
-            </a:pPr>
-            <a:r>
-              <a:rPr sz="2400" b="1">
-                <a:solidFill>
-                  <a:srgbClr val="EE5B22"/>
-                </a:solidFill>
-                <a:latin typeface="Poppins"/>
-              </a:rPr>
-              <a:t>5</a:t>
-            </a:r>
-          </a:p>
-        </p:txBody>
-      </p:sp>
-      <p:sp>
-        <p:nvSpPr>
-          <p:cNvPr id="40" name="Oval 39"/>
-          <p:cNvSpPr/>
-          <p:nvPr/>
-        </p:nvSpPr>
-        <p:spPr>
-          <a:xfrm>
-            <a:off x="1404000" y="5525999"/>
-            <a:ext cx="594000" cy="594000"/>
-          </a:xfrm>
-          <a:prstGeom prst="ellipse">
-            <a:avLst/>
-          </a:prstGeom>
-          <a:solidFill>
-            <a:srgbClr val="11202E"/>
-          </a:solidFill>
-          <a:ln>
-            <a:noFill/>
-          </a:ln>
-          <a:effectLst/>
-        </p:spPr>
-        <p:style>
-          <a:lnRef idx="1">
-            <a:schemeClr val="accent1"/>
-          </a:lnRef>
-          <a:fillRef idx="3">
-            <a:schemeClr val="accent1"/>
-          </a:fillRef>
-          <a:effectRef idx="2">
-            <a:schemeClr val="accent1"/>
-          </a:effectRef>
-          <a:fontRef idx="minor">
-            <a:schemeClr val="lt1"/>
-          </a:fontRef>
-        </p:style>
-        <p:txBody>
-          <a:bodyPr rtlCol="0" anchor="ctr"/>
-          <a:lstStyle/>
-          <a:p>
-            <a:pPr algn="ctr"/>
-          </a:p>
-        </p:txBody>
-      </p:sp>
-      <p:pic>
-        <p:nvPicPr>
-          <p:cNvPr id="41" name="Picture 40" descr="brand-instagram_bl.png"/>
-          <p:cNvPicPr>
-            <a:picLocks noChangeAspect="1"/>
-          </p:cNvPicPr>
-          <p:nvPr/>
-        </p:nvPicPr>
-        <p:blipFill>
-          <a:blip r:embed="rId7"/>
-          <a:stretch>
-            <a:fillRect/>
-          </a:stretch>
-        </p:blipFill>
-        <p:spPr>
-          <a:xfrm>
-            <a:off x="1534680" y="5656679"/>
-            <a:ext cx="332640" cy="332640"/>
-          </a:xfrm>
-          <a:prstGeom prst="rect">
-            <a:avLst/>
-          </a:prstGeom>
-        </p:spPr>
-      </p:pic>
-      <p:sp>
-        <p:nvSpPr>
-          <p:cNvPr id="42" name="TextBox 41"/>
-          <p:cNvSpPr txBox="1"/>
-          <p:nvPr/>
-        </p:nvSpPr>
-        <p:spPr>
-          <a:xfrm>
-            <a:off x="2196000" y="5400000"/>
-            <a:ext cx="3060000" cy="846000"/>
-          </a:xfrm>
-          <a:prstGeom prst="rect">
-            <a:avLst/>
-          </a:prstGeom>
-          <a:noFill/>
-        </p:spPr>
-        <p:txBody>
-          <a:bodyPr wrap="square" lIns="36000" rIns="36000" tIns="18000" bIns="18000" anchor="ctr">
-            <a:spAutoFit/>
-          </a:bodyPr>
-          <a:lstStyle/>
-          <a:p>
-            <a:pPr algn="l">
-              <a:lnSpc>
-                <a:spcPct val="110000"/>
-              </a:lnSpc>
-            </a:pPr>
-            <a:r>
-              <a:rPr sz="1450" b="1">
-                <a:solidFill>
-                  <a:srgbClr val="111111"/>
-                </a:solidFill>
-                <a:latin typeface="Poppins"/>
-              </a:rPr>
-              <a:t>Réserver votre nom</a:t>
-            </a:r>
-          </a:p>
-        </p:txBody>
-      </p:sp>
-      <p:sp>
-        <p:nvSpPr>
-          <p:cNvPr id="43" name="TextBox 42"/>
-          <p:cNvSpPr txBox="1"/>
-          <p:nvPr/>
-        </p:nvSpPr>
-        <p:spPr>
-          <a:xfrm>
-            <a:off x="5256000" y="5400000"/>
-            <a:ext cx="6228000" cy="846000"/>
-          </a:xfrm>
-          <a:prstGeom prst="rect">
-            <a:avLst/>
-          </a:prstGeom>
-          <a:noFill/>
-        </p:spPr>
-        <p:txBody>
-          <a:bodyPr wrap="square" lIns="36000" rIns="36000" tIns="18000" bIns="18000" anchor="ctr">
-            <a:spAutoFit/>
-          </a:bodyPr>
-          <a:lstStyle/>
-          <a:p>
-            <a:pPr algn="l">
-              <a:lnSpc>
-                <a:spcPct val="110000"/>
-              </a:lnSpc>
-            </a:pPr>
-            <a:r>
-              <a:rPr sz="1200" b="0">
+              <a:rPr sz="1050" b="0">
                 <a:solidFill>
                   <a:srgbClr val="5A5A5A"/>
                 </a:solidFill>
@@ -15759,16 +20527,41 @@
           </a:p>
         </p:txBody>
       </p:sp>
-      <p:sp>
-        <p:nvSpPr>
-          <p:cNvPr id="9" name="Rounded Rectangle 8"/>
+      <p:pic>
+        <p:nvPicPr>
+          <p:cNvPr id="9" name="Picture 8" descr="pl_entrepot_rack_jpg.jpg"/>
+          <p:cNvPicPr>
+            <a:picLocks noChangeAspect="1"/>
+          </p:cNvPicPr>
+          <p:nvPr/>
+        </p:nvPicPr>
+        <p:blipFill>
+          <a:blip r:embed="rId3"/>
+          <a:srcRect l="31901" r="31901"/>
+          <a:stretch>
+            <a:fillRect/>
+          </a:stretch>
+        </p:blipFill>
+        <p:spPr>
+          <a:xfrm>
+            <a:off x="8928000" y="1584000"/>
+            <a:ext cx="2700000" cy="4644000"/>
+          </a:xfrm>
+          <a:prstGeom prst="rect">
+            <a:avLst/>
+          </a:prstGeom>
+        </p:spPr>
+      </p:pic>
+      <p:sp>
+        <p:nvSpPr>
+          <p:cNvPr id="10" name="Rounded Rectangle 9"/>
           <p:cNvSpPr/>
           <p:nvPr/>
         </p:nvSpPr>
         <p:spPr>
           <a:xfrm>
-            <a:off x="576000" y="1655999"/>
-            <a:ext cx="3528000" cy="3420000"/>
+            <a:off x="576000" y="1584000"/>
+            <a:ext cx="2628000" cy="3671999"/>
           </a:xfrm>
           <a:prstGeom prst="roundRect">
             <a:avLst>
@@ -15807,14 +20600,14 @@
       </p:sp>
       <p:sp>
         <p:nvSpPr>
-          <p:cNvPr id="10" name="Oval 9"/>
+          <p:cNvPr id="11" name="Oval 10"/>
           <p:cNvSpPr/>
           <p:nvPr/>
         </p:nvSpPr>
         <p:spPr>
           <a:xfrm>
-            <a:off x="864000" y="1944000"/>
-            <a:ext cx="792000" cy="792000"/>
+            <a:off x="827999" y="1835999"/>
+            <a:ext cx="720000" cy="720000"/>
           </a:xfrm>
           <a:prstGeom prst="ellipse">
             <a:avLst/>
@@ -15851,22 +20644,22 @@
       </p:sp>
       <p:pic>
         <p:nvPicPr>
-          <p:cNvPr id="11" name="Picture 10" descr="eye_bl.png"/>
+          <p:cNvPr id="12" name="Picture 11" descr="eye_bl.png"/>
           <p:cNvPicPr>
             <a:picLocks noChangeAspect="1"/>
           </p:cNvPicPr>
           <p:nvPr/>
         </p:nvPicPr>
         <p:blipFill>
-          <a:blip r:embed="rId3"/>
+          <a:blip r:embed="rId4"/>
           <a:stretch>
             <a:fillRect/>
           </a:stretch>
         </p:blipFill>
         <p:spPr>
           <a:xfrm>
-            <a:off x="1038240" y="2118240"/>
-            <a:ext cx="443520" cy="443520"/>
+            <a:off x="986399" y="1994399"/>
+            <a:ext cx="403200" cy="403200"/>
           </a:xfrm>
           <a:prstGeom prst="rect">
             <a:avLst/>
@@ -15875,14 +20668,14 @@
       </p:pic>
       <p:sp>
         <p:nvSpPr>
-          <p:cNvPr id="12" name="TextBox 11"/>
+          <p:cNvPr id="13" name="TextBox 12"/>
           <p:cNvSpPr txBox="1"/>
           <p:nvPr/>
         </p:nvSpPr>
         <p:spPr>
           <a:xfrm>
-            <a:off x="864000" y="2951999"/>
-            <a:ext cx="3024000" cy="432000"/>
+            <a:off x="827999" y="2736000"/>
+            <a:ext cx="2196000" cy="576000"/>
           </a:xfrm>
           <a:prstGeom prst="rect">
             <a:avLst/>
@@ -15901,7 +20694,7 @@
               </a:lnSpc>
             </a:pPr>
             <a:r>
-              <a:rPr sz="1700" b="1">
+              <a:rPr sz="1500" b="1">
                 <a:solidFill>
                   <a:srgbClr val="111111"/>
                 </a:solidFill>
@@ -15914,14 +20707,14 @@
       </p:sp>
       <p:sp>
         <p:nvSpPr>
-          <p:cNvPr id="13" name="TextBox 12"/>
+          <p:cNvPr id="14" name="TextBox 13"/>
           <p:cNvSpPr txBox="1"/>
           <p:nvPr/>
         </p:nvSpPr>
         <p:spPr>
           <a:xfrm>
-            <a:off x="864000" y="3456000"/>
-            <a:ext cx="3024000" cy="1512000"/>
+            <a:off x="827999" y="3348000"/>
+            <a:ext cx="2196000" cy="1800000"/>
           </a:xfrm>
           <a:prstGeom prst="rect">
             <a:avLst/>
@@ -15940,7 +20733,7 @@
               </a:lnSpc>
             </a:pPr>
             <a:r>
-              <a:rPr sz="1250" b="0">
+              <a:rPr sz="1150" b="0">
                 <a:solidFill>
                   <a:srgbClr val="5A5A5A"/>
                 </a:solidFill>
@@ -15953,14 +20746,14 @@
       </p:sp>
       <p:sp>
         <p:nvSpPr>
-          <p:cNvPr id="14" name="Rounded Rectangle 13"/>
+          <p:cNvPr id="15" name="Rounded Rectangle 14"/>
           <p:cNvSpPr/>
           <p:nvPr/>
         </p:nvSpPr>
         <p:spPr>
           <a:xfrm>
-            <a:off x="4320000" y="1655999"/>
-            <a:ext cx="3528000" cy="3420000"/>
+            <a:off x="3366000" y="1584000"/>
+            <a:ext cx="2628000" cy="3671999"/>
           </a:xfrm>
           <a:prstGeom prst="roundRect">
             <a:avLst>
@@ -15999,14 +20792,14 @@
       </p:sp>
       <p:sp>
         <p:nvSpPr>
-          <p:cNvPr id="15" name="Oval 14"/>
+          <p:cNvPr id="16" name="Oval 15"/>
           <p:cNvSpPr/>
           <p:nvPr/>
         </p:nvSpPr>
         <p:spPr>
           <a:xfrm>
-            <a:off x="4608000" y="1944000"/>
-            <a:ext cx="792000" cy="792000"/>
+            <a:off x="3617999" y="1835999"/>
+            <a:ext cx="720000" cy="720000"/>
           </a:xfrm>
           <a:prstGeom prst="ellipse">
             <a:avLst/>
@@ -16043,22 +20836,22 @@
       </p:sp>
       <p:pic>
         <p:nvPicPr>
-          <p:cNvPr id="16" name="Picture 15" descr="camera_bl.png"/>
+          <p:cNvPr id="17" name="Picture 16" descr="camera_bl.png"/>
           <p:cNvPicPr>
             <a:picLocks noChangeAspect="1"/>
           </p:cNvPicPr>
           <p:nvPr/>
         </p:nvPicPr>
         <p:blipFill>
-          <a:blip r:embed="rId4"/>
+          <a:blip r:embed="rId5"/>
           <a:stretch>
             <a:fillRect/>
           </a:stretch>
         </p:blipFill>
         <p:spPr>
           <a:xfrm>
-            <a:off x="4782240" y="2118240"/>
-            <a:ext cx="443520" cy="443520"/>
+            <a:off x="3776399" y="1994399"/>
+            <a:ext cx="403200" cy="403200"/>
           </a:xfrm>
           <a:prstGeom prst="rect">
             <a:avLst/>
@@ -16067,14 +20860,14 @@
       </p:pic>
       <p:sp>
         <p:nvSpPr>
-          <p:cNvPr id="17" name="TextBox 16"/>
+          <p:cNvPr id="18" name="TextBox 17"/>
           <p:cNvSpPr txBox="1"/>
           <p:nvPr/>
         </p:nvSpPr>
         <p:spPr>
           <a:xfrm>
-            <a:off x="4608000" y="2951999"/>
-            <a:ext cx="3024000" cy="432000"/>
+            <a:off x="3617999" y="2736000"/>
+            <a:ext cx="2196000" cy="576000"/>
           </a:xfrm>
           <a:prstGeom prst="rect">
             <a:avLst/>
@@ -16093,7 +20886,7 @@
               </a:lnSpc>
             </a:pPr>
             <a:r>
-              <a:rPr sz="1700" b="1">
+              <a:rPr sz="1500" b="1">
                 <a:solidFill>
                   <a:srgbClr val="111111"/>
                 </a:solidFill>
@@ -16106,14 +20899,14 @@
       </p:sp>
       <p:sp>
         <p:nvSpPr>
-          <p:cNvPr id="18" name="TextBox 17"/>
+          <p:cNvPr id="19" name="TextBox 18"/>
           <p:cNvSpPr txBox="1"/>
           <p:nvPr/>
         </p:nvSpPr>
         <p:spPr>
           <a:xfrm>
-            <a:off x="4608000" y="3456000"/>
-            <a:ext cx="3024000" cy="1512000"/>
+            <a:off x="3617999" y="3348000"/>
+            <a:ext cx="2196000" cy="1800000"/>
           </a:xfrm>
           <a:prstGeom prst="rect">
             <a:avLst/>
@@ -16132,7 +20925,7 @@
               </a:lnSpc>
             </a:pPr>
             <a:r>
-              <a:rPr sz="1250" b="0">
+              <a:rPr sz="1150" b="0">
                 <a:solidFill>
                   <a:srgbClr val="5A5A5A"/>
                 </a:solidFill>
@@ -16145,14 +20938,14 @@
       </p:sp>
       <p:sp>
         <p:nvSpPr>
-          <p:cNvPr id="19" name="Rounded Rectangle 18"/>
+          <p:cNvPr id="20" name="Rounded Rectangle 19"/>
           <p:cNvSpPr/>
           <p:nvPr/>
         </p:nvSpPr>
         <p:spPr>
           <a:xfrm>
-            <a:off x="8064000" y="1655999"/>
-            <a:ext cx="3528000" cy="3420000"/>
+            <a:off x="6156000" y="1584000"/>
+            <a:ext cx="2628000" cy="3671999"/>
           </a:xfrm>
           <a:prstGeom prst="roundRect">
             <a:avLst>
@@ -16191,14 +20984,14 @@
       </p:sp>
       <p:sp>
         <p:nvSpPr>
-          <p:cNvPr id="20" name="Oval 19"/>
+          <p:cNvPr id="21" name="Oval 20"/>
           <p:cNvSpPr/>
           <p:nvPr/>
         </p:nvSpPr>
         <p:spPr>
           <a:xfrm>
-            <a:off x="8352000" y="1944000"/>
-            <a:ext cx="792000" cy="792000"/>
+            <a:off x="6407999" y="1835999"/>
+            <a:ext cx="720000" cy="720000"/>
           </a:xfrm>
           <a:prstGeom prst="ellipse">
             <a:avLst/>
@@ -16235,22 +21028,22 @@
       </p:sp>
       <p:pic>
         <p:nvPicPr>
-          <p:cNvPr id="21" name="Picture 20" descr="circle-check_bl.png"/>
+          <p:cNvPr id="22" name="Picture 21" descr="circle-check_bl.png"/>
           <p:cNvPicPr>
             <a:picLocks noChangeAspect="1"/>
           </p:cNvPicPr>
           <p:nvPr/>
         </p:nvPicPr>
         <p:blipFill>
-          <a:blip r:embed="rId5"/>
+          <a:blip r:embed="rId6"/>
           <a:stretch>
             <a:fillRect/>
           </a:stretch>
         </p:blipFill>
         <p:spPr>
           <a:xfrm>
-            <a:off x="8526240" y="2118240"/>
-            <a:ext cx="443520" cy="443520"/>
+            <a:off x="6566399" y="1994399"/>
+            <a:ext cx="403200" cy="403200"/>
           </a:xfrm>
           <a:prstGeom prst="rect">
             <a:avLst/>
@@ -16259,14 +21052,14 @@
       </p:pic>
       <p:sp>
         <p:nvSpPr>
-          <p:cNvPr id="22" name="TextBox 21"/>
+          <p:cNvPr id="23" name="TextBox 22"/>
           <p:cNvSpPr txBox="1"/>
           <p:nvPr/>
         </p:nvSpPr>
         <p:spPr>
           <a:xfrm>
-            <a:off x="8352000" y="2951999"/>
-            <a:ext cx="3024000" cy="432000"/>
+            <a:off x="6407999" y="2736000"/>
+            <a:ext cx="2196000" cy="576000"/>
           </a:xfrm>
           <a:prstGeom prst="rect">
             <a:avLst/>
@@ -16285,7 +21078,7 @@
               </a:lnSpc>
             </a:pPr>
             <a:r>
-              <a:rPr sz="1700" b="1">
+              <a:rPr sz="1500" b="1">
                 <a:solidFill>
                   <a:srgbClr val="111111"/>
                 </a:solidFill>
@@ -16298,14 +21091,14 @@
       </p:sp>
       <p:sp>
         <p:nvSpPr>
-          <p:cNvPr id="23" name="TextBox 22"/>
+          <p:cNvPr id="24" name="TextBox 23"/>
           <p:cNvSpPr txBox="1"/>
           <p:nvPr/>
         </p:nvSpPr>
         <p:spPr>
           <a:xfrm>
-            <a:off x="8352000" y="3456000"/>
-            <a:ext cx="3024000" cy="1512000"/>
+            <a:off x="6407999" y="3348000"/>
+            <a:ext cx="2196000" cy="1800000"/>
           </a:xfrm>
           <a:prstGeom prst="rect">
             <a:avLst/>
@@ -16324,7 +21117,7 @@
               </a:lnSpc>
             </a:pPr>
             <a:r>
-              <a:rPr sz="1250" b="0">
+              <a:rPr sz="1150" b="0">
                 <a:solidFill>
                   <a:srgbClr val="5A5A5A"/>
                 </a:solidFill>
@@ -16337,14 +21130,14 @@
       </p:sp>
       <p:sp>
         <p:nvSpPr>
-          <p:cNvPr id="24" name="TextBox 23"/>
+          <p:cNvPr id="25" name="TextBox 24"/>
           <p:cNvSpPr txBox="1"/>
           <p:nvPr/>
         </p:nvSpPr>
         <p:spPr>
           <a:xfrm>
-            <a:off x="576000" y="5400000"/>
-            <a:ext cx="11052000" cy="720000"/>
+            <a:off x="576000" y="5436000"/>
+            <a:ext cx="8136000" cy="792000"/>
           </a:xfrm>
           <a:prstGeom prst="rect">
             <a:avLst/>
@@ -16363,7 +21156,7 @@
               </a:lnSpc>
             </a:pPr>
             <a:r>
-              <a:rPr sz="1200" b="0">
+              <a:rPr sz="1100" b="0">
                 <a:solidFill>
                   <a:srgbClr val="5A5A5A"/>
                 </a:solidFill>
@@ -16782,8 +21575,47 @@
         </p:nvSpPr>
         <p:spPr>
           <a:xfrm>
-            <a:off x="827999" y="2879999"/>
-            <a:ext cx="2160000" cy="648000"/>
+            <a:off x="827999" y="2843999"/>
+            <a:ext cx="2160000" cy="684000"/>
+          </a:xfrm>
+          <a:prstGeom prst="rect">
+            <a:avLst/>
+          </a:prstGeom>
+          <a:noFill/>
+        </p:spPr>
+        <p:txBody>
+          <a:bodyPr wrap="square" lIns="36000" rIns="36000" tIns="18000" bIns="18000" anchor="ctr">
+            <a:spAutoFit/>
+          </a:bodyPr>
+          <a:lstStyle/>
+          <a:p>
+            <a:pPr algn="l">
+              <a:lnSpc>
+                <a:spcPct val="110000"/>
+              </a:lnSpc>
+            </a:pPr>
+            <a:r>
+              <a:rPr sz="1500" b="1">
+                <a:solidFill>
+                  <a:srgbClr val="111111"/>
+                </a:solidFill>
+                <a:latin typeface="Poppins"/>
+              </a:rPr>
+              <a:t>Pages publiques</a:t>
+            </a:r>
+          </a:p>
+        </p:txBody>
+      </p:sp>
+      <p:sp>
+        <p:nvSpPr>
+          <p:cNvPr id="13" name="TextBox 12"/>
+          <p:cNvSpPr txBox="1"/>
+          <p:nvPr/>
+        </p:nvSpPr>
+        <p:spPr>
+          <a:xfrm>
+            <a:off x="827999" y="3635999"/>
+            <a:ext cx="2160000" cy="2160000"/>
           </a:xfrm>
           <a:prstGeom prst="rect">
             <a:avLst/>
@@ -16802,46 +21634,7 @@
               </a:lnSpc>
             </a:pPr>
             <a:r>
-              <a:rPr sz="1550" b="1">
-                <a:solidFill>
-                  <a:srgbClr val="111111"/>
-                </a:solidFill>
-                <a:latin typeface="Poppins"/>
-              </a:rPr>
-              <a:t>Pages publiques</a:t>
-            </a:r>
-          </a:p>
-        </p:txBody>
-      </p:sp>
-      <p:sp>
-        <p:nvSpPr>
-          <p:cNvPr id="13" name="TextBox 12"/>
-          <p:cNvSpPr txBox="1"/>
-          <p:nvPr/>
-        </p:nvSpPr>
-        <p:spPr>
-          <a:xfrm>
-            <a:off x="827999" y="3599999"/>
-            <a:ext cx="2160000" cy="2160000"/>
-          </a:xfrm>
-          <a:prstGeom prst="rect">
-            <a:avLst/>
-          </a:prstGeom>
-          <a:noFill/>
-        </p:spPr>
-        <p:txBody>
-          <a:bodyPr wrap="square" lIns="36000" rIns="36000" tIns="18000" bIns="18000" anchor="t">
-            <a:spAutoFit/>
-          </a:bodyPr>
-          <a:lstStyle/>
-          <a:p>
-            <a:pPr algn="l">
-              <a:lnSpc>
-                <a:spcPct val="110000"/>
-              </a:lnSpc>
-            </a:pPr>
-            <a:r>
-              <a:rPr sz="1250" b="0">
+              <a:rPr sz="1200" b="0">
                 <a:solidFill>
                   <a:srgbClr val="5A5A5A"/>
                 </a:solidFill>
@@ -16974,8 +21767,47 @@
         </p:nvSpPr>
         <p:spPr>
           <a:xfrm>
-            <a:off x="3635999" y="2879999"/>
-            <a:ext cx="2160000" cy="648000"/>
+            <a:off x="3635999" y="2843999"/>
+            <a:ext cx="2160000" cy="684000"/>
+          </a:xfrm>
+          <a:prstGeom prst="rect">
+            <a:avLst/>
+          </a:prstGeom>
+          <a:noFill/>
+        </p:spPr>
+        <p:txBody>
+          <a:bodyPr wrap="square" lIns="36000" rIns="36000" tIns="18000" bIns="18000" anchor="ctr">
+            <a:spAutoFit/>
+          </a:bodyPr>
+          <a:lstStyle/>
+          <a:p>
+            <a:pPr algn="l">
+              <a:lnSpc>
+                <a:spcPct val="110000"/>
+              </a:lnSpc>
+            </a:pPr>
+            <a:r>
+              <a:rPr sz="1500" b="1">
+                <a:solidFill>
+                  <a:srgbClr val="111111"/>
+                </a:solidFill>
+                <a:latin typeface="Poppins"/>
+              </a:rPr>
+              <a:t>25 publications pour AGL</a:t>
+            </a:r>
+          </a:p>
+        </p:txBody>
+      </p:sp>
+      <p:sp>
+        <p:nvSpPr>
+          <p:cNvPr id="18" name="TextBox 17"/>
+          <p:cNvSpPr txBox="1"/>
+          <p:nvPr/>
+        </p:nvSpPr>
+        <p:spPr>
+          <a:xfrm>
+            <a:off x="3635999" y="3635999"/>
+            <a:ext cx="2160000" cy="2160000"/>
           </a:xfrm>
           <a:prstGeom prst="rect">
             <a:avLst/>
@@ -16994,46 +21826,7 @@
               </a:lnSpc>
             </a:pPr>
             <a:r>
-              <a:rPr sz="1550" b="1">
-                <a:solidFill>
-                  <a:srgbClr val="111111"/>
-                </a:solidFill>
-                <a:latin typeface="Poppins"/>
-              </a:rPr>
-              <a:t>25 publications pour AGL</a:t>
-            </a:r>
-          </a:p>
-        </p:txBody>
-      </p:sp>
-      <p:sp>
-        <p:nvSpPr>
-          <p:cNvPr id="18" name="TextBox 17"/>
-          <p:cNvSpPr txBox="1"/>
-          <p:nvPr/>
-        </p:nvSpPr>
-        <p:spPr>
-          <a:xfrm>
-            <a:off x="3635999" y="3599999"/>
-            <a:ext cx="2160000" cy="2160000"/>
-          </a:xfrm>
-          <a:prstGeom prst="rect">
-            <a:avLst/>
-          </a:prstGeom>
-          <a:noFill/>
-        </p:spPr>
-        <p:txBody>
-          <a:bodyPr wrap="square" lIns="36000" rIns="36000" tIns="18000" bIns="18000" anchor="t">
-            <a:spAutoFit/>
-          </a:bodyPr>
-          <a:lstStyle/>
-          <a:p>
-            <a:pPr algn="l">
-              <a:lnSpc>
-                <a:spcPct val="110000"/>
-              </a:lnSpc>
-            </a:pPr>
-            <a:r>
-              <a:rPr sz="1250" b="0">
+              <a:rPr sz="1200" b="0">
                 <a:solidFill>
                   <a:srgbClr val="5A5A5A"/>
                 </a:solidFill>
@@ -17166,8 +21959,47 @@
         </p:nvSpPr>
         <p:spPr>
           <a:xfrm>
-            <a:off x="6443999" y="2879999"/>
-            <a:ext cx="2160000" cy="648000"/>
+            <a:off x="6443999" y="2843999"/>
+            <a:ext cx="2160000" cy="684000"/>
+          </a:xfrm>
+          <a:prstGeom prst="rect">
+            <a:avLst/>
+          </a:prstGeom>
+          <a:noFill/>
+        </p:spPr>
+        <p:txBody>
+          <a:bodyPr wrap="square" lIns="36000" rIns="36000" tIns="18000" bIns="18000" anchor="ctr">
+            <a:spAutoFit/>
+          </a:bodyPr>
+          <a:lstStyle/>
+          <a:p>
+            <a:pPr algn="l">
+              <a:lnSpc>
+                <a:spcPct val="110000"/>
+              </a:lnSpc>
+            </a:pPr>
+            <a:r>
+              <a:rPr sz="1500" b="1">
+                <a:solidFill>
+                  <a:srgbClr val="111111"/>
+                </a:solidFill>
+                <a:latin typeface="Poppins"/>
+              </a:rPr>
+              <a:t>Médianes</a:t>
+            </a:r>
+          </a:p>
+        </p:txBody>
+      </p:sp>
+      <p:sp>
+        <p:nvSpPr>
+          <p:cNvPr id="23" name="TextBox 22"/>
+          <p:cNvSpPr txBox="1"/>
+          <p:nvPr/>
+        </p:nvSpPr>
+        <p:spPr>
+          <a:xfrm>
+            <a:off x="6443999" y="3635999"/>
+            <a:ext cx="2160000" cy="2160000"/>
           </a:xfrm>
           <a:prstGeom prst="rect">
             <a:avLst/>
@@ -17186,46 +22018,7 @@
               </a:lnSpc>
             </a:pPr>
             <a:r>
-              <a:rPr sz="1550" b="1">
-                <a:solidFill>
-                  <a:srgbClr val="111111"/>
-                </a:solidFill>
-                <a:latin typeface="Poppins"/>
-              </a:rPr>
-              <a:t>Médianes</a:t>
-            </a:r>
-          </a:p>
-        </p:txBody>
-      </p:sp>
-      <p:sp>
-        <p:nvSpPr>
-          <p:cNvPr id="23" name="TextBox 22"/>
-          <p:cNvSpPr txBox="1"/>
-          <p:nvPr/>
-        </p:nvSpPr>
-        <p:spPr>
-          <a:xfrm>
-            <a:off x="6443999" y="3599999"/>
-            <a:ext cx="2160000" cy="2160000"/>
-          </a:xfrm>
-          <a:prstGeom prst="rect">
-            <a:avLst/>
-          </a:prstGeom>
-          <a:noFill/>
-        </p:spPr>
-        <p:txBody>
-          <a:bodyPr wrap="square" lIns="36000" rIns="36000" tIns="18000" bIns="18000" anchor="t">
-            <a:spAutoFit/>
-          </a:bodyPr>
-          <a:lstStyle/>
-          <a:p>
-            <a:pPr algn="l">
-              <a:lnSpc>
-                <a:spcPct val="110000"/>
-              </a:lnSpc>
-            </a:pPr>
-            <a:r>
-              <a:rPr sz="1250" b="0">
+              <a:rPr sz="1200" b="0">
                 <a:solidFill>
                   <a:srgbClr val="5A5A5A"/>
                 </a:solidFill>
@@ -17358,8 +22151,47 @@
         </p:nvSpPr>
         <p:spPr>
           <a:xfrm>
-            <a:off x="9251999" y="2879999"/>
-            <a:ext cx="2160000" cy="648000"/>
+            <a:off x="9251999" y="2843999"/>
+            <a:ext cx="2160000" cy="684000"/>
+          </a:xfrm>
+          <a:prstGeom prst="rect">
+            <a:avLst/>
+          </a:prstGeom>
+          <a:noFill/>
+        </p:spPr>
+        <p:txBody>
+          <a:bodyPr wrap="square" lIns="36000" rIns="36000" tIns="18000" bIns="18000" anchor="ctr">
+            <a:spAutoFit/>
+          </a:bodyPr>
+          <a:lstStyle/>
+          <a:p>
+            <a:pPr algn="l">
+              <a:lnSpc>
+                <a:spcPct val="110000"/>
+              </a:lnSpc>
+            </a:pPr>
+            <a:r>
+              <a:rPr sz="1500" b="1">
+                <a:solidFill>
+                  <a:srgbClr val="111111"/>
+                </a:solidFill>
+                <a:latin typeface="Poppins"/>
+              </a:rPr>
+              <a:t>Hors de vue</a:t>
+            </a:r>
+          </a:p>
+        </p:txBody>
+      </p:sp>
+      <p:sp>
+        <p:nvSpPr>
+          <p:cNvPr id="28" name="TextBox 27"/>
+          <p:cNvSpPr txBox="1"/>
+          <p:nvPr/>
+        </p:nvSpPr>
+        <p:spPr>
+          <a:xfrm>
+            <a:off x="9251999" y="3635999"/>
+            <a:ext cx="2160000" cy="2160000"/>
           </a:xfrm>
           <a:prstGeom prst="rect">
             <a:avLst/>
@@ -17378,46 +22210,7 @@
               </a:lnSpc>
             </a:pPr>
             <a:r>
-              <a:rPr sz="1550" b="1">
-                <a:solidFill>
-                  <a:srgbClr val="111111"/>
-                </a:solidFill>
-                <a:latin typeface="Poppins"/>
-              </a:rPr>
-              <a:t>Hors de vue</a:t>
-            </a:r>
-          </a:p>
-        </p:txBody>
-      </p:sp>
-      <p:sp>
-        <p:nvSpPr>
-          <p:cNvPr id="28" name="TextBox 27"/>
-          <p:cNvSpPr txBox="1"/>
-          <p:nvPr/>
-        </p:nvSpPr>
-        <p:spPr>
-          <a:xfrm>
-            <a:off x="9251999" y="3599999"/>
-            <a:ext cx="2160000" cy="2160000"/>
-          </a:xfrm>
-          <a:prstGeom prst="rect">
-            <a:avLst/>
-          </a:prstGeom>
-          <a:noFill/>
-        </p:spPr>
-        <p:txBody>
-          <a:bodyPr wrap="square" lIns="36000" rIns="36000" tIns="18000" bIns="18000" anchor="t">
-            <a:spAutoFit/>
-          </a:bodyPr>
-          <a:lstStyle/>
-          <a:p>
-            <a:pPr algn="l">
-              <a:lnSpc>
-                <a:spcPct val="110000"/>
-              </a:lnSpc>
-            </a:pPr>
-            <a:r>
-              <a:rPr sz="1250" b="0">
+              <a:rPr sz="1200" b="0">
                 <a:solidFill>
                   <a:srgbClr val="5A5A5A"/>
                 </a:solidFill>
@@ -20064,7 +24857,7 @@
         </p:nvSpPr>
         <p:spPr>
           <a:xfrm>
-            <a:off x="792000" y="3419999"/>
+            <a:off x="792000" y="3401998"/>
             <a:ext cx="3132000" cy="576000"/>
           </a:xfrm>
           <a:prstGeom prst="rect">
@@ -20084,7 +24877,7 @@
               </a:lnSpc>
             </a:pPr>
             <a:r>
-              <a:rPr sz="1050" b="0">
+              <a:rPr sz="1000" b="0">
                 <a:solidFill>
                   <a:srgbClr val="5A5A5A"/>
                 </a:solidFill>
@@ -20295,7 +25088,7 @@
         </p:nvSpPr>
         <p:spPr>
           <a:xfrm>
-            <a:off x="4536000" y="3419999"/>
+            <a:off x="4536000" y="3401998"/>
             <a:ext cx="3132000" cy="576000"/>
           </a:xfrm>
           <a:prstGeom prst="rect">
@@ -20315,7 +25108,7 @@
               </a:lnSpc>
             </a:pPr>
             <a:r>
-              <a:rPr sz="1050" b="0">
+              <a:rPr sz="1000" b="0">
                 <a:solidFill>
                   <a:srgbClr val="5A5A5A"/>
                 </a:solidFill>
@@ -20526,7 +25319,7 @@
         </p:nvSpPr>
         <p:spPr>
           <a:xfrm>
-            <a:off x="8279999" y="3419999"/>
+            <a:off x="8279999" y="3401998"/>
             <a:ext cx="3132000" cy="576000"/>
           </a:xfrm>
           <a:prstGeom prst="rect">
@@ -20546,7 +25339,7 @@
               </a:lnSpc>
             </a:pPr>
             <a:r>
-              <a:rPr sz="1050" b="0">
+              <a:rPr sz="1000" b="0">
                 <a:solidFill>
                   <a:srgbClr val="5A5A5A"/>
                 </a:solidFill>
@@ -21024,8 +25817,8 @@
           <p:nvPr/>
         </p:nvGraphicFramePr>
         <p:xfrm>
-          <a:off x="576000" y="1584000"/>
-          <a:ext cx="5256000" cy="4176000"/>
+          <a:off x="576000" y="1944000"/>
+          <a:ext cx="5256000" cy="3816000"/>
         </p:xfrm>
         <a:graphic>
           <a:graphicData uri="http://schemas.openxmlformats.org/drawingml/2006/chart">
@@ -21033,9 +25826,48 @@
           </a:graphicData>
         </a:graphic>
       </p:graphicFrame>
+      <p:sp>
+        <p:nvSpPr>
+          <p:cNvPr id="10" name="TextBox 9"/>
+          <p:cNvSpPr txBox="1"/>
+          <p:nvPr/>
+        </p:nvSpPr>
+        <p:spPr>
+          <a:xfrm>
+            <a:off x="576000" y="1548000"/>
+            <a:ext cx="5256000" cy="360000"/>
+          </a:xfrm>
+          <a:prstGeom prst="rect">
+            <a:avLst/>
+          </a:prstGeom>
+          <a:noFill/>
+        </p:spPr>
+        <p:txBody>
+          <a:bodyPr wrap="square" lIns="36000" rIns="36000" tIns="18000" bIns="18000" anchor="t">
+            <a:spAutoFit/>
+          </a:bodyPr>
+          <a:lstStyle/>
+          <a:p>
+            <a:pPr algn="l">
+              <a:lnSpc>
+                <a:spcPct val="110000"/>
+              </a:lnSpc>
+            </a:pPr>
+            <a:r>
+              <a:rPr sz="1250" b="1">
+                <a:solidFill>
+                  <a:srgbClr val="111111"/>
+                </a:solidFill>
+                <a:latin typeface="Poppins"/>
+              </a:rPr>
+              <a:t>Publications par semaine (période relevée)</a:t>
+            </a:r>
+          </a:p>
+        </p:txBody>
+      </p:sp>
       <p:graphicFrame>
         <p:nvGraphicFramePr>
-          <p:cNvPr id="10" name="Table 9"/>
+          <p:cNvPr id="11" name="Table 10"/>
           <p:cNvGraphicFramePr>
             <a:graphicFrameLocks noGrp="1"/>
           </p:cNvGraphicFramePr>
@@ -21998,7 +26830,7 @@
       </p:graphicFrame>
       <p:sp>
         <p:nvSpPr>
-          <p:cNvPr id="11" name="TextBox 10"/>
+          <p:cNvPr id="12" name="TextBox 11"/>
           <p:cNvSpPr txBox="1"/>
           <p:nvPr/>
         </p:nvSpPr>

--- a/tmp-tj/261028_proline-logistics_audit-reseaux-sociaux_v1.pptx
+++ b/tmp-tj/261028_proline-logistics_audit-reseaux-sociaux_v1.pptx
@@ -127,387 +127,6 @@
     </a:lvl9pPr>
   </p:defaultTextStyle>
 </p:presentation>
-</file>
-
-<file path=ppt/charts/chart1.xml><?xml version="1.0" encoding="utf-8"?>
-<c:chartSpace xmlns:c="http://schemas.openxmlformats.org/drawingml/2006/chart" xmlns:a="http://schemas.openxmlformats.org/drawingml/2006/main" xmlns:r="http://schemas.openxmlformats.org/officeDocument/2006/relationships">
-  <c:date1904 val="0"/>
-  <c:chart>
-    <c:autoTitleDeleted val="1"/>
-    <c:plotArea>
-      <c:barChart>
-        <c:barDir val="bar"/>
-        <c:grouping val="clustered"/>
-        <c:ser>
-          <c:idx val="0"/>
-          <c:order val="0"/>
-          <c:tx>
-            <c:strRef>
-              <c:f>Sheet1!$B$1</c:f>
-              <c:strCache>
-                <c:ptCount val="1"/>
-                <c:pt idx="0">
-                  <c:v>Publications par semaine (période relevée)</c:v>
-                </c:pt>
-              </c:strCache>
-            </c:strRef>
-          </c:tx>
-          <c:dPt>
-            <c:idx val="0"/>
-            <c:spPr>
-              <a:solidFill>
-                <a:srgbClr val="B9B9B9"/>
-              </a:solidFill>
-            </c:spPr>
-          </c:dPt>
-          <c:dPt>
-            <c:idx val="1"/>
-            <c:spPr>
-              <a:solidFill>
-                <a:srgbClr val="B9B9B9"/>
-              </a:solidFill>
-            </c:spPr>
-          </c:dPt>
-          <c:dPt>
-            <c:idx val="2"/>
-            <c:spPr>
-              <a:solidFill>
-                <a:srgbClr val="B9B9B9"/>
-              </a:solidFill>
-            </c:spPr>
-          </c:dPt>
-          <c:dPt>
-            <c:idx val="3"/>
-            <c:spPr>
-              <a:solidFill>
-                <a:srgbClr val="EE5B22"/>
-              </a:solidFill>
-            </c:spPr>
-          </c:dPt>
-          <c:cat>
-            <c:strRef>
-              <c:f>Sheet1!$A$2:$A$5</c:f>
-              <c:strCache>
-                <c:ptCount val="4"/>
-                <c:pt idx="0">
-                  <c:v>OTL (LinkedIn)</c:v>
-                </c:pt>
-                <c:pt idx="1">
-                  <c:v>LTA (LinkedIn)</c:v>
-                </c:pt>
-                <c:pt idx="2">
-                  <c:v>AGL (Facebook)</c:v>
-                </c:pt>
-                <c:pt idx="3">
-                  <c:v>Proline</c:v>
-                </c:pt>
-              </c:strCache>
-            </c:strRef>
-          </c:cat>
-          <c:val>
-            <c:numRef>
-              <c:f>Sheet1!$B$2:$B$5</c:f>
-              <c:numCache>
-                <c:formatCode>General</c:formatCode>
-                <c:ptCount val="4"/>
-                <c:pt idx="0">
-                  <c:v>0.2</c:v>
-                </c:pt>
-                <c:pt idx="1">
-                  <c:v>0.3</c:v>
-                </c:pt>
-                <c:pt idx="2">
-                  <c:v>6.0</c:v>
-                </c:pt>
-                <c:pt idx="3">
-                  <c:v>0</c:v>
-                </c:pt>
-              </c:numCache>
-            </c:numRef>
-          </c:val>
-        </c:ser>
-        <c:dLbls>
-          <c:numFmt formatCode="0.0" sourceLinked="0"/>
-          <c:txPr>
-            <a:bodyPr/>
-            <a:lstStyle/>
-            <a:p>
-              <a:pPr>
-                <a:defRPr sz="1300" b="1"/>
-              </a:pPr>
-            </a:p>
-          </c:txPr>
-          <c:dLblPos val="outEnd"/>
-          <c:showLegendKey val="0"/>
-          <c:showVal val="1"/>
-          <c:showCatName val="0"/>
-          <c:showSerName val="0"/>
-          <c:showPercent val="0"/>
-          <c:showBubbleSize val="0"/>
-          <c:showLeaderLines val="1"/>
-        </c:dLbls>
-        <c:gapWidth val="55"/>
-        <c:axId val="-2068027336"/>
-        <c:axId val="-2113994440"/>
-      </c:barChart>
-      <c:catAx>
-        <c:axId val="-2068027336"/>
-        <c:scaling>
-          <c:orientation val="minMax"/>
-        </c:scaling>
-        <c:delete val="0"/>
-        <c:axPos val="l"/>
-        <c:majorTickMark val="out"/>
-        <c:minorTickMark val="none"/>
-        <c:tickLblPos val="nextTo"/>
-        <c:spPr>
-          <a:ln>
-            <a:noFill/>
-          </a:ln>
-        </c:spPr>
-        <c:txPr>
-          <a:bodyPr/>
-          <a:lstStyle/>
-          <a:p>
-            <a:pPr>
-              <a:defRPr sz="1200">
-                <a:latin typeface="Poppins"/>
-              </a:defRPr>
-            </a:pPr>
-          </a:p>
-        </c:txPr>
-        <c:crossAx val="-2113994440"/>
-        <c:crosses val="autoZero"/>
-        <c:auto val="1"/>
-        <c:lblAlgn val="ctr"/>
-        <c:lblOffset val="100"/>
-        <c:noMultiLvlLbl val="0"/>
-      </c:catAx>
-      <c:valAx>
-        <c:axId val="-2113994440"/>
-        <c:scaling>
-          <c:min val="0.0"/>
-        </c:scaling>
-        <c:delete/>
-        <c:axPos val="b"/>
-        <c:majorTickMark val="none"/>
-        <c:minorTickMark val="none"/>
-        <c:tickLblPos val="none"/>
-        <c:spPr>
-          <a:ln>
-            <a:noFill/>
-          </a:ln>
-        </c:spPr>
-        <c:crossAx val="-2068027336"/>
-        <c:crosses val="autoZero"/>
-      </c:valAx>
-    </c:plotArea>
-    <c:dispBlanksAs val="gap"/>
-  </c:chart>
-  <c:txPr>
-    <a:bodyPr/>
-    <a:lstStyle/>
-    <a:p>
-      <a:pPr>
-        <a:defRPr sz="1800"/>
-      </a:pPr>
-      <a:endParaRPr lang="en-US"/>
-    </a:p>
-  </c:txPr>
-  <c:externalData r:id="rId1">
-    <c:autoUpdate val="0"/>
-  </c:externalData>
-</c:chartSpace>
-</file>
-
-<file path=ppt/charts/chart2.xml><?xml version="1.0" encoding="utf-8"?>
-<c:chartSpace xmlns:c="http://schemas.openxmlformats.org/drawingml/2006/chart" xmlns:a="http://schemas.openxmlformats.org/drawingml/2006/main" xmlns:r="http://schemas.openxmlformats.org/officeDocument/2006/relationships">
-  <c:date1904 val="0"/>
-  <c:chart>
-    <c:autoTitleDeleted val="1"/>
-    <c:plotArea>
-      <c:barChart>
-        <c:barDir val="bar"/>
-        <c:grouping val="clustered"/>
-        <c:ser>
-          <c:idx val="0"/>
-          <c:order val="0"/>
-          <c:tx>
-            <c:strRef>
-              <c:f>Sheet1!$B$1</c:f>
-              <c:strCache>
-                <c:ptCount val="1"/>
-                <c:pt idx="0">
-                  <c:v>Réactions médianes par type (nombre de publications)</c:v>
-                </c:pt>
-              </c:strCache>
-            </c:strRef>
-          </c:tx>
-          <c:dPt>
-            <c:idx val="0"/>
-            <c:spPr>
-              <a:solidFill>
-                <a:srgbClr val="B9B9B9"/>
-              </a:solidFill>
-            </c:spPr>
-          </c:dPt>
-          <c:dPt>
-            <c:idx val="1"/>
-            <c:spPr>
-              <a:solidFill>
-                <a:srgbClr val="B9B9B9"/>
-              </a:solidFill>
-            </c:spPr>
-          </c:dPt>
-          <c:dPt>
-            <c:idx val="2"/>
-            <c:spPr>
-              <a:solidFill>
-                <a:srgbClr val="B9B9B9"/>
-              </a:solidFill>
-            </c:spPr>
-          </c:dPt>
-          <c:dPt>
-            <c:idx val="3"/>
-            <c:spPr>
-              <a:solidFill>
-                <a:srgbClr val="EE5B22"/>
-              </a:solidFill>
-            </c:spPr>
-          </c:dPt>
-          <c:cat>
-            <c:strRef>
-              <c:f>Sheet1!$A$2:$A$5</c:f>
-              <c:strCache>
-                <c:ptCount val="4"/>
-                <c:pt idx="0">
-                  <c:v>Agenda et événements (4)</c:v>
-                </c:pt>
-                <c:pt idx="1">
-                  <c:v>Toute la page (25)</c:v>
-                </c:pt>
-                <c:pt idx="2">
-                  <c:v>Équipes et engins (13)</c:v>
-                </c:pt>
-                <c:pt idx="3">
-                  <c:v>Offres d’emploi (4)</c:v>
-                </c:pt>
-              </c:strCache>
-            </c:strRef>
-          </c:cat>
-          <c:val>
-            <c:numRef>
-              <c:f>Sheet1!$B$2:$B$5</c:f>
-              <c:numCache>
-                <c:formatCode>General</c:formatCode>
-                <c:ptCount val="4"/>
-                <c:pt idx="0">
-                  <c:v>32</c:v>
-                </c:pt>
-                <c:pt idx="1">
-                  <c:v>96</c:v>
-                </c:pt>
-                <c:pt idx="2">
-                  <c:v>95</c:v>
-                </c:pt>
-                <c:pt idx="3">
-                  <c:v>270</c:v>
-                </c:pt>
-              </c:numCache>
-            </c:numRef>
-          </c:val>
-        </c:ser>
-        <c:dLbls>
-          <c:txPr>
-            <a:bodyPr/>
-            <a:lstStyle/>
-            <a:p>
-              <a:pPr>
-                <a:defRPr sz="1300" b="1"/>
-              </a:pPr>
-            </a:p>
-          </c:txPr>
-          <c:dLblPos val="outEnd"/>
-          <c:showLegendKey val="0"/>
-          <c:showVal val="1"/>
-          <c:showCatName val="0"/>
-          <c:showSerName val="0"/>
-          <c:showPercent val="0"/>
-          <c:showBubbleSize val="0"/>
-          <c:showLeaderLines val="1"/>
-        </c:dLbls>
-        <c:gapWidth val="55"/>
-        <c:axId val="-2068027336"/>
-        <c:axId val="-2113994440"/>
-      </c:barChart>
-      <c:catAx>
-        <c:axId val="-2068027336"/>
-        <c:scaling>
-          <c:orientation val="minMax"/>
-        </c:scaling>
-        <c:delete val="0"/>
-        <c:axPos val="l"/>
-        <c:majorTickMark val="out"/>
-        <c:minorTickMark val="none"/>
-        <c:tickLblPos val="nextTo"/>
-        <c:spPr>
-          <a:ln>
-            <a:noFill/>
-          </a:ln>
-        </c:spPr>
-        <c:txPr>
-          <a:bodyPr/>
-          <a:lstStyle/>
-          <a:p>
-            <a:pPr>
-              <a:defRPr sz="1200">
-                <a:latin typeface="Poppins"/>
-              </a:defRPr>
-            </a:pPr>
-          </a:p>
-        </c:txPr>
-        <c:crossAx val="-2113994440"/>
-        <c:crosses val="autoZero"/>
-        <c:auto val="1"/>
-        <c:lblAlgn val="ctr"/>
-        <c:lblOffset val="100"/>
-        <c:noMultiLvlLbl val="0"/>
-      </c:catAx>
-      <c:valAx>
-        <c:axId val="-2113994440"/>
-        <c:scaling>
-          <c:min val="0.0"/>
-        </c:scaling>
-        <c:delete/>
-        <c:axPos val="b"/>
-        <c:majorTickMark val="none"/>
-        <c:minorTickMark val="none"/>
-        <c:tickLblPos val="none"/>
-        <c:spPr>
-          <a:ln>
-            <a:noFill/>
-          </a:ln>
-        </c:spPr>
-        <c:crossAx val="-2068027336"/>
-        <c:crosses val="autoZero"/>
-      </c:valAx>
-    </c:plotArea>
-    <c:dispBlanksAs val="gap"/>
-  </c:chart>
-  <c:txPr>
-    <a:bodyPr/>
-    <a:lstStyle/>
-    <a:p>
-      <a:pPr>
-        <a:defRPr sz="1800"/>
-      </a:pPr>
-      <a:endParaRPr lang="en-US"/>
-    </a:p>
-  </c:txPr>
-  <c:externalData r:id="rId1">
-    <c:autoUpdate val="0"/>
-  </c:externalData>
-</c:chartSpace>
 </file>
 
 <file path=ppt/slideLayouts/slideLayout1.xml><?xml version="1.0" encoding="utf-8"?>
@@ -6438,27 +6057,9 @@
           </a:p>
         </p:txBody>
       </p:sp>
-      <p:graphicFrame>
-        <p:nvGraphicFramePr>
-          <p:cNvPr id="9" name="Chart 8"/>
-          <p:cNvGraphicFramePr>
-            <a:graphicFrameLocks noGrp="1"/>
-          </p:cNvGraphicFramePr>
-          <p:nvPr/>
-        </p:nvGraphicFramePr>
-        <p:xfrm>
-          <a:off x="576000" y="1944000"/>
-          <a:ext cx="5760000" cy="4104000"/>
-        </p:xfrm>
-        <a:graphic>
-          <a:graphicData uri="http://schemas.openxmlformats.org/drawingml/2006/chart">
-            <c:chart xmlns:c="http://schemas.openxmlformats.org/drawingml/2006/chart" r:id="rId3"/>
-          </a:graphicData>
-        </a:graphic>
-      </p:graphicFrame>
-      <p:sp>
-        <p:nvSpPr>
-          <p:cNvPr id="10" name="TextBox 9"/>
+      <p:sp>
+        <p:nvSpPr>
+          <p:cNvPr id="9" name="TextBox 8"/>
           <p:cNvSpPr txBox="1"/>
           <p:nvPr/>
         </p:nvSpPr>
@@ -6497,7 +6098,671 @@
       </p:sp>
       <p:sp>
         <p:nvSpPr>
-          <p:cNvPr id="11" name="TextBox 10"/>
+          <p:cNvPr id="10" name="TextBox 9"/>
+          <p:cNvSpPr txBox="1"/>
+          <p:nvPr/>
+        </p:nvSpPr>
+        <p:spPr>
+          <a:xfrm>
+            <a:off x="576000" y="2016000"/>
+            <a:ext cx="1583999" cy="1008000"/>
+          </a:xfrm>
+          <a:prstGeom prst="rect">
+            <a:avLst/>
+          </a:prstGeom>
+          <a:noFill/>
+        </p:spPr>
+        <p:txBody>
+          <a:bodyPr wrap="square" lIns="36000" rIns="36000" tIns="18000" bIns="18000" anchor="ctr">
+            <a:spAutoFit/>
+          </a:bodyPr>
+          <a:lstStyle/>
+          <a:p>
+            <a:pPr algn="l">
+              <a:lnSpc>
+                <a:spcPct val="110000"/>
+              </a:lnSpc>
+            </a:pPr>
+            <a:r>
+              <a:rPr sz="1150" b="1">
+                <a:solidFill>
+                  <a:srgbClr val="111111"/>
+                </a:solidFill>
+                <a:latin typeface="Poppins"/>
+              </a:rPr>
+              <a:t>Offres d’emploi (4)</a:t>
+            </a:r>
+          </a:p>
+        </p:txBody>
+      </p:sp>
+      <p:sp>
+        <p:nvSpPr>
+          <p:cNvPr id="11" name="Rounded Rectangle 10"/>
+          <p:cNvSpPr/>
+          <p:nvPr/>
+        </p:nvSpPr>
+        <p:spPr>
+          <a:xfrm>
+            <a:off x="2231999" y="2286000"/>
+            <a:ext cx="3204001" cy="468000"/>
+          </a:xfrm>
+          <a:prstGeom prst="roundRect">
+            <a:avLst/>
+          </a:prstGeom>
+          <a:solidFill>
+            <a:srgbClr val="F0F0F0"/>
+          </a:solidFill>
+          <a:ln>
+            <a:noFill/>
+          </a:ln>
+          <a:effectLst/>
+        </p:spPr>
+        <p:style>
+          <a:lnRef idx="1">
+            <a:schemeClr val="accent1"/>
+          </a:lnRef>
+          <a:fillRef idx="3">
+            <a:schemeClr val="accent1"/>
+          </a:fillRef>
+          <a:effectRef idx="2">
+            <a:schemeClr val="accent1"/>
+          </a:effectRef>
+          <a:fontRef idx="minor">
+            <a:schemeClr val="lt1"/>
+          </a:fontRef>
+        </p:style>
+        <p:txBody>
+          <a:bodyPr rtlCol="0" anchor="ctr"/>
+          <a:lstStyle/>
+          <a:p>
+            <a:pPr algn="ctr"/>
+          </a:p>
+        </p:txBody>
+      </p:sp>
+      <p:sp>
+        <p:nvSpPr>
+          <p:cNvPr id="12" name="Rounded Rectangle 11"/>
+          <p:cNvSpPr/>
+          <p:nvPr/>
+        </p:nvSpPr>
+        <p:spPr>
+          <a:xfrm>
+            <a:off x="2231999" y="2286000"/>
+            <a:ext cx="3204001" cy="468000"/>
+          </a:xfrm>
+          <a:prstGeom prst="roundRect">
+            <a:avLst/>
+          </a:prstGeom>
+          <a:solidFill>
+            <a:srgbClr val="EE5B22"/>
+          </a:solidFill>
+          <a:ln>
+            <a:noFill/>
+          </a:ln>
+          <a:effectLst/>
+        </p:spPr>
+        <p:style>
+          <a:lnRef idx="1">
+            <a:schemeClr val="accent1"/>
+          </a:lnRef>
+          <a:fillRef idx="3">
+            <a:schemeClr val="accent1"/>
+          </a:fillRef>
+          <a:effectRef idx="2">
+            <a:schemeClr val="accent1"/>
+          </a:effectRef>
+          <a:fontRef idx="minor">
+            <a:schemeClr val="lt1"/>
+          </a:fontRef>
+        </p:style>
+        <p:txBody>
+          <a:bodyPr rtlCol="0" anchor="ctr"/>
+          <a:lstStyle/>
+          <a:p>
+            <a:pPr algn="ctr"/>
+          </a:p>
+        </p:txBody>
+      </p:sp>
+      <p:sp>
+        <p:nvSpPr>
+          <p:cNvPr id="13" name="TextBox 12"/>
+          <p:cNvSpPr txBox="1"/>
+          <p:nvPr/>
+        </p:nvSpPr>
+        <p:spPr>
+          <a:xfrm>
+            <a:off x="5508000" y="2016000"/>
+            <a:ext cx="792000" cy="1008000"/>
+          </a:xfrm>
+          <a:prstGeom prst="rect">
+            <a:avLst/>
+          </a:prstGeom>
+          <a:noFill/>
+        </p:spPr>
+        <p:txBody>
+          <a:bodyPr wrap="square" lIns="36000" rIns="36000" tIns="18000" bIns="18000" anchor="ctr">
+            <a:spAutoFit/>
+          </a:bodyPr>
+          <a:lstStyle/>
+          <a:p>
+            <a:pPr algn="l">
+              <a:lnSpc>
+                <a:spcPct val="110000"/>
+              </a:lnSpc>
+            </a:pPr>
+            <a:r>
+              <a:rPr sz="1250" b="1">
+                <a:solidFill>
+                  <a:srgbClr val="EE5B22"/>
+                </a:solidFill>
+                <a:latin typeface="Poppins"/>
+              </a:rPr>
+              <a:t>270</a:t>
+            </a:r>
+          </a:p>
+        </p:txBody>
+      </p:sp>
+      <p:sp>
+        <p:nvSpPr>
+          <p:cNvPr id="14" name="TextBox 13"/>
+          <p:cNvSpPr txBox="1"/>
+          <p:nvPr/>
+        </p:nvSpPr>
+        <p:spPr>
+          <a:xfrm>
+            <a:off x="576000" y="3024000"/>
+            <a:ext cx="1583999" cy="1008000"/>
+          </a:xfrm>
+          <a:prstGeom prst="rect">
+            <a:avLst/>
+          </a:prstGeom>
+          <a:noFill/>
+        </p:spPr>
+        <p:txBody>
+          <a:bodyPr wrap="square" lIns="36000" rIns="36000" tIns="18000" bIns="18000" anchor="ctr">
+            <a:spAutoFit/>
+          </a:bodyPr>
+          <a:lstStyle/>
+          <a:p>
+            <a:pPr algn="l">
+              <a:lnSpc>
+                <a:spcPct val="110000"/>
+              </a:lnSpc>
+            </a:pPr>
+            <a:r>
+              <a:rPr sz="1150" b="0">
+                <a:solidFill>
+                  <a:srgbClr val="111111"/>
+                </a:solidFill>
+                <a:latin typeface="Poppins"/>
+              </a:rPr>
+              <a:t>Équipes et engins (13)</a:t>
+            </a:r>
+          </a:p>
+        </p:txBody>
+      </p:sp>
+      <p:sp>
+        <p:nvSpPr>
+          <p:cNvPr id="15" name="Rounded Rectangle 14"/>
+          <p:cNvSpPr/>
+          <p:nvPr/>
+        </p:nvSpPr>
+        <p:spPr>
+          <a:xfrm>
+            <a:off x="2231999" y="3294000"/>
+            <a:ext cx="3204001" cy="468000"/>
+          </a:xfrm>
+          <a:prstGeom prst="roundRect">
+            <a:avLst/>
+          </a:prstGeom>
+          <a:solidFill>
+            <a:srgbClr val="F0F0F0"/>
+          </a:solidFill>
+          <a:ln>
+            <a:noFill/>
+          </a:ln>
+          <a:effectLst/>
+        </p:spPr>
+        <p:style>
+          <a:lnRef idx="1">
+            <a:schemeClr val="accent1"/>
+          </a:lnRef>
+          <a:fillRef idx="3">
+            <a:schemeClr val="accent1"/>
+          </a:fillRef>
+          <a:effectRef idx="2">
+            <a:schemeClr val="accent1"/>
+          </a:effectRef>
+          <a:fontRef idx="minor">
+            <a:schemeClr val="lt1"/>
+          </a:fontRef>
+        </p:style>
+        <p:txBody>
+          <a:bodyPr rtlCol="0" anchor="ctr"/>
+          <a:lstStyle/>
+          <a:p>
+            <a:pPr algn="ctr"/>
+          </a:p>
+        </p:txBody>
+      </p:sp>
+      <p:sp>
+        <p:nvSpPr>
+          <p:cNvPr id="16" name="Rounded Rectangle 15"/>
+          <p:cNvSpPr/>
+          <p:nvPr/>
+        </p:nvSpPr>
+        <p:spPr>
+          <a:xfrm>
+            <a:off x="2231999" y="3294000"/>
+            <a:ext cx="1127333" cy="468000"/>
+          </a:xfrm>
+          <a:prstGeom prst="roundRect">
+            <a:avLst/>
+          </a:prstGeom>
+          <a:solidFill>
+            <a:srgbClr val="B9B9B9"/>
+          </a:solidFill>
+          <a:ln>
+            <a:noFill/>
+          </a:ln>
+          <a:effectLst/>
+        </p:spPr>
+        <p:style>
+          <a:lnRef idx="1">
+            <a:schemeClr val="accent1"/>
+          </a:lnRef>
+          <a:fillRef idx="3">
+            <a:schemeClr val="accent1"/>
+          </a:fillRef>
+          <a:effectRef idx="2">
+            <a:schemeClr val="accent1"/>
+          </a:effectRef>
+          <a:fontRef idx="minor">
+            <a:schemeClr val="lt1"/>
+          </a:fontRef>
+        </p:style>
+        <p:txBody>
+          <a:bodyPr rtlCol="0" anchor="ctr"/>
+          <a:lstStyle/>
+          <a:p>
+            <a:pPr algn="ctr"/>
+          </a:p>
+        </p:txBody>
+      </p:sp>
+      <p:sp>
+        <p:nvSpPr>
+          <p:cNvPr id="17" name="TextBox 16"/>
+          <p:cNvSpPr txBox="1"/>
+          <p:nvPr/>
+        </p:nvSpPr>
+        <p:spPr>
+          <a:xfrm>
+            <a:off x="5508000" y="3024000"/>
+            <a:ext cx="792000" cy="1008000"/>
+          </a:xfrm>
+          <a:prstGeom prst="rect">
+            <a:avLst/>
+          </a:prstGeom>
+          <a:noFill/>
+        </p:spPr>
+        <p:txBody>
+          <a:bodyPr wrap="square" lIns="36000" rIns="36000" tIns="18000" bIns="18000" anchor="ctr">
+            <a:spAutoFit/>
+          </a:bodyPr>
+          <a:lstStyle/>
+          <a:p>
+            <a:pPr algn="l">
+              <a:lnSpc>
+                <a:spcPct val="110000"/>
+              </a:lnSpc>
+            </a:pPr>
+            <a:r>
+              <a:rPr sz="1250" b="1">
+                <a:solidFill>
+                  <a:srgbClr val="111111"/>
+                </a:solidFill>
+                <a:latin typeface="Poppins"/>
+              </a:rPr>
+              <a:t>95</a:t>
+            </a:r>
+          </a:p>
+        </p:txBody>
+      </p:sp>
+      <p:sp>
+        <p:nvSpPr>
+          <p:cNvPr id="18" name="TextBox 17"/>
+          <p:cNvSpPr txBox="1"/>
+          <p:nvPr/>
+        </p:nvSpPr>
+        <p:spPr>
+          <a:xfrm>
+            <a:off x="576000" y="4032000"/>
+            <a:ext cx="1583999" cy="1008000"/>
+          </a:xfrm>
+          <a:prstGeom prst="rect">
+            <a:avLst/>
+          </a:prstGeom>
+          <a:noFill/>
+        </p:spPr>
+        <p:txBody>
+          <a:bodyPr wrap="square" lIns="36000" rIns="36000" tIns="18000" bIns="18000" anchor="ctr">
+            <a:spAutoFit/>
+          </a:bodyPr>
+          <a:lstStyle/>
+          <a:p>
+            <a:pPr algn="l">
+              <a:lnSpc>
+                <a:spcPct val="110000"/>
+              </a:lnSpc>
+            </a:pPr>
+            <a:r>
+              <a:rPr sz="1150" b="0">
+                <a:solidFill>
+                  <a:srgbClr val="111111"/>
+                </a:solidFill>
+                <a:latin typeface="Poppins"/>
+              </a:rPr>
+              <a:t>Toute la page (25)</a:t>
+            </a:r>
+          </a:p>
+        </p:txBody>
+      </p:sp>
+      <p:sp>
+        <p:nvSpPr>
+          <p:cNvPr id="19" name="Rounded Rectangle 18"/>
+          <p:cNvSpPr/>
+          <p:nvPr/>
+        </p:nvSpPr>
+        <p:spPr>
+          <a:xfrm>
+            <a:off x="2231999" y="4302000"/>
+            <a:ext cx="3204001" cy="468000"/>
+          </a:xfrm>
+          <a:prstGeom prst="roundRect">
+            <a:avLst/>
+          </a:prstGeom>
+          <a:solidFill>
+            <a:srgbClr val="F0F0F0"/>
+          </a:solidFill>
+          <a:ln>
+            <a:noFill/>
+          </a:ln>
+          <a:effectLst/>
+        </p:spPr>
+        <p:style>
+          <a:lnRef idx="1">
+            <a:schemeClr val="accent1"/>
+          </a:lnRef>
+          <a:fillRef idx="3">
+            <a:schemeClr val="accent1"/>
+          </a:fillRef>
+          <a:effectRef idx="2">
+            <a:schemeClr val="accent1"/>
+          </a:effectRef>
+          <a:fontRef idx="minor">
+            <a:schemeClr val="lt1"/>
+          </a:fontRef>
+        </p:style>
+        <p:txBody>
+          <a:bodyPr rtlCol="0" anchor="ctr"/>
+          <a:lstStyle/>
+          <a:p>
+            <a:pPr algn="ctr"/>
+          </a:p>
+        </p:txBody>
+      </p:sp>
+      <p:sp>
+        <p:nvSpPr>
+          <p:cNvPr id="20" name="Rounded Rectangle 19"/>
+          <p:cNvSpPr/>
+          <p:nvPr/>
+        </p:nvSpPr>
+        <p:spPr>
+          <a:xfrm>
+            <a:off x="2231999" y="4302000"/>
+            <a:ext cx="1139200" cy="468000"/>
+          </a:xfrm>
+          <a:prstGeom prst="roundRect">
+            <a:avLst/>
+          </a:prstGeom>
+          <a:solidFill>
+            <a:srgbClr val="B9B9B9"/>
+          </a:solidFill>
+          <a:ln>
+            <a:noFill/>
+          </a:ln>
+          <a:effectLst/>
+        </p:spPr>
+        <p:style>
+          <a:lnRef idx="1">
+            <a:schemeClr val="accent1"/>
+          </a:lnRef>
+          <a:fillRef idx="3">
+            <a:schemeClr val="accent1"/>
+          </a:fillRef>
+          <a:effectRef idx="2">
+            <a:schemeClr val="accent1"/>
+          </a:effectRef>
+          <a:fontRef idx="minor">
+            <a:schemeClr val="lt1"/>
+          </a:fontRef>
+        </p:style>
+        <p:txBody>
+          <a:bodyPr rtlCol="0" anchor="ctr"/>
+          <a:lstStyle/>
+          <a:p>
+            <a:pPr algn="ctr"/>
+          </a:p>
+        </p:txBody>
+      </p:sp>
+      <p:sp>
+        <p:nvSpPr>
+          <p:cNvPr id="21" name="TextBox 20"/>
+          <p:cNvSpPr txBox="1"/>
+          <p:nvPr/>
+        </p:nvSpPr>
+        <p:spPr>
+          <a:xfrm>
+            <a:off x="5508000" y="4032000"/>
+            <a:ext cx="792000" cy="1008000"/>
+          </a:xfrm>
+          <a:prstGeom prst="rect">
+            <a:avLst/>
+          </a:prstGeom>
+          <a:noFill/>
+        </p:spPr>
+        <p:txBody>
+          <a:bodyPr wrap="square" lIns="36000" rIns="36000" tIns="18000" bIns="18000" anchor="ctr">
+            <a:spAutoFit/>
+          </a:bodyPr>
+          <a:lstStyle/>
+          <a:p>
+            <a:pPr algn="l">
+              <a:lnSpc>
+                <a:spcPct val="110000"/>
+              </a:lnSpc>
+            </a:pPr>
+            <a:r>
+              <a:rPr sz="1250" b="1">
+                <a:solidFill>
+                  <a:srgbClr val="111111"/>
+                </a:solidFill>
+                <a:latin typeface="Poppins"/>
+              </a:rPr>
+              <a:t>96</a:t>
+            </a:r>
+          </a:p>
+        </p:txBody>
+      </p:sp>
+      <p:sp>
+        <p:nvSpPr>
+          <p:cNvPr id="22" name="TextBox 21"/>
+          <p:cNvSpPr txBox="1"/>
+          <p:nvPr/>
+        </p:nvSpPr>
+        <p:spPr>
+          <a:xfrm>
+            <a:off x="576000" y="5040000"/>
+            <a:ext cx="1583999" cy="1008000"/>
+          </a:xfrm>
+          <a:prstGeom prst="rect">
+            <a:avLst/>
+          </a:prstGeom>
+          <a:noFill/>
+        </p:spPr>
+        <p:txBody>
+          <a:bodyPr wrap="square" lIns="36000" rIns="36000" tIns="18000" bIns="18000" anchor="ctr">
+            <a:spAutoFit/>
+          </a:bodyPr>
+          <a:lstStyle/>
+          <a:p>
+            <a:pPr algn="l">
+              <a:lnSpc>
+                <a:spcPct val="110000"/>
+              </a:lnSpc>
+            </a:pPr>
+            <a:r>
+              <a:rPr sz="1150" b="0">
+                <a:solidFill>
+                  <a:srgbClr val="111111"/>
+                </a:solidFill>
+                <a:latin typeface="Poppins"/>
+              </a:rPr>
+              <a:t>Agenda et événements (4)</a:t>
+            </a:r>
+          </a:p>
+        </p:txBody>
+      </p:sp>
+      <p:sp>
+        <p:nvSpPr>
+          <p:cNvPr id="23" name="Rounded Rectangle 22"/>
+          <p:cNvSpPr/>
+          <p:nvPr/>
+        </p:nvSpPr>
+        <p:spPr>
+          <a:xfrm>
+            <a:off x="2231999" y="5310000"/>
+            <a:ext cx="3204001" cy="468000"/>
+          </a:xfrm>
+          <a:prstGeom prst="roundRect">
+            <a:avLst/>
+          </a:prstGeom>
+          <a:solidFill>
+            <a:srgbClr val="F0F0F0"/>
+          </a:solidFill>
+          <a:ln>
+            <a:noFill/>
+          </a:ln>
+          <a:effectLst/>
+        </p:spPr>
+        <p:style>
+          <a:lnRef idx="1">
+            <a:schemeClr val="accent1"/>
+          </a:lnRef>
+          <a:fillRef idx="3">
+            <a:schemeClr val="accent1"/>
+          </a:fillRef>
+          <a:effectRef idx="2">
+            <a:schemeClr val="accent1"/>
+          </a:effectRef>
+          <a:fontRef idx="minor">
+            <a:schemeClr val="lt1"/>
+          </a:fontRef>
+        </p:style>
+        <p:txBody>
+          <a:bodyPr rtlCol="0" anchor="ctr"/>
+          <a:lstStyle/>
+          <a:p>
+            <a:pPr algn="ctr"/>
+          </a:p>
+        </p:txBody>
+      </p:sp>
+      <p:sp>
+        <p:nvSpPr>
+          <p:cNvPr id="24" name="Rounded Rectangle 23"/>
+          <p:cNvSpPr/>
+          <p:nvPr/>
+        </p:nvSpPr>
+        <p:spPr>
+          <a:xfrm>
+            <a:off x="2231999" y="5310000"/>
+            <a:ext cx="379733" cy="468000"/>
+          </a:xfrm>
+          <a:prstGeom prst="roundRect">
+            <a:avLst/>
+          </a:prstGeom>
+          <a:solidFill>
+            <a:srgbClr val="B9B9B9"/>
+          </a:solidFill>
+          <a:ln>
+            <a:noFill/>
+          </a:ln>
+          <a:effectLst/>
+        </p:spPr>
+        <p:style>
+          <a:lnRef idx="1">
+            <a:schemeClr val="accent1"/>
+          </a:lnRef>
+          <a:fillRef idx="3">
+            <a:schemeClr val="accent1"/>
+          </a:fillRef>
+          <a:effectRef idx="2">
+            <a:schemeClr val="accent1"/>
+          </a:effectRef>
+          <a:fontRef idx="minor">
+            <a:schemeClr val="lt1"/>
+          </a:fontRef>
+        </p:style>
+        <p:txBody>
+          <a:bodyPr rtlCol="0" anchor="ctr"/>
+          <a:lstStyle/>
+          <a:p>
+            <a:pPr algn="ctr"/>
+          </a:p>
+        </p:txBody>
+      </p:sp>
+      <p:sp>
+        <p:nvSpPr>
+          <p:cNvPr id="25" name="TextBox 24"/>
+          <p:cNvSpPr txBox="1"/>
+          <p:nvPr/>
+        </p:nvSpPr>
+        <p:spPr>
+          <a:xfrm>
+            <a:off x="5508000" y="5040000"/>
+            <a:ext cx="792000" cy="1008000"/>
+          </a:xfrm>
+          <a:prstGeom prst="rect">
+            <a:avLst/>
+          </a:prstGeom>
+          <a:noFill/>
+        </p:spPr>
+        <p:txBody>
+          <a:bodyPr wrap="square" lIns="36000" rIns="36000" tIns="18000" bIns="18000" anchor="ctr">
+            <a:spAutoFit/>
+          </a:bodyPr>
+          <a:lstStyle/>
+          <a:p>
+            <a:pPr algn="l">
+              <a:lnSpc>
+                <a:spcPct val="110000"/>
+              </a:lnSpc>
+            </a:pPr>
+            <a:r>
+              <a:rPr sz="1250" b="1">
+                <a:solidFill>
+                  <a:srgbClr val="111111"/>
+                </a:solidFill>
+                <a:latin typeface="Poppins"/>
+              </a:rPr>
+              <a:t>32</a:t>
+            </a:r>
+          </a:p>
+        </p:txBody>
+      </p:sp>
+      <p:sp>
+        <p:nvSpPr>
+          <p:cNvPr id="26" name="TextBox 25"/>
           <p:cNvSpPr txBox="1"/>
           <p:nvPr/>
         </p:nvSpPr>
@@ -25036,7 +25301,7 @@
                 </a:solidFill>
                 <a:latin typeface="Poppins"/>
               </a:rPr>
-              <a:t>page de 2015</a:t>
+              <a:t>0</a:t>
             </a:r>
           </a:p>
         </p:txBody>
@@ -25075,7 +25340,7 @@
                 </a:solidFill>
                 <a:latin typeface="Poppins"/>
               </a:rPr>
-              <a:t>Facebook</a:t>
+              <a:t>publication Facebook visible</a:t>
             </a:r>
           </a:p>
         </p:txBody>
@@ -25114,7 +25379,7 @@
                 </a:solidFill>
                 <a:latin typeface="Poppins"/>
               </a:rPr>
-              <a:t>Page « Proline Logistics » trouvée, sans publication lisible</a:t>
+              <a:t>Page « Proline Logistics » créée en 2015</a:t>
             </a:r>
           </a:p>
         </p:txBody>
@@ -25267,7 +25532,7 @@
                 </a:solidFill>
                 <a:latin typeface="Poppins"/>
               </a:rPr>
-              <a:t>pris</a:t>
+              <a:t>0</a:t>
             </a:r>
           </a:p>
         </p:txBody>
@@ -25306,7 +25571,7 @@
                 </a:solidFill>
                 <a:latin typeface="Poppins"/>
               </a:rPr>
-              <a:t>nom Instagram</a:t>
+              <a:t>compte Instagram à vous</a:t>
             </a:r>
           </a:p>
         </p:txBody>
@@ -25345,7 +25610,7 @@
                 </a:solidFill>
                 <a:latin typeface="Poppins"/>
               </a:rPr>
-              <a:t>@prolinelogistics est une société de Perth, en Australie</a:t>
+              <a:t>Le nom @prolinelogistics est pris par une société australienne</a:t>
             </a:r>
           </a:p>
         </p:txBody>
@@ -25808,27 +26073,9 @@
           </a:p>
         </p:txBody>
       </p:sp>
-      <p:graphicFrame>
-        <p:nvGraphicFramePr>
-          <p:cNvPr id="9" name="Chart 8"/>
-          <p:cNvGraphicFramePr>
-            <a:graphicFrameLocks noGrp="1"/>
-          </p:cNvGraphicFramePr>
-          <p:nvPr/>
-        </p:nvGraphicFramePr>
-        <p:xfrm>
-          <a:off x="576000" y="1944000"/>
-          <a:ext cx="5256000" cy="3816000"/>
-        </p:xfrm>
-        <a:graphic>
-          <a:graphicData uri="http://schemas.openxmlformats.org/drawingml/2006/chart">
-            <c:chart xmlns:c="http://schemas.openxmlformats.org/drawingml/2006/chart" r:id="rId3"/>
-          </a:graphicData>
-        </a:graphic>
-      </p:graphicFrame>
-      <p:sp>
-        <p:nvSpPr>
-          <p:cNvPr id="10" name="TextBox 9"/>
+      <p:sp>
+        <p:nvSpPr>
+          <p:cNvPr id="9" name="TextBox 8"/>
           <p:cNvSpPr txBox="1"/>
           <p:nvPr/>
         </p:nvSpPr>
@@ -25865,9 +26112,673 @@
           </a:p>
         </p:txBody>
       </p:sp>
+      <p:sp>
+        <p:nvSpPr>
+          <p:cNvPr id="10" name="TextBox 9"/>
+          <p:cNvSpPr txBox="1"/>
+          <p:nvPr/>
+        </p:nvSpPr>
+        <p:spPr>
+          <a:xfrm>
+            <a:off x="576000" y="2016000"/>
+            <a:ext cx="1583999" cy="936000"/>
+          </a:xfrm>
+          <a:prstGeom prst="rect">
+            <a:avLst/>
+          </a:prstGeom>
+          <a:noFill/>
+        </p:spPr>
+        <p:txBody>
+          <a:bodyPr wrap="square" lIns="36000" rIns="36000" tIns="18000" bIns="18000" anchor="ctr">
+            <a:spAutoFit/>
+          </a:bodyPr>
+          <a:lstStyle/>
+          <a:p>
+            <a:pPr algn="l">
+              <a:lnSpc>
+                <a:spcPct val="110000"/>
+              </a:lnSpc>
+            </a:pPr>
+            <a:r>
+              <a:rPr sz="1150" b="1">
+                <a:solidFill>
+                  <a:srgbClr val="111111"/>
+                </a:solidFill>
+                <a:latin typeface="Poppins"/>
+              </a:rPr>
+              <a:t>Proline</a:t>
+            </a:r>
+          </a:p>
+        </p:txBody>
+      </p:sp>
+      <p:sp>
+        <p:nvSpPr>
+          <p:cNvPr id="11" name="Rounded Rectangle 10"/>
+          <p:cNvSpPr/>
+          <p:nvPr/>
+        </p:nvSpPr>
+        <p:spPr>
+          <a:xfrm>
+            <a:off x="2231999" y="2250000"/>
+            <a:ext cx="2700001" cy="468000"/>
+          </a:xfrm>
+          <a:prstGeom prst="roundRect">
+            <a:avLst/>
+          </a:prstGeom>
+          <a:solidFill>
+            <a:srgbClr val="F0F0F0"/>
+          </a:solidFill>
+          <a:ln>
+            <a:noFill/>
+          </a:ln>
+          <a:effectLst/>
+        </p:spPr>
+        <p:style>
+          <a:lnRef idx="1">
+            <a:schemeClr val="accent1"/>
+          </a:lnRef>
+          <a:fillRef idx="3">
+            <a:schemeClr val="accent1"/>
+          </a:fillRef>
+          <a:effectRef idx="2">
+            <a:schemeClr val="accent1"/>
+          </a:effectRef>
+          <a:fontRef idx="minor">
+            <a:schemeClr val="lt1"/>
+          </a:fontRef>
+        </p:style>
+        <p:txBody>
+          <a:bodyPr rtlCol="0" anchor="ctr"/>
+          <a:lstStyle/>
+          <a:p>
+            <a:pPr algn="ctr"/>
+          </a:p>
+        </p:txBody>
+      </p:sp>
+      <p:sp>
+        <p:nvSpPr>
+          <p:cNvPr id="12" name="Rounded Rectangle 11"/>
+          <p:cNvSpPr/>
+          <p:nvPr/>
+        </p:nvSpPr>
+        <p:spPr>
+          <a:xfrm>
+            <a:off x="2231999" y="2250000"/>
+            <a:ext cx="90000" cy="468000"/>
+          </a:xfrm>
+          <a:prstGeom prst="roundRect">
+            <a:avLst/>
+          </a:prstGeom>
+          <a:solidFill>
+            <a:srgbClr val="EE5B22"/>
+          </a:solidFill>
+          <a:ln>
+            <a:noFill/>
+          </a:ln>
+          <a:effectLst/>
+        </p:spPr>
+        <p:style>
+          <a:lnRef idx="1">
+            <a:schemeClr val="accent1"/>
+          </a:lnRef>
+          <a:fillRef idx="3">
+            <a:schemeClr val="accent1"/>
+          </a:fillRef>
+          <a:effectRef idx="2">
+            <a:schemeClr val="accent1"/>
+          </a:effectRef>
+          <a:fontRef idx="minor">
+            <a:schemeClr val="lt1"/>
+          </a:fontRef>
+        </p:style>
+        <p:txBody>
+          <a:bodyPr rtlCol="0" anchor="ctr"/>
+          <a:lstStyle/>
+          <a:p>
+            <a:pPr algn="ctr"/>
+          </a:p>
+        </p:txBody>
+      </p:sp>
+      <p:sp>
+        <p:nvSpPr>
+          <p:cNvPr id="13" name="TextBox 12"/>
+          <p:cNvSpPr txBox="1"/>
+          <p:nvPr/>
+        </p:nvSpPr>
+        <p:spPr>
+          <a:xfrm>
+            <a:off x="5004000" y="2016000"/>
+            <a:ext cx="792000" cy="936000"/>
+          </a:xfrm>
+          <a:prstGeom prst="rect">
+            <a:avLst/>
+          </a:prstGeom>
+          <a:noFill/>
+        </p:spPr>
+        <p:txBody>
+          <a:bodyPr wrap="square" lIns="36000" rIns="36000" tIns="18000" bIns="18000" anchor="ctr">
+            <a:spAutoFit/>
+          </a:bodyPr>
+          <a:lstStyle/>
+          <a:p>
+            <a:pPr algn="l">
+              <a:lnSpc>
+                <a:spcPct val="110000"/>
+              </a:lnSpc>
+            </a:pPr>
+            <a:r>
+              <a:rPr sz="1250" b="1">
+                <a:solidFill>
+                  <a:srgbClr val="EE5B22"/>
+                </a:solidFill>
+                <a:latin typeface="Poppins"/>
+              </a:rPr>
+              <a:t>0</a:t>
+            </a:r>
+          </a:p>
+        </p:txBody>
+      </p:sp>
+      <p:sp>
+        <p:nvSpPr>
+          <p:cNvPr id="14" name="TextBox 13"/>
+          <p:cNvSpPr txBox="1"/>
+          <p:nvPr/>
+        </p:nvSpPr>
+        <p:spPr>
+          <a:xfrm>
+            <a:off x="576000" y="2952000"/>
+            <a:ext cx="1583999" cy="936000"/>
+          </a:xfrm>
+          <a:prstGeom prst="rect">
+            <a:avLst/>
+          </a:prstGeom>
+          <a:noFill/>
+        </p:spPr>
+        <p:txBody>
+          <a:bodyPr wrap="square" lIns="36000" rIns="36000" tIns="18000" bIns="18000" anchor="ctr">
+            <a:spAutoFit/>
+          </a:bodyPr>
+          <a:lstStyle/>
+          <a:p>
+            <a:pPr algn="l">
+              <a:lnSpc>
+                <a:spcPct val="110000"/>
+              </a:lnSpc>
+            </a:pPr>
+            <a:r>
+              <a:rPr sz="1150" b="0">
+                <a:solidFill>
+                  <a:srgbClr val="111111"/>
+                </a:solidFill>
+                <a:latin typeface="Poppins"/>
+              </a:rPr>
+              <a:t>AGL (Facebook)</a:t>
+            </a:r>
+          </a:p>
+        </p:txBody>
+      </p:sp>
+      <p:sp>
+        <p:nvSpPr>
+          <p:cNvPr id="15" name="Rounded Rectangle 14"/>
+          <p:cNvSpPr/>
+          <p:nvPr/>
+        </p:nvSpPr>
+        <p:spPr>
+          <a:xfrm>
+            <a:off x="2231999" y="3186000"/>
+            <a:ext cx="2700001" cy="468000"/>
+          </a:xfrm>
+          <a:prstGeom prst="roundRect">
+            <a:avLst/>
+          </a:prstGeom>
+          <a:solidFill>
+            <a:srgbClr val="F0F0F0"/>
+          </a:solidFill>
+          <a:ln>
+            <a:noFill/>
+          </a:ln>
+          <a:effectLst/>
+        </p:spPr>
+        <p:style>
+          <a:lnRef idx="1">
+            <a:schemeClr val="accent1"/>
+          </a:lnRef>
+          <a:fillRef idx="3">
+            <a:schemeClr val="accent1"/>
+          </a:fillRef>
+          <a:effectRef idx="2">
+            <a:schemeClr val="accent1"/>
+          </a:effectRef>
+          <a:fontRef idx="minor">
+            <a:schemeClr val="lt1"/>
+          </a:fontRef>
+        </p:style>
+        <p:txBody>
+          <a:bodyPr rtlCol="0" anchor="ctr"/>
+          <a:lstStyle/>
+          <a:p>
+            <a:pPr algn="ctr"/>
+          </a:p>
+        </p:txBody>
+      </p:sp>
+      <p:sp>
+        <p:nvSpPr>
+          <p:cNvPr id="16" name="Rounded Rectangle 15"/>
+          <p:cNvSpPr/>
+          <p:nvPr/>
+        </p:nvSpPr>
+        <p:spPr>
+          <a:xfrm>
+            <a:off x="2231999" y="3186000"/>
+            <a:ext cx="2700001" cy="468000"/>
+          </a:xfrm>
+          <a:prstGeom prst="roundRect">
+            <a:avLst/>
+          </a:prstGeom>
+          <a:solidFill>
+            <a:srgbClr val="B9B9B9"/>
+          </a:solidFill>
+          <a:ln>
+            <a:noFill/>
+          </a:ln>
+          <a:effectLst/>
+        </p:spPr>
+        <p:style>
+          <a:lnRef idx="1">
+            <a:schemeClr val="accent1"/>
+          </a:lnRef>
+          <a:fillRef idx="3">
+            <a:schemeClr val="accent1"/>
+          </a:fillRef>
+          <a:effectRef idx="2">
+            <a:schemeClr val="accent1"/>
+          </a:effectRef>
+          <a:fontRef idx="minor">
+            <a:schemeClr val="lt1"/>
+          </a:fontRef>
+        </p:style>
+        <p:txBody>
+          <a:bodyPr rtlCol="0" anchor="ctr"/>
+          <a:lstStyle/>
+          <a:p>
+            <a:pPr algn="ctr"/>
+          </a:p>
+        </p:txBody>
+      </p:sp>
+      <p:sp>
+        <p:nvSpPr>
+          <p:cNvPr id="17" name="TextBox 16"/>
+          <p:cNvSpPr txBox="1"/>
+          <p:nvPr/>
+        </p:nvSpPr>
+        <p:spPr>
+          <a:xfrm>
+            <a:off x="5004000" y="2952000"/>
+            <a:ext cx="792000" cy="936000"/>
+          </a:xfrm>
+          <a:prstGeom prst="rect">
+            <a:avLst/>
+          </a:prstGeom>
+          <a:noFill/>
+        </p:spPr>
+        <p:txBody>
+          <a:bodyPr wrap="square" lIns="36000" rIns="36000" tIns="18000" bIns="18000" anchor="ctr">
+            <a:spAutoFit/>
+          </a:bodyPr>
+          <a:lstStyle/>
+          <a:p>
+            <a:pPr algn="l">
+              <a:lnSpc>
+                <a:spcPct val="110000"/>
+              </a:lnSpc>
+            </a:pPr>
+            <a:r>
+              <a:rPr sz="1250" b="1">
+                <a:solidFill>
+                  <a:srgbClr val="111111"/>
+                </a:solidFill>
+                <a:latin typeface="Poppins"/>
+              </a:rPr>
+              <a:t>6</a:t>
+            </a:r>
+          </a:p>
+        </p:txBody>
+      </p:sp>
+      <p:sp>
+        <p:nvSpPr>
+          <p:cNvPr id="18" name="TextBox 17"/>
+          <p:cNvSpPr txBox="1"/>
+          <p:nvPr/>
+        </p:nvSpPr>
+        <p:spPr>
+          <a:xfrm>
+            <a:off x="576000" y="3888000"/>
+            <a:ext cx="1583999" cy="936000"/>
+          </a:xfrm>
+          <a:prstGeom prst="rect">
+            <a:avLst/>
+          </a:prstGeom>
+          <a:noFill/>
+        </p:spPr>
+        <p:txBody>
+          <a:bodyPr wrap="square" lIns="36000" rIns="36000" tIns="18000" bIns="18000" anchor="ctr">
+            <a:spAutoFit/>
+          </a:bodyPr>
+          <a:lstStyle/>
+          <a:p>
+            <a:pPr algn="l">
+              <a:lnSpc>
+                <a:spcPct val="110000"/>
+              </a:lnSpc>
+            </a:pPr>
+            <a:r>
+              <a:rPr sz="1150" b="0">
+                <a:solidFill>
+                  <a:srgbClr val="111111"/>
+                </a:solidFill>
+                <a:latin typeface="Poppins"/>
+              </a:rPr>
+              <a:t>LTA (LinkedIn)</a:t>
+            </a:r>
+          </a:p>
+        </p:txBody>
+      </p:sp>
+      <p:sp>
+        <p:nvSpPr>
+          <p:cNvPr id="19" name="Rounded Rectangle 18"/>
+          <p:cNvSpPr/>
+          <p:nvPr/>
+        </p:nvSpPr>
+        <p:spPr>
+          <a:xfrm>
+            <a:off x="2231999" y="4122000"/>
+            <a:ext cx="2700001" cy="468000"/>
+          </a:xfrm>
+          <a:prstGeom prst="roundRect">
+            <a:avLst/>
+          </a:prstGeom>
+          <a:solidFill>
+            <a:srgbClr val="F0F0F0"/>
+          </a:solidFill>
+          <a:ln>
+            <a:noFill/>
+          </a:ln>
+          <a:effectLst/>
+        </p:spPr>
+        <p:style>
+          <a:lnRef idx="1">
+            <a:schemeClr val="accent1"/>
+          </a:lnRef>
+          <a:fillRef idx="3">
+            <a:schemeClr val="accent1"/>
+          </a:fillRef>
+          <a:effectRef idx="2">
+            <a:schemeClr val="accent1"/>
+          </a:effectRef>
+          <a:fontRef idx="minor">
+            <a:schemeClr val="lt1"/>
+          </a:fontRef>
+        </p:style>
+        <p:txBody>
+          <a:bodyPr rtlCol="0" anchor="ctr"/>
+          <a:lstStyle/>
+          <a:p>
+            <a:pPr algn="ctr"/>
+          </a:p>
+        </p:txBody>
+      </p:sp>
+      <p:sp>
+        <p:nvSpPr>
+          <p:cNvPr id="20" name="Rounded Rectangle 19"/>
+          <p:cNvSpPr/>
+          <p:nvPr/>
+        </p:nvSpPr>
+        <p:spPr>
+          <a:xfrm>
+            <a:off x="2231999" y="4122000"/>
+            <a:ext cx="135000" cy="468000"/>
+          </a:xfrm>
+          <a:prstGeom prst="roundRect">
+            <a:avLst/>
+          </a:prstGeom>
+          <a:solidFill>
+            <a:srgbClr val="B9B9B9"/>
+          </a:solidFill>
+          <a:ln>
+            <a:noFill/>
+          </a:ln>
+          <a:effectLst/>
+        </p:spPr>
+        <p:style>
+          <a:lnRef idx="1">
+            <a:schemeClr val="accent1"/>
+          </a:lnRef>
+          <a:fillRef idx="3">
+            <a:schemeClr val="accent1"/>
+          </a:fillRef>
+          <a:effectRef idx="2">
+            <a:schemeClr val="accent1"/>
+          </a:effectRef>
+          <a:fontRef idx="minor">
+            <a:schemeClr val="lt1"/>
+          </a:fontRef>
+        </p:style>
+        <p:txBody>
+          <a:bodyPr rtlCol="0" anchor="ctr"/>
+          <a:lstStyle/>
+          <a:p>
+            <a:pPr algn="ctr"/>
+          </a:p>
+        </p:txBody>
+      </p:sp>
+      <p:sp>
+        <p:nvSpPr>
+          <p:cNvPr id="21" name="TextBox 20"/>
+          <p:cNvSpPr txBox="1"/>
+          <p:nvPr/>
+        </p:nvSpPr>
+        <p:spPr>
+          <a:xfrm>
+            <a:off x="5004000" y="3888000"/>
+            <a:ext cx="792000" cy="936000"/>
+          </a:xfrm>
+          <a:prstGeom prst="rect">
+            <a:avLst/>
+          </a:prstGeom>
+          <a:noFill/>
+        </p:spPr>
+        <p:txBody>
+          <a:bodyPr wrap="square" lIns="36000" rIns="36000" tIns="18000" bIns="18000" anchor="ctr">
+            <a:spAutoFit/>
+          </a:bodyPr>
+          <a:lstStyle/>
+          <a:p>
+            <a:pPr algn="l">
+              <a:lnSpc>
+                <a:spcPct val="110000"/>
+              </a:lnSpc>
+            </a:pPr>
+            <a:r>
+              <a:rPr sz="1250" b="1">
+                <a:solidFill>
+                  <a:srgbClr val="111111"/>
+                </a:solidFill>
+                <a:latin typeface="Poppins"/>
+              </a:rPr>
+              <a:t>0,3</a:t>
+            </a:r>
+          </a:p>
+        </p:txBody>
+      </p:sp>
+      <p:sp>
+        <p:nvSpPr>
+          <p:cNvPr id="22" name="TextBox 21"/>
+          <p:cNvSpPr txBox="1"/>
+          <p:nvPr/>
+        </p:nvSpPr>
+        <p:spPr>
+          <a:xfrm>
+            <a:off x="576000" y="4824000"/>
+            <a:ext cx="1583999" cy="936000"/>
+          </a:xfrm>
+          <a:prstGeom prst="rect">
+            <a:avLst/>
+          </a:prstGeom>
+          <a:noFill/>
+        </p:spPr>
+        <p:txBody>
+          <a:bodyPr wrap="square" lIns="36000" rIns="36000" tIns="18000" bIns="18000" anchor="ctr">
+            <a:spAutoFit/>
+          </a:bodyPr>
+          <a:lstStyle/>
+          <a:p>
+            <a:pPr algn="l">
+              <a:lnSpc>
+                <a:spcPct val="110000"/>
+              </a:lnSpc>
+            </a:pPr>
+            <a:r>
+              <a:rPr sz="1150" b="0">
+                <a:solidFill>
+                  <a:srgbClr val="111111"/>
+                </a:solidFill>
+                <a:latin typeface="Poppins"/>
+              </a:rPr>
+              <a:t>OTL (LinkedIn)</a:t>
+            </a:r>
+          </a:p>
+        </p:txBody>
+      </p:sp>
+      <p:sp>
+        <p:nvSpPr>
+          <p:cNvPr id="23" name="Rounded Rectangle 22"/>
+          <p:cNvSpPr/>
+          <p:nvPr/>
+        </p:nvSpPr>
+        <p:spPr>
+          <a:xfrm>
+            <a:off x="2231999" y="5058000"/>
+            <a:ext cx="2700001" cy="468000"/>
+          </a:xfrm>
+          <a:prstGeom prst="roundRect">
+            <a:avLst/>
+          </a:prstGeom>
+          <a:solidFill>
+            <a:srgbClr val="F0F0F0"/>
+          </a:solidFill>
+          <a:ln>
+            <a:noFill/>
+          </a:ln>
+          <a:effectLst/>
+        </p:spPr>
+        <p:style>
+          <a:lnRef idx="1">
+            <a:schemeClr val="accent1"/>
+          </a:lnRef>
+          <a:fillRef idx="3">
+            <a:schemeClr val="accent1"/>
+          </a:fillRef>
+          <a:effectRef idx="2">
+            <a:schemeClr val="accent1"/>
+          </a:effectRef>
+          <a:fontRef idx="minor">
+            <a:schemeClr val="lt1"/>
+          </a:fontRef>
+        </p:style>
+        <p:txBody>
+          <a:bodyPr rtlCol="0" anchor="ctr"/>
+          <a:lstStyle/>
+          <a:p>
+            <a:pPr algn="ctr"/>
+          </a:p>
+        </p:txBody>
+      </p:sp>
+      <p:sp>
+        <p:nvSpPr>
+          <p:cNvPr id="24" name="Rounded Rectangle 23"/>
+          <p:cNvSpPr/>
+          <p:nvPr/>
+        </p:nvSpPr>
+        <p:spPr>
+          <a:xfrm>
+            <a:off x="2231999" y="5058000"/>
+            <a:ext cx="90000" cy="468000"/>
+          </a:xfrm>
+          <a:prstGeom prst="roundRect">
+            <a:avLst/>
+          </a:prstGeom>
+          <a:solidFill>
+            <a:srgbClr val="B9B9B9"/>
+          </a:solidFill>
+          <a:ln>
+            <a:noFill/>
+          </a:ln>
+          <a:effectLst/>
+        </p:spPr>
+        <p:style>
+          <a:lnRef idx="1">
+            <a:schemeClr val="accent1"/>
+          </a:lnRef>
+          <a:fillRef idx="3">
+            <a:schemeClr val="accent1"/>
+          </a:fillRef>
+          <a:effectRef idx="2">
+            <a:schemeClr val="accent1"/>
+          </a:effectRef>
+          <a:fontRef idx="minor">
+            <a:schemeClr val="lt1"/>
+          </a:fontRef>
+        </p:style>
+        <p:txBody>
+          <a:bodyPr rtlCol="0" anchor="ctr"/>
+          <a:lstStyle/>
+          <a:p>
+            <a:pPr algn="ctr"/>
+          </a:p>
+        </p:txBody>
+      </p:sp>
+      <p:sp>
+        <p:nvSpPr>
+          <p:cNvPr id="25" name="TextBox 24"/>
+          <p:cNvSpPr txBox="1"/>
+          <p:nvPr/>
+        </p:nvSpPr>
+        <p:spPr>
+          <a:xfrm>
+            <a:off x="5004000" y="4824000"/>
+            <a:ext cx="792000" cy="936000"/>
+          </a:xfrm>
+          <a:prstGeom prst="rect">
+            <a:avLst/>
+          </a:prstGeom>
+          <a:noFill/>
+        </p:spPr>
+        <p:txBody>
+          <a:bodyPr wrap="square" lIns="36000" rIns="36000" tIns="18000" bIns="18000" anchor="ctr">
+            <a:spAutoFit/>
+          </a:bodyPr>
+          <a:lstStyle/>
+          <a:p>
+            <a:pPr algn="l">
+              <a:lnSpc>
+                <a:spcPct val="110000"/>
+              </a:lnSpc>
+            </a:pPr>
+            <a:r>
+              <a:rPr sz="1250" b="1">
+                <a:solidFill>
+                  <a:srgbClr val="111111"/>
+                </a:solidFill>
+                <a:latin typeface="Poppins"/>
+              </a:rPr>
+              <a:t>0,2</a:t>
+            </a:r>
+          </a:p>
+        </p:txBody>
+      </p:sp>
       <p:graphicFrame>
         <p:nvGraphicFramePr>
-          <p:cNvPr id="11" name="Table 10"/>
+          <p:cNvPr id="26" name="Table 25"/>
           <p:cNvGraphicFramePr>
             <a:graphicFrameLocks noGrp="1"/>
           </p:cNvGraphicFramePr>
@@ -26830,7 +27741,7 @@
       </p:graphicFrame>
       <p:sp>
         <p:nvSpPr>
-          <p:cNvPr id="12" name="TextBox 11"/>
+          <p:cNvPr id="27" name="TextBox 26"/>
           <p:cNvSpPr txBox="1"/>
           <p:nvPr/>
         </p:nvSpPr>

--- a/tmp-tj/261028_proline-logistics_audit-reseaux-sociaux_v1.pptx
+++ b/tmp-tj/261028_proline-logistics_audit-reseaux-sociaux_v1.pptx
@@ -28,6 +28,8 @@
     <p:sldId id="276" r:id="rId27"/>
     <p:sldId id="277" r:id="rId28"/>
     <p:sldId id="278" r:id="rId29"/>
+    <p:sldId id="279" r:id="rId30"/>
+    <p:sldId id="280" r:id="rId31"/>
   </p:sldIdLst>
   <p:sldSz cx="12192119" cy="6858000" type="screen4x3"/>
   <p:notesSz cx="6858000" cy="9144000"/>
@@ -18216,7 +18218,7 @@
                 </a:solidFill>
                 <a:latin typeface="Poppins"/>
               </a:rPr>
-              <a:t>PLAN 30 JOURS</a:t>
+              <a:t>NOUVELLE LIGNE DE FLYERS · 1 SUR 2</a:t>
             </a:r>
           </a:p>
         </p:txBody>
@@ -18249,13 +18251,13 @@
               </a:lnSpc>
             </a:pPr>
             <a:r>
-              <a:rPr sz="2500" b="1">
+              <a:rPr sz="2100" b="1">
                 <a:solidFill>
                   <a:srgbClr val="111111"/>
                 </a:solidFill>
                 <a:latin typeface="Poppins"/>
               </a:rPr>
-              <a:t>Le premier mois, semaine par semaine</a:t>
+              <a:t>Une nouvelle ligne : trois styles, vos sites au centre</a:t>
             </a:r>
           </a:p>
         </p:txBody>
@@ -18382,53 +18384,9 @@
           </a:p>
         </p:txBody>
       </p:sp>
-      <p:sp>
-        <p:nvSpPr>
-          <p:cNvPr id="9" name="Rounded Rectangle 8"/>
-          <p:cNvSpPr/>
-          <p:nvPr/>
-        </p:nvSpPr>
-        <p:spPr>
-          <a:xfrm>
-            <a:off x="576000" y="1584000"/>
-            <a:ext cx="2628000" cy="576000"/>
-          </a:xfrm>
-          <a:prstGeom prst="roundRect">
-            <a:avLst/>
-          </a:prstGeom>
-          <a:solidFill>
-            <a:srgbClr val="EE5B22"/>
-          </a:solidFill>
-          <a:ln>
-            <a:noFill/>
-          </a:ln>
-          <a:effectLst/>
-        </p:spPr>
-        <p:style>
-          <a:lnRef idx="1">
-            <a:schemeClr val="accent1"/>
-          </a:lnRef>
-          <a:fillRef idx="3">
-            <a:schemeClr val="accent1"/>
-          </a:fillRef>
-          <a:effectRef idx="2">
-            <a:schemeClr val="accent1"/>
-          </a:effectRef>
-          <a:fontRef idx="minor">
-            <a:schemeClr val="lt1"/>
-          </a:fontRef>
-        </p:style>
-        <p:txBody>
-          <a:bodyPr rtlCol="0" anchor="ctr"/>
-          <a:lstStyle/>
-          <a:p>
-            <a:pPr algn="ctr"/>
-          </a:p>
-        </p:txBody>
-      </p:sp>
       <p:pic>
         <p:nvPicPr>
-          <p:cNvPr id="10" name="Picture 9" descr="calendar-event_bl.png"/>
+          <p:cNvPr id="9" name="Picture 8" descr="n_p1.jpg"/>
           <p:cNvPicPr>
             <a:picLocks noChangeAspect="1"/>
           </p:cNvPicPr>
@@ -18442,8 +18400,8 @@
         </p:blipFill>
         <p:spPr>
           <a:xfrm>
-            <a:off x="720000" y="1710000"/>
-            <a:ext cx="324000" cy="324000"/>
+            <a:off x="576000" y="1512000"/>
+            <a:ext cx="3528000" cy="4410000"/>
           </a:xfrm>
           <a:prstGeom prst="rect">
             <a:avLst/>
@@ -18452,61 +18410,20 @@
       </p:pic>
       <p:sp>
         <p:nvSpPr>
-          <p:cNvPr id="11" name="TextBox 10"/>
-          <p:cNvSpPr txBox="1"/>
-          <p:nvPr/>
-        </p:nvSpPr>
-        <p:spPr>
-          <a:xfrm>
-            <a:off x="1116000" y="1584000"/>
-            <a:ext cx="2015999" cy="576000"/>
-          </a:xfrm>
-          <a:prstGeom prst="rect">
-            <a:avLst/>
-          </a:prstGeom>
-          <a:noFill/>
-        </p:spPr>
-        <p:txBody>
-          <a:bodyPr wrap="square" lIns="36000" rIns="36000" tIns="18000" bIns="18000" anchor="ctr">
-            <a:spAutoFit/>
-          </a:bodyPr>
-          <a:lstStyle/>
-          <a:p>
-            <a:pPr algn="l">
-              <a:lnSpc>
-                <a:spcPct val="110000"/>
-              </a:lnSpc>
-            </a:pPr>
-            <a:r>
-              <a:rPr sz="1500" b="1">
-                <a:solidFill>
-                  <a:srgbClr val="FFFFFF"/>
-                </a:solidFill>
-                <a:latin typeface="Poppins"/>
-              </a:rPr>
-              <a:t>Semaine 1</a:t>
-            </a:r>
-          </a:p>
-        </p:txBody>
-      </p:sp>
-      <p:sp>
-        <p:nvSpPr>
-          <p:cNvPr id="12" name="Rounded Rectangle 11"/>
+          <p:cNvPr id="10" name="Rounded Rectangle 9"/>
           <p:cNvSpPr/>
           <p:nvPr/>
         </p:nvSpPr>
         <p:spPr>
           <a:xfrm>
-            <a:off x="576000" y="2304000"/>
-            <a:ext cx="2628000" cy="2880000"/>
+            <a:off x="576000" y="6012000"/>
+            <a:ext cx="3528000" cy="306000"/>
           </a:xfrm>
           <a:prstGeom prst="roundRect">
-            <a:avLst>
-              <a:gd name="adj" fmla="val 6000"/>
-            </a:avLst>
+            <a:avLst/>
           </a:prstGeom>
           <a:solidFill>
-            <a:srgbClr val="F4F4F2"/>
+            <a:srgbClr val="E3E7EC"/>
           </a:solidFill>
           <a:ln>
             <a:noFill/>
@@ -18537,14 +18454,14 @@
       </p:sp>
       <p:sp>
         <p:nvSpPr>
-          <p:cNvPr id="13" name="TextBox 12"/>
+          <p:cNvPr id="11" name="TextBox 10"/>
           <p:cNvSpPr txBox="1"/>
           <p:nvPr/>
         </p:nvSpPr>
         <p:spPr>
           <a:xfrm>
-            <a:off x="720000" y="2448000"/>
-            <a:ext cx="2376000" cy="2664000"/>
+            <a:off x="576000" y="6012000"/>
+            <a:ext cx="3528000" cy="306000"/>
           </a:xfrm>
           <a:prstGeom prst="rect">
             <a:avLst/>
@@ -18552,134 +18469,31 @@
           <a:noFill/>
         </p:spPr>
         <p:txBody>
-          <a:bodyPr wrap="square">
+          <a:bodyPr wrap="square" lIns="36000" rIns="36000" tIns="18000" bIns="18000" anchor="ctr">
             <a:spAutoFit/>
           </a:bodyPr>
           <a:lstStyle/>
           <a:p>
-            <a:pPr>
-              <a:spcAft>
-                <a:spcPts val="700"/>
-              </a:spcAft>
-            </a:pPr>
-            <a:r>
-              <a:rPr sz="800">
+            <a:pPr algn="ctr">
+              <a:lnSpc>
+                <a:spcPct val="110000"/>
+              </a:lnSpc>
+            </a:pPr>
+            <a:r>
+              <a:rPr sz="1100" b="1">
                 <a:solidFill>
                   <a:srgbClr val="EE5B22"/>
                 </a:solidFill>
                 <a:latin typeface="Poppins"/>
               </a:rPr>
-              <a:t>■  </a:t>
-            </a:r>
-            <a:r>
-              <a:rPr sz="1200">
-                <a:solidFill>
-                  <a:srgbClr val="111111"/>
-                </a:solidFill>
-                <a:latin typeface="Poppins"/>
-              </a:rPr>
-              <a:t>Mettre à jour la page LinkedIn</a:t>
-            </a:r>
-          </a:p>
-          <a:p>
-            <a:pPr>
-              <a:spcAft>
-                <a:spcPts val="700"/>
-              </a:spcAft>
-            </a:pPr>
-            <a:r>
-              <a:rPr sz="800">
-                <a:solidFill>
-                  <a:srgbClr val="EE5B22"/>
-                </a:solidFill>
-                <a:latin typeface="Poppins"/>
-              </a:rPr>
-              <a:t>■  </a:t>
-            </a:r>
-            <a:r>
-              <a:rPr sz="1200">
-                <a:solidFill>
-                  <a:srgbClr val="111111"/>
-                </a:solidFill>
-                <a:latin typeface="Poppins"/>
-              </a:rPr>
-              <a:t>Valider les 6 publications</a:t>
-            </a:r>
-          </a:p>
-          <a:p>
-            <a:pPr>
-              <a:spcAft>
-                <a:spcPts val="700"/>
-              </a:spcAft>
-            </a:pPr>
-            <a:r>
-              <a:rPr sz="800">
-                <a:solidFill>
-                  <a:srgbClr val="EE5B22"/>
-                </a:solidFill>
-                <a:latin typeface="Poppins"/>
-              </a:rPr>
-              <a:t>■  </a:t>
-            </a:r>
-            <a:r>
-              <a:rPr sz="1200">
-                <a:solidFill>
-                  <a:srgbClr val="111111"/>
-                </a:solidFill>
-                <a:latin typeface="Poppins"/>
-              </a:rPr>
-              <a:t>Réserver le nom Instagram</a:t>
-            </a:r>
-          </a:p>
-        </p:txBody>
-      </p:sp>
-      <p:sp>
-        <p:nvSpPr>
-          <p:cNvPr id="14" name="Rounded Rectangle 13"/>
-          <p:cNvSpPr/>
-          <p:nvPr/>
-        </p:nvSpPr>
-        <p:spPr>
-          <a:xfrm>
-            <a:off x="3384000" y="1584000"/>
-            <a:ext cx="2628000" cy="576000"/>
-          </a:xfrm>
-          <a:prstGeom prst="roundRect">
-            <a:avLst/>
-          </a:prstGeom>
-          <a:solidFill>
-            <a:srgbClr val="11202E"/>
-          </a:solidFill>
-          <a:ln>
-            <a:noFill/>
-          </a:ln>
-          <a:effectLst/>
-        </p:spPr>
-        <p:style>
-          <a:lnRef idx="1">
-            <a:schemeClr val="accent1"/>
-          </a:lnRef>
-          <a:fillRef idx="3">
-            <a:schemeClr val="accent1"/>
-          </a:fillRef>
-          <a:effectRef idx="2">
-            <a:schemeClr val="accent1"/>
-          </a:effectRef>
-          <a:fontRef idx="minor">
-            <a:schemeClr val="lt1"/>
-          </a:fontRef>
-        </p:style>
-        <p:txBody>
-          <a:bodyPr rtlCol="0" anchor="ctr"/>
-          <a:lstStyle/>
-          <a:p>
-            <a:pPr algn="ctr"/>
+              <a:t>Style éditorial</a:t>
+            </a:r>
           </a:p>
         </p:txBody>
       </p:sp>
       <p:pic>
         <p:nvPicPr>
-          <p:cNvPr id="15" name="Picture 14" descr="pencil_bl.png"/>
+          <p:cNvPr id="12" name="Picture 11" descr="n_p2.jpg"/>
           <p:cNvPicPr>
             <a:picLocks noChangeAspect="1"/>
           </p:cNvPicPr>
@@ -18693,8 +18507,8 @@
         </p:blipFill>
         <p:spPr>
           <a:xfrm>
-            <a:off x="3528000" y="1710000"/>
-            <a:ext cx="324000" cy="324000"/>
+            <a:off x="4320000" y="1512000"/>
+            <a:ext cx="3528000" cy="4410000"/>
           </a:xfrm>
           <a:prstGeom prst="rect">
             <a:avLst/>
@@ -18703,61 +18517,20 @@
       </p:pic>
       <p:sp>
         <p:nvSpPr>
-          <p:cNvPr id="16" name="TextBox 15"/>
-          <p:cNvSpPr txBox="1"/>
-          <p:nvPr/>
-        </p:nvSpPr>
-        <p:spPr>
-          <a:xfrm>
-            <a:off x="3924000" y="1584000"/>
-            <a:ext cx="2015999" cy="576000"/>
-          </a:xfrm>
-          <a:prstGeom prst="rect">
-            <a:avLst/>
-          </a:prstGeom>
-          <a:noFill/>
-        </p:spPr>
-        <p:txBody>
-          <a:bodyPr wrap="square" lIns="36000" rIns="36000" tIns="18000" bIns="18000" anchor="ctr">
-            <a:spAutoFit/>
-          </a:bodyPr>
-          <a:lstStyle/>
-          <a:p>
-            <a:pPr algn="l">
-              <a:lnSpc>
-                <a:spcPct val="110000"/>
-              </a:lnSpc>
-            </a:pPr>
-            <a:r>
-              <a:rPr sz="1500" b="1">
-                <a:solidFill>
-                  <a:srgbClr val="FFFFFF"/>
-                </a:solidFill>
-                <a:latin typeface="Poppins"/>
-              </a:rPr>
-              <a:t>Semaine 2</a:t>
-            </a:r>
-          </a:p>
-        </p:txBody>
-      </p:sp>
-      <p:sp>
-        <p:nvSpPr>
-          <p:cNvPr id="17" name="Rounded Rectangle 16"/>
+          <p:cNvPr id="13" name="Rounded Rectangle 12"/>
           <p:cNvSpPr/>
           <p:nvPr/>
         </p:nvSpPr>
         <p:spPr>
           <a:xfrm>
-            <a:off x="3384000" y="2304000"/>
-            <a:ext cx="2628000" cy="2880000"/>
+            <a:off x="4320000" y="6012000"/>
+            <a:ext cx="3528000" cy="306000"/>
           </a:xfrm>
           <a:prstGeom prst="roundRect">
-            <a:avLst>
-              <a:gd name="adj" fmla="val 6000"/>
-            </a:avLst>
+            <a:avLst/>
           </a:prstGeom>
           <a:solidFill>
-            <a:srgbClr val="F4F4F2"/>
+            <a:srgbClr val="E3E7EC"/>
           </a:solidFill>
           <a:ln>
             <a:noFill/>
@@ -18788,14 +18561,14 @@
       </p:sp>
       <p:sp>
         <p:nvSpPr>
-          <p:cNvPr id="18" name="TextBox 17"/>
+          <p:cNvPr id="14" name="TextBox 13"/>
           <p:cNvSpPr txBox="1"/>
           <p:nvPr/>
         </p:nvSpPr>
         <p:spPr>
           <a:xfrm>
-            <a:off x="3528000" y="2448000"/>
-            <a:ext cx="2376000" cy="2664000"/>
+            <a:off x="4320000" y="6012000"/>
+            <a:ext cx="3528000" cy="306000"/>
           </a:xfrm>
           <a:prstGeom prst="rect">
             <a:avLst/>
@@ -18803,134 +18576,31 @@
           <a:noFill/>
         </p:spPr>
         <p:txBody>
-          <a:bodyPr wrap="square">
+          <a:bodyPr wrap="square" lIns="36000" rIns="36000" tIns="18000" bIns="18000" anchor="ctr">
             <a:spAutoFit/>
           </a:bodyPr>
           <a:lstStyle/>
           <a:p>
-            <a:pPr>
-              <a:spcAft>
-                <a:spcPts val="700"/>
-              </a:spcAft>
-            </a:pPr>
-            <a:r>
-              <a:rPr sz="800">
+            <a:pPr algn="ctr">
+              <a:lnSpc>
+                <a:spcPct val="110000"/>
+              </a:lnSpc>
+            </a:pPr>
+            <a:r>
+              <a:rPr sz="1100" b="1">
                 <a:solidFill>
                   <a:srgbClr val="EE5B22"/>
                 </a:solidFill>
                 <a:latin typeface="Poppins"/>
               </a:rPr>
-              <a:t>■  </a:t>
-            </a:r>
-            <a:r>
-              <a:rPr sz="1200">
-                <a:solidFill>
-                  <a:srgbClr val="111111"/>
-                </a:solidFill>
-                <a:latin typeface="Poppins"/>
-              </a:rPr>
-              <a:t>Publier 2 des 6 publications</a:t>
-            </a:r>
-          </a:p>
-          <a:p>
-            <a:pPr>
-              <a:spcAft>
-                <a:spcPts val="700"/>
-              </a:spcAft>
-            </a:pPr>
-            <a:r>
-              <a:rPr sz="800">
-                <a:solidFill>
-                  <a:srgbClr val="EE5B22"/>
-                </a:solidFill>
-                <a:latin typeface="Poppins"/>
-              </a:rPr>
-              <a:t>■  </a:t>
-            </a:r>
-            <a:r>
-              <a:rPr sz="1200">
-                <a:solidFill>
-                  <a:srgbClr val="111111"/>
-                </a:solidFill>
-                <a:latin typeface="Poppins"/>
-              </a:rPr>
-              <a:t>Demander aux salariés de suivre la page</a:t>
-            </a:r>
-          </a:p>
-          <a:p>
-            <a:pPr>
-              <a:spcAft>
-                <a:spcPts val="700"/>
-              </a:spcAft>
-            </a:pPr>
-            <a:r>
-              <a:rPr sz="800">
-                <a:solidFill>
-                  <a:srgbClr val="EE5B22"/>
-                </a:solidFill>
-                <a:latin typeface="Poppins"/>
-              </a:rPr>
-              <a:t>■  </a:t>
-            </a:r>
-            <a:r>
-              <a:rPr sz="1200">
-                <a:solidFill>
-                  <a:srgbClr val="111111"/>
-                </a:solidFill>
-                <a:latin typeface="Poppins"/>
-              </a:rPr>
-              <a:t>Répondre à chaque commentaire</a:t>
-            </a:r>
-          </a:p>
-        </p:txBody>
-      </p:sp>
-      <p:sp>
-        <p:nvSpPr>
-          <p:cNvPr id="19" name="Rounded Rectangle 18"/>
-          <p:cNvSpPr/>
-          <p:nvPr/>
-        </p:nvSpPr>
-        <p:spPr>
-          <a:xfrm>
-            <a:off x="6192000" y="1584000"/>
-            <a:ext cx="2628000" cy="576000"/>
-          </a:xfrm>
-          <a:prstGeom prst="roundRect">
-            <a:avLst/>
-          </a:prstGeom>
-          <a:solidFill>
-            <a:srgbClr val="EE5B22"/>
-          </a:solidFill>
-          <a:ln>
-            <a:noFill/>
-          </a:ln>
-          <a:effectLst/>
-        </p:spPr>
-        <p:style>
-          <a:lnRef idx="1">
-            <a:schemeClr val="accent1"/>
-          </a:lnRef>
-          <a:fillRef idx="3">
-            <a:schemeClr val="accent1"/>
-          </a:fillRef>
-          <a:effectRef idx="2">
-            <a:schemeClr val="accent1"/>
-          </a:effectRef>
-          <a:fontRef idx="minor">
-            <a:schemeClr val="lt1"/>
-          </a:fontRef>
-        </p:style>
-        <p:txBody>
-          <a:bodyPr rtlCol="0" anchor="ctr"/>
-          <a:lstStyle/>
-          <a:p>
-            <a:pPr algn="ctr"/>
+              <a:t>Style aplat couleur</a:t>
+            </a:r>
           </a:p>
         </p:txBody>
       </p:sp>
       <p:pic>
         <p:nvPicPr>
-          <p:cNvPr id="20" name="Picture 19" descr="briefcase_bl.png"/>
+          <p:cNvPr id="15" name="Picture 14" descr="n_p3.jpg"/>
           <p:cNvPicPr>
             <a:picLocks noChangeAspect="1"/>
           </p:cNvPicPr>
@@ -18944,8 +18614,8 @@
         </p:blipFill>
         <p:spPr>
           <a:xfrm>
-            <a:off x="6336000" y="1710000"/>
-            <a:ext cx="324000" cy="324000"/>
+            <a:off x="8064000" y="1512000"/>
+            <a:ext cx="3528000" cy="4410000"/>
           </a:xfrm>
           <a:prstGeom prst="rect">
             <a:avLst/>
@@ -18954,61 +18624,20 @@
       </p:pic>
       <p:sp>
         <p:nvSpPr>
-          <p:cNvPr id="21" name="TextBox 20"/>
-          <p:cNvSpPr txBox="1"/>
-          <p:nvPr/>
-        </p:nvSpPr>
-        <p:spPr>
-          <a:xfrm>
-            <a:off x="6732000" y="1584000"/>
-            <a:ext cx="2015999" cy="576000"/>
-          </a:xfrm>
-          <a:prstGeom prst="rect">
-            <a:avLst/>
-          </a:prstGeom>
-          <a:noFill/>
-        </p:spPr>
-        <p:txBody>
-          <a:bodyPr wrap="square" lIns="36000" rIns="36000" tIns="18000" bIns="18000" anchor="ctr">
-            <a:spAutoFit/>
-          </a:bodyPr>
-          <a:lstStyle/>
-          <a:p>
-            <a:pPr algn="l">
-              <a:lnSpc>
-                <a:spcPct val="110000"/>
-              </a:lnSpc>
-            </a:pPr>
-            <a:r>
-              <a:rPr sz="1500" b="1">
-                <a:solidFill>
-                  <a:srgbClr val="FFFFFF"/>
-                </a:solidFill>
-                <a:latin typeface="Poppins"/>
-              </a:rPr>
-              <a:t>Semaine 3</a:t>
-            </a:r>
-          </a:p>
-        </p:txBody>
-      </p:sp>
-      <p:sp>
-        <p:nvSpPr>
-          <p:cNvPr id="22" name="Rounded Rectangle 21"/>
+          <p:cNvPr id="16" name="Rounded Rectangle 15"/>
           <p:cNvSpPr/>
           <p:nvPr/>
         </p:nvSpPr>
         <p:spPr>
           <a:xfrm>
-            <a:off x="6192000" y="2304000"/>
-            <a:ext cx="2628000" cy="2880000"/>
+            <a:off x="8064000" y="6012000"/>
+            <a:ext cx="3528000" cy="306000"/>
           </a:xfrm>
           <a:prstGeom prst="roundRect">
-            <a:avLst>
-              <a:gd name="adj" fmla="val 6000"/>
-            </a:avLst>
+            <a:avLst/>
           </a:prstGeom>
           <a:solidFill>
-            <a:srgbClr val="F4F4F2"/>
+            <a:srgbClr val="E3E7EC"/>
           </a:solidFill>
           <a:ln>
             <a:noFill/>
@@ -19039,180 +18668,14 @@
       </p:sp>
       <p:sp>
         <p:nvSpPr>
-          <p:cNvPr id="23" name="TextBox 22"/>
+          <p:cNvPr id="17" name="TextBox 16"/>
           <p:cNvSpPr txBox="1"/>
           <p:nvPr/>
         </p:nvSpPr>
         <p:spPr>
           <a:xfrm>
-            <a:off x="6336000" y="2448000"/>
-            <a:ext cx="2376000" cy="2664000"/>
-          </a:xfrm>
-          <a:prstGeom prst="rect">
-            <a:avLst/>
-          </a:prstGeom>
-          <a:noFill/>
-        </p:spPr>
-        <p:txBody>
-          <a:bodyPr wrap="square">
-            <a:spAutoFit/>
-          </a:bodyPr>
-          <a:lstStyle/>
-          <a:p>
-            <a:pPr>
-              <a:spcAft>
-                <a:spcPts val="700"/>
-              </a:spcAft>
-            </a:pPr>
-            <a:r>
-              <a:rPr sz="800">
-                <a:solidFill>
-                  <a:srgbClr val="EE5B22"/>
-                </a:solidFill>
-                <a:latin typeface="Poppins"/>
-              </a:rPr>
-              <a:t>■  </a:t>
-            </a:r>
-            <a:r>
-              <a:rPr sz="1200">
-                <a:solidFill>
-                  <a:srgbClr val="111111"/>
-                </a:solidFill>
-                <a:latin typeface="Poppins"/>
-              </a:rPr>
-              <a:t>Publier une offre d’emploi</a:t>
-            </a:r>
-          </a:p>
-          <a:p>
-            <a:pPr>
-              <a:spcAft>
-                <a:spcPts val="700"/>
-              </a:spcAft>
-            </a:pPr>
-            <a:r>
-              <a:rPr sz="800">
-                <a:solidFill>
-                  <a:srgbClr val="EE5B22"/>
-                </a:solidFill>
-                <a:latin typeface="Poppins"/>
-              </a:rPr>
-              <a:t>■  </a:t>
-            </a:r>
-            <a:r>
-              <a:rPr sz="1200">
-                <a:solidFill>
-                  <a:srgbClr val="111111"/>
-                </a:solidFill>
-                <a:latin typeface="Poppins"/>
-              </a:rPr>
-              <a:t>Publier 2 autres publications</a:t>
-            </a:r>
-          </a:p>
-          <a:p>
-            <a:pPr>
-              <a:spcAft>
-                <a:spcPts val="700"/>
-              </a:spcAft>
-            </a:pPr>
-            <a:r>
-              <a:rPr sz="800">
-                <a:solidFill>
-                  <a:srgbClr val="EE5B22"/>
-                </a:solidFill>
-                <a:latin typeface="Poppins"/>
-              </a:rPr>
-              <a:t>■  </a:t>
-            </a:r>
-            <a:r>
-              <a:rPr sz="1200">
-                <a:solidFill>
-                  <a:srgbClr val="111111"/>
-                </a:solidFill>
-                <a:latin typeface="Poppins"/>
-              </a:rPr>
-              <a:t>Photographier 2 équipes</a:t>
-            </a:r>
-          </a:p>
-        </p:txBody>
-      </p:sp>
-      <p:sp>
-        <p:nvSpPr>
-          <p:cNvPr id="24" name="Rounded Rectangle 23"/>
-          <p:cNvSpPr/>
-          <p:nvPr/>
-        </p:nvSpPr>
-        <p:spPr>
-          <a:xfrm>
-            <a:off x="9000000" y="1584000"/>
-            <a:ext cx="2628000" cy="576000"/>
-          </a:xfrm>
-          <a:prstGeom prst="roundRect">
-            <a:avLst/>
-          </a:prstGeom>
-          <a:solidFill>
-            <a:srgbClr val="11202E"/>
-          </a:solidFill>
-          <a:ln>
-            <a:noFill/>
-          </a:ln>
-          <a:effectLst/>
-        </p:spPr>
-        <p:style>
-          <a:lnRef idx="1">
-            <a:schemeClr val="accent1"/>
-          </a:lnRef>
-          <a:fillRef idx="3">
-            <a:schemeClr val="accent1"/>
-          </a:fillRef>
-          <a:effectRef idx="2">
-            <a:schemeClr val="accent1"/>
-          </a:effectRef>
-          <a:fontRef idx="minor">
-            <a:schemeClr val="lt1"/>
-          </a:fontRef>
-        </p:style>
-        <p:txBody>
-          <a:bodyPr rtlCol="0" anchor="ctr"/>
-          <a:lstStyle/>
-          <a:p>
-            <a:pPr algn="ctr"/>
-          </a:p>
-        </p:txBody>
-      </p:sp>
-      <p:pic>
-        <p:nvPicPr>
-          <p:cNvPr id="25" name="Picture 24" descr="trending-up_bl.png"/>
-          <p:cNvPicPr>
-            <a:picLocks noChangeAspect="1"/>
-          </p:cNvPicPr>
-          <p:nvPr/>
-        </p:nvPicPr>
-        <p:blipFill>
-          <a:blip r:embed="rId6"/>
-          <a:stretch>
-            <a:fillRect/>
-          </a:stretch>
-        </p:blipFill>
-        <p:spPr>
-          <a:xfrm>
-            <a:off x="9144000" y="1710000"/>
-            <a:ext cx="324000" cy="324000"/>
-          </a:xfrm>
-          <a:prstGeom prst="rect">
-            <a:avLst/>
-          </a:prstGeom>
-        </p:spPr>
-      </p:pic>
-      <p:sp>
-        <p:nvSpPr>
-          <p:cNvPr id="26" name="TextBox 25"/>
-          <p:cNvSpPr txBox="1"/>
-          <p:nvPr/>
-        </p:nvSpPr>
-        <p:spPr>
-          <a:xfrm>
-            <a:off x="9540000" y="1584000"/>
-            <a:ext cx="2015999" cy="576000"/>
+            <a:off x="8064000" y="6012000"/>
+            <a:ext cx="3528000" cy="306000"/>
           </a:xfrm>
           <a:prstGeom prst="rect">
             <a:avLst/>
@@ -19225,272 +18688,19 @@
           </a:bodyPr>
           <a:lstStyle/>
           <a:p>
-            <a:pPr algn="l">
-              <a:lnSpc>
-                <a:spcPct val="110000"/>
-              </a:lnSpc>
-            </a:pPr>
-            <a:r>
-              <a:rPr sz="1500" b="1">
-                <a:solidFill>
-                  <a:srgbClr val="FFFFFF"/>
-                </a:solidFill>
-                <a:latin typeface="Poppins"/>
-              </a:rPr>
-              <a:t>Semaine 4</a:t>
-            </a:r>
-          </a:p>
-        </p:txBody>
-      </p:sp>
-      <p:sp>
-        <p:nvSpPr>
-          <p:cNvPr id="27" name="Rounded Rectangle 26"/>
-          <p:cNvSpPr/>
-          <p:nvPr/>
-        </p:nvSpPr>
-        <p:spPr>
-          <a:xfrm>
-            <a:off x="9000000" y="2304000"/>
-            <a:ext cx="2628000" cy="2880000"/>
-          </a:xfrm>
-          <a:prstGeom prst="roundRect">
-            <a:avLst>
-              <a:gd name="adj" fmla="val 6000"/>
-            </a:avLst>
-          </a:prstGeom>
-          <a:solidFill>
-            <a:srgbClr val="F4F4F2"/>
-          </a:solidFill>
-          <a:ln>
-            <a:noFill/>
-          </a:ln>
-          <a:effectLst/>
-        </p:spPr>
-        <p:style>
-          <a:lnRef idx="1">
-            <a:schemeClr val="accent1"/>
-          </a:lnRef>
-          <a:fillRef idx="3">
-            <a:schemeClr val="accent1"/>
-          </a:fillRef>
-          <a:effectRef idx="2">
-            <a:schemeClr val="accent1"/>
-          </a:effectRef>
-          <a:fontRef idx="minor">
-            <a:schemeClr val="lt1"/>
-          </a:fontRef>
-        </p:style>
-        <p:txBody>
-          <a:bodyPr rtlCol="0" anchor="ctr"/>
-          <a:lstStyle/>
-          <a:p>
-            <a:pPr algn="ctr"/>
-          </a:p>
-        </p:txBody>
-      </p:sp>
-      <p:sp>
-        <p:nvSpPr>
-          <p:cNvPr id="28" name="TextBox 27"/>
-          <p:cNvSpPr txBox="1"/>
-          <p:nvPr/>
-        </p:nvSpPr>
-        <p:spPr>
-          <a:xfrm>
-            <a:off x="9144000" y="2448000"/>
-            <a:ext cx="2376000" cy="2664000"/>
-          </a:xfrm>
-          <a:prstGeom prst="rect">
-            <a:avLst/>
-          </a:prstGeom>
-          <a:noFill/>
-        </p:spPr>
-        <p:txBody>
-          <a:bodyPr wrap="square">
-            <a:spAutoFit/>
-          </a:bodyPr>
-          <a:lstStyle/>
-          <a:p>
-            <a:pPr>
-              <a:spcAft>
-                <a:spcPts val="700"/>
-              </a:spcAft>
-            </a:pPr>
-            <a:r>
-              <a:rPr sz="800">
+            <a:pPr algn="ctr">
+              <a:lnSpc>
+                <a:spcPct val="110000"/>
+              </a:lnSpc>
+            </a:pPr>
+            <a:r>
+              <a:rPr sz="1100" b="1">
                 <a:solidFill>
                   <a:srgbClr val="EE5B22"/>
                 </a:solidFill>
                 <a:latin typeface="Poppins"/>
               </a:rPr>
-              <a:t>■  </a:t>
-            </a:r>
-            <a:r>
-              <a:rPr sz="1200">
-                <a:solidFill>
-                  <a:srgbClr val="111111"/>
-                </a:solidFill>
-                <a:latin typeface="Poppins"/>
-              </a:rPr>
-              <a:t>Compter réactions et abonnés</a:t>
-            </a:r>
-          </a:p>
-          <a:p>
-            <a:pPr>
-              <a:spcAft>
-                <a:spcPts val="700"/>
-              </a:spcAft>
-            </a:pPr>
-            <a:r>
-              <a:rPr sz="800">
-                <a:solidFill>
-                  <a:srgbClr val="EE5B22"/>
-                </a:solidFill>
-                <a:latin typeface="Poppins"/>
-              </a:rPr>
-              <a:t>■  </a:t>
-            </a:r>
-            <a:r>
-              <a:rPr sz="1200">
-                <a:solidFill>
-                  <a:srgbClr val="111111"/>
-                </a:solidFill>
-                <a:latin typeface="Poppins"/>
-              </a:rPr>
-              <a:t>Compter les demandes reçues</a:t>
-            </a:r>
-          </a:p>
-          <a:p>
-            <a:pPr>
-              <a:spcAft>
-                <a:spcPts val="700"/>
-              </a:spcAft>
-            </a:pPr>
-            <a:r>
-              <a:rPr sz="800">
-                <a:solidFill>
-                  <a:srgbClr val="EE5B22"/>
-                </a:solidFill>
-                <a:latin typeface="Poppins"/>
-              </a:rPr>
-              <a:t>■  </a:t>
-            </a:r>
-            <a:r>
-              <a:rPr sz="1200">
-                <a:solidFill>
-                  <a:srgbClr val="111111"/>
-                </a:solidFill>
-                <a:latin typeface="Poppins"/>
-              </a:rPr>
-              <a:t>Préparer décembre</a:t>
-            </a:r>
-          </a:p>
-        </p:txBody>
-      </p:sp>
-      <p:sp>
-        <p:nvSpPr>
-          <p:cNvPr id="29" name="Rounded Rectangle 28"/>
-          <p:cNvSpPr/>
-          <p:nvPr/>
-        </p:nvSpPr>
-        <p:spPr>
-          <a:xfrm>
-            <a:off x="576000" y="5364000"/>
-            <a:ext cx="11052000" cy="864000"/>
-          </a:xfrm>
-          <a:prstGeom prst="roundRect">
-            <a:avLst>
-              <a:gd name="adj" fmla="val 6000"/>
-            </a:avLst>
-          </a:prstGeom>
-          <a:solidFill>
-            <a:srgbClr val="11202E"/>
-          </a:solidFill>
-          <a:ln>
-            <a:noFill/>
-          </a:ln>
-          <a:effectLst/>
-        </p:spPr>
-        <p:style>
-          <a:lnRef idx="1">
-            <a:schemeClr val="accent1"/>
-          </a:lnRef>
-          <a:fillRef idx="3">
-            <a:schemeClr val="accent1"/>
-          </a:fillRef>
-          <a:effectRef idx="2">
-            <a:schemeClr val="accent1"/>
-          </a:effectRef>
-          <a:fontRef idx="minor">
-            <a:schemeClr val="lt1"/>
-          </a:fontRef>
-        </p:style>
-        <p:txBody>
-          <a:bodyPr rtlCol="0" anchor="ctr"/>
-          <a:lstStyle/>
-          <a:p>
-            <a:pPr algn="ctr"/>
-          </a:p>
-        </p:txBody>
-      </p:sp>
-      <p:pic>
-        <p:nvPicPr>
-          <p:cNvPr id="30" name="Picture 29" descr="target-arrow_bl.png"/>
-          <p:cNvPicPr>
-            <a:picLocks noChangeAspect="1"/>
-          </p:cNvPicPr>
-          <p:nvPr/>
-        </p:nvPicPr>
-        <p:blipFill>
-          <a:blip r:embed="rId7"/>
-          <a:stretch>
-            <a:fillRect/>
-          </a:stretch>
-        </p:blipFill>
-        <p:spPr>
-          <a:xfrm>
-            <a:off x="792000" y="5544000"/>
-            <a:ext cx="503999" cy="503999"/>
-          </a:xfrm>
-          <a:prstGeom prst="rect">
-            <a:avLst/>
-          </a:prstGeom>
-        </p:spPr>
-      </p:pic>
-      <p:sp>
-        <p:nvSpPr>
-          <p:cNvPr id="31" name="TextBox 30"/>
-          <p:cNvSpPr txBox="1"/>
-          <p:nvPr/>
-        </p:nvSpPr>
-        <p:spPr>
-          <a:xfrm>
-            <a:off x="1440000" y="5364000"/>
-            <a:ext cx="10008000" cy="864000"/>
-          </a:xfrm>
-          <a:prstGeom prst="rect">
-            <a:avLst/>
-          </a:prstGeom>
-          <a:noFill/>
-        </p:spPr>
-        <p:txBody>
-          <a:bodyPr wrap="square" lIns="36000" rIns="36000" tIns="18000" bIns="18000" anchor="ctr">
-            <a:spAutoFit/>
-          </a:bodyPr>
-          <a:lstStyle/>
-          <a:p>
-            <a:pPr algn="l">
-              <a:lnSpc>
-                <a:spcPct val="110000"/>
-              </a:lnSpc>
-            </a:pPr>
-            <a:r>
-              <a:rPr sz="1300" b="1">
-                <a:solidFill>
-                  <a:srgbClr val="FFFFFF"/>
-                </a:solidFill>
-                <a:latin typeface="Poppins"/>
-              </a:rPr>
-              <a:t>Objectif proposé à 30 jours : 8 publications, 20 réactions médianes sur LinkedIn, et chaque demande de devis venue des réseaux notée.</a:t>
+              <a:t>Style fiche sombre</a:t>
             </a:r>
           </a:p>
         </p:txBody>
@@ -19615,7 +18825,7 @@
                 </a:solidFill>
                 <a:latin typeface="Poppins"/>
               </a:rPr>
-              <a:t>TABLEAU DE BORD</a:t>
+              <a:t>NOUVELLE LIGNE DE FLYERS · 2 SUR 2</a:t>
             </a:r>
           </a:p>
         </p:txBody>
@@ -19654,7 +18864,7 @@
                 </a:solidFill>
                 <a:latin typeface="Poppins"/>
               </a:rPr>
-              <a:t>Les chiffres à suivre chaque semaine</a:t>
+              <a:t>Trois styles qui alternent pour un fil varié</a:t>
             </a:r>
           </a:p>
         </p:txBody>
@@ -19738,6 +18948,2012 @@
                 <a:latin typeface="Poppins"/>
               </a:rPr>
               <a:t>22 / 23</a:t>
+            </a:r>
+          </a:p>
+        </p:txBody>
+      </p:sp>
+      <p:sp>
+        <p:nvSpPr>
+          <p:cNvPr id="8" name="TextBox 7"/>
+          <p:cNvSpPr txBox="1"/>
+          <p:nvPr/>
+        </p:nvSpPr>
+        <p:spPr>
+          <a:xfrm>
+            <a:off x="576000" y="6498000"/>
+            <a:ext cx="7920000" cy="216000"/>
+          </a:xfrm>
+          <a:prstGeom prst="rect">
+            <a:avLst/>
+          </a:prstGeom>
+          <a:noFill/>
+        </p:spPr>
+        <p:txBody>
+          <a:bodyPr wrap="square" lIns="36000" rIns="36000" tIns="18000" bIns="18000" anchor="t">
+            <a:spAutoFit/>
+          </a:bodyPr>
+          <a:lstStyle/>
+          <a:p>
+            <a:pPr algn="l">
+              <a:lnSpc>
+                <a:spcPct val="110000"/>
+              </a:lnSpc>
+            </a:pPr>
+            <a:r>
+              <a:rPr sz="900" b="0">
+                <a:solidFill>
+                  <a:srgbClr val="5A5A5A"/>
+                </a:solidFill>
+                <a:latin typeface="Poppins"/>
+              </a:rPr>
+              <a:t>Proline Logistics · Audit réseaux sociaux · relevé du 28/10/2026</a:t>
+            </a:r>
+          </a:p>
+        </p:txBody>
+      </p:sp>
+      <p:pic>
+        <p:nvPicPr>
+          <p:cNvPr id="9" name="Picture 8" descr="n_p4.jpg"/>
+          <p:cNvPicPr>
+            <a:picLocks noChangeAspect="1"/>
+          </p:cNvPicPr>
+          <p:nvPr/>
+        </p:nvPicPr>
+        <p:blipFill>
+          <a:blip r:embed="rId3"/>
+          <a:stretch>
+            <a:fillRect/>
+          </a:stretch>
+        </p:blipFill>
+        <p:spPr>
+          <a:xfrm>
+            <a:off x="576000" y="1512000"/>
+            <a:ext cx="3528000" cy="4410000"/>
+          </a:xfrm>
+          <a:prstGeom prst="rect">
+            <a:avLst/>
+          </a:prstGeom>
+        </p:spPr>
+      </p:pic>
+      <p:sp>
+        <p:nvSpPr>
+          <p:cNvPr id="10" name="Rounded Rectangle 9"/>
+          <p:cNvSpPr/>
+          <p:nvPr/>
+        </p:nvSpPr>
+        <p:spPr>
+          <a:xfrm>
+            <a:off x="576000" y="6012000"/>
+            <a:ext cx="3528000" cy="306000"/>
+          </a:xfrm>
+          <a:prstGeom prst="roundRect">
+            <a:avLst/>
+          </a:prstGeom>
+          <a:solidFill>
+            <a:srgbClr val="E3E7EC"/>
+          </a:solidFill>
+          <a:ln>
+            <a:noFill/>
+          </a:ln>
+          <a:effectLst/>
+        </p:spPr>
+        <p:style>
+          <a:lnRef idx="1">
+            <a:schemeClr val="accent1"/>
+          </a:lnRef>
+          <a:fillRef idx="3">
+            <a:schemeClr val="accent1"/>
+          </a:fillRef>
+          <a:effectRef idx="2">
+            <a:schemeClr val="accent1"/>
+          </a:effectRef>
+          <a:fontRef idx="minor">
+            <a:schemeClr val="lt1"/>
+          </a:fontRef>
+        </p:style>
+        <p:txBody>
+          <a:bodyPr rtlCol="0" anchor="ctr"/>
+          <a:lstStyle/>
+          <a:p>
+            <a:pPr algn="ctr"/>
+          </a:p>
+        </p:txBody>
+      </p:sp>
+      <p:sp>
+        <p:nvSpPr>
+          <p:cNvPr id="11" name="TextBox 10"/>
+          <p:cNvSpPr txBox="1"/>
+          <p:nvPr/>
+        </p:nvSpPr>
+        <p:spPr>
+          <a:xfrm>
+            <a:off x="576000" y="6012000"/>
+            <a:ext cx="3528000" cy="306000"/>
+          </a:xfrm>
+          <a:prstGeom prst="rect">
+            <a:avLst/>
+          </a:prstGeom>
+          <a:noFill/>
+        </p:spPr>
+        <p:txBody>
+          <a:bodyPr wrap="square" lIns="36000" rIns="36000" tIns="18000" bIns="18000" anchor="ctr">
+            <a:spAutoFit/>
+          </a:bodyPr>
+          <a:lstStyle/>
+          <a:p>
+            <a:pPr algn="ctr">
+              <a:lnSpc>
+                <a:spcPct val="110000"/>
+              </a:lnSpc>
+            </a:pPr>
+            <a:r>
+              <a:rPr sz="1100" b="1">
+                <a:solidFill>
+                  <a:srgbClr val="EE5B22"/>
+                </a:solidFill>
+                <a:latin typeface="Poppins"/>
+              </a:rPr>
+              <a:t>Style éditorial</a:t>
+            </a:r>
+          </a:p>
+        </p:txBody>
+      </p:sp>
+      <p:pic>
+        <p:nvPicPr>
+          <p:cNvPr id="12" name="Picture 11" descr="n_p5.jpg"/>
+          <p:cNvPicPr>
+            <a:picLocks noChangeAspect="1"/>
+          </p:cNvPicPr>
+          <p:nvPr/>
+        </p:nvPicPr>
+        <p:blipFill>
+          <a:blip r:embed="rId4"/>
+          <a:stretch>
+            <a:fillRect/>
+          </a:stretch>
+        </p:blipFill>
+        <p:spPr>
+          <a:xfrm>
+            <a:off x="4320000" y="1512000"/>
+            <a:ext cx="3528000" cy="4410000"/>
+          </a:xfrm>
+          <a:prstGeom prst="rect">
+            <a:avLst/>
+          </a:prstGeom>
+        </p:spPr>
+      </p:pic>
+      <p:sp>
+        <p:nvSpPr>
+          <p:cNvPr id="13" name="Rounded Rectangle 12"/>
+          <p:cNvSpPr/>
+          <p:nvPr/>
+        </p:nvSpPr>
+        <p:spPr>
+          <a:xfrm>
+            <a:off x="4320000" y="6012000"/>
+            <a:ext cx="3528000" cy="306000"/>
+          </a:xfrm>
+          <a:prstGeom prst="roundRect">
+            <a:avLst/>
+          </a:prstGeom>
+          <a:solidFill>
+            <a:srgbClr val="E3E7EC"/>
+          </a:solidFill>
+          <a:ln>
+            <a:noFill/>
+          </a:ln>
+          <a:effectLst/>
+        </p:spPr>
+        <p:style>
+          <a:lnRef idx="1">
+            <a:schemeClr val="accent1"/>
+          </a:lnRef>
+          <a:fillRef idx="3">
+            <a:schemeClr val="accent1"/>
+          </a:fillRef>
+          <a:effectRef idx="2">
+            <a:schemeClr val="accent1"/>
+          </a:effectRef>
+          <a:fontRef idx="minor">
+            <a:schemeClr val="lt1"/>
+          </a:fontRef>
+        </p:style>
+        <p:txBody>
+          <a:bodyPr rtlCol="0" anchor="ctr"/>
+          <a:lstStyle/>
+          <a:p>
+            <a:pPr algn="ctr"/>
+          </a:p>
+        </p:txBody>
+      </p:sp>
+      <p:sp>
+        <p:nvSpPr>
+          <p:cNvPr id="14" name="TextBox 13"/>
+          <p:cNvSpPr txBox="1"/>
+          <p:nvPr/>
+        </p:nvSpPr>
+        <p:spPr>
+          <a:xfrm>
+            <a:off x="4320000" y="6012000"/>
+            <a:ext cx="3528000" cy="306000"/>
+          </a:xfrm>
+          <a:prstGeom prst="rect">
+            <a:avLst/>
+          </a:prstGeom>
+          <a:noFill/>
+        </p:spPr>
+        <p:txBody>
+          <a:bodyPr wrap="square" lIns="36000" rIns="36000" tIns="18000" bIns="18000" anchor="ctr">
+            <a:spAutoFit/>
+          </a:bodyPr>
+          <a:lstStyle/>
+          <a:p>
+            <a:pPr algn="ctr">
+              <a:lnSpc>
+                <a:spcPct val="110000"/>
+              </a:lnSpc>
+            </a:pPr>
+            <a:r>
+              <a:rPr sz="1100" b="1">
+                <a:solidFill>
+                  <a:srgbClr val="EE5B22"/>
+                </a:solidFill>
+                <a:latin typeface="Poppins"/>
+              </a:rPr>
+              <a:t>Style aplat couleur</a:t>
+            </a:r>
+          </a:p>
+        </p:txBody>
+      </p:sp>
+      <p:pic>
+        <p:nvPicPr>
+          <p:cNvPr id="15" name="Picture 14" descr="n_p6.jpg"/>
+          <p:cNvPicPr>
+            <a:picLocks noChangeAspect="1"/>
+          </p:cNvPicPr>
+          <p:nvPr/>
+        </p:nvPicPr>
+        <p:blipFill>
+          <a:blip r:embed="rId5"/>
+          <a:stretch>
+            <a:fillRect/>
+          </a:stretch>
+        </p:blipFill>
+        <p:spPr>
+          <a:xfrm>
+            <a:off x="8064000" y="1512000"/>
+            <a:ext cx="3528000" cy="4410000"/>
+          </a:xfrm>
+          <a:prstGeom prst="rect">
+            <a:avLst/>
+          </a:prstGeom>
+        </p:spPr>
+      </p:pic>
+      <p:sp>
+        <p:nvSpPr>
+          <p:cNvPr id="16" name="Rounded Rectangle 15"/>
+          <p:cNvSpPr/>
+          <p:nvPr/>
+        </p:nvSpPr>
+        <p:spPr>
+          <a:xfrm>
+            <a:off x="8064000" y="6012000"/>
+            <a:ext cx="3528000" cy="306000"/>
+          </a:xfrm>
+          <a:prstGeom prst="roundRect">
+            <a:avLst/>
+          </a:prstGeom>
+          <a:solidFill>
+            <a:srgbClr val="E3E7EC"/>
+          </a:solidFill>
+          <a:ln>
+            <a:noFill/>
+          </a:ln>
+          <a:effectLst/>
+        </p:spPr>
+        <p:style>
+          <a:lnRef idx="1">
+            <a:schemeClr val="accent1"/>
+          </a:lnRef>
+          <a:fillRef idx="3">
+            <a:schemeClr val="accent1"/>
+          </a:fillRef>
+          <a:effectRef idx="2">
+            <a:schemeClr val="accent1"/>
+          </a:effectRef>
+          <a:fontRef idx="minor">
+            <a:schemeClr val="lt1"/>
+          </a:fontRef>
+        </p:style>
+        <p:txBody>
+          <a:bodyPr rtlCol="0" anchor="ctr"/>
+          <a:lstStyle/>
+          <a:p>
+            <a:pPr algn="ctr"/>
+          </a:p>
+        </p:txBody>
+      </p:sp>
+      <p:sp>
+        <p:nvSpPr>
+          <p:cNvPr id="17" name="TextBox 16"/>
+          <p:cNvSpPr txBox="1"/>
+          <p:nvPr/>
+        </p:nvSpPr>
+        <p:spPr>
+          <a:xfrm>
+            <a:off x="8064000" y="6012000"/>
+            <a:ext cx="3528000" cy="306000"/>
+          </a:xfrm>
+          <a:prstGeom prst="rect">
+            <a:avLst/>
+          </a:prstGeom>
+          <a:noFill/>
+        </p:spPr>
+        <p:txBody>
+          <a:bodyPr wrap="square" lIns="36000" rIns="36000" tIns="18000" bIns="18000" anchor="ctr">
+            <a:spAutoFit/>
+          </a:bodyPr>
+          <a:lstStyle/>
+          <a:p>
+            <a:pPr algn="ctr">
+              <a:lnSpc>
+                <a:spcPct val="110000"/>
+              </a:lnSpc>
+            </a:pPr>
+            <a:r>
+              <a:rPr sz="1100" b="1">
+                <a:solidFill>
+                  <a:srgbClr val="EE5B22"/>
+                </a:solidFill>
+                <a:latin typeface="Poppins"/>
+              </a:rPr>
+              <a:t>Style fiche sombre</a:t>
+            </a:r>
+          </a:p>
+        </p:txBody>
+      </p:sp>
+    </p:spTree>
+  </p:cSld>
+  <p:clrMapOvr>
+    <a:masterClrMapping/>
+  </p:clrMapOvr>
+</p:sld>
+</file>
+
+<file path=ppt/slides/slide23.xml><?xml version="1.0" encoding="utf-8"?>
+<p:sld xmlns:a="http://schemas.openxmlformats.org/drawingml/2006/main" xmlns:p="http://schemas.openxmlformats.org/presentationml/2006/main" xmlns:r="http://schemas.openxmlformats.org/officeDocument/2006/relationships">
+  <p:cSld>
+    <p:spTree>
+      <p:nvGrpSpPr>
+        <p:cNvPr id="1" name=""/>
+        <p:cNvGrpSpPr/>
+        <p:nvPr/>
+      </p:nvGrpSpPr>
+      <p:grpSpPr/>
+      <p:sp>
+        <p:nvSpPr>
+          <p:cNvPr id="2" name="Rectangle 1"/>
+          <p:cNvSpPr/>
+          <p:nvPr/>
+        </p:nvSpPr>
+        <p:spPr>
+          <a:xfrm>
+            <a:off x="0" y="0"/>
+            <a:ext cx="180000" cy="6858000"/>
+          </a:xfrm>
+          <a:prstGeom prst="rect">
+            <a:avLst/>
+          </a:prstGeom>
+          <a:solidFill>
+            <a:srgbClr val="EE5B22"/>
+          </a:solidFill>
+          <a:ln>
+            <a:noFill/>
+          </a:ln>
+          <a:effectLst/>
+        </p:spPr>
+        <p:style>
+          <a:lnRef idx="1">
+            <a:schemeClr val="accent1"/>
+          </a:lnRef>
+          <a:fillRef idx="3">
+            <a:schemeClr val="accent1"/>
+          </a:fillRef>
+          <a:effectRef idx="2">
+            <a:schemeClr val="accent1"/>
+          </a:effectRef>
+          <a:fontRef idx="minor">
+            <a:schemeClr val="lt1"/>
+          </a:fontRef>
+        </p:style>
+        <p:txBody>
+          <a:bodyPr rtlCol="0" anchor="ctr"/>
+          <a:lstStyle/>
+          <a:p>
+            <a:pPr algn="ctr"/>
+          </a:p>
+        </p:txBody>
+      </p:sp>
+      <p:pic>
+        <p:nvPicPr>
+          <p:cNvPr id="3" name="Picture 2" descr="logo-proline-fond-blanc.png"/>
+          <p:cNvPicPr>
+            <a:picLocks noChangeAspect="1"/>
+          </p:cNvPicPr>
+          <p:nvPr/>
+        </p:nvPicPr>
+        <p:blipFill>
+          <a:blip r:embed="rId2"/>
+          <a:stretch>
+            <a:fillRect/>
+          </a:stretch>
+        </p:blipFill>
+        <p:spPr>
+          <a:xfrm>
+            <a:off x="10200399" y="216000"/>
+            <a:ext cx="1607441" cy="576000"/>
+          </a:xfrm>
+          <a:prstGeom prst="rect">
+            <a:avLst/>
+          </a:prstGeom>
+        </p:spPr>
+      </p:pic>
+      <p:sp>
+        <p:nvSpPr>
+          <p:cNvPr id="4" name="TextBox 3"/>
+          <p:cNvSpPr txBox="1"/>
+          <p:nvPr/>
+        </p:nvSpPr>
+        <p:spPr>
+          <a:xfrm>
+            <a:off x="576000" y="324000"/>
+            <a:ext cx="8640000" cy="288000"/>
+          </a:xfrm>
+          <a:prstGeom prst="rect">
+            <a:avLst/>
+          </a:prstGeom>
+          <a:noFill/>
+        </p:spPr>
+        <p:txBody>
+          <a:bodyPr wrap="square" lIns="36000" rIns="36000" tIns="18000" bIns="18000" anchor="t">
+            <a:spAutoFit/>
+          </a:bodyPr>
+          <a:lstStyle/>
+          <a:p>
+            <a:pPr algn="l">
+              <a:lnSpc>
+                <a:spcPct val="110000"/>
+              </a:lnSpc>
+            </a:pPr>
+            <a:r>
+              <a:rPr sz="1100" b="1">
+                <a:solidFill>
+                  <a:srgbClr val="EE5B22"/>
+                </a:solidFill>
+                <a:latin typeface="Poppins"/>
+              </a:rPr>
+              <a:t>PLAN 30 JOURS</a:t>
+            </a:r>
+          </a:p>
+        </p:txBody>
+      </p:sp>
+      <p:sp>
+        <p:nvSpPr>
+          <p:cNvPr id="5" name="TextBox 4"/>
+          <p:cNvSpPr txBox="1"/>
+          <p:nvPr/>
+        </p:nvSpPr>
+        <p:spPr>
+          <a:xfrm>
+            <a:off x="576000" y="576000"/>
+            <a:ext cx="9180000" cy="720000"/>
+          </a:xfrm>
+          <a:prstGeom prst="rect">
+            <a:avLst/>
+          </a:prstGeom>
+          <a:noFill/>
+        </p:spPr>
+        <p:txBody>
+          <a:bodyPr wrap="square" lIns="36000" rIns="36000" tIns="18000" bIns="18000" anchor="t">
+            <a:spAutoFit/>
+          </a:bodyPr>
+          <a:lstStyle/>
+          <a:p>
+            <a:pPr algn="l">
+              <a:lnSpc>
+                <a:spcPct val="110000"/>
+              </a:lnSpc>
+            </a:pPr>
+            <a:r>
+              <a:rPr sz="2500" b="1">
+                <a:solidFill>
+                  <a:srgbClr val="111111"/>
+                </a:solidFill>
+                <a:latin typeface="Poppins"/>
+              </a:rPr>
+              <a:t>Le premier mois, semaine par semaine</a:t>
+            </a:r>
+          </a:p>
+        </p:txBody>
+      </p:sp>
+      <p:sp>
+        <p:nvSpPr>
+          <p:cNvPr id="6" name="Rectangle 5"/>
+          <p:cNvSpPr/>
+          <p:nvPr/>
+        </p:nvSpPr>
+        <p:spPr>
+          <a:xfrm>
+            <a:off x="576000" y="1278000"/>
+            <a:ext cx="792000" cy="50400"/>
+          </a:xfrm>
+          <a:prstGeom prst="rect">
+            <a:avLst/>
+          </a:prstGeom>
+          <a:solidFill>
+            <a:srgbClr val="11202E"/>
+          </a:solidFill>
+          <a:ln>
+            <a:noFill/>
+          </a:ln>
+          <a:effectLst/>
+        </p:spPr>
+        <p:style>
+          <a:lnRef idx="1">
+            <a:schemeClr val="accent1"/>
+          </a:lnRef>
+          <a:fillRef idx="3">
+            <a:schemeClr val="accent1"/>
+          </a:fillRef>
+          <a:effectRef idx="2">
+            <a:schemeClr val="accent1"/>
+          </a:effectRef>
+          <a:fontRef idx="minor">
+            <a:schemeClr val="lt1"/>
+          </a:fontRef>
+        </p:style>
+        <p:txBody>
+          <a:bodyPr rtlCol="0" anchor="ctr"/>
+          <a:lstStyle/>
+          <a:p>
+            <a:pPr algn="ctr"/>
+          </a:p>
+        </p:txBody>
+      </p:sp>
+      <p:sp>
+        <p:nvSpPr>
+          <p:cNvPr id="7" name="TextBox 6"/>
+          <p:cNvSpPr txBox="1"/>
+          <p:nvPr/>
+        </p:nvSpPr>
+        <p:spPr>
+          <a:xfrm>
+            <a:off x="10572119" y="6498000"/>
+            <a:ext cx="1296000" cy="216000"/>
+          </a:xfrm>
+          <a:prstGeom prst="rect">
+            <a:avLst/>
+          </a:prstGeom>
+          <a:noFill/>
+        </p:spPr>
+        <p:txBody>
+          <a:bodyPr wrap="square" lIns="36000" rIns="36000" tIns="18000" bIns="18000" anchor="t">
+            <a:spAutoFit/>
+          </a:bodyPr>
+          <a:lstStyle/>
+          <a:p>
+            <a:pPr algn="r">
+              <a:lnSpc>
+                <a:spcPct val="110000"/>
+              </a:lnSpc>
+            </a:pPr>
+            <a:r>
+              <a:rPr sz="900" b="0">
+                <a:solidFill>
+                  <a:srgbClr val="5A5A5A"/>
+                </a:solidFill>
+                <a:latin typeface="Poppins"/>
+              </a:rPr>
+              <a:t>23 / 23</a:t>
+            </a:r>
+          </a:p>
+        </p:txBody>
+      </p:sp>
+      <p:sp>
+        <p:nvSpPr>
+          <p:cNvPr id="8" name="TextBox 7"/>
+          <p:cNvSpPr txBox="1"/>
+          <p:nvPr/>
+        </p:nvSpPr>
+        <p:spPr>
+          <a:xfrm>
+            <a:off x="576000" y="6498000"/>
+            <a:ext cx="7920000" cy="216000"/>
+          </a:xfrm>
+          <a:prstGeom prst="rect">
+            <a:avLst/>
+          </a:prstGeom>
+          <a:noFill/>
+        </p:spPr>
+        <p:txBody>
+          <a:bodyPr wrap="square" lIns="36000" rIns="36000" tIns="18000" bIns="18000" anchor="t">
+            <a:spAutoFit/>
+          </a:bodyPr>
+          <a:lstStyle/>
+          <a:p>
+            <a:pPr algn="l">
+              <a:lnSpc>
+                <a:spcPct val="110000"/>
+              </a:lnSpc>
+            </a:pPr>
+            <a:r>
+              <a:rPr sz="900" b="0">
+                <a:solidFill>
+                  <a:srgbClr val="5A5A5A"/>
+                </a:solidFill>
+                <a:latin typeface="Poppins"/>
+              </a:rPr>
+              <a:t>Proline Logistics · Audit réseaux sociaux · relevé du 28/10/2026</a:t>
+            </a:r>
+          </a:p>
+        </p:txBody>
+      </p:sp>
+      <p:sp>
+        <p:nvSpPr>
+          <p:cNvPr id="9" name="Rounded Rectangle 8"/>
+          <p:cNvSpPr/>
+          <p:nvPr/>
+        </p:nvSpPr>
+        <p:spPr>
+          <a:xfrm>
+            <a:off x="576000" y="1584000"/>
+            <a:ext cx="2628000" cy="576000"/>
+          </a:xfrm>
+          <a:prstGeom prst="roundRect">
+            <a:avLst/>
+          </a:prstGeom>
+          <a:solidFill>
+            <a:srgbClr val="EE5B22"/>
+          </a:solidFill>
+          <a:ln>
+            <a:noFill/>
+          </a:ln>
+          <a:effectLst/>
+        </p:spPr>
+        <p:style>
+          <a:lnRef idx="1">
+            <a:schemeClr val="accent1"/>
+          </a:lnRef>
+          <a:fillRef idx="3">
+            <a:schemeClr val="accent1"/>
+          </a:fillRef>
+          <a:effectRef idx="2">
+            <a:schemeClr val="accent1"/>
+          </a:effectRef>
+          <a:fontRef idx="minor">
+            <a:schemeClr val="lt1"/>
+          </a:fontRef>
+        </p:style>
+        <p:txBody>
+          <a:bodyPr rtlCol="0" anchor="ctr"/>
+          <a:lstStyle/>
+          <a:p>
+            <a:pPr algn="ctr"/>
+          </a:p>
+        </p:txBody>
+      </p:sp>
+      <p:pic>
+        <p:nvPicPr>
+          <p:cNvPr id="10" name="Picture 9" descr="calendar-event_bl.png"/>
+          <p:cNvPicPr>
+            <a:picLocks noChangeAspect="1"/>
+          </p:cNvPicPr>
+          <p:nvPr/>
+        </p:nvPicPr>
+        <p:blipFill>
+          <a:blip r:embed="rId3"/>
+          <a:stretch>
+            <a:fillRect/>
+          </a:stretch>
+        </p:blipFill>
+        <p:spPr>
+          <a:xfrm>
+            <a:off x="720000" y="1710000"/>
+            <a:ext cx="324000" cy="324000"/>
+          </a:xfrm>
+          <a:prstGeom prst="rect">
+            <a:avLst/>
+          </a:prstGeom>
+        </p:spPr>
+      </p:pic>
+      <p:sp>
+        <p:nvSpPr>
+          <p:cNvPr id="11" name="TextBox 10"/>
+          <p:cNvSpPr txBox="1"/>
+          <p:nvPr/>
+        </p:nvSpPr>
+        <p:spPr>
+          <a:xfrm>
+            <a:off x="1116000" y="1584000"/>
+            <a:ext cx="2015999" cy="576000"/>
+          </a:xfrm>
+          <a:prstGeom prst="rect">
+            <a:avLst/>
+          </a:prstGeom>
+          <a:noFill/>
+        </p:spPr>
+        <p:txBody>
+          <a:bodyPr wrap="square" lIns="36000" rIns="36000" tIns="18000" bIns="18000" anchor="ctr">
+            <a:spAutoFit/>
+          </a:bodyPr>
+          <a:lstStyle/>
+          <a:p>
+            <a:pPr algn="l">
+              <a:lnSpc>
+                <a:spcPct val="110000"/>
+              </a:lnSpc>
+            </a:pPr>
+            <a:r>
+              <a:rPr sz="1500" b="1">
+                <a:solidFill>
+                  <a:srgbClr val="FFFFFF"/>
+                </a:solidFill>
+                <a:latin typeface="Poppins"/>
+              </a:rPr>
+              <a:t>Semaine 1</a:t>
+            </a:r>
+          </a:p>
+        </p:txBody>
+      </p:sp>
+      <p:sp>
+        <p:nvSpPr>
+          <p:cNvPr id="12" name="Rounded Rectangle 11"/>
+          <p:cNvSpPr/>
+          <p:nvPr/>
+        </p:nvSpPr>
+        <p:spPr>
+          <a:xfrm>
+            <a:off x="576000" y="2304000"/>
+            <a:ext cx="2628000" cy="2880000"/>
+          </a:xfrm>
+          <a:prstGeom prst="roundRect">
+            <a:avLst>
+              <a:gd name="adj" fmla="val 6000"/>
+            </a:avLst>
+          </a:prstGeom>
+          <a:solidFill>
+            <a:srgbClr val="F4F4F2"/>
+          </a:solidFill>
+          <a:ln>
+            <a:noFill/>
+          </a:ln>
+          <a:effectLst/>
+        </p:spPr>
+        <p:style>
+          <a:lnRef idx="1">
+            <a:schemeClr val="accent1"/>
+          </a:lnRef>
+          <a:fillRef idx="3">
+            <a:schemeClr val="accent1"/>
+          </a:fillRef>
+          <a:effectRef idx="2">
+            <a:schemeClr val="accent1"/>
+          </a:effectRef>
+          <a:fontRef idx="minor">
+            <a:schemeClr val="lt1"/>
+          </a:fontRef>
+        </p:style>
+        <p:txBody>
+          <a:bodyPr rtlCol="0" anchor="ctr"/>
+          <a:lstStyle/>
+          <a:p>
+            <a:pPr algn="ctr"/>
+          </a:p>
+        </p:txBody>
+      </p:sp>
+      <p:sp>
+        <p:nvSpPr>
+          <p:cNvPr id="13" name="TextBox 12"/>
+          <p:cNvSpPr txBox="1"/>
+          <p:nvPr/>
+        </p:nvSpPr>
+        <p:spPr>
+          <a:xfrm>
+            <a:off x="720000" y="2448000"/>
+            <a:ext cx="2376000" cy="2664000"/>
+          </a:xfrm>
+          <a:prstGeom prst="rect">
+            <a:avLst/>
+          </a:prstGeom>
+          <a:noFill/>
+        </p:spPr>
+        <p:txBody>
+          <a:bodyPr wrap="square">
+            <a:spAutoFit/>
+          </a:bodyPr>
+          <a:lstStyle/>
+          <a:p>
+            <a:pPr>
+              <a:spcAft>
+                <a:spcPts val="700"/>
+              </a:spcAft>
+            </a:pPr>
+            <a:r>
+              <a:rPr sz="800">
+                <a:solidFill>
+                  <a:srgbClr val="EE5B22"/>
+                </a:solidFill>
+                <a:latin typeface="Poppins"/>
+              </a:rPr>
+              <a:t>■  </a:t>
+            </a:r>
+            <a:r>
+              <a:rPr sz="1200">
+                <a:solidFill>
+                  <a:srgbClr val="111111"/>
+                </a:solidFill>
+                <a:latin typeface="Poppins"/>
+              </a:rPr>
+              <a:t>Mettre à jour la page LinkedIn</a:t>
+            </a:r>
+          </a:p>
+          <a:p>
+            <a:pPr>
+              <a:spcAft>
+                <a:spcPts val="700"/>
+              </a:spcAft>
+            </a:pPr>
+            <a:r>
+              <a:rPr sz="800">
+                <a:solidFill>
+                  <a:srgbClr val="EE5B22"/>
+                </a:solidFill>
+                <a:latin typeface="Poppins"/>
+              </a:rPr>
+              <a:t>■  </a:t>
+            </a:r>
+            <a:r>
+              <a:rPr sz="1200">
+                <a:solidFill>
+                  <a:srgbClr val="111111"/>
+                </a:solidFill>
+                <a:latin typeface="Poppins"/>
+              </a:rPr>
+              <a:t>Valider les 6 publications</a:t>
+            </a:r>
+          </a:p>
+          <a:p>
+            <a:pPr>
+              <a:spcAft>
+                <a:spcPts val="700"/>
+              </a:spcAft>
+            </a:pPr>
+            <a:r>
+              <a:rPr sz="800">
+                <a:solidFill>
+                  <a:srgbClr val="EE5B22"/>
+                </a:solidFill>
+                <a:latin typeface="Poppins"/>
+              </a:rPr>
+              <a:t>■  </a:t>
+            </a:r>
+            <a:r>
+              <a:rPr sz="1200">
+                <a:solidFill>
+                  <a:srgbClr val="111111"/>
+                </a:solidFill>
+                <a:latin typeface="Poppins"/>
+              </a:rPr>
+              <a:t>Réserver le nom Instagram</a:t>
+            </a:r>
+          </a:p>
+        </p:txBody>
+      </p:sp>
+      <p:sp>
+        <p:nvSpPr>
+          <p:cNvPr id="14" name="Rounded Rectangle 13"/>
+          <p:cNvSpPr/>
+          <p:nvPr/>
+        </p:nvSpPr>
+        <p:spPr>
+          <a:xfrm>
+            <a:off x="3384000" y="1584000"/>
+            <a:ext cx="2628000" cy="576000"/>
+          </a:xfrm>
+          <a:prstGeom prst="roundRect">
+            <a:avLst/>
+          </a:prstGeom>
+          <a:solidFill>
+            <a:srgbClr val="11202E"/>
+          </a:solidFill>
+          <a:ln>
+            <a:noFill/>
+          </a:ln>
+          <a:effectLst/>
+        </p:spPr>
+        <p:style>
+          <a:lnRef idx="1">
+            <a:schemeClr val="accent1"/>
+          </a:lnRef>
+          <a:fillRef idx="3">
+            <a:schemeClr val="accent1"/>
+          </a:fillRef>
+          <a:effectRef idx="2">
+            <a:schemeClr val="accent1"/>
+          </a:effectRef>
+          <a:fontRef idx="minor">
+            <a:schemeClr val="lt1"/>
+          </a:fontRef>
+        </p:style>
+        <p:txBody>
+          <a:bodyPr rtlCol="0" anchor="ctr"/>
+          <a:lstStyle/>
+          <a:p>
+            <a:pPr algn="ctr"/>
+          </a:p>
+        </p:txBody>
+      </p:sp>
+      <p:pic>
+        <p:nvPicPr>
+          <p:cNvPr id="15" name="Picture 14" descr="pencil_bl.png"/>
+          <p:cNvPicPr>
+            <a:picLocks noChangeAspect="1"/>
+          </p:cNvPicPr>
+          <p:nvPr/>
+        </p:nvPicPr>
+        <p:blipFill>
+          <a:blip r:embed="rId4"/>
+          <a:stretch>
+            <a:fillRect/>
+          </a:stretch>
+        </p:blipFill>
+        <p:spPr>
+          <a:xfrm>
+            <a:off x="3528000" y="1710000"/>
+            <a:ext cx="324000" cy="324000"/>
+          </a:xfrm>
+          <a:prstGeom prst="rect">
+            <a:avLst/>
+          </a:prstGeom>
+        </p:spPr>
+      </p:pic>
+      <p:sp>
+        <p:nvSpPr>
+          <p:cNvPr id="16" name="TextBox 15"/>
+          <p:cNvSpPr txBox="1"/>
+          <p:nvPr/>
+        </p:nvSpPr>
+        <p:spPr>
+          <a:xfrm>
+            <a:off x="3924000" y="1584000"/>
+            <a:ext cx="2015999" cy="576000"/>
+          </a:xfrm>
+          <a:prstGeom prst="rect">
+            <a:avLst/>
+          </a:prstGeom>
+          <a:noFill/>
+        </p:spPr>
+        <p:txBody>
+          <a:bodyPr wrap="square" lIns="36000" rIns="36000" tIns="18000" bIns="18000" anchor="ctr">
+            <a:spAutoFit/>
+          </a:bodyPr>
+          <a:lstStyle/>
+          <a:p>
+            <a:pPr algn="l">
+              <a:lnSpc>
+                <a:spcPct val="110000"/>
+              </a:lnSpc>
+            </a:pPr>
+            <a:r>
+              <a:rPr sz="1500" b="1">
+                <a:solidFill>
+                  <a:srgbClr val="FFFFFF"/>
+                </a:solidFill>
+                <a:latin typeface="Poppins"/>
+              </a:rPr>
+              <a:t>Semaine 2</a:t>
+            </a:r>
+          </a:p>
+        </p:txBody>
+      </p:sp>
+      <p:sp>
+        <p:nvSpPr>
+          <p:cNvPr id="17" name="Rounded Rectangle 16"/>
+          <p:cNvSpPr/>
+          <p:nvPr/>
+        </p:nvSpPr>
+        <p:spPr>
+          <a:xfrm>
+            <a:off x="3384000" y="2304000"/>
+            <a:ext cx="2628000" cy="2880000"/>
+          </a:xfrm>
+          <a:prstGeom prst="roundRect">
+            <a:avLst>
+              <a:gd name="adj" fmla="val 6000"/>
+            </a:avLst>
+          </a:prstGeom>
+          <a:solidFill>
+            <a:srgbClr val="F4F4F2"/>
+          </a:solidFill>
+          <a:ln>
+            <a:noFill/>
+          </a:ln>
+          <a:effectLst/>
+        </p:spPr>
+        <p:style>
+          <a:lnRef idx="1">
+            <a:schemeClr val="accent1"/>
+          </a:lnRef>
+          <a:fillRef idx="3">
+            <a:schemeClr val="accent1"/>
+          </a:fillRef>
+          <a:effectRef idx="2">
+            <a:schemeClr val="accent1"/>
+          </a:effectRef>
+          <a:fontRef idx="minor">
+            <a:schemeClr val="lt1"/>
+          </a:fontRef>
+        </p:style>
+        <p:txBody>
+          <a:bodyPr rtlCol="0" anchor="ctr"/>
+          <a:lstStyle/>
+          <a:p>
+            <a:pPr algn="ctr"/>
+          </a:p>
+        </p:txBody>
+      </p:sp>
+      <p:sp>
+        <p:nvSpPr>
+          <p:cNvPr id="18" name="TextBox 17"/>
+          <p:cNvSpPr txBox="1"/>
+          <p:nvPr/>
+        </p:nvSpPr>
+        <p:spPr>
+          <a:xfrm>
+            <a:off x="3528000" y="2448000"/>
+            <a:ext cx="2376000" cy="2664000"/>
+          </a:xfrm>
+          <a:prstGeom prst="rect">
+            <a:avLst/>
+          </a:prstGeom>
+          <a:noFill/>
+        </p:spPr>
+        <p:txBody>
+          <a:bodyPr wrap="square">
+            <a:spAutoFit/>
+          </a:bodyPr>
+          <a:lstStyle/>
+          <a:p>
+            <a:pPr>
+              <a:spcAft>
+                <a:spcPts val="700"/>
+              </a:spcAft>
+            </a:pPr>
+            <a:r>
+              <a:rPr sz="800">
+                <a:solidFill>
+                  <a:srgbClr val="EE5B22"/>
+                </a:solidFill>
+                <a:latin typeface="Poppins"/>
+              </a:rPr>
+              <a:t>■  </a:t>
+            </a:r>
+            <a:r>
+              <a:rPr sz="1200">
+                <a:solidFill>
+                  <a:srgbClr val="111111"/>
+                </a:solidFill>
+                <a:latin typeface="Poppins"/>
+              </a:rPr>
+              <a:t>Publier 2 des 6 publications</a:t>
+            </a:r>
+          </a:p>
+          <a:p>
+            <a:pPr>
+              <a:spcAft>
+                <a:spcPts val="700"/>
+              </a:spcAft>
+            </a:pPr>
+            <a:r>
+              <a:rPr sz="800">
+                <a:solidFill>
+                  <a:srgbClr val="EE5B22"/>
+                </a:solidFill>
+                <a:latin typeface="Poppins"/>
+              </a:rPr>
+              <a:t>■  </a:t>
+            </a:r>
+            <a:r>
+              <a:rPr sz="1200">
+                <a:solidFill>
+                  <a:srgbClr val="111111"/>
+                </a:solidFill>
+                <a:latin typeface="Poppins"/>
+              </a:rPr>
+              <a:t>Demander aux salariés de suivre la page</a:t>
+            </a:r>
+          </a:p>
+          <a:p>
+            <a:pPr>
+              <a:spcAft>
+                <a:spcPts val="700"/>
+              </a:spcAft>
+            </a:pPr>
+            <a:r>
+              <a:rPr sz="800">
+                <a:solidFill>
+                  <a:srgbClr val="EE5B22"/>
+                </a:solidFill>
+                <a:latin typeface="Poppins"/>
+              </a:rPr>
+              <a:t>■  </a:t>
+            </a:r>
+            <a:r>
+              <a:rPr sz="1200">
+                <a:solidFill>
+                  <a:srgbClr val="111111"/>
+                </a:solidFill>
+                <a:latin typeface="Poppins"/>
+              </a:rPr>
+              <a:t>Répondre à chaque commentaire</a:t>
+            </a:r>
+          </a:p>
+        </p:txBody>
+      </p:sp>
+      <p:sp>
+        <p:nvSpPr>
+          <p:cNvPr id="19" name="Rounded Rectangle 18"/>
+          <p:cNvSpPr/>
+          <p:nvPr/>
+        </p:nvSpPr>
+        <p:spPr>
+          <a:xfrm>
+            <a:off x="6192000" y="1584000"/>
+            <a:ext cx="2628000" cy="576000"/>
+          </a:xfrm>
+          <a:prstGeom prst="roundRect">
+            <a:avLst/>
+          </a:prstGeom>
+          <a:solidFill>
+            <a:srgbClr val="EE5B22"/>
+          </a:solidFill>
+          <a:ln>
+            <a:noFill/>
+          </a:ln>
+          <a:effectLst/>
+        </p:spPr>
+        <p:style>
+          <a:lnRef idx="1">
+            <a:schemeClr val="accent1"/>
+          </a:lnRef>
+          <a:fillRef idx="3">
+            <a:schemeClr val="accent1"/>
+          </a:fillRef>
+          <a:effectRef idx="2">
+            <a:schemeClr val="accent1"/>
+          </a:effectRef>
+          <a:fontRef idx="minor">
+            <a:schemeClr val="lt1"/>
+          </a:fontRef>
+        </p:style>
+        <p:txBody>
+          <a:bodyPr rtlCol="0" anchor="ctr"/>
+          <a:lstStyle/>
+          <a:p>
+            <a:pPr algn="ctr"/>
+          </a:p>
+        </p:txBody>
+      </p:sp>
+      <p:pic>
+        <p:nvPicPr>
+          <p:cNvPr id="20" name="Picture 19" descr="briefcase_bl.png"/>
+          <p:cNvPicPr>
+            <a:picLocks noChangeAspect="1"/>
+          </p:cNvPicPr>
+          <p:nvPr/>
+        </p:nvPicPr>
+        <p:blipFill>
+          <a:blip r:embed="rId5"/>
+          <a:stretch>
+            <a:fillRect/>
+          </a:stretch>
+        </p:blipFill>
+        <p:spPr>
+          <a:xfrm>
+            <a:off x="6336000" y="1710000"/>
+            <a:ext cx="324000" cy="324000"/>
+          </a:xfrm>
+          <a:prstGeom prst="rect">
+            <a:avLst/>
+          </a:prstGeom>
+        </p:spPr>
+      </p:pic>
+      <p:sp>
+        <p:nvSpPr>
+          <p:cNvPr id="21" name="TextBox 20"/>
+          <p:cNvSpPr txBox="1"/>
+          <p:nvPr/>
+        </p:nvSpPr>
+        <p:spPr>
+          <a:xfrm>
+            <a:off x="6732000" y="1584000"/>
+            <a:ext cx="2015999" cy="576000"/>
+          </a:xfrm>
+          <a:prstGeom prst="rect">
+            <a:avLst/>
+          </a:prstGeom>
+          <a:noFill/>
+        </p:spPr>
+        <p:txBody>
+          <a:bodyPr wrap="square" lIns="36000" rIns="36000" tIns="18000" bIns="18000" anchor="ctr">
+            <a:spAutoFit/>
+          </a:bodyPr>
+          <a:lstStyle/>
+          <a:p>
+            <a:pPr algn="l">
+              <a:lnSpc>
+                <a:spcPct val="110000"/>
+              </a:lnSpc>
+            </a:pPr>
+            <a:r>
+              <a:rPr sz="1500" b="1">
+                <a:solidFill>
+                  <a:srgbClr val="FFFFFF"/>
+                </a:solidFill>
+                <a:latin typeface="Poppins"/>
+              </a:rPr>
+              <a:t>Semaine 3</a:t>
+            </a:r>
+          </a:p>
+        </p:txBody>
+      </p:sp>
+      <p:sp>
+        <p:nvSpPr>
+          <p:cNvPr id="22" name="Rounded Rectangle 21"/>
+          <p:cNvSpPr/>
+          <p:nvPr/>
+        </p:nvSpPr>
+        <p:spPr>
+          <a:xfrm>
+            <a:off x="6192000" y="2304000"/>
+            <a:ext cx="2628000" cy="2880000"/>
+          </a:xfrm>
+          <a:prstGeom prst="roundRect">
+            <a:avLst>
+              <a:gd name="adj" fmla="val 6000"/>
+            </a:avLst>
+          </a:prstGeom>
+          <a:solidFill>
+            <a:srgbClr val="F4F4F2"/>
+          </a:solidFill>
+          <a:ln>
+            <a:noFill/>
+          </a:ln>
+          <a:effectLst/>
+        </p:spPr>
+        <p:style>
+          <a:lnRef idx="1">
+            <a:schemeClr val="accent1"/>
+          </a:lnRef>
+          <a:fillRef idx="3">
+            <a:schemeClr val="accent1"/>
+          </a:fillRef>
+          <a:effectRef idx="2">
+            <a:schemeClr val="accent1"/>
+          </a:effectRef>
+          <a:fontRef idx="minor">
+            <a:schemeClr val="lt1"/>
+          </a:fontRef>
+        </p:style>
+        <p:txBody>
+          <a:bodyPr rtlCol="0" anchor="ctr"/>
+          <a:lstStyle/>
+          <a:p>
+            <a:pPr algn="ctr"/>
+          </a:p>
+        </p:txBody>
+      </p:sp>
+      <p:sp>
+        <p:nvSpPr>
+          <p:cNvPr id="23" name="TextBox 22"/>
+          <p:cNvSpPr txBox="1"/>
+          <p:nvPr/>
+        </p:nvSpPr>
+        <p:spPr>
+          <a:xfrm>
+            <a:off x="6336000" y="2448000"/>
+            <a:ext cx="2376000" cy="2664000"/>
+          </a:xfrm>
+          <a:prstGeom prst="rect">
+            <a:avLst/>
+          </a:prstGeom>
+          <a:noFill/>
+        </p:spPr>
+        <p:txBody>
+          <a:bodyPr wrap="square">
+            <a:spAutoFit/>
+          </a:bodyPr>
+          <a:lstStyle/>
+          <a:p>
+            <a:pPr>
+              <a:spcAft>
+                <a:spcPts val="700"/>
+              </a:spcAft>
+            </a:pPr>
+            <a:r>
+              <a:rPr sz="800">
+                <a:solidFill>
+                  <a:srgbClr val="EE5B22"/>
+                </a:solidFill>
+                <a:latin typeface="Poppins"/>
+              </a:rPr>
+              <a:t>■  </a:t>
+            </a:r>
+            <a:r>
+              <a:rPr sz="1200">
+                <a:solidFill>
+                  <a:srgbClr val="111111"/>
+                </a:solidFill>
+                <a:latin typeface="Poppins"/>
+              </a:rPr>
+              <a:t>Publier une offre d’emploi</a:t>
+            </a:r>
+          </a:p>
+          <a:p>
+            <a:pPr>
+              <a:spcAft>
+                <a:spcPts val="700"/>
+              </a:spcAft>
+            </a:pPr>
+            <a:r>
+              <a:rPr sz="800">
+                <a:solidFill>
+                  <a:srgbClr val="EE5B22"/>
+                </a:solidFill>
+                <a:latin typeface="Poppins"/>
+              </a:rPr>
+              <a:t>■  </a:t>
+            </a:r>
+            <a:r>
+              <a:rPr sz="1200">
+                <a:solidFill>
+                  <a:srgbClr val="111111"/>
+                </a:solidFill>
+                <a:latin typeface="Poppins"/>
+              </a:rPr>
+              <a:t>Publier 2 autres publications</a:t>
+            </a:r>
+          </a:p>
+          <a:p>
+            <a:pPr>
+              <a:spcAft>
+                <a:spcPts val="700"/>
+              </a:spcAft>
+            </a:pPr>
+            <a:r>
+              <a:rPr sz="800">
+                <a:solidFill>
+                  <a:srgbClr val="EE5B22"/>
+                </a:solidFill>
+                <a:latin typeface="Poppins"/>
+              </a:rPr>
+              <a:t>■  </a:t>
+            </a:r>
+            <a:r>
+              <a:rPr sz="1200">
+                <a:solidFill>
+                  <a:srgbClr val="111111"/>
+                </a:solidFill>
+                <a:latin typeface="Poppins"/>
+              </a:rPr>
+              <a:t>Photographier 2 équipes</a:t>
+            </a:r>
+          </a:p>
+        </p:txBody>
+      </p:sp>
+      <p:sp>
+        <p:nvSpPr>
+          <p:cNvPr id="24" name="Rounded Rectangle 23"/>
+          <p:cNvSpPr/>
+          <p:nvPr/>
+        </p:nvSpPr>
+        <p:spPr>
+          <a:xfrm>
+            <a:off x="9000000" y="1584000"/>
+            <a:ext cx="2628000" cy="576000"/>
+          </a:xfrm>
+          <a:prstGeom prst="roundRect">
+            <a:avLst/>
+          </a:prstGeom>
+          <a:solidFill>
+            <a:srgbClr val="11202E"/>
+          </a:solidFill>
+          <a:ln>
+            <a:noFill/>
+          </a:ln>
+          <a:effectLst/>
+        </p:spPr>
+        <p:style>
+          <a:lnRef idx="1">
+            <a:schemeClr val="accent1"/>
+          </a:lnRef>
+          <a:fillRef idx="3">
+            <a:schemeClr val="accent1"/>
+          </a:fillRef>
+          <a:effectRef idx="2">
+            <a:schemeClr val="accent1"/>
+          </a:effectRef>
+          <a:fontRef idx="minor">
+            <a:schemeClr val="lt1"/>
+          </a:fontRef>
+        </p:style>
+        <p:txBody>
+          <a:bodyPr rtlCol="0" anchor="ctr"/>
+          <a:lstStyle/>
+          <a:p>
+            <a:pPr algn="ctr"/>
+          </a:p>
+        </p:txBody>
+      </p:sp>
+      <p:pic>
+        <p:nvPicPr>
+          <p:cNvPr id="25" name="Picture 24" descr="trending-up_bl.png"/>
+          <p:cNvPicPr>
+            <a:picLocks noChangeAspect="1"/>
+          </p:cNvPicPr>
+          <p:nvPr/>
+        </p:nvPicPr>
+        <p:blipFill>
+          <a:blip r:embed="rId6"/>
+          <a:stretch>
+            <a:fillRect/>
+          </a:stretch>
+        </p:blipFill>
+        <p:spPr>
+          <a:xfrm>
+            <a:off x="9144000" y="1710000"/>
+            <a:ext cx="324000" cy="324000"/>
+          </a:xfrm>
+          <a:prstGeom prst="rect">
+            <a:avLst/>
+          </a:prstGeom>
+        </p:spPr>
+      </p:pic>
+      <p:sp>
+        <p:nvSpPr>
+          <p:cNvPr id="26" name="TextBox 25"/>
+          <p:cNvSpPr txBox="1"/>
+          <p:nvPr/>
+        </p:nvSpPr>
+        <p:spPr>
+          <a:xfrm>
+            <a:off x="9540000" y="1584000"/>
+            <a:ext cx="2015999" cy="576000"/>
+          </a:xfrm>
+          <a:prstGeom prst="rect">
+            <a:avLst/>
+          </a:prstGeom>
+          <a:noFill/>
+        </p:spPr>
+        <p:txBody>
+          <a:bodyPr wrap="square" lIns="36000" rIns="36000" tIns="18000" bIns="18000" anchor="ctr">
+            <a:spAutoFit/>
+          </a:bodyPr>
+          <a:lstStyle/>
+          <a:p>
+            <a:pPr algn="l">
+              <a:lnSpc>
+                <a:spcPct val="110000"/>
+              </a:lnSpc>
+            </a:pPr>
+            <a:r>
+              <a:rPr sz="1500" b="1">
+                <a:solidFill>
+                  <a:srgbClr val="FFFFFF"/>
+                </a:solidFill>
+                <a:latin typeface="Poppins"/>
+              </a:rPr>
+              <a:t>Semaine 4</a:t>
+            </a:r>
+          </a:p>
+        </p:txBody>
+      </p:sp>
+      <p:sp>
+        <p:nvSpPr>
+          <p:cNvPr id="27" name="Rounded Rectangle 26"/>
+          <p:cNvSpPr/>
+          <p:nvPr/>
+        </p:nvSpPr>
+        <p:spPr>
+          <a:xfrm>
+            <a:off x="9000000" y="2304000"/>
+            <a:ext cx="2628000" cy="2880000"/>
+          </a:xfrm>
+          <a:prstGeom prst="roundRect">
+            <a:avLst>
+              <a:gd name="adj" fmla="val 6000"/>
+            </a:avLst>
+          </a:prstGeom>
+          <a:solidFill>
+            <a:srgbClr val="F4F4F2"/>
+          </a:solidFill>
+          <a:ln>
+            <a:noFill/>
+          </a:ln>
+          <a:effectLst/>
+        </p:spPr>
+        <p:style>
+          <a:lnRef idx="1">
+            <a:schemeClr val="accent1"/>
+          </a:lnRef>
+          <a:fillRef idx="3">
+            <a:schemeClr val="accent1"/>
+          </a:fillRef>
+          <a:effectRef idx="2">
+            <a:schemeClr val="accent1"/>
+          </a:effectRef>
+          <a:fontRef idx="minor">
+            <a:schemeClr val="lt1"/>
+          </a:fontRef>
+        </p:style>
+        <p:txBody>
+          <a:bodyPr rtlCol="0" anchor="ctr"/>
+          <a:lstStyle/>
+          <a:p>
+            <a:pPr algn="ctr"/>
+          </a:p>
+        </p:txBody>
+      </p:sp>
+      <p:sp>
+        <p:nvSpPr>
+          <p:cNvPr id="28" name="TextBox 27"/>
+          <p:cNvSpPr txBox="1"/>
+          <p:nvPr/>
+        </p:nvSpPr>
+        <p:spPr>
+          <a:xfrm>
+            <a:off x="9144000" y="2448000"/>
+            <a:ext cx="2376000" cy="2664000"/>
+          </a:xfrm>
+          <a:prstGeom prst="rect">
+            <a:avLst/>
+          </a:prstGeom>
+          <a:noFill/>
+        </p:spPr>
+        <p:txBody>
+          <a:bodyPr wrap="square">
+            <a:spAutoFit/>
+          </a:bodyPr>
+          <a:lstStyle/>
+          <a:p>
+            <a:pPr>
+              <a:spcAft>
+                <a:spcPts val="700"/>
+              </a:spcAft>
+            </a:pPr>
+            <a:r>
+              <a:rPr sz="800">
+                <a:solidFill>
+                  <a:srgbClr val="EE5B22"/>
+                </a:solidFill>
+                <a:latin typeface="Poppins"/>
+              </a:rPr>
+              <a:t>■  </a:t>
+            </a:r>
+            <a:r>
+              <a:rPr sz="1200">
+                <a:solidFill>
+                  <a:srgbClr val="111111"/>
+                </a:solidFill>
+                <a:latin typeface="Poppins"/>
+              </a:rPr>
+              <a:t>Compter réactions et abonnés</a:t>
+            </a:r>
+          </a:p>
+          <a:p>
+            <a:pPr>
+              <a:spcAft>
+                <a:spcPts val="700"/>
+              </a:spcAft>
+            </a:pPr>
+            <a:r>
+              <a:rPr sz="800">
+                <a:solidFill>
+                  <a:srgbClr val="EE5B22"/>
+                </a:solidFill>
+                <a:latin typeface="Poppins"/>
+              </a:rPr>
+              <a:t>■  </a:t>
+            </a:r>
+            <a:r>
+              <a:rPr sz="1200">
+                <a:solidFill>
+                  <a:srgbClr val="111111"/>
+                </a:solidFill>
+                <a:latin typeface="Poppins"/>
+              </a:rPr>
+              <a:t>Compter les demandes reçues</a:t>
+            </a:r>
+          </a:p>
+          <a:p>
+            <a:pPr>
+              <a:spcAft>
+                <a:spcPts val="700"/>
+              </a:spcAft>
+            </a:pPr>
+            <a:r>
+              <a:rPr sz="800">
+                <a:solidFill>
+                  <a:srgbClr val="EE5B22"/>
+                </a:solidFill>
+                <a:latin typeface="Poppins"/>
+              </a:rPr>
+              <a:t>■  </a:t>
+            </a:r>
+            <a:r>
+              <a:rPr sz="1200">
+                <a:solidFill>
+                  <a:srgbClr val="111111"/>
+                </a:solidFill>
+                <a:latin typeface="Poppins"/>
+              </a:rPr>
+              <a:t>Préparer décembre</a:t>
+            </a:r>
+          </a:p>
+        </p:txBody>
+      </p:sp>
+      <p:sp>
+        <p:nvSpPr>
+          <p:cNvPr id="29" name="Rounded Rectangle 28"/>
+          <p:cNvSpPr/>
+          <p:nvPr/>
+        </p:nvSpPr>
+        <p:spPr>
+          <a:xfrm>
+            <a:off x="576000" y="5364000"/>
+            <a:ext cx="11052000" cy="864000"/>
+          </a:xfrm>
+          <a:prstGeom prst="roundRect">
+            <a:avLst>
+              <a:gd name="adj" fmla="val 6000"/>
+            </a:avLst>
+          </a:prstGeom>
+          <a:solidFill>
+            <a:srgbClr val="11202E"/>
+          </a:solidFill>
+          <a:ln>
+            <a:noFill/>
+          </a:ln>
+          <a:effectLst/>
+        </p:spPr>
+        <p:style>
+          <a:lnRef idx="1">
+            <a:schemeClr val="accent1"/>
+          </a:lnRef>
+          <a:fillRef idx="3">
+            <a:schemeClr val="accent1"/>
+          </a:fillRef>
+          <a:effectRef idx="2">
+            <a:schemeClr val="accent1"/>
+          </a:effectRef>
+          <a:fontRef idx="minor">
+            <a:schemeClr val="lt1"/>
+          </a:fontRef>
+        </p:style>
+        <p:txBody>
+          <a:bodyPr rtlCol="0" anchor="ctr"/>
+          <a:lstStyle/>
+          <a:p>
+            <a:pPr algn="ctr"/>
+          </a:p>
+        </p:txBody>
+      </p:sp>
+      <p:pic>
+        <p:nvPicPr>
+          <p:cNvPr id="30" name="Picture 29" descr="target-arrow_bl.png"/>
+          <p:cNvPicPr>
+            <a:picLocks noChangeAspect="1"/>
+          </p:cNvPicPr>
+          <p:nvPr/>
+        </p:nvPicPr>
+        <p:blipFill>
+          <a:blip r:embed="rId7"/>
+          <a:stretch>
+            <a:fillRect/>
+          </a:stretch>
+        </p:blipFill>
+        <p:spPr>
+          <a:xfrm>
+            <a:off x="792000" y="5544000"/>
+            <a:ext cx="503999" cy="503999"/>
+          </a:xfrm>
+          <a:prstGeom prst="rect">
+            <a:avLst/>
+          </a:prstGeom>
+        </p:spPr>
+      </p:pic>
+      <p:sp>
+        <p:nvSpPr>
+          <p:cNvPr id="31" name="TextBox 30"/>
+          <p:cNvSpPr txBox="1"/>
+          <p:nvPr/>
+        </p:nvSpPr>
+        <p:spPr>
+          <a:xfrm>
+            <a:off x="1440000" y="5364000"/>
+            <a:ext cx="10008000" cy="864000"/>
+          </a:xfrm>
+          <a:prstGeom prst="rect">
+            <a:avLst/>
+          </a:prstGeom>
+          <a:noFill/>
+        </p:spPr>
+        <p:txBody>
+          <a:bodyPr wrap="square" lIns="36000" rIns="36000" tIns="18000" bIns="18000" anchor="ctr">
+            <a:spAutoFit/>
+          </a:bodyPr>
+          <a:lstStyle/>
+          <a:p>
+            <a:pPr algn="l">
+              <a:lnSpc>
+                <a:spcPct val="110000"/>
+              </a:lnSpc>
+            </a:pPr>
+            <a:r>
+              <a:rPr sz="1300" b="1">
+                <a:solidFill>
+                  <a:srgbClr val="FFFFFF"/>
+                </a:solidFill>
+                <a:latin typeface="Poppins"/>
+              </a:rPr>
+              <a:t>Objectif proposé à 30 jours : 8 publications, 20 réactions médianes sur LinkedIn, et chaque demande de devis venue des réseaux notée.</a:t>
+            </a:r>
+          </a:p>
+        </p:txBody>
+      </p:sp>
+    </p:spTree>
+  </p:cSld>
+  <p:clrMapOvr>
+    <a:masterClrMapping/>
+  </p:clrMapOvr>
+</p:sld>
+</file>
+
+<file path=ppt/slides/slide24.xml><?xml version="1.0" encoding="utf-8"?>
+<p:sld xmlns:a="http://schemas.openxmlformats.org/drawingml/2006/main" xmlns:p="http://schemas.openxmlformats.org/presentationml/2006/main" xmlns:r="http://schemas.openxmlformats.org/officeDocument/2006/relationships">
+  <p:cSld>
+    <p:spTree>
+      <p:nvGrpSpPr>
+        <p:cNvPr id="1" name=""/>
+        <p:cNvGrpSpPr/>
+        <p:nvPr/>
+      </p:nvGrpSpPr>
+      <p:grpSpPr/>
+      <p:sp>
+        <p:nvSpPr>
+          <p:cNvPr id="2" name="Rectangle 1"/>
+          <p:cNvSpPr/>
+          <p:nvPr/>
+        </p:nvSpPr>
+        <p:spPr>
+          <a:xfrm>
+            <a:off x="0" y="0"/>
+            <a:ext cx="180000" cy="6858000"/>
+          </a:xfrm>
+          <a:prstGeom prst="rect">
+            <a:avLst/>
+          </a:prstGeom>
+          <a:solidFill>
+            <a:srgbClr val="EE5B22"/>
+          </a:solidFill>
+          <a:ln>
+            <a:noFill/>
+          </a:ln>
+          <a:effectLst/>
+        </p:spPr>
+        <p:style>
+          <a:lnRef idx="1">
+            <a:schemeClr val="accent1"/>
+          </a:lnRef>
+          <a:fillRef idx="3">
+            <a:schemeClr val="accent1"/>
+          </a:fillRef>
+          <a:effectRef idx="2">
+            <a:schemeClr val="accent1"/>
+          </a:effectRef>
+          <a:fontRef idx="minor">
+            <a:schemeClr val="lt1"/>
+          </a:fontRef>
+        </p:style>
+        <p:txBody>
+          <a:bodyPr rtlCol="0" anchor="ctr"/>
+          <a:lstStyle/>
+          <a:p>
+            <a:pPr algn="ctr"/>
+          </a:p>
+        </p:txBody>
+      </p:sp>
+      <p:pic>
+        <p:nvPicPr>
+          <p:cNvPr id="3" name="Picture 2" descr="logo-proline-fond-blanc.png"/>
+          <p:cNvPicPr>
+            <a:picLocks noChangeAspect="1"/>
+          </p:cNvPicPr>
+          <p:nvPr/>
+        </p:nvPicPr>
+        <p:blipFill>
+          <a:blip r:embed="rId2"/>
+          <a:stretch>
+            <a:fillRect/>
+          </a:stretch>
+        </p:blipFill>
+        <p:spPr>
+          <a:xfrm>
+            <a:off x="10200399" y="216000"/>
+            <a:ext cx="1607441" cy="576000"/>
+          </a:xfrm>
+          <a:prstGeom prst="rect">
+            <a:avLst/>
+          </a:prstGeom>
+        </p:spPr>
+      </p:pic>
+      <p:sp>
+        <p:nvSpPr>
+          <p:cNvPr id="4" name="TextBox 3"/>
+          <p:cNvSpPr txBox="1"/>
+          <p:nvPr/>
+        </p:nvSpPr>
+        <p:spPr>
+          <a:xfrm>
+            <a:off x="576000" y="324000"/>
+            <a:ext cx="8640000" cy="288000"/>
+          </a:xfrm>
+          <a:prstGeom prst="rect">
+            <a:avLst/>
+          </a:prstGeom>
+          <a:noFill/>
+        </p:spPr>
+        <p:txBody>
+          <a:bodyPr wrap="square" lIns="36000" rIns="36000" tIns="18000" bIns="18000" anchor="t">
+            <a:spAutoFit/>
+          </a:bodyPr>
+          <a:lstStyle/>
+          <a:p>
+            <a:pPr algn="l">
+              <a:lnSpc>
+                <a:spcPct val="110000"/>
+              </a:lnSpc>
+            </a:pPr>
+            <a:r>
+              <a:rPr sz="1100" b="1">
+                <a:solidFill>
+                  <a:srgbClr val="EE5B22"/>
+                </a:solidFill>
+                <a:latin typeface="Poppins"/>
+              </a:rPr>
+              <a:t>TABLEAU DE BORD</a:t>
+            </a:r>
+          </a:p>
+        </p:txBody>
+      </p:sp>
+      <p:sp>
+        <p:nvSpPr>
+          <p:cNvPr id="5" name="TextBox 4"/>
+          <p:cNvSpPr txBox="1"/>
+          <p:nvPr/>
+        </p:nvSpPr>
+        <p:spPr>
+          <a:xfrm>
+            <a:off x="576000" y="576000"/>
+            <a:ext cx="9180000" cy="720000"/>
+          </a:xfrm>
+          <a:prstGeom prst="rect">
+            <a:avLst/>
+          </a:prstGeom>
+          <a:noFill/>
+        </p:spPr>
+        <p:txBody>
+          <a:bodyPr wrap="square" lIns="36000" rIns="36000" tIns="18000" bIns="18000" anchor="t">
+            <a:spAutoFit/>
+          </a:bodyPr>
+          <a:lstStyle/>
+          <a:p>
+            <a:pPr algn="l">
+              <a:lnSpc>
+                <a:spcPct val="110000"/>
+              </a:lnSpc>
+            </a:pPr>
+            <a:r>
+              <a:rPr sz="2500" b="1">
+                <a:solidFill>
+                  <a:srgbClr val="111111"/>
+                </a:solidFill>
+                <a:latin typeface="Poppins"/>
+              </a:rPr>
+              <a:t>Les chiffres à suivre chaque semaine</a:t>
+            </a:r>
+          </a:p>
+        </p:txBody>
+      </p:sp>
+      <p:sp>
+        <p:nvSpPr>
+          <p:cNvPr id="6" name="Rectangle 5"/>
+          <p:cNvSpPr/>
+          <p:nvPr/>
+        </p:nvSpPr>
+        <p:spPr>
+          <a:xfrm>
+            <a:off x="576000" y="1278000"/>
+            <a:ext cx="792000" cy="50400"/>
+          </a:xfrm>
+          <a:prstGeom prst="rect">
+            <a:avLst/>
+          </a:prstGeom>
+          <a:solidFill>
+            <a:srgbClr val="11202E"/>
+          </a:solidFill>
+          <a:ln>
+            <a:noFill/>
+          </a:ln>
+          <a:effectLst/>
+        </p:spPr>
+        <p:style>
+          <a:lnRef idx="1">
+            <a:schemeClr val="accent1"/>
+          </a:lnRef>
+          <a:fillRef idx="3">
+            <a:schemeClr val="accent1"/>
+          </a:fillRef>
+          <a:effectRef idx="2">
+            <a:schemeClr val="accent1"/>
+          </a:effectRef>
+          <a:fontRef idx="minor">
+            <a:schemeClr val="lt1"/>
+          </a:fontRef>
+        </p:style>
+        <p:txBody>
+          <a:bodyPr rtlCol="0" anchor="ctr"/>
+          <a:lstStyle/>
+          <a:p>
+            <a:pPr algn="ctr"/>
+          </a:p>
+        </p:txBody>
+      </p:sp>
+      <p:sp>
+        <p:nvSpPr>
+          <p:cNvPr id="7" name="TextBox 6"/>
+          <p:cNvSpPr txBox="1"/>
+          <p:nvPr/>
+        </p:nvSpPr>
+        <p:spPr>
+          <a:xfrm>
+            <a:off x="10572119" y="6498000"/>
+            <a:ext cx="1296000" cy="216000"/>
+          </a:xfrm>
+          <a:prstGeom prst="rect">
+            <a:avLst/>
+          </a:prstGeom>
+          <a:noFill/>
+        </p:spPr>
+        <p:txBody>
+          <a:bodyPr wrap="square" lIns="36000" rIns="36000" tIns="18000" bIns="18000" anchor="t">
+            <a:spAutoFit/>
+          </a:bodyPr>
+          <a:lstStyle/>
+          <a:p>
+            <a:pPr algn="r">
+              <a:lnSpc>
+                <a:spcPct val="110000"/>
+              </a:lnSpc>
+            </a:pPr>
+            <a:r>
+              <a:rPr sz="900" b="0">
+                <a:solidFill>
+                  <a:srgbClr val="5A5A5A"/>
+                </a:solidFill>
+                <a:latin typeface="Poppins"/>
+              </a:rPr>
+              <a:t>24 / 23</a:t>
             </a:r>
           </a:p>
         </p:txBody>
@@ -20514,7 +21730,7 @@
 </p:sld>
 </file>
 
-<file path=ppt/slides/slide23.xml><?xml version="1.0" encoding="utf-8"?>
+<file path=ppt/slides/slide25.xml><?xml version="1.0" encoding="utf-8"?>
 <p:sld xmlns:a="http://schemas.openxmlformats.org/drawingml/2006/main" xmlns:p="http://schemas.openxmlformats.org/presentationml/2006/main" xmlns:r="http://schemas.openxmlformats.org/officeDocument/2006/relationships">
   <p:cSld>
     <p:spTree>
@@ -20748,7 +21964,7 @@
                 </a:solidFill>
                 <a:latin typeface="Poppins"/>
               </a:rPr>
-              <a:t>23 / 23</a:t>
+              <a:t>25 / 23</a:t>
             </a:r>
           </a:p>
         </p:txBody>
